--- a/docs/Policy-Overview-Dashboard.pptx
+++ b/docs/Policy-Overview-Dashboard.pptx
@@ -3174,7 +3174,7 @@
               </a:defRPr>
             </a:pPr>
             <a:r>
-              <a:t>Resource Name  |  Date  |  HCLTech</a:t>
+              <a:t>Ravi G  |  Date  |  HCLTech</a:t>
             </a:r>
           </a:p>
         </p:txBody>

--- a/docs/Policy-Overview-Dashboard.pptx
+++ b/docs/Policy-Overview-Dashboard.pptx
@@ -1,28 +1,29 @@
 
 <file path=ppt/presentation.xml><?xml version="1.0" encoding="utf-8"?>
-<p:presentation xmlns:a="http://schemas.openxmlformats.org/drawingml/2006/main" xmlns:r="http://schemas.openxmlformats.org/officeDocument/2006/relationships" xmlns:p="http://schemas.openxmlformats.org/presentationml/2006/main" saveSubsetFonts="1" autoCompressPictures="0">
+<p:presentation xmlns:a="http://schemas.openxmlformats.org/drawingml/2006/main" xmlns:r="http://schemas.openxmlformats.org/officeDocument/2006/relationships" xmlns:p="http://schemas.openxmlformats.org/presentationml/2006/main" saveSubsetFonts="1">
   <p:sldMasterIdLst>
     <p:sldMasterId id="2147483648" r:id="rId1"/>
   </p:sldMasterIdLst>
+  <p:notesMasterIdLst>
+    <p:notesMasterId r:id="rId10"/>
+  </p:notesMasterIdLst>
   <p:sldIdLst>
-    <p:sldId id="256" r:id="rId7"/>
-    <p:sldId id="257" r:id="rId8"/>
-    <p:sldId id="258" r:id="rId9"/>
-    <p:sldId id="259" r:id="rId10"/>
-    <p:sldId id="260" r:id="rId11"/>
-    <p:sldId id="261" r:id="rId12"/>
-    <p:sldId id="262" r:id="rId13"/>
-    <p:sldId id="263" r:id="rId14"/>
-    <p:sldId id="264" r:id="rId15"/>
-    <p:sldId id="265" r:id="rId16"/>
+    <p:sldId id="277" r:id="rId2"/>
+    <p:sldId id="2147472225" r:id="rId3"/>
+    <p:sldId id="256" r:id="rId4"/>
+    <p:sldId id="257" r:id="rId5"/>
+    <p:sldId id="2147472226" r:id="rId6"/>
+    <p:sldId id="2147472227" r:id="rId7"/>
+    <p:sldId id="2147472228" r:id="rId8"/>
+    <p:sldId id="2147472229" r:id="rId9"/>
   </p:sldIdLst>
-  <p:sldSz cx="12191695" cy="6858000" type="screen4x3"/>
+  <p:sldSz cx="12192000" cy="6858000"/>
   <p:notesSz cx="6858000" cy="9144000"/>
   <p:defaultTextStyle>
     <a:defPPr>
       <a:defRPr lang="en-US"/>
     </a:defPPr>
-    <a:lvl1pPr marL="0" algn="l" defTabSz="457200" rtl="0" eaLnBrk="1" latinLnBrk="0" hangingPunct="1">
+    <a:lvl1pPr marL="0" algn="l" defTabSz="914400" rtl="0" eaLnBrk="1" latinLnBrk="0" hangingPunct="1">
       <a:defRPr sz="1800" kern="1200">
         <a:solidFill>
           <a:schemeClr val="tx1"/>
@@ -32,7 +33,7 @@
         <a:cs typeface="+mn-cs"/>
       </a:defRPr>
     </a:lvl1pPr>
-    <a:lvl2pPr marL="457200" algn="l" defTabSz="457200" rtl="0" eaLnBrk="1" latinLnBrk="0" hangingPunct="1">
+    <a:lvl2pPr marL="457200" algn="l" defTabSz="914400" rtl="0" eaLnBrk="1" latinLnBrk="0" hangingPunct="1">
       <a:defRPr sz="1800" kern="1200">
         <a:solidFill>
           <a:schemeClr val="tx1"/>
@@ -42,7 +43,7 @@
         <a:cs typeface="+mn-cs"/>
       </a:defRPr>
     </a:lvl2pPr>
-    <a:lvl3pPr marL="914400" algn="l" defTabSz="457200" rtl="0" eaLnBrk="1" latinLnBrk="0" hangingPunct="1">
+    <a:lvl3pPr marL="914400" algn="l" defTabSz="914400" rtl="0" eaLnBrk="1" latinLnBrk="0" hangingPunct="1">
       <a:defRPr sz="1800" kern="1200">
         <a:solidFill>
           <a:schemeClr val="tx1"/>
@@ -52,7 +53,7 @@
         <a:cs typeface="+mn-cs"/>
       </a:defRPr>
     </a:lvl3pPr>
-    <a:lvl4pPr marL="1371600" algn="l" defTabSz="457200" rtl="0" eaLnBrk="1" latinLnBrk="0" hangingPunct="1">
+    <a:lvl4pPr marL="1371600" algn="l" defTabSz="914400" rtl="0" eaLnBrk="1" latinLnBrk="0" hangingPunct="1">
       <a:defRPr sz="1800" kern="1200">
         <a:solidFill>
           <a:schemeClr val="tx1"/>
@@ -62,7 +63,7 @@
         <a:cs typeface="+mn-cs"/>
       </a:defRPr>
     </a:lvl4pPr>
-    <a:lvl5pPr marL="1828800" algn="l" defTabSz="457200" rtl="0" eaLnBrk="1" latinLnBrk="0" hangingPunct="1">
+    <a:lvl5pPr marL="1828800" algn="l" defTabSz="914400" rtl="0" eaLnBrk="1" latinLnBrk="0" hangingPunct="1">
       <a:defRPr sz="1800" kern="1200">
         <a:solidFill>
           <a:schemeClr val="tx1"/>
@@ -72,7 +73,7 @@
         <a:cs typeface="+mn-cs"/>
       </a:defRPr>
     </a:lvl5pPr>
-    <a:lvl6pPr marL="2286000" algn="l" defTabSz="457200" rtl="0" eaLnBrk="1" latinLnBrk="0" hangingPunct="1">
+    <a:lvl6pPr marL="2286000" algn="l" defTabSz="914400" rtl="0" eaLnBrk="1" latinLnBrk="0" hangingPunct="1">
       <a:defRPr sz="1800" kern="1200">
         <a:solidFill>
           <a:schemeClr val="tx1"/>
@@ -82,7 +83,7 @@
         <a:cs typeface="+mn-cs"/>
       </a:defRPr>
     </a:lvl6pPr>
-    <a:lvl7pPr marL="2743200" algn="l" defTabSz="457200" rtl="0" eaLnBrk="1" latinLnBrk="0" hangingPunct="1">
+    <a:lvl7pPr marL="2743200" algn="l" defTabSz="914400" rtl="0" eaLnBrk="1" latinLnBrk="0" hangingPunct="1">
       <a:defRPr sz="1800" kern="1200">
         <a:solidFill>
           <a:schemeClr val="tx1"/>
@@ -92,7 +93,7 @@
         <a:cs typeface="+mn-cs"/>
       </a:defRPr>
     </a:lvl7pPr>
-    <a:lvl8pPr marL="3200400" algn="l" defTabSz="457200" rtl="0" eaLnBrk="1" latinLnBrk="0" hangingPunct="1">
+    <a:lvl8pPr marL="3200400" algn="l" defTabSz="914400" rtl="0" eaLnBrk="1" latinLnBrk="0" hangingPunct="1">
       <a:defRPr sz="1800" kern="1200">
         <a:solidFill>
           <a:schemeClr val="tx1"/>
@@ -102,7 +103,7 @@
         <a:cs typeface="+mn-cs"/>
       </a:defRPr>
     </a:lvl8pPr>
-    <a:lvl9pPr marL="3657600" algn="l" defTabSz="457200" rtl="0" eaLnBrk="1" latinLnBrk="0" hangingPunct="1">
+    <a:lvl9pPr marL="3657600" algn="l" defTabSz="914400" rtl="0" eaLnBrk="1" latinLnBrk="0" hangingPunct="1">
       <a:defRPr sz="1800" kern="1200">
         <a:solidFill>
           <a:schemeClr val="tx1"/>
@@ -114,6 +115,524 @@
     </a:lvl9pPr>
   </p:defaultTextStyle>
 </p:presentation>
+</file>
+
+<file path=ppt/notesMasters/notesMaster1.xml><?xml version="1.0" encoding="utf-8"?>
+<p:notesMaster xmlns:a="http://schemas.openxmlformats.org/drawingml/2006/main" xmlns:r="http://schemas.openxmlformats.org/officeDocument/2006/relationships" xmlns:p="http://schemas.openxmlformats.org/presentationml/2006/main">
+  <p:cSld>
+    <p:bg>
+      <p:bgRef idx="1001">
+        <a:schemeClr val="bg1"/>
+      </p:bgRef>
+    </p:bg>
+    <p:spTree>
+      <p:nvGrpSpPr>
+        <p:cNvPr id="1" name=""/>
+        <p:cNvGrpSpPr/>
+        <p:nvPr/>
+      </p:nvGrpSpPr>
+      <p:grpSpPr>
+        <a:xfrm>
+          <a:off x="0" y="0"/>
+          <a:ext cx="0" cy="0"/>
+          <a:chOff x="0" y="0"/>
+          <a:chExt cx="0" cy="0"/>
+        </a:xfrm>
+      </p:grpSpPr>
+      <p:sp>
+        <p:nvSpPr>
+          <p:cNvPr id="2" name="Header Placeholder 1"/>
+          <p:cNvSpPr>
+            <a:spLocks noGrp="1"/>
+          </p:cNvSpPr>
+          <p:nvPr>
+            <p:ph type="hdr" sz="quarter"/>
+          </p:nvPr>
+        </p:nvSpPr>
+        <p:spPr>
+          <a:xfrm>
+            <a:off x="0" y="0"/>
+            <a:ext cx="2971800" cy="458788"/>
+          </a:xfrm>
+          <a:prstGeom prst="rect">
+            <a:avLst/>
+          </a:prstGeom>
+        </p:spPr>
+        <p:txBody>
+          <a:bodyPr vert="horz" lIns="91440" tIns="45720" rIns="91440" bIns="45720" rtlCol="0"/>
+          <a:lstStyle>
+            <a:lvl1pPr algn="l">
+              <a:defRPr sz="1200"/>
+            </a:lvl1pPr>
+          </a:lstStyle>
+          <a:p>
+            <a:endParaRPr lang="en-IN"/>
+          </a:p>
+        </p:txBody>
+      </p:sp>
+      <p:sp>
+        <p:nvSpPr>
+          <p:cNvPr id="3" name="Date Placeholder 2"/>
+          <p:cNvSpPr>
+            <a:spLocks noGrp="1"/>
+          </p:cNvSpPr>
+          <p:nvPr>
+            <p:ph type="dt" idx="1"/>
+          </p:nvPr>
+        </p:nvSpPr>
+        <p:spPr>
+          <a:xfrm>
+            <a:off x="3884613" y="0"/>
+            <a:ext cx="2971800" cy="458788"/>
+          </a:xfrm>
+          <a:prstGeom prst="rect">
+            <a:avLst/>
+          </a:prstGeom>
+        </p:spPr>
+        <p:txBody>
+          <a:bodyPr vert="horz" lIns="91440" tIns="45720" rIns="91440" bIns="45720" rtlCol="0"/>
+          <a:lstStyle>
+            <a:lvl1pPr algn="r">
+              <a:defRPr sz="1200"/>
+            </a:lvl1pPr>
+          </a:lstStyle>
+          <a:p>
+            <a:fld id="{E3F32CD3-80BE-4400-B0FD-AA184D52B094}" type="datetimeFigureOut">
+              <a:rPr lang="en-IN" smtClean="0"/>
+              <a:t>09-06-2026</a:t>
+            </a:fld>
+            <a:endParaRPr lang="en-IN"/>
+          </a:p>
+        </p:txBody>
+      </p:sp>
+      <p:sp>
+        <p:nvSpPr>
+          <p:cNvPr id="4" name="Slide Image Placeholder 3"/>
+          <p:cNvSpPr>
+            <a:spLocks noGrp="1" noRot="1" noChangeAspect="1"/>
+          </p:cNvSpPr>
+          <p:nvPr>
+            <p:ph type="sldImg" idx="2"/>
+          </p:nvPr>
+        </p:nvSpPr>
+        <p:spPr>
+          <a:xfrm>
+            <a:off x="685800" y="1143000"/>
+            <a:ext cx="5486400" cy="3086100"/>
+          </a:xfrm>
+          <a:prstGeom prst="rect">
+            <a:avLst/>
+          </a:prstGeom>
+          <a:noFill/>
+          <a:ln w="12700">
+            <a:solidFill>
+              <a:prstClr val="black"/>
+            </a:solidFill>
+          </a:ln>
+        </p:spPr>
+        <p:txBody>
+          <a:bodyPr vert="horz" lIns="91440" tIns="45720" rIns="91440" bIns="45720" rtlCol="0" anchor="ctr"/>
+          <a:lstStyle/>
+          <a:p>
+            <a:endParaRPr lang="en-IN"/>
+          </a:p>
+        </p:txBody>
+      </p:sp>
+      <p:sp>
+        <p:nvSpPr>
+          <p:cNvPr id="5" name="Notes Placeholder 4"/>
+          <p:cNvSpPr>
+            <a:spLocks noGrp="1"/>
+          </p:cNvSpPr>
+          <p:nvPr>
+            <p:ph type="body" sz="quarter" idx="3"/>
+          </p:nvPr>
+        </p:nvSpPr>
+        <p:spPr>
+          <a:xfrm>
+            <a:off x="685800" y="4400550"/>
+            <a:ext cx="5486400" cy="3600450"/>
+          </a:xfrm>
+          <a:prstGeom prst="rect">
+            <a:avLst/>
+          </a:prstGeom>
+        </p:spPr>
+        <p:txBody>
+          <a:bodyPr vert="horz" lIns="91440" tIns="45720" rIns="91440" bIns="45720" rtlCol="0"/>
+          <a:lstStyle/>
+          <a:p>
+            <a:pPr lvl="0"/>
+            <a:r>
+              <a:rPr lang="en-US"/>
+              <a:t>Click to edit Master text styles</a:t>
+            </a:r>
+          </a:p>
+          <a:p>
+            <a:pPr lvl="1"/>
+            <a:r>
+              <a:rPr lang="en-US"/>
+              <a:t>Second level</a:t>
+            </a:r>
+          </a:p>
+          <a:p>
+            <a:pPr lvl="2"/>
+            <a:r>
+              <a:rPr lang="en-US"/>
+              <a:t>Third level</a:t>
+            </a:r>
+          </a:p>
+          <a:p>
+            <a:pPr lvl="3"/>
+            <a:r>
+              <a:rPr lang="en-US"/>
+              <a:t>Fourth level</a:t>
+            </a:r>
+          </a:p>
+          <a:p>
+            <a:pPr lvl="4"/>
+            <a:r>
+              <a:rPr lang="en-US"/>
+              <a:t>Fifth level</a:t>
+            </a:r>
+            <a:endParaRPr lang="en-IN"/>
+          </a:p>
+        </p:txBody>
+      </p:sp>
+      <p:sp>
+        <p:nvSpPr>
+          <p:cNvPr id="6" name="Footer Placeholder 5"/>
+          <p:cNvSpPr>
+            <a:spLocks noGrp="1"/>
+          </p:cNvSpPr>
+          <p:nvPr>
+            <p:ph type="ftr" sz="quarter" idx="4"/>
+          </p:nvPr>
+        </p:nvSpPr>
+        <p:spPr>
+          <a:xfrm>
+            <a:off x="0" y="8685213"/>
+            <a:ext cx="2971800" cy="458787"/>
+          </a:xfrm>
+          <a:prstGeom prst="rect">
+            <a:avLst/>
+          </a:prstGeom>
+        </p:spPr>
+        <p:txBody>
+          <a:bodyPr vert="horz" lIns="91440" tIns="45720" rIns="91440" bIns="45720" rtlCol="0" anchor="b"/>
+          <a:lstStyle>
+            <a:lvl1pPr algn="l">
+              <a:defRPr sz="1200"/>
+            </a:lvl1pPr>
+          </a:lstStyle>
+          <a:p>
+            <a:endParaRPr lang="en-IN"/>
+          </a:p>
+        </p:txBody>
+      </p:sp>
+      <p:sp>
+        <p:nvSpPr>
+          <p:cNvPr id="7" name="Slide Number Placeholder 6"/>
+          <p:cNvSpPr>
+            <a:spLocks noGrp="1"/>
+          </p:cNvSpPr>
+          <p:nvPr>
+            <p:ph type="sldNum" sz="quarter" idx="5"/>
+          </p:nvPr>
+        </p:nvSpPr>
+        <p:spPr>
+          <a:xfrm>
+            <a:off x="3884613" y="8685213"/>
+            <a:ext cx="2971800" cy="458787"/>
+          </a:xfrm>
+          <a:prstGeom prst="rect">
+            <a:avLst/>
+          </a:prstGeom>
+        </p:spPr>
+        <p:txBody>
+          <a:bodyPr vert="horz" lIns="91440" tIns="45720" rIns="91440" bIns="45720" rtlCol="0" anchor="b"/>
+          <a:lstStyle>
+            <a:lvl1pPr algn="r">
+              <a:defRPr sz="1200"/>
+            </a:lvl1pPr>
+          </a:lstStyle>
+          <a:p>
+            <a:fld id="{3BA0AF21-0A34-4130-AB30-E6AFE1AF1E5D}" type="slidenum">
+              <a:rPr lang="en-IN" smtClean="0"/>
+              <a:t>‹#›</a:t>
+            </a:fld>
+            <a:endParaRPr lang="en-IN"/>
+          </a:p>
+        </p:txBody>
+      </p:sp>
+    </p:spTree>
+    <p:extLst>
+      <p:ext uri="{BB962C8B-B14F-4D97-AF65-F5344CB8AC3E}">
+        <p14:creationId xmlns:p14="http://schemas.microsoft.com/office/powerpoint/2010/main" val="1041200885"/>
+      </p:ext>
+    </p:extLst>
+  </p:cSld>
+  <p:clrMap bg1="lt1" tx1="dk1" bg2="lt2" tx2="dk2" accent1="accent1" accent2="accent2" accent3="accent3" accent4="accent4" accent5="accent5" accent6="accent6" hlink="hlink" folHlink="folHlink"/>
+  <p:notesStyle>
+    <a:lvl1pPr marL="0" algn="l" defTabSz="914400" rtl="0" eaLnBrk="1" latinLnBrk="0" hangingPunct="1">
+      <a:defRPr sz="1200" kern="1200">
+        <a:solidFill>
+          <a:schemeClr val="tx1"/>
+        </a:solidFill>
+        <a:latin typeface="+mn-lt"/>
+        <a:ea typeface="+mn-ea"/>
+        <a:cs typeface="+mn-cs"/>
+      </a:defRPr>
+    </a:lvl1pPr>
+    <a:lvl2pPr marL="457200" algn="l" defTabSz="914400" rtl="0" eaLnBrk="1" latinLnBrk="0" hangingPunct="1">
+      <a:defRPr sz="1200" kern="1200">
+        <a:solidFill>
+          <a:schemeClr val="tx1"/>
+        </a:solidFill>
+        <a:latin typeface="+mn-lt"/>
+        <a:ea typeface="+mn-ea"/>
+        <a:cs typeface="+mn-cs"/>
+      </a:defRPr>
+    </a:lvl2pPr>
+    <a:lvl3pPr marL="914400" algn="l" defTabSz="914400" rtl="0" eaLnBrk="1" latinLnBrk="0" hangingPunct="1">
+      <a:defRPr sz="1200" kern="1200">
+        <a:solidFill>
+          <a:schemeClr val="tx1"/>
+        </a:solidFill>
+        <a:latin typeface="+mn-lt"/>
+        <a:ea typeface="+mn-ea"/>
+        <a:cs typeface="+mn-cs"/>
+      </a:defRPr>
+    </a:lvl3pPr>
+    <a:lvl4pPr marL="1371600" algn="l" defTabSz="914400" rtl="0" eaLnBrk="1" latinLnBrk="0" hangingPunct="1">
+      <a:defRPr sz="1200" kern="1200">
+        <a:solidFill>
+          <a:schemeClr val="tx1"/>
+        </a:solidFill>
+        <a:latin typeface="+mn-lt"/>
+        <a:ea typeface="+mn-ea"/>
+        <a:cs typeface="+mn-cs"/>
+      </a:defRPr>
+    </a:lvl4pPr>
+    <a:lvl5pPr marL="1828800" algn="l" defTabSz="914400" rtl="0" eaLnBrk="1" latinLnBrk="0" hangingPunct="1">
+      <a:defRPr sz="1200" kern="1200">
+        <a:solidFill>
+          <a:schemeClr val="tx1"/>
+        </a:solidFill>
+        <a:latin typeface="+mn-lt"/>
+        <a:ea typeface="+mn-ea"/>
+        <a:cs typeface="+mn-cs"/>
+      </a:defRPr>
+    </a:lvl5pPr>
+    <a:lvl6pPr marL="2286000" algn="l" defTabSz="914400" rtl="0" eaLnBrk="1" latinLnBrk="0" hangingPunct="1">
+      <a:defRPr sz="1200" kern="1200">
+        <a:solidFill>
+          <a:schemeClr val="tx1"/>
+        </a:solidFill>
+        <a:latin typeface="+mn-lt"/>
+        <a:ea typeface="+mn-ea"/>
+        <a:cs typeface="+mn-cs"/>
+      </a:defRPr>
+    </a:lvl6pPr>
+    <a:lvl7pPr marL="2743200" algn="l" defTabSz="914400" rtl="0" eaLnBrk="1" latinLnBrk="0" hangingPunct="1">
+      <a:defRPr sz="1200" kern="1200">
+        <a:solidFill>
+          <a:schemeClr val="tx1"/>
+        </a:solidFill>
+        <a:latin typeface="+mn-lt"/>
+        <a:ea typeface="+mn-ea"/>
+        <a:cs typeface="+mn-cs"/>
+      </a:defRPr>
+    </a:lvl7pPr>
+    <a:lvl8pPr marL="3200400" algn="l" defTabSz="914400" rtl="0" eaLnBrk="1" latinLnBrk="0" hangingPunct="1">
+      <a:defRPr sz="1200" kern="1200">
+        <a:solidFill>
+          <a:schemeClr val="tx1"/>
+        </a:solidFill>
+        <a:latin typeface="+mn-lt"/>
+        <a:ea typeface="+mn-ea"/>
+        <a:cs typeface="+mn-cs"/>
+      </a:defRPr>
+    </a:lvl8pPr>
+    <a:lvl9pPr marL="3657600" algn="l" defTabSz="914400" rtl="0" eaLnBrk="1" latinLnBrk="0" hangingPunct="1">
+      <a:defRPr sz="1200" kern="1200">
+        <a:solidFill>
+          <a:schemeClr val="tx1"/>
+        </a:solidFill>
+        <a:latin typeface="+mn-lt"/>
+        <a:ea typeface="+mn-ea"/>
+        <a:cs typeface="+mn-cs"/>
+      </a:defRPr>
+    </a:lvl9pPr>
+  </p:notesStyle>
+</p:notesMaster>
+</file>
+
+<file path=ppt/notesSlides/notesSlide1.xml><?xml version="1.0" encoding="utf-8"?>
+<p:notes xmlns:a="http://schemas.openxmlformats.org/drawingml/2006/main" xmlns:r="http://schemas.openxmlformats.org/officeDocument/2006/relationships" xmlns:p="http://schemas.openxmlformats.org/presentationml/2006/main">
+  <p:cSld>
+    <p:spTree>
+      <p:nvGrpSpPr>
+        <p:cNvPr id="1" name=""/>
+        <p:cNvGrpSpPr/>
+        <p:nvPr/>
+      </p:nvGrpSpPr>
+      <p:grpSpPr>
+        <a:xfrm>
+          <a:off x="0" y="0"/>
+          <a:ext cx="0" cy="0"/>
+          <a:chOff x="0" y="0"/>
+          <a:chExt cx="0" cy="0"/>
+        </a:xfrm>
+      </p:grpSpPr>
+      <p:sp>
+        <p:nvSpPr>
+          <p:cNvPr id="2" name="Slide Image Placeholder 1"/>
+          <p:cNvSpPr>
+            <a:spLocks noGrp="1" noRot="1" noChangeAspect="1"/>
+          </p:cNvSpPr>
+          <p:nvPr>
+            <p:ph type="sldImg"/>
+          </p:nvPr>
+        </p:nvSpPr>
+        <p:spPr/>
+      </p:sp>
+      <p:sp>
+        <p:nvSpPr>
+          <p:cNvPr id="3" name="Notes Placeholder 2"/>
+          <p:cNvSpPr>
+            <a:spLocks noGrp="1"/>
+          </p:cNvSpPr>
+          <p:nvPr>
+            <p:ph type="body" idx="1"/>
+          </p:nvPr>
+        </p:nvSpPr>
+        <p:spPr/>
+        <p:txBody>
+          <a:bodyPr/>
+          <a:lstStyle/>
+          <a:p>
+            <a:endParaRPr lang="en-GB"/>
+          </a:p>
+        </p:txBody>
+      </p:sp>
+      <p:sp>
+        <p:nvSpPr>
+          <p:cNvPr id="4" name="Slide Number Placeholder 3"/>
+          <p:cNvSpPr>
+            <a:spLocks noGrp="1"/>
+          </p:cNvSpPr>
+          <p:nvPr>
+            <p:ph type="sldNum" sz="quarter" idx="5"/>
+          </p:nvPr>
+        </p:nvSpPr>
+        <p:spPr/>
+        <p:txBody>
+          <a:bodyPr/>
+          <a:lstStyle/>
+          <a:p>
+            <a:fld id="{345AF4B5-3E5C-F84D-A668-6F62F852D3B7}" type="slidenum">
+              <a:rPr lang="en-US" smtClean="0"/>
+              <a:t>1</a:t>
+            </a:fld>
+            <a:endParaRPr lang="en-US"/>
+          </a:p>
+        </p:txBody>
+      </p:sp>
+    </p:spTree>
+    <p:extLst>
+      <p:ext uri="{BB962C8B-B14F-4D97-AF65-F5344CB8AC3E}">
+        <p14:creationId xmlns:p14="http://schemas.microsoft.com/office/powerpoint/2010/main" val="2960752830"/>
+      </p:ext>
+    </p:extLst>
+  </p:cSld>
+  <p:clrMapOvr>
+    <a:masterClrMapping/>
+  </p:clrMapOvr>
+</p:notes>
+</file>
+
+<file path=ppt/notesSlides/notesSlide2.xml><?xml version="1.0" encoding="utf-8"?>
+<p:notes xmlns:a="http://schemas.openxmlformats.org/drawingml/2006/main" xmlns:r="http://schemas.openxmlformats.org/officeDocument/2006/relationships" xmlns:p="http://schemas.openxmlformats.org/presentationml/2006/main">
+  <p:cSld>
+    <p:spTree>
+      <p:nvGrpSpPr>
+        <p:cNvPr id="1" name=""/>
+        <p:cNvGrpSpPr/>
+        <p:nvPr/>
+      </p:nvGrpSpPr>
+      <p:grpSpPr>
+        <a:xfrm>
+          <a:off x="0" y="0"/>
+          <a:ext cx="0" cy="0"/>
+          <a:chOff x="0" y="0"/>
+          <a:chExt cx="0" cy="0"/>
+        </a:xfrm>
+      </p:grpSpPr>
+      <p:sp>
+        <p:nvSpPr>
+          <p:cNvPr id="2" name="Slide Image Placeholder 1"/>
+          <p:cNvSpPr>
+            <a:spLocks noGrp="1" noRot="1" noChangeAspect="1"/>
+          </p:cNvSpPr>
+          <p:nvPr>
+            <p:ph type="sldImg"/>
+          </p:nvPr>
+        </p:nvSpPr>
+        <p:spPr/>
+      </p:sp>
+      <p:sp>
+        <p:nvSpPr>
+          <p:cNvPr id="3" name="Notes Placeholder 2"/>
+          <p:cNvSpPr>
+            <a:spLocks noGrp="1"/>
+          </p:cNvSpPr>
+          <p:nvPr>
+            <p:ph type="body" idx="1"/>
+          </p:nvPr>
+        </p:nvSpPr>
+        <p:spPr/>
+        <p:txBody>
+          <a:bodyPr/>
+          <a:lstStyle/>
+          <a:p>
+            <a:endParaRPr lang="en-US"/>
+          </a:p>
+        </p:txBody>
+      </p:sp>
+      <p:sp>
+        <p:nvSpPr>
+          <p:cNvPr id="4" name="Slide Number Placeholder 3"/>
+          <p:cNvSpPr>
+            <a:spLocks noGrp="1"/>
+          </p:cNvSpPr>
+          <p:nvPr>
+            <p:ph type="sldNum" sz="quarter" idx="5"/>
+          </p:nvPr>
+        </p:nvSpPr>
+        <p:spPr/>
+        <p:txBody>
+          <a:bodyPr/>
+          <a:lstStyle/>
+          <a:p>
+            <a:fld id="{345AF4B5-3E5C-F84D-A668-6F62F852D3B7}" type="slidenum">
+              <a:rPr lang="en-US" smtClean="0"/>
+              <a:t>2</a:t>
+            </a:fld>
+            <a:endParaRPr lang="en-US"/>
+          </a:p>
+        </p:txBody>
+      </p:sp>
+    </p:spTree>
+    <p:extLst>
+      <p:ext uri="{BB962C8B-B14F-4D97-AF65-F5344CB8AC3E}">
+        <p14:creationId xmlns:p14="http://schemas.microsoft.com/office/powerpoint/2010/main" val="544541371"/>
+      </p:ext>
+    </p:extLst>
+  </p:cSld>
+  <p:clrMapOvr>
+    <a:masterClrMapping/>
+  </p:clrMapOvr>
+</p:notes>
 </file>
 
 <file path=ppt/slideLayouts/slideLayout1.xml><?xml version="1.0" encoding="utf-8"?>
@@ -135,7 +654,13 @@
       </p:grpSpPr>
       <p:sp>
         <p:nvSpPr>
-          <p:cNvPr id="2" name="Title 1"/>
+          <p:cNvPr id="2" name="Title 1">
+            <a:extLst>
+              <a:ext uri="{FF2B5EF4-FFF2-40B4-BE49-F238E27FC236}">
+                <a16:creationId xmlns:a16="http://schemas.microsoft.com/office/drawing/2014/main" id="{63845392-4AF4-B222-E6F4-09E012FBA8F4}"/>
+              </a:ext>
+            </a:extLst>
+          </p:cNvPr>
           <p:cNvSpPr>
             <a:spLocks noGrp="1"/>
           </p:cNvSpPr>
@@ -145,25 +670,35 @@
         </p:nvSpPr>
         <p:spPr>
           <a:xfrm>
-            <a:off x="685800" y="2130425"/>
-            <a:ext cx="7772400" cy="1470025"/>
+            <a:off x="1524000" y="1122363"/>
+            <a:ext cx="9144000" cy="2387600"/>
           </a:xfrm>
         </p:spPr>
         <p:txBody>
-          <a:bodyPr/>
-          <a:lstStyle/>
-          <a:p>
-            <a:r>
-              <a:rPr lang="en-US" smtClean="0"/>
+          <a:bodyPr anchor="b"/>
+          <a:lstStyle>
+            <a:lvl1pPr algn="ctr">
+              <a:defRPr sz="6000"/>
+            </a:lvl1pPr>
+          </a:lstStyle>
+          <a:p>
+            <a:r>
+              <a:rPr lang="en-US"/>
               <a:t>Click to edit Master title style</a:t>
             </a:r>
-            <a:endParaRPr lang="en-US"/>
-          </a:p>
-        </p:txBody>
-      </p:sp>
-      <p:sp>
-        <p:nvSpPr>
-          <p:cNvPr id="3" name="Subtitle 2"/>
+            <a:endParaRPr lang="en-IN"/>
+          </a:p>
+        </p:txBody>
+      </p:sp>
+      <p:sp>
+        <p:nvSpPr>
+          <p:cNvPr id="3" name="Subtitle 2">
+            <a:extLst>
+              <a:ext uri="{FF2B5EF4-FFF2-40B4-BE49-F238E27FC236}">
+                <a16:creationId xmlns:a16="http://schemas.microsoft.com/office/drawing/2014/main" id="{FE7855F3-B6E0-A423-5F96-A9721CEFEAA4}"/>
+              </a:ext>
+            </a:extLst>
+          </p:cNvPr>
           <p:cNvSpPr>
             <a:spLocks noGrp="1"/>
           </p:cNvSpPr>
@@ -173,8 +708,8 @@
         </p:nvSpPr>
         <p:spPr>
           <a:xfrm>
-            <a:off x="1371600" y="3886200"/>
-            <a:ext cx="6400800" cy="1752600"/>
+            <a:off x="1524000" y="3602038"/>
+            <a:ext cx="9144000" cy="1655762"/>
           </a:xfrm>
         </p:spPr>
         <p:txBody>
@@ -182,107 +717,59 @@
           <a:lstStyle>
             <a:lvl1pPr marL="0" indent="0" algn="ctr">
               <a:buNone/>
-              <a:defRPr>
-                <a:solidFill>
-                  <a:schemeClr val="tx1">
-                    <a:tint val="75000"/>
-                  </a:schemeClr>
-                </a:solidFill>
-              </a:defRPr>
+              <a:defRPr sz="2400"/>
             </a:lvl1pPr>
             <a:lvl2pPr marL="457200" indent="0" algn="ctr">
               <a:buNone/>
-              <a:defRPr>
-                <a:solidFill>
-                  <a:schemeClr val="tx1">
-                    <a:tint val="75000"/>
-                  </a:schemeClr>
-                </a:solidFill>
-              </a:defRPr>
+              <a:defRPr sz="2000"/>
             </a:lvl2pPr>
             <a:lvl3pPr marL="914400" indent="0" algn="ctr">
               <a:buNone/>
-              <a:defRPr>
-                <a:solidFill>
-                  <a:schemeClr val="tx1">
-                    <a:tint val="75000"/>
-                  </a:schemeClr>
-                </a:solidFill>
-              </a:defRPr>
+              <a:defRPr sz="1800"/>
             </a:lvl3pPr>
             <a:lvl4pPr marL="1371600" indent="0" algn="ctr">
               <a:buNone/>
-              <a:defRPr>
-                <a:solidFill>
-                  <a:schemeClr val="tx1">
-                    <a:tint val="75000"/>
-                  </a:schemeClr>
-                </a:solidFill>
-              </a:defRPr>
+              <a:defRPr sz="1600"/>
             </a:lvl4pPr>
             <a:lvl5pPr marL="1828800" indent="0" algn="ctr">
               <a:buNone/>
-              <a:defRPr>
-                <a:solidFill>
-                  <a:schemeClr val="tx1">
-                    <a:tint val="75000"/>
-                  </a:schemeClr>
-                </a:solidFill>
-              </a:defRPr>
+              <a:defRPr sz="1600"/>
             </a:lvl5pPr>
             <a:lvl6pPr marL="2286000" indent="0" algn="ctr">
               <a:buNone/>
-              <a:defRPr>
-                <a:solidFill>
-                  <a:schemeClr val="tx1">
-                    <a:tint val="75000"/>
-                  </a:schemeClr>
-                </a:solidFill>
-              </a:defRPr>
+              <a:defRPr sz="1600"/>
             </a:lvl6pPr>
             <a:lvl7pPr marL="2743200" indent="0" algn="ctr">
               <a:buNone/>
-              <a:defRPr>
-                <a:solidFill>
-                  <a:schemeClr val="tx1">
-                    <a:tint val="75000"/>
-                  </a:schemeClr>
-                </a:solidFill>
-              </a:defRPr>
+              <a:defRPr sz="1600"/>
             </a:lvl7pPr>
             <a:lvl8pPr marL="3200400" indent="0" algn="ctr">
               <a:buNone/>
-              <a:defRPr>
-                <a:solidFill>
-                  <a:schemeClr val="tx1">
-                    <a:tint val="75000"/>
-                  </a:schemeClr>
-                </a:solidFill>
-              </a:defRPr>
+              <a:defRPr sz="1600"/>
             </a:lvl8pPr>
             <a:lvl9pPr marL="3657600" indent="0" algn="ctr">
               <a:buNone/>
-              <a:defRPr>
-                <a:solidFill>
-                  <a:schemeClr val="tx1">
-                    <a:tint val="75000"/>
-                  </a:schemeClr>
-                </a:solidFill>
-              </a:defRPr>
+              <a:defRPr sz="1600"/>
             </a:lvl9pPr>
           </a:lstStyle>
           <a:p>
             <a:r>
-              <a:rPr lang="en-US" smtClean="0"/>
+              <a:rPr lang="en-US"/>
               <a:t>Click to edit Master subtitle style</a:t>
             </a:r>
-            <a:endParaRPr lang="en-US"/>
-          </a:p>
-        </p:txBody>
-      </p:sp>
-      <p:sp>
-        <p:nvSpPr>
-          <p:cNvPr id="4" name="Date Placeholder 3"/>
+            <a:endParaRPr lang="en-IN"/>
+          </a:p>
+        </p:txBody>
+      </p:sp>
+      <p:sp>
+        <p:nvSpPr>
+          <p:cNvPr id="4" name="Date Placeholder 3">
+            <a:extLst>
+              <a:ext uri="{FF2B5EF4-FFF2-40B4-BE49-F238E27FC236}">
+                <a16:creationId xmlns:a16="http://schemas.microsoft.com/office/drawing/2014/main" id="{10F1C92D-01BC-69A8-1FB3-41BBF4B64AE5}"/>
+              </a:ext>
+            </a:extLst>
+          </p:cNvPr>
           <p:cNvSpPr>
             <a:spLocks noGrp="1"/>
           </p:cNvSpPr>
@@ -295,17 +782,23 @@
           <a:bodyPr/>
           <a:lstStyle/>
           <a:p>
-            <a:fld id="{5BCAD085-E8A6-8845-BD4E-CB4CCA059FC4}" type="datetimeFigureOut">
-              <a:rPr lang="en-US" smtClean="0"/>
-              <a:t>1/27/13</a:t>
+            <a:fld id="{BD835E71-2212-4FEA-BE8F-2F4D357B223E}" type="datetimeFigureOut">
+              <a:rPr lang="en-IN" smtClean="0"/>
+              <a:t>09-06-2026</a:t>
             </a:fld>
-            <a:endParaRPr lang="en-US"/>
-          </a:p>
-        </p:txBody>
-      </p:sp>
-      <p:sp>
-        <p:nvSpPr>
-          <p:cNvPr id="5" name="Footer Placeholder 4"/>
+            <a:endParaRPr lang="en-IN"/>
+          </a:p>
+        </p:txBody>
+      </p:sp>
+      <p:sp>
+        <p:nvSpPr>
+          <p:cNvPr id="5" name="Footer Placeholder 4">
+            <a:extLst>
+              <a:ext uri="{FF2B5EF4-FFF2-40B4-BE49-F238E27FC236}">
+                <a16:creationId xmlns:a16="http://schemas.microsoft.com/office/drawing/2014/main" id="{32ECAD9F-5312-D053-C02F-9A3ADC31D716}"/>
+              </a:ext>
+            </a:extLst>
+          </p:cNvPr>
           <p:cNvSpPr>
             <a:spLocks noGrp="1"/>
           </p:cNvSpPr>
@@ -318,13 +811,19 @@
           <a:bodyPr/>
           <a:lstStyle/>
           <a:p>
-            <a:endParaRPr lang="en-US"/>
-          </a:p>
-        </p:txBody>
-      </p:sp>
-      <p:sp>
-        <p:nvSpPr>
-          <p:cNvPr id="6" name="Slide Number Placeholder 5"/>
+            <a:endParaRPr lang="en-IN"/>
+          </a:p>
+        </p:txBody>
+      </p:sp>
+      <p:sp>
+        <p:nvSpPr>
+          <p:cNvPr id="6" name="Slide Number Placeholder 5">
+            <a:extLst>
+              <a:ext uri="{FF2B5EF4-FFF2-40B4-BE49-F238E27FC236}">
+                <a16:creationId xmlns:a16="http://schemas.microsoft.com/office/drawing/2014/main" id="{7015DE77-03B4-E01E-D01B-48A3846A5A23}"/>
+              </a:ext>
+            </a:extLst>
+          </p:cNvPr>
           <p:cNvSpPr>
             <a:spLocks noGrp="1"/>
           </p:cNvSpPr>
@@ -337,18 +836,18 @@
           <a:bodyPr/>
           <a:lstStyle/>
           <a:p>
-            <a:fld id="{C1FF6DA9-008F-8B48-92A6-B652298478BF}" type="slidenum">
-              <a:rPr lang="en-US" smtClean="0"/>
+            <a:fld id="{A517286A-0854-47BE-AEC8-6C8157BD39BE}" type="slidenum">
+              <a:rPr lang="en-IN" smtClean="0"/>
               <a:t>‹#›</a:t>
             </a:fld>
-            <a:endParaRPr lang="en-US"/>
+            <a:endParaRPr lang="en-IN"/>
           </a:p>
         </p:txBody>
       </p:sp>
     </p:spTree>
     <p:extLst>
       <p:ext uri="{BB962C8B-B14F-4D97-AF65-F5344CB8AC3E}">
-        <p14:creationId xmlns:p14="http://schemas.microsoft.com/office/powerpoint/2010/main" val="3168075583"/>
+        <p14:creationId xmlns:p14="http://schemas.microsoft.com/office/powerpoint/2010/main" val="1149631712"/>
       </p:ext>
     </p:extLst>
   </p:cSld>
@@ -377,7 +876,13 @@
       </p:grpSpPr>
       <p:sp>
         <p:nvSpPr>
-          <p:cNvPr id="2" name="Title 1"/>
+          <p:cNvPr id="2" name="Title 1">
+            <a:extLst>
+              <a:ext uri="{FF2B5EF4-FFF2-40B4-BE49-F238E27FC236}">
+                <a16:creationId xmlns:a16="http://schemas.microsoft.com/office/drawing/2014/main" id="{677AFD0F-DF23-8E05-B9E4-42345B503518}"/>
+              </a:ext>
+            </a:extLst>
+          </p:cNvPr>
           <p:cNvSpPr>
             <a:spLocks noGrp="1"/>
           </p:cNvSpPr>
@@ -391,16 +896,22 @@
           <a:lstStyle/>
           <a:p>
             <a:r>
-              <a:rPr lang="en-US" smtClean="0"/>
+              <a:rPr lang="en-US"/>
               <a:t>Click to edit Master title style</a:t>
             </a:r>
-            <a:endParaRPr lang="en-US"/>
-          </a:p>
-        </p:txBody>
-      </p:sp>
-      <p:sp>
-        <p:nvSpPr>
-          <p:cNvPr id="3" name="Vertical Text Placeholder 2"/>
+            <a:endParaRPr lang="en-IN"/>
+          </a:p>
+        </p:txBody>
+      </p:sp>
+      <p:sp>
+        <p:nvSpPr>
+          <p:cNvPr id="3" name="Vertical Text Placeholder 2">
+            <a:extLst>
+              <a:ext uri="{FF2B5EF4-FFF2-40B4-BE49-F238E27FC236}">
+                <a16:creationId xmlns:a16="http://schemas.microsoft.com/office/drawing/2014/main" id="{44B258FA-533D-932C-CBD8-5BFA430B8E46}"/>
+              </a:ext>
+            </a:extLst>
+          </p:cNvPr>
           <p:cNvSpPr>
             <a:spLocks noGrp="1"/>
           </p:cNvSpPr>
@@ -415,44 +926,50 @@
           <a:p>
             <a:pPr lvl="0"/>
             <a:r>
-              <a:rPr lang="en-US" smtClean="0"/>
+              <a:rPr lang="en-US"/>
               <a:t>Click to edit Master text styles</a:t>
             </a:r>
           </a:p>
           <a:p>
             <a:pPr lvl="1"/>
             <a:r>
-              <a:rPr lang="en-US" smtClean="0"/>
+              <a:rPr lang="en-US"/>
               <a:t>Second level</a:t>
             </a:r>
           </a:p>
           <a:p>
             <a:pPr lvl="2"/>
             <a:r>
-              <a:rPr lang="en-US" smtClean="0"/>
+              <a:rPr lang="en-US"/>
               <a:t>Third level</a:t>
             </a:r>
           </a:p>
           <a:p>
             <a:pPr lvl="3"/>
             <a:r>
-              <a:rPr lang="en-US" smtClean="0"/>
+              <a:rPr lang="en-US"/>
               <a:t>Fourth level</a:t>
             </a:r>
           </a:p>
           <a:p>
             <a:pPr lvl="4"/>
             <a:r>
-              <a:rPr lang="en-US" smtClean="0"/>
+              <a:rPr lang="en-US"/>
               <a:t>Fifth level</a:t>
             </a:r>
-            <a:endParaRPr lang="en-US"/>
-          </a:p>
-        </p:txBody>
-      </p:sp>
-      <p:sp>
-        <p:nvSpPr>
-          <p:cNvPr id="4" name="Date Placeholder 3"/>
+            <a:endParaRPr lang="en-IN"/>
+          </a:p>
+        </p:txBody>
+      </p:sp>
+      <p:sp>
+        <p:nvSpPr>
+          <p:cNvPr id="4" name="Date Placeholder 3">
+            <a:extLst>
+              <a:ext uri="{FF2B5EF4-FFF2-40B4-BE49-F238E27FC236}">
+                <a16:creationId xmlns:a16="http://schemas.microsoft.com/office/drawing/2014/main" id="{5550154B-43CC-40BA-5ACB-1E9CA2A5BEAE}"/>
+              </a:ext>
+            </a:extLst>
+          </p:cNvPr>
           <p:cNvSpPr>
             <a:spLocks noGrp="1"/>
           </p:cNvSpPr>
@@ -465,17 +982,23 @@
           <a:bodyPr/>
           <a:lstStyle/>
           <a:p>
-            <a:fld id="{5BCAD085-E8A6-8845-BD4E-CB4CCA059FC4}" type="datetimeFigureOut">
-              <a:rPr lang="en-US" smtClean="0"/>
-              <a:t>1/27/13</a:t>
+            <a:fld id="{BD835E71-2212-4FEA-BE8F-2F4D357B223E}" type="datetimeFigureOut">
+              <a:rPr lang="en-IN" smtClean="0"/>
+              <a:t>09-06-2026</a:t>
             </a:fld>
-            <a:endParaRPr lang="en-US"/>
-          </a:p>
-        </p:txBody>
-      </p:sp>
-      <p:sp>
-        <p:nvSpPr>
-          <p:cNvPr id="5" name="Footer Placeholder 4"/>
+            <a:endParaRPr lang="en-IN"/>
+          </a:p>
+        </p:txBody>
+      </p:sp>
+      <p:sp>
+        <p:nvSpPr>
+          <p:cNvPr id="5" name="Footer Placeholder 4">
+            <a:extLst>
+              <a:ext uri="{FF2B5EF4-FFF2-40B4-BE49-F238E27FC236}">
+                <a16:creationId xmlns:a16="http://schemas.microsoft.com/office/drawing/2014/main" id="{2451AD53-D446-90D5-5D5F-7A766B92DF00}"/>
+              </a:ext>
+            </a:extLst>
+          </p:cNvPr>
           <p:cNvSpPr>
             <a:spLocks noGrp="1"/>
           </p:cNvSpPr>
@@ -488,13 +1011,19 @@
           <a:bodyPr/>
           <a:lstStyle/>
           <a:p>
-            <a:endParaRPr lang="en-US"/>
-          </a:p>
-        </p:txBody>
-      </p:sp>
-      <p:sp>
-        <p:nvSpPr>
-          <p:cNvPr id="6" name="Slide Number Placeholder 5"/>
+            <a:endParaRPr lang="en-IN"/>
+          </a:p>
+        </p:txBody>
+      </p:sp>
+      <p:sp>
+        <p:nvSpPr>
+          <p:cNvPr id="6" name="Slide Number Placeholder 5">
+            <a:extLst>
+              <a:ext uri="{FF2B5EF4-FFF2-40B4-BE49-F238E27FC236}">
+                <a16:creationId xmlns:a16="http://schemas.microsoft.com/office/drawing/2014/main" id="{5A78D4A4-D325-187E-482F-2F700A939A66}"/>
+              </a:ext>
+            </a:extLst>
+          </p:cNvPr>
           <p:cNvSpPr>
             <a:spLocks noGrp="1"/>
           </p:cNvSpPr>
@@ -507,18 +1036,18 @@
           <a:bodyPr/>
           <a:lstStyle/>
           <a:p>
-            <a:fld id="{C1FF6DA9-008F-8B48-92A6-B652298478BF}" type="slidenum">
-              <a:rPr lang="en-US" smtClean="0"/>
+            <a:fld id="{A517286A-0854-47BE-AEC8-6C8157BD39BE}" type="slidenum">
+              <a:rPr lang="en-IN" smtClean="0"/>
               <a:t>‹#›</a:t>
             </a:fld>
-            <a:endParaRPr lang="en-US"/>
+            <a:endParaRPr lang="en-IN"/>
           </a:p>
         </p:txBody>
       </p:sp>
     </p:spTree>
     <p:extLst>
       <p:ext uri="{BB962C8B-B14F-4D97-AF65-F5344CB8AC3E}">
-        <p14:creationId xmlns:p14="http://schemas.microsoft.com/office/powerpoint/2010/main" val="2910927964"/>
+        <p14:creationId xmlns:p14="http://schemas.microsoft.com/office/powerpoint/2010/main" val="2030566040"/>
       </p:ext>
     </p:extLst>
   </p:cSld>
@@ -547,7 +1076,13 @@
       </p:grpSpPr>
       <p:sp>
         <p:nvSpPr>
-          <p:cNvPr id="2" name="Vertical Title 1"/>
+          <p:cNvPr id="2" name="Vertical Title 1">
+            <a:extLst>
+              <a:ext uri="{FF2B5EF4-FFF2-40B4-BE49-F238E27FC236}">
+                <a16:creationId xmlns:a16="http://schemas.microsoft.com/office/drawing/2014/main" id="{79302B07-1D6D-E6AE-5016-4FA083E9DCAC}"/>
+              </a:ext>
+            </a:extLst>
+          </p:cNvPr>
           <p:cNvSpPr>
             <a:spLocks noGrp="1"/>
           </p:cNvSpPr>
@@ -557,8 +1092,8 @@
         </p:nvSpPr>
         <p:spPr>
           <a:xfrm>
-            <a:off x="6629400" y="274638"/>
-            <a:ext cx="2057400" cy="5851525"/>
+            <a:off x="8724900" y="365125"/>
+            <a:ext cx="2628900" cy="5811838"/>
           </a:xfrm>
         </p:spPr>
         <p:txBody>
@@ -566,16 +1101,22 @@
           <a:lstStyle/>
           <a:p>
             <a:r>
-              <a:rPr lang="en-US" smtClean="0"/>
+              <a:rPr lang="en-US"/>
               <a:t>Click to edit Master title style</a:t>
             </a:r>
-            <a:endParaRPr lang="en-US"/>
-          </a:p>
-        </p:txBody>
-      </p:sp>
-      <p:sp>
-        <p:nvSpPr>
-          <p:cNvPr id="3" name="Vertical Text Placeholder 2"/>
+            <a:endParaRPr lang="en-IN"/>
+          </a:p>
+        </p:txBody>
+      </p:sp>
+      <p:sp>
+        <p:nvSpPr>
+          <p:cNvPr id="3" name="Vertical Text Placeholder 2">
+            <a:extLst>
+              <a:ext uri="{FF2B5EF4-FFF2-40B4-BE49-F238E27FC236}">
+                <a16:creationId xmlns:a16="http://schemas.microsoft.com/office/drawing/2014/main" id="{9F06717D-AE46-AE5E-2BCB-87BDD177B022}"/>
+              </a:ext>
+            </a:extLst>
+          </p:cNvPr>
           <p:cNvSpPr>
             <a:spLocks noGrp="1"/>
           </p:cNvSpPr>
@@ -585,8 +1126,8 @@
         </p:nvSpPr>
         <p:spPr>
           <a:xfrm>
-            <a:off x="457200" y="274638"/>
-            <a:ext cx="6019800" cy="5851525"/>
+            <a:off x="838200" y="365125"/>
+            <a:ext cx="7734300" cy="5811838"/>
           </a:xfrm>
         </p:spPr>
         <p:txBody>
@@ -595,44 +1136,50 @@
           <a:p>
             <a:pPr lvl="0"/>
             <a:r>
-              <a:rPr lang="en-US" smtClean="0"/>
+              <a:rPr lang="en-US"/>
               <a:t>Click to edit Master text styles</a:t>
             </a:r>
           </a:p>
           <a:p>
             <a:pPr lvl="1"/>
             <a:r>
-              <a:rPr lang="en-US" smtClean="0"/>
+              <a:rPr lang="en-US"/>
               <a:t>Second level</a:t>
             </a:r>
           </a:p>
           <a:p>
             <a:pPr lvl="2"/>
             <a:r>
-              <a:rPr lang="en-US" smtClean="0"/>
+              <a:rPr lang="en-US"/>
               <a:t>Third level</a:t>
             </a:r>
           </a:p>
           <a:p>
             <a:pPr lvl="3"/>
             <a:r>
-              <a:rPr lang="en-US" smtClean="0"/>
+              <a:rPr lang="en-US"/>
               <a:t>Fourth level</a:t>
             </a:r>
           </a:p>
           <a:p>
             <a:pPr lvl="4"/>
             <a:r>
-              <a:rPr lang="en-US" smtClean="0"/>
+              <a:rPr lang="en-US"/>
               <a:t>Fifth level</a:t>
             </a:r>
-            <a:endParaRPr lang="en-US"/>
-          </a:p>
-        </p:txBody>
-      </p:sp>
-      <p:sp>
-        <p:nvSpPr>
-          <p:cNvPr id="4" name="Date Placeholder 3"/>
+            <a:endParaRPr lang="en-IN"/>
+          </a:p>
+        </p:txBody>
+      </p:sp>
+      <p:sp>
+        <p:nvSpPr>
+          <p:cNvPr id="4" name="Date Placeholder 3">
+            <a:extLst>
+              <a:ext uri="{FF2B5EF4-FFF2-40B4-BE49-F238E27FC236}">
+                <a16:creationId xmlns:a16="http://schemas.microsoft.com/office/drawing/2014/main" id="{84D58040-5D6A-0DAA-F0FA-07ADB0F03591}"/>
+              </a:ext>
+            </a:extLst>
+          </p:cNvPr>
           <p:cNvSpPr>
             <a:spLocks noGrp="1"/>
           </p:cNvSpPr>
@@ -645,17 +1192,23 @@
           <a:bodyPr/>
           <a:lstStyle/>
           <a:p>
-            <a:fld id="{5BCAD085-E8A6-8845-BD4E-CB4CCA059FC4}" type="datetimeFigureOut">
-              <a:rPr lang="en-US" smtClean="0"/>
-              <a:t>1/27/13</a:t>
+            <a:fld id="{BD835E71-2212-4FEA-BE8F-2F4D357B223E}" type="datetimeFigureOut">
+              <a:rPr lang="en-IN" smtClean="0"/>
+              <a:t>09-06-2026</a:t>
             </a:fld>
-            <a:endParaRPr lang="en-US"/>
-          </a:p>
-        </p:txBody>
-      </p:sp>
-      <p:sp>
-        <p:nvSpPr>
-          <p:cNvPr id="5" name="Footer Placeholder 4"/>
+            <a:endParaRPr lang="en-IN"/>
+          </a:p>
+        </p:txBody>
+      </p:sp>
+      <p:sp>
+        <p:nvSpPr>
+          <p:cNvPr id="5" name="Footer Placeholder 4">
+            <a:extLst>
+              <a:ext uri="{FF2B5EF4-FFF2-40B4-BE49-F238E27FC236}">
+                <a16:creationId xmlns:a16="http://schemas.microsoft.com/office/drawing/2014/main" id="{6960A5A3-629D-22AC-8490-D0E0185F26AB}"/>
+              </a:ext>
+            </a:extLst>
+          </p:cNvPr>
           <p:cNvSpPr>
             <a:spLocks noGrp="1"/>
           </p:cNvSpPr>
@@ -668,13 +1221,19 @@
           <a:bodyPr/>
           <a:lstStyle/>
           <a:p>
-            <a:endParaRPr lang="en-US"/>
-          </a:p>
-        </p:txBody>
-      </p:sp>
-      <p:sp>
-        <p:nvSpPr>
-          <p:cNvPr id="6" name="Slide Number Placeholder 5"/>
+            <a:endParaRPr lang="en-IN"/>
+          </a:p>
+        </p:txBody>
+      </p:sp>
+      <p:sp>
+        <p:nvSpPr>
+          <p:cNvPr id="6" name="Slide Number Placeholder 5">
+            <a:extLst>
+              <a:ext uri="{FF2B5EF4-FFF2-40B4-BE49-F238E27FC236}">
+                <a16:creationId xmlns:a16="http://schemas.microsoft.com/office/drawing/2014/main" id="{9FBEA014-8F1B-08F5-0BB6-1938413FC2EC}"/>
+              </a:ext>
+            </a:extLst>
+          </p:cNvPr>
           <p:cNvSpPr>
             <a:spLocks noGrp="1"/>
           </p:cNvSpPr>
@@ -687,24 +1246,591 @@
           <a:bodyPr/>
           <a:lstStyle/>
           <a:p>
-            <a:fld id="{C1FF6DA9-008F-8B48-92A6-B652298478BF}" type="slidenum">
-              <a:rPr lang="en-US" smtClean="0"/>
+            <a:fld id="{A517286A-0854-47BE-AEC8-6C8157BD39BE}" type="slidenum">
+              <a:rPr lang="en-IN" smtClean="0"/>
               <a:t>‹#›</a:t>
             </a:fld>
-            <a:endParaRPr lang="en-US"/>
+            <a:endParaRPr lang="en-IN"/>
           </a:p>
         </p:txBody>
       </p:sp>
     </p:spTree>
     <p:extLst>
       <p:ext uri="{BB962C8B-B14F-4D97-AF65-F5344CB8AC3E}">
-        <p14:creationId xmlns:p14="http://schemas.microsoft.com/office/powerpoint/2010/main" val="3612223792"/>
+        <p14:creationId xmlns:p14="http://schemas.microsoft.com/office/powerpoint/2010/main" val="1880991306"/>
       </p:ext>
     </p:extLst>
   </p:cSld>
   <p:clrMapOvr>
     <a:masterClrMapping/>
   </p:clrMapOvr>
+</p:sldLayout>
+</file>
+
+<file path=ppt/slideLayouts/slideLayout12.xml><?xml version="1.0" encoding="utf-8"?>
+<p:sldLayout xmlns:a="http://schemas.openxmlformats.org/drawingml/2006/main" xmlns:r="http://schemas.openxmlformats.org/officeDocument/2006/relationships" xmlns:p="http://schemas.openxmlformats.org/presentationml/2006/main" userDrawn="1">
+  <p:cSld name="Cover Slide 1">
+    <p:spTree>
+      <p:nvGrpSpPr>
+        <p:cNvPr id="1" name=""/>
+        <p:cNvGrpSpPr/>
+        <p:nvPr/>
+      </p:nvGrpSpPr>
+      <p:grpSpPr>
+        <a:xfrm>
+          <a:off x="0" y="0"/>
+          <a:ext cx="0" cy="0"/>
+          <a:chOff x="0" y="0"/>
+          <a:chExt cx="0" cy="0"/>
+        </a:xfrm>
+      </p:grpSpPr>
+      <p:grpSp>
+        <p:nvGrpSpPr>
+          <p:cNvPr id="37" name="object 2">
+            <a:extLst>
+              <a:ext uri="{FF2B5EF4-FFF2-40B4-BE49-F238E27FC236}">
+                <a16:creationId xmlns:a16="http://schemas.microsoft.com/office/drawing/2014/main" id="{DF2FE585-DEB2-9385-A233-004B9D7FC0B3}"/>
+              </a:ext>
+            </a:extLst>
+          </p:cNvPr>
+          <p:cNvGrpSpPr/>
+          <p:nvPr/>
+        </p:nvGrpSpPr>
+        <p:grpSpPr>
+          <a:xfrm>
+            <a:off x="0" y="0"/>
+            <a:ext cx="12191999" cy="6858000"/>
+            <a:chOff x="0" y="0"/>
+            <a:chExt cx="20104099" cy="11308556"/>
+          </a:xfrm>
+        </p:grpSpPr>
+        <p:pic>
+          <p:nvPicPr>
+            <p:cNvPr id="39" name="object 3">
+              <a:extLst>
+                <a:ext uri="{FF2B5EF4-FFF2-40B4-BE49-F238E27FC236}">
+                  <a16:creationId xmlns:a16="http://schemas.microsoft.com/office/drawing/2014/main" id="{5C931129-D884-3125-BA58-033EC34B811E}"/>
+                </a:ext>
+              </a:extLst>
+            </p:cNvPr>
+            <p:cNvPicPr/>
+            <p:nvPr/>
+          </p:nvPicPr>
+          <p:blipFill>
+            <a:blip r:embed="rId2" cstate="screen">
+              <a:extLst>
+                <a:ext uri="{28A0092B-C50C-407E-A947-70E740481C1C}">
+                  <a14:useLocalDpi xmlns:a14="http://schemas.microsoft.com/office/drawing/2010/main"/>
+                </a:ext>
+              </a:extLst>
+            </a:blip>
+            <a:stretch>
+              <a:fillRect/>
+            </a:stretch>
+          </p:blipFill>
+          <p:spPr>
+            <a:xfrm>
+              <a:off x="0" y="0"/>
+              <a:ext cx="20104099" cy="11308556"/>
+            </a:xfrm>
+            <a:prstGeom prst="rect">
+              <a:avLst/>
+            </a:prstGeom>
+          </p:spPr>
+        </p:pic>
+        <p:pic>
+          <p:nvPicPr>
+            <p:cNvPr id="41" name="object 5">
+              <a:extLst>
+                <a:ext uri="{FF2B5EF4-FFF2-40B4-BE49-F238E27FC236}">
+                  <a16:creationId xmlns:a16="http://schemas.microsoft.com/office/drawing/2014/main" id="{38B18016-7766-3B76-F702-BCA8FBC8BF14}"/>
+                </a:ext>
+              </a:extLst>
+            </p:cNvPr>
+            <p:cNvPicPr/>
+            <p:nvPr/>
+          </p:nvPicPr>
+          <p:blipFill>
+            <a:blip r:embed="rId3" cstate="screen">
+              <a:extLst>
+                <a:ext uri="{28A0092B-C50C-407E-A947-70E740481C1C}">
+                  <a14:useLocalDpi xmlns:a14="http://schemas.microsoft.com/office/drawing/2010/main"/>
+                </a:ext>
+              </a:extLst>
+            </a:blip>
+            <a:stretch>
+              <a:fillRect/>
+            </a:stretch>
+          </p:blipFill>
+          <p:spPr>
+            <a:xfrm>
+              <a:off x="999322" y="831967"/>
+              <a:ext cx="6592804" cy="732510"/>
+            </a:xfrm>
+            <a:prstGeom prst="rect">
+              <a:avLst/>
+            </a:prstGeom>
+          </p:spPr>
+        </p:pic>
+      </p:grpSp>
+      <p:pic>
+        <p:nvPicPr>
+          <p:cNvPr id="38" name="object 9">
+            <a:extLst>
+              <a:ext uri="{FF2B5EF4-FFF2-40B4-BE49-F238E27FC236}">
+                <a16:creationId xmlns:a16="http://schemas.microsoft.com/office/drawing/2014/main" id="{96F89763-5FAC-F534-07B2-89D560CF33DD}"/>
+              </a:ext>
+            </a:extLst>
+          </p:cNvPr>
+          <p:cNvPicPr/>
+          <p:nvPr userDrawn="1"/>
+        </p:nvPicPr>
+        <p:blipFill>
+          <a:blip r:embed="rId4" cstate="print"/>
+          <a:stretch>
+            <a:fillRect/>
+          </a:stretch>
+        </p:blipFill>
+        <p:spPr>
+          <a:xfrm>
+            <a:off x="4348861" y="0"/>
+            <a:ext cx="7843139" cy="6828364"/>
+          </a:xfrm>
+          <a:prstGeom prst="rect">
+            <a:avLst/>
+          </a:prstGeom>
+        </p:spPr>
+      </p:pic>
+      <p:sp>
+        <p:nvSpPr>
+          <p:cNvPr id="29" name="Text Placeholder 12">
+            <a:extLst>
+              <a:ext uri="{FF2B5EF4-FFF2-40B4-BE49-F238E27FC236}">
+                <a16:creationId xmlns:a16="http://schemas.microsoft.com/office/drawing/2014/main" id="{AE8F102E-DC00-DBE1-F4B3-1BD3932464CF}"/>
+              </a:ext>
+            </a:extLst>
+          </p:cNvPr>
+          <p:cNvSpPr>
+            <a:spLocks noGrp="1"/>
+          </p:cNvSpPr>
+          <p:nvPr>
+            <p:ph type="body" sz="quarter" idx="11"/>
+          </p:nvPr>
+        </p:nvSpPr>
+        <p:spPr>
+          <a:xfrm>
+            <a:off x="609600" y="2196502"/>
+            <a:ext cx="6578600" cy="1412875"/>
+          </a:xfrm>
+          <a:prstGeom prst="rect">
+            <a:avLst/>
+          </a:prstGeom>
+        </p:spPr>
+        <p:txBody>
+          <a:bodyPr lIns="0" anchor="b">
+            <a:noAutofit/>
+          </a:bodyPr>
+          <a:lstStyle>
+            <a:lvl1pPr marL="0" indent="0">
+              <a:lnSpc>
+                <a:spcPct val="100000"/>
+              </a:lnSpc>
+              <a:spcBef>
+                <a:spcPts val="0"/>
+              </a:spcBef>
+              <a:buNone/>
+              <a:defRPr sz="4800" b="1">
+                <a:solidFill>
+                  <a:schemeClr val="bg1"/>
+                </a:solidFill>
+                <a:latin typeface="HCLTech Roobert" pitchFamily="50" charset="0"/>
+                <a:cs typeface="HCLTech Roobert" pitchFamily="50" charset="0"/>
+              </a:defRPr>
+            </a:lvl1pPr>
+            <a:lvl2pPr marL="457200" indent="0">
+              <a:buNone/>
+              <a:defRPr>
+                <a:solidFill>
+                  <a:schemeClr val="bg1"/>
+                </a:solidFill>
+              </a:defRPr>
+            </a:lvl2pPr>
+            <a:lvl3pPr marL="914400" indent="0">
+              <a:buNone/>
+              <a:defRPr>
+                <a:solidFill>
+                  <a:schemeClr val="bg1"/>
+                </a:solidFill>
+              </a:defRPr>
+            </a:lvl3pPr>
+            <a:lvl4pPr marL="1371600" indent="0">
+              <a:buNone/>
+              <a:defRPr>
+                <a:solidFill>
+                  <a:schemeClr val="bg1"/>
+                </a:solidFill>
+              </a:defRPr>
+            </a:lvl4pPr>
+            <a:lvl5pPr marL="1828800" indent="0">
+              <a:buNone/>
+              <a:defRPr>
+                <a:solidFill>
+                  <a:schemeClr val="bg1"/>
+                </a:solidFill>
+              </a:defRPr>
+            </a:lvl5pPr>
+          </a:lstStyle>
+          <a:p>
+            <a:pPr lvl="0"/>
+            <a:r>
+              <a:rPr lang="en-US"/>
+              <a:t>Click to edit Master text styles</a:t>
+            </a:r>
+          </a:p>
+        </p:txBody>
+      </p:sp>
+      <p:sp>
+        <p:nvSpPr>
+          <p:cNvPr id="30" name="Text Placeholder 12">
+            <a:extLst>
+              <a:ext uri="{FF2B5EF4-FFF2-40B4-BE49-F238E27FC236}">
+                <a16:creationId xmlns:a16="http://schemas.microsoft.com/office/drawing/2014/main" id="{09BE1CC7-79AA-A1F6-65FF-9B022A7ECAE4}"/>
+              </a:ext>
+            </a:extLst>
+          </p:cNvPr>
+          <p:cNvSpPr>
+            <a:spLocks noGrp="1"/>
+          </p:cNvSpPr>
+          <p:nvPr>
+            <p:ph type="body" sz="quarter" idx="12"/>
+          </p:nvPr>
+        </p:nvSpPr>
+        <p:spPr>
+          <a:xfrm>
+            <a:off x="609600" y="3748640"/>
+            <a:ext cx="6578600" cy="633304"/>
+          </a:xfrm>
+          <a:prstGeom prst="rect">
+            <a:avLst/>
+          </a:prstGeom>
+        </p:spPr>
+        <p:txBody>
+          <a:bodyPr lIns="0" anchor="ctr">
+            <a:noAutofit/>
+          </a:bodyPr>
+          <a:lstStyle>
+            <a:lvl1pPr marL="0" indent="0">
+              <a:lnSpc>
+                <a:spcPct val="100000"/>
+              </a:lnSpc>
+              <a:spcBef>
+                <a:spcPts val="0"/>
+              </a:spcBef>
+              <a:buNone/>
+              <a:defRPr sz="3000" b="0">
+                <a:solidFill>
+                  <a:schemeClr val="bg1"/>
+                </a:solidFill>
+                <a:latin typeface="HCLTech Roobert" pitchFamily="50" charset="0"/>
+                <a:cs typeface="HCLTech Roobert" pitchFamily="50" charset="0"/>
+              </a:defRPr>
+            </a:lvl1pPr>
+            <a:lvl2pPr marL="457200" indent="0">
+              <a:buNone/>
+              <a:defRPr>
+                <a:solidFill>
+                  <a:schemeClr val="bg1"/>
+                </a:solidFill>
+              </a:defRPr>
+            </a:lvl2pPr>
+            <a:lvl3pPr marL="914400" indent="0">
+              <a:buNone/>
+              <a:defRPr>
+                <a:solidFill>
+                  <a:schemeClr val="bg1"/>
+                </a:solidFill>
+              </a:defRPr>
+            </a:lvl3pPr>
+            <a:lvl4pPr marL="1371600" indent="0">
+              <a:buNone/>
+              <a:defRPr>
+                <a:solidFill>
+                  <a:schemeClr val="bg1"/>
+                </a:solidFill>
+              </a:defRPr>
+            </a:lvl4pPr>
+            <a:lvl5pPr marL="1828800" indent="0">
+              <a:buNone/>
+              <a:defRPr>
+                <a:solidFill>
+                  <a:schemeClr val="bg1"/>
+                </a:solidFill>
+              </a:defRPr>
+            </a:lvl5pPr>
+          </a:lstStyle>
+          <a:p>
+            <a:pPr lvl="0"/>
+            <a:r>
+              <a:rPr lang="en-US"/>
+              <a:t>Click to edit Master text styles</a:t>
+            </a:r>
+          </a:p>
+        </p:txBody>
+      </p:sp>
+      <p:sp>
+        <p:nvSpPr>
+          <p:cNvPr id="31" name="Text Placeholder 12">
+            <a:extLst>
+              <a:ext uri="{FF2B5EF4-FFF2-40B4-BE49-F238E27FC236}">
+                <a16:creationId xmlns:a16="http://schemas.microsoft.com/office/drawing/2014/main" id="{B9E6DC15-6519-CB80-B41E-4A4D08F559B1}"/>
+              </a:ext>
+            </a:extLst>
+          </p:cNvPr>
+          <p:cNvSpPr>
+            <a:spLocks noGrp="1"/>
+          </p:cNvSpPr>
+          <p:nvPr>
+            <p:ph type="body" sz="quarter" idx="13"/>
+          </p:nvPr>
+        </p:nvSpPr>
+        <p:spPr>
+          <a:xfrm>
+            <a:off x="628650" y="4930805"/>
+            <a:ext cx="6578600" cy="1000542"/>
+          </a:xfrm>
+          <a:prstGeom prst="rect">
+            <a:avLst/>
+          </a:prstGeom>
+        </p:spPr>
+        <p:txBody>
+          <a:bodyPr lIns="0" anchor="b">
+            <a:noAutofit/>
+          </a:bodyPr>
+          <a:lstStyle>
+            <a:lvl1pPr marL="0" indent="0">
+              <a:lnSpc>
+                <a:spcPct val="100000"/>
+              </a:lnSpc>
+              <a:spcBef>
+                <a:spcPts val="0"/>
+              </a:spcBef>
+              <a:buNone/>
+              <a:defRPr sz="1800" b="0">
+                <a:solidFill>
+                  <a:schemeClr val="bg1"/>
+                </a:solidFill>
+                <a:latin typeface="HCLTech Roobert" pitchFamily="50" charset="0"/>
+                <a:cs typeface="HCLTech Roobert" pitchFamily="50" charset="0"/>
+              </a:defRPr>
+            </a:lvl1pPr>
+            <a:lvl2pPr marL="457200" indent="0">
+              <a:buNone/>
+              <a:defRPr>
+                <a:solidFill>
+                  <a:schemeClr val="bg1"/>
+                </a:solidFill>
+              </a:defRPr>
+            </a:lvl2pPr>
+            <a:lvl3pPr marL="914400" indent="0">
+              <a:buNone/>
+              <a:defRPr>
+                <a:solidFill>
+                  <a:schemeClr val="bg1"/>
+                </a:solidFill>
+              </a:defRPr>
+            </a:lvl3pPr>
+            <a:lvl4pPr marL="1371600" indent="0">
+              <a:buNone/>
+              <a:defRPr>
+                <a:solidFill>
+                  <a:schemeClr val="bg1"/>
+                </a:solidFill>
+              </a:defRPr>
+            </a:lvl4pPr>
+            <a:lvl5pPr marL="1828800" indent="0">
+              <a:buNone/>
+              <a:defRPr>
+                <a:solidFill>
+                  <a:schemeClr val="bg1"/>
+                </a:solidFill>
+              </a:defRPr>
+            </a:lvl5pPr>
+          </a:lstStyle>
+          <a:p>
+            <a:pPr lvl="0"/>
+            <a:r>
+              <a:rPr lang="en-US"/>
+              <a:t>Click to edit Master text styles</a:t>
+            </a:r>
+          </a:p>
+        </p:txBody>
+      </p:sp>
+    </p:spTree>
+    <p:extLst>
+      <p:ext uri="{BB962C8B-B14F-4D97-AF65-F5344CB8AC3E}">
+        <p14:creationId xmlns:p14="http://schemas.microsoft.com/office/powerpoint/2010/main" val="1563039211"/>
+      </p:ext>
+    </p:extLst>
+  </p:cSld>
+  <p:clrMapOvr>
+    <a:masterClrMapping/>
+  </p:clrMapOvr>
+  <p:extLst>
+    <p:ext uri="{DCECCB84-F9BA-43D5-87BE-67443E8EF086}">
+      <p15:sldGuideLst xmlns:p15="http://schemas.microsoft.com/office/powerpoint/2012/main">
+        <p15:guide id="1" orient="horz" pos="2160">
+          <p15:clr>
+            <a:srgbClr val="FBAE40"/>
+          </p15:clr>
+        </p15:guide>
+        <p15:guide id="2" pos="7296">
+          <p15:clr>
+            <a:srgbClr val="FBAE40"/>
+          </p15:clr>
+        </p15:guide>
+        <p15:guide id="3" pos="384">
+          <p15:clr>
+            <a:srgbClr val="FBAE40"/>
+          </p15:clr>
+        </p15:guide>
+        <p15:guide id="4" pos="576">
+          <p15:clr>
+            <a:srgbClr val="FBAE40"/>
+          </p15:clr>
+        </p15:guide>
+      </p15:sldGuideLst>
+    </p:ext>
+  </p:extLst>
+</p:sldLayout>
+</file>
+
+<file path=ppt/slideLayouts/slideLayout13.xml><?xml version="1.0" encoding="utf-8"?>
+<p:sldLayout xmlns:a="http://schemas.openxmlformats.org/drawingml/2006/main" xmlns:r="http://schemas.openxmlformats.org/officeDocument/2006/relationships" xmlns:p="http://schemas.openxmlformats.org/presentationml/2006/main" userDrawn="1">
+  <p:cSld name="2_Cover Slide 2">
+    <p:spTree>
+      <p:nvGrpSpPr>
+        <p:cNvPr id="1" name=""/>
+        <p:cNvGrpSpPr/>
+        <p:nvPr/>
+      </p:nvGrpSpPr>
+      <p:grpSpPr>
+        <a:xfrm>
+          <a:off x="0" y="0"/>
+          <a:ext cx="0" cy="0"/>
+          <a:chOff x="0" y="0"/>
+          <a:chExt cx="0" cy="0"/>
+        </a:xfrm>
+      </p:grpSpPr>
+      <p:pic>
+        <p:nvPicPr>
+          <p:cNvPr id="2" name="Picture Placeholder 7">
+            <a:extLst>
+              <a:ext uri="{FF2B5EF4-FFF2-40B4-BE49-F238E27FC236}">
+                <a16:creationId xmlns:a16="http://schemas.microsoft.com/office/drawing/2014/main" id="{379B5CB1-5DBC-3B2B-FA56-8014B25C7940}"/>
+              </a:ext>
+            </a:extLst>
+          </p:cNvPr>
+          <p:cNvPicPr>
+            <a:picLocks noChangeAspect="1"/>
+          </p:cNvPicPr>
+          <p:nvPr userDrawn="1"/>
+        </p:nvPicPr>
+        <p:blipFill>
+          <a:blip r:embed="rId2" cstate="screen">
+            <a:extLst>
+              <a:ext uri="{28A0092B-C50C-407E-A947-70E740481C1C}">
+                <a14:useLocalDpi xmlns:a14="http://schemas.microsoft.com/office/drawing/2010/main"/>
+              </a:ext>
+            </a:extLst>
+          </a:blip>
+          <a:srcRect/>
+          <a:stretch/>
+        </p:blipFill>
+        <p:spPr>
+          <a:xfrm flipH="1">
+            <a:off x="385276" y="170671"/>
+            <a:ext cx="3871300" cy="6182698"/>
+          </a:xfrm>
+          <a:prstGeom prst="roundRect">
+            <a:avLst>
+              <a:gd name="adj" fmla="val 1457"/>
+            </a:avLst>
+          </a:prstGeom>
+        </p:spPr>
+      </p:pic>
+      <p:sp>
+        <p:nvSpPr>
+          <p:cNvPr id="3" name="Rectangle: Rounded Corners 2">
+            <a:extLst>
+              <a:ext uri="{FF2B5EF4-FFF2-40B4-BE49-F238E27FC236}">
+                <a16:creationId xmlns:a16="http://schemas.microsoft.com/office/drawing/2014/main" id="{59B1973D-758E-4746-292C-7E06C4660076}"/>
+              </a:ext>
+            </a:extLst>
+          </p:cNvPr>
+          <p:cNvSpPr/>
+          <p:nvPr userDrawn="1"/>
+        </p:nvSpPr>
+        <p:spPr>
+          <a:xfrm>
+            <a:off x="190500" y="6524625"/>
+            <a:ext cx="3009900" cy="247650"/>
+          </a:xfrm>
+          <a:prstGeom prst="roundRect">
+            <a:avLst/>
+          </a:prstGeom>
+          <a:solidFill>
+            <a:schemeClr val="bg1"/>
+          </a:solidFill>
+          <a:ln>
+            <a:noFill/>
+          </a:ln>
+        </p:spPr>
+        <p:style>
+          <a:lnRef idx="2">
+            <a:schemeClr val="accent1">
+              <a:shade val="15000"/>
+            </a:schemeClr>
+          </a:lnRef>
+          <a:fillRef idx="1">
+            <a:schemeClr val="accent1"/>
+          </a:fillRef>
+          <a:effectRef idx="0">
+            <a:schemeClr val="accent1"/>
+          </a:effectRef>
+          <a:fontRef idx="minor">
+            <a:schemeClr val="lt1"/>
+          </a:fontRef>
+        </p:style>
+        <p:txBody>
+          <a:bodyPr rtlCol="0" anchor="ctr"/>
+          <a:lstStyle/>
+          <a:p>
+            <a:pPr algn="ctr"/>
+            <a:endParaRPr lang="en-US"/>
+          </a:p>
+        </p:txBody>
+      </p:sp>
+    </p:spTree>
+    <p:extLst>
+      <p:ext uri="{BB962C8B-B14F-4D97-AF65-F5344CB8AC3E}">
+        <p14:creationId xmlns:p14="http://schemas.microsoft.com/office/powerpoint/2010/main" val="172677985"/>
+      </p:ext>
+    </p:extLst>
+  </p:cSld>
+  <p:clrMapOvr>
+    <a:masterClrMapping/>
+  </p:clrMapOvr>
+  <p:extLst>
+    <p:ext uri="{DCECCB84-F9BA-43D5-87BE-67443E8EF086}">
+      <p15:sldGuideLst xmlns:p15="http://schemas.microsoft.com/office/powerpoint/2012/main">
+        <p15:guide id="1" orient="horz" pos="2160">
+          <p15:clr>
+            <a:srgbClr val="FBAE40"/>
+          </p15:clr>
+        </p15:guide>
+      </p15:sldGuideLst>
+    </p:ext>
+  </p:extLst>
 </p:sldLayout>
 </file>
 
@@ -727,7 +1853,13 @@
       </p:grpSpPr>
       <p:sp>
         <p:nvSpPr>
-          <p:cNvPr id="2" name="Title 1"/>
+          <p:cNvPr id="2" name="Title 1">
+            <a:extLst>
+              <a:ext uri="{FF2B5EF4-FFF2-40B4-BE49-F238E27FC236}">
+                <a16:creationId xmlns:a16="http://schemas.microsoft.com/office/drawing/2014/main" id="{CD9C5861-57CF-2EFF-8CB6-40DE9FB08EC8}"/>
+              </a:ext>
+            </a:extLst>
+          </p:cNvPr>
           <p:cNvSpPr>
             <a:spLocks noGrp="1"/>
           </p:cNvSpPr>
@@ -741,16 +1873,22 @@
           <a:lstStyle/>
           <a:p>
             <a:r>
-              <a:rPr lang="en-US" smtClean="0"/>
+              <a:rPr lang="en-US"/>
               <a:t>Click to edit Master title style</a:t>
             </a:r>
-            <a:endParaRPr lang="en-US"/>
-          </a:p>
-        </p:txBody>
-      </p:sp>
-      <p:sp>
-        <p:nvSpPr>
-          <p:cNvPr id="3" name="Content Placeholder 2"/>
+            <a:endParaRPr lang="en-IN"/>
+          </a:p>
+        </p:txBody>
+      </p:sp>
+      <p:sp>
+        <p:nvSpPr>
+          <p:cNvPr id="3" name="Content Placeholder 2">
+            <a:extLst>
+              <a:ext uri="{FF2B5EF4-FFF2-40B4-BE49-F238E27FC236}">
+                <a16:creationId xmlns:a16="http://schemas.microsoft.com/office/drawing/2014/main" id="{4A52C341-F44A-2AA0-F6BC-5BF2D085D11B}"/>
+              </a:ext>
+            </a:extLst>
+          </p:cNvPr>
           <p:cNvSpPr>
             <a:spLocks noGrp="1"/>
           </p:cNvSpPr>
@@ -765,44 +1903,50 @@
           <a:p>
             <a:pPr lvl="0"/>
             <a:r>
-              <a:rPr lang="en-US" smtClean="0"/>
+              <a:rPr lang="en-US"/>
               <a:t>Click to edit Master text styles</a:t>
             </a:r>
           </a:p>
           <a:p>
             <a:pPr lvl="1"/>
             <a:r>
-              <a:rPr lang="en-US" smtClean="0"/>
+              <a:rPr lang="en-US"/>
               <a:t>Second level</a:t>
             </a:r>
           </a:p>
           <a:p>
             <a:pPr lvl="2"/>
             <a:r>
-              <a:rPr lang="en-US" smtClean="0"/>
+              <a:rPr lang="en-US"/>
               <a:t>Third level</a:t>
             </a:r>
           </a:p>
           <a:p>
             <a:pPr lvl="3"/>
             <a:r>
-              <a:rPr lang="en-US" smtClean="0"/>
+              <a:rPr lang="en-US"/>
               <a:t>Fourth level</a:t>
             </a:r>
           </a:p>
           <a:p>
             <a:pPr lvl="4"/>
             <a:r>
-              <a:rPr lang="en-US" smtClean="0"/>
+              <a:rPr lang="en-US"/>
               <a:t>Fifth level</a:t>
             </a:r>
-            <a:endParaRPr lang="en-US"/>
-          </a:p>
-        </p:txBody>
-      </p:sp>
-      <p:sp>
-        <p:nvSpPr>
-          <p:cNvPr id="4" name="Date Placeholder 3"/>
+            <a:endParaRPr lang="en-IN"/>
+          </a:p>
+        </p:txBody>
+      </p:sp>
+      <p:sp>
+        <p:nvSpPr>
+          <p:cNvPr id="4" name="Date Placeholder 3">
+            <a:extLst>
+              <a:ext uri="{FF2B5EF4-FFF2-40B4-BE49-F238E27FC236}">
+                <a16:creationId xmlns:a16="http://schemas.microsoft.com/office/drawing/2014/main" id="{D174D0E5-6793-BA22-3199-42672E02E9CF}"/>
+              </a:ext>
+            </a:extLst>
+          </p:cNvPr>
           <p:cNvSpPr>
             <a:spLocks noGrp="1"/>
           </p:cNvSpPr>
@@ -815,17 +1959,23 @@
           <a:bodyPr/>
           <a:lstStyle/>
           <a:p>
-            <a:fld id="{5BCAD085-E8A6-8845-BD4E-CB4CCA059FC4}" type="datetimeFigureOut">
-              <a:rPr lang="en-US" smtClean="0"/>
-              <a:t>1/27/13</a:t>
+            <a:fld id="{BD835E71-2212-4FEA-BE8F-2F4D357B223E}" type="datetimeFigureOut">
+              <a:rPr lang="en-IN" smtClean="0"/>
+              <a:t>09-06-2026</a:t>
             </a:fld>
-            <a:endParaRPr lang="en-US"/>
-          </a:p>
-        </p:txBody>
-      </p:sp>
-      <p:sp>
-        <p:nvSpPr>
-          <p:cNvPr id="5" name="Footer Placeholder 4"/>
+            <a:endParaRPr lang="en-IN"/>
+          </a:p>
+        </p:txBody>
+      </p:sp>
+      <p:sp>
+        <p:nvSpPr>
+          <p:cNvPr id="5" name="Footer Placeholder 4">
+            <a:extLst>
+              <a:ext uri="{FF2B5EF4-FFF2-40B4-BE49-F238E27FC236}">
+                <a16:creationId xmlns:a16="http://schemas.microsoft.com/office/drawing/2014/main" id="{97889AAD-FC91-5418-95EC-0FDA3CEAD933}"/>
+              </a:ext>
+            </a:extLst>
+          </p:cNvPr>
           <p:cNvSpPr>
             <a:spLocks noGrp="1"/>
           </p:cNvSpPr>
@@ -838,13 +1988,19 @@
           <a:bodyPr/>
           <a:lstStyle/>
           <a:p>
-            <a:endParaRPr lang="en-US"/>
-          </a:p>
-        </p:txBody>
-      </p:sp>
-      <p:sp>
-        <p:nvSpPr>
-          <p:cNvPr id="6" name="Slide Number Placeholder 5"/>
+            <a:endParaRPr lang="en-IN"/>
+          </a:p>
+        </p:txBody>
+      </p:sp>
+      <p:sp>
+        <p:nvSpPr>
+          <p:cNvPr id="6" name="Slide Number Placeholder 5">
+            <a:extLst>
+              <a:ext uri="{FF2B5EF4-FFF2-40B4-BE49-F238E27FC236}">
+                <a16:creationId xmlns:a16="http://schemas.microsoft.com/office/drawing/2014/main" id="{93AD3FBB-8222-B4F8-B51B-79EDC6CBF6AE}"/>
+              </a:ext>
+            </a:extLst>
+          </p:cNvPr>
           <p:cNvSpPr>
             <a:spLocks noGrp="1"/>
           </p:cNvSpPr>
@@ -857,18 +2013,18 @@
           <a:bodyPr/>
           <a:lstStyle/>
           <a:p>
-            <a:fld id="{C1FF6DA9-008F-8B48-92A6-B652298478BF}" type="slidenum">
-              <a:rPr lang="en-US" smtClean="0"/>
+            <a:fld id="{A517286A-0854-47BE-AEC8-6C8157BD39BE}" type="slidenum">
+              <a:rPr lang="en-IN" smtClean="0"/>
               <a:t>‹#›</a:t>
             </a:fld>
-            <a:endParaRPr lang="en-US"/>
+            <a:endParaRPr lang="en-IN"/>
           </a:p>
         </p:txBody>
       </p:sp>
     </p:spTree>
     <p:extLst>
       <p:ext uri="{BB962C8B-B14F-4D97-AF65-F5344CB8AC3E}">
-        <p14:creationId xmlns:p14="http://schemas.microsoft.com/office/powerpoint/2010/main" val="2614314258"/>
+        <p14:creationId xmlns:p14="http://schemas.microsoft.com/office/powerpoint/2010/main" val="529216927"/>
       </p:ext>
     </p:extLst>
   </p:cSld>
@@ -897,7 +2053,13 @@
       </p:grpSpPr>
       <p:sp>
         <p:nvSpPr>
-          <p:cNvPr id="2" name="Title 1"/>
+          <p:cNvPr id="2" name="Title 1">
+            <a:extLst>
+              <a:ext uri="{FF2B5EF4-FFF2-40B4-BE49-F238E27FC236}">
+                <a16:creationId xmlns:a16="http://schemas.microsoft.com/office/drawing/2014/main" id="{3D471E99-83EC-1E92-4EE5-0CD949799661}"/>
+              </a:ext>
+            </a:extLst>
+          </p:cNvPr>
           <p:cNvSpPr>
             <a:spLocks noGrp="1"/>
           </p:cNvSpPr>
@@ -907,29 +2069,35 @@
         </p:nvSpPr>
         <p:spPr>
           <a:xfrm>
-            <a:off x="722313" y="4406900"/>
-            <a:ext cx="7772400" cy="1362075"/>
+            <a:off x="831850" y="1709738"/>
+            <a:ext cx="10515600" cy="2852737"/>
           </a:xfrm>
         </p:spPr>
         <p:txBody>
-          <a:bodyPr anchor="t"/>
+          <a:bodyPr anchor="b"/>
           <a:lstStyle>
-            <a:lvl1pPr algn="l">
-              <a:defRPr sz="4000" b="1" cap="all"/>
+            <a:lvl1pPr>
+              <a:defRPr sz="6000"/>
             </a:lvl1pPr>
           </a:lstStyle>
           <a:p>
             <a:r>
-              <a:rPr lang="en-US" smtClean="0"/>
+              <a:rPr lang="en-US"/>
               <a:t>Click to edit Master title style</a:t>
             </a:r>
-            <a:endParaRPr lang="en-US"/>
-          </a:p>
-        </p:txBody>
-      </p:sp>
-      <p:sp>
-        <p:nvSpPr>
-          <p:cNvPr id="3" name="Text Placeholder 2"/>
+            <a:endParaRPr lang="en-IN"/>
+          </a:p>
+        </p:txBody>
+      </p:sp>
+      <p:sp>
+        <p:nvSpPr>
+          <p:cNvPr id="3" name="Text Placeholder 2">
+            <a:extLst>
+              <a:ext uri="{FF2B5EF4-FFF2-40B4-BE49-F238E27FC236}">
+                <a16:creationId xmlns:a16="http://schemas.microsoft.com/office/drawing/2014/main" id="{E72EF56C-6060-D758-0392-D16BD66E8F1E}"/>
+              </a:ext>
+            </a:extLst>
+          </p:cNvPr>
           <p:cNvSpPr>
             <a:spLocks noGrp="1"/>
           </p:cNvSpPr>
@@ -939,16 +2107,16 @@
         </p:nvSpPr>
         <p:spPr>
           <a:xfrm>
-            <a:off x="722313" y="2906713"/>
-            <a:ext cx="7772400" cy="1500187"/>
+            <a:off x="831850" y="4589463"/>
+            <a:ext cx="10515600" cy="1500187"/>
           </a:xfrm>
         </p:spPr>
         <p:txBody>
-          <a:bodyPr anchor="b"/>
+          <a:bodyPr/>
           <a:lstStyle>
             <a:lvl1pPr marL="0" indent="0">
               <a:buNone/>
-              <a:defRPr sz="2000">
+              <a:defRPr sz="2400">
                 <a:solidFill>
                   <a:schemeClr val="tx1">
                     <a:tint val="75000"/>
@@ -958,7 +2126,7 @@
             </a:lvl1pPr>
             <a:lvl2pPr marL="457200" indent="0">
               <a:buNone/>
-              <a:defRPr sz="1800">
+              <a:defRPr sz="2000">
                 <a:solidFill>
                   <a:schemeClr val="tx1">
                     <a:tint val="75000"/>
@@ -968,7 +2136,7 @@
             </a:lvl2pPr>
             <a:lvl3pPr marL="914400" indent="0">
               <a:buNone/>
-              <a:defRPr sz="1600">
+              <a:defRPr sz="1800">
                 <a:solidFill>
                   <a:schemeClr val="tx1">
                     <a:tint val="75000"/>
@@ -978,7 +2146,7 @@
             </a:lvl3pPr>
             <a:lvl4pPr marL="1371600" indent="0">
               <a:buNone/>
-              <a:defRPr sz="1400">
+              <a:defRPr sz="1600">
                 <a:solidFill>
                   <a:schemeClr val="tx1">
                     <a:tint val="75000"/>
@@ -988,7 +2156,7 @@
             </a:lvl4pPr>
             <a:lvl5pPr marL="1828800" indent="0">
               <a:buNone/>
-              <a:defRPr sz="1400">
+              <a:defRPr sz="1600">
                 <a:solidFill>
                   <a:schemeClr val="tx1">
                     <a:tint val="75000"/>
@@ -998,7 +2166,7 @@
             </a:lvl5pPr>
             <a:lvl6pPr marL="2286000" indent="0">
               <a:buNone/>
-              <a:defRPr sz="1400">
+              <a:defRPr sz="1600">
                 <a:solidFill>
                   <a:schemeClr val="tx1">
                     <a:tint val="75000"/>
@@ -1008,7 +2176,7 @@
             </a:lvl6pPr>
             <a:lvl7pPr marL="2743200" indent="0">
               <a:buNone/>
-              <a:defRPr sz="1400">
+              <a:defRPr sz="1600">
                 <a:solidFill>
                   <a:schemeClr val="tx1">
                     <a:tint val="75000"/>
@@ -1018,7 +2186,7 @@
             </a:lvl7pPr>
             <a:lvl8pPr marL="3200400" indent="0">
               <a:buNone/>
-              <a:defRPr sz="1400">
+              <a:defRPr sz="1600">
                 <a:solidFill>
                   <a:schemeClr val="tx1">
                     <a:tint val="75000"/>
@@ -1028,7 +2196,7 @@
             </a:lvl8pPr>
             <a:lvl9pPr marL="3657600" indent="0">
               <a:buNone/>
-              <a:defRPr sz="1400">
+              <a:defRPr sz="1600">
                 <a:solidFill>
                   <a:schemeClr val="tx1">
                     <a:tint val="75000"/>
@@ -1040,7 +2208,7 @@
           <a:p>
             <a:pPr lvl="0"/>
             <a:r>
-              <a:rPr lang="en-US" smtClean="0"/>
+              <a:rPr lang="en-US"/>
               <a:t>Click to edit Master text styles</a:t>
             </a:r>
           </a:p>
@@ -1048,7 +2216,13 @@
       </p:sp>
       <p:sp>
         <p:nvSpPr>
-          <p:cNvPr id="4" name="Date Placeholder 3"/>
+          <p:cNvPr id="4" name="Date Placeholder 3">
+            <a:extLst>
+              <a:ext uri="{FF2B5EF4-FFF2-40B4-BE49-F238E27FC236}">
+                <a16:creationId xmlns:a16="http://schemas.microsoft.com/office/drawing/2014/main" id="{46F4B32B-8524-56DC-E383-3BE74365E99A}"/>
+              </a:ext>
+            </a:extLst>
+          </p:cNvPr>
           <p:cNvSpPr>
             <a:spLocks noGrp="1"/>
           </p:cNvSpPr>
@@ -1061,17 +2235,23 @@
           <a:bodyPr/>
           <a:lstStyle/>
           <a:p>
-            <a:fld id="{5BCAD085-E8A6-8845-BD4E-CB4CCA059FC4}" type="datetimeFigureOut">
-              <a:rPr lang="en-US" smtClean="0"/>
-              <a:t>1/27/13</a:t>
+            <a:fld id="{BD835E71-2212-4FEA-BE8F-2F4D357B223E}" type="datetimeFigureOut">
+              <a:rPr lang="en-IN" smtClean="0"/>
+              <a:t>09-06-2026</a:t>
             </a:fld>
-            <a:endParaRPr lang="en-US"/>
-          </a:p>
-        </p:txBody>
-      </p:sp>
-      <p:sp>
-        <p:nvSpPr>
-          <p:cNvPr id="5" name="Footer Placeholder 4"/>
+            <a:endParaRPr lang="en-IN"/>
+          </a:p>
+        </p:txBody>
+      </p:sp>
+      <p:sp>
+        <p:nvSpPr>
+          <p:cNvPr id="5" name="Footer Placeholder 4">
+            <a:extLst>
+              <a:ext uri="{FF2B5EF4-FFF2-40B4-BE49-F238E27FC236}">
+                <a16:creationId xmlns:a16="http://schemas.microsoft.com/office/drawing/2014/main" id="{D561E89F-FD93-F97F-750C-F25A71AC9E34}"/>
+              </a:ext>
+            </a:extLst>
+          </p:cNvPr>
           <p:cNvSpPr>
             <a:spLocks noGrp="1"/>
           </p:cNvSpPr>
@@ -1084,13 +2264,19 @@
           <a:bodyPr/>
           <a:lstStyle/>
           <a:p>
-            <a:endParaRPr lang="en-US"/>
-          </a:p>
-        </p:txBody>
-      </p:sp>
-      <p:sp>
-        <p:nvSpPr>
-          <p:cNvPr id="6" name="Slide Number Placeholder 5"/>
+            <a:endParaRPr lang="en-IN"/>
+          </a:p>
+        </p:txBody>
+      </p:sp>
+      <p:sp>
+        <p:nvSpPr>
+          <p:cNvPr id="6" name="Slide Number Placeholder 5">
+            <a:extLst>
+              <a:ext uri="{FF2B5EF4-FFF2-40B4-BE49-F238E27FC236}">
+                <a16:creationId xmlns:a16="http://schemas.microsoft.com/office/drawing/2014/main" id="{5D8F20F0-B268-0D9F-3611-97CCB1448C3F}"/>
+              </a:ext>
+            </a:extLst>
+          </p:cNvPr>
           <p:cNvSpPr>
             <a:spLocks noGrp="1"/>
           </p:cNvSpPr>
@@ -1103,18 +2289,18 @@
           <a:bodyPr/>
           <a:lstStyle/>
           <a:p>
-            <a:fld id="{C1FF6DA9-008F-8B48-92A6-B652298478BF}" type="slidenum">
-              <a:rPr lang="en-US" smtClean="0"/>
+            <a:fld id="{A517286A-0854-47BE-AEC8-6C8157BD39BE}" type="slidenum">
+              <a:rPr lang="en-IN" smtClean="0"/>
               <a:t>‹#›</a:t>
             </a:fld>
-            <a:endParaRPr lang="en-US"/>
+            <a:endParaRPr lang="en-IN"/>
           </a:p>
         </p:txBody>
       </p:sp>
     </p:spTree>
     <p:extLst>
       <p:ext uri="{BB962C8B-B14F-4D97-AF65-F5344CB8AC3E}">
-        <p14:creationId xmlns:p14="http://schemas.microsoft.com/office/powerpoint/2010/main" val="960648375"/>
+        <p14:creationId xmlns:p14="http://schemas.microsoft.com/office/powerpoint/2010/main" val="1184513242"/>
       </p:ext>
     </p:extLst>
   </p:cSld>
@@ -1143,7 +2329,13 @@
       </p:grpSpPr>
       <p:sp>
         <p:nvSpPr>
-          <p:cNvPr id="2" name="Title 1"/>
+          <p:cNvPr id="2" name="Title 1">
+            <a:extLst>
+              <a:ext uri="{FF2B5EF4-FFF2-40B4-BE49-F238E27FC236}">
+                <a16:creationId xmlns:a16="http://schemas.microsoft.com/office/drawing/2014/main" id="{E9726104-EB8E-905C-25BF-7E6E2B020500}"/>
+              </a:ext>
+            </a:extLst>
+          </p:cNvPr>
           <p:cNvSpPr>
             <a:spLocks noGrp="1"/>
           </p:cNvSpPr>
@@ -1157,16 +2349,22 @@
           <a:lstStyle/>
           <a:p>
             <a:r>
-              <a:rPr lang="en-US" smtClean="0"/>
+              <a:rPr lang="en-US"/>
               <a:t>Click to edit Master title style</a:t>
             </a:r>
-            <a:endParaRPr lang="en-US"/>
-          </a:p>
-        </p:txBody>
-      </p:sp>
-      <p:sp>
-        <p:nvSpPr>
-          <p:cNvPr id="3" name="Content Placeholder 2"/>
+            <a:endParaRPr lang="en-IN"/>
+          </a:p>
+        </p:txBody>
+      </p:sp>
+      <p:sp>
+        <p:nvSpPr>
+          <p:cNvPr id="3" name="Content Placeholder 2">
+            <a:extLst>
+              <a:ext uri="{FF2B5EF4-FFF2-40B4-BE49-F238E27FC236}">
+                <a16:creationId xmlns:a16="http://schemas.microsoft.com/office/drawing/2014/main" id="{00D9ECFE-E8A1-4D6B-4FAA-6B5CA0A26A5F}"/>
+              </a:ext>
+            </a:extLst>
+          </p:cNvPr>
           <p:cNvSpPr>
             <a:spLocks noGrp="1"/>
           </p:cNvSpPr>
@@ -1176,82 +2374,60 @@
         </p:nvSpPr>
         <p:spPr>
           <a:xfrm>
-            <a:off x="457200" y="1600200"/>
-            <a:ext cx="4038600" cy="4525963"/>
+            <a:off x="838200" y="1825625"/>
+            <a:ext cx="5181600" cy="4351338"/>
           </a:xfrm>
         </p:spPr>
         <p:txBody>
           <a:bodyPr/>
-          <a:lstStyle>
-            <a:lvl1pPr>
-              <a:defRPr sz="2800"/>
-            </a:lvl1pPr>
-            <a:lvl2pPr>
-              <a:defRPr sz="2400"/>
-            </a:lvl2pPr>
-            <a:lvl3pPr>
-              <a:defRPr sz="2000"/>
-            </a:lvl3pPr>
-            <a:lvl4pPr>
-              <a:defRPr sz="1800"/>
-            </a:lvl4pPr>
-            <a:lvl5pPr>
-              <a:defRPr sz="1800"/>
-            </a:lvl5pPr>
-            <a:lvl6pPr>
-              <a:defRPr sz="1800"/>
-            </a:lvl6pPr>
-            <a:lvl7pPr>
-              <a:defRPr sz="1800"/>
-            </a:lvl7pPr>
-            <a:lvl8pPr>
-              <a:defRPr sz="1800"/>
-            </a:lvl8pPr>
-            <a:lvl9pPr>
-              <a:defRPr sz="1800"/>
-            </a:lvl9pPr>
-          </a:lstStyle>
+          <a:lstStyle/>
           <a:p>
             <a:pPr lvl="0"/>
             <a:r>
-              <a:rPr lang="en-US" smtClean="0"/>
+              <a:rPr lang="en-US"/>
               <a:t>Click to edit Master text styles</a:t>
             </a:r>
           </a:p>
           <a:p>
             <a:pPr lvl="1"/>
             <a:r>
-              <a:rPr lang="en-US" smtClean="0"/>
+              <a:rPr lang="en-US"/>
               <a:t>Second level</a:t>
             </a:r>
           </a:p>
           <a:p>
             <a:pPr lvl="2"/>
             <a:r>
-              <a:rPr lang="en-US" smtClean="0"/>
+              <a:rPr lang="en-US"/>
               <a:t>Third level</a:t>
             </a:r>
           </a:p>
           <a:p>
             <a:pPr lvl="3"/>
             <a:r>
-              <a:rPr lang="en-US" smtClean="0"/>
+              <a:rPr lang="en-US"/>
               <a:t>Fourth level</a:t>
             </a:r>
           </a:p>
           <a:p>
             <a:pPr lvl="4"/>
             <a:r>
-              <a:rPr lang="en-US" smtClean="0"/>
+              <a:rPr lang="en-US"/>
               <a:t>Fifth level</a:t>
             </a:r>
-            <a:endParaRPr lang="en-US"/>
-          </a:p>
-        </p:txBody>
-      </p:sp>
-      <p:sp>
-        <p:nvSpPr>
-          <p:cNvPr id="4" name="Content Placeholder 3"/>
+            <a:endParaRPr lang="en-IN"/>
+          </a:p>
+        </p:txBody>
+      </p:sp>
+      <p:sp>
+        <p:nvSpPr>
+          <p:cNvPr id="4" name="Content Placeholder 3">
+            <a:extLst>
+              <a:ext uri="{FF2B5EF4-FFF2-40B4-BE49-F238E27FC236}">
+                <a16:creationId xmlns:a16="http://schemas.microsoft.com/office/drawing/2014/main" id="{93D43AEF-1B94-0721-7D2E-6B53F9A1A38E}"/>
+              </a:ext>
+            </a:extLst>
+          </p:cNvPr>
           <p:cNvSpPr>
             <a:spLocks noGrp="1"/>
           </p:cNvSpPr>
@@ -1261,82 +2437,60 @@
         </p:nvSpPr>
         <p:spPr>
           <a:xfrm>
-            <a:off x="4648200" y="1600200"/>
-            <a:ext cx="4038600" cy="4525963"/>
+            <a:off x="6172200" y="1825625"/>
+            <a:ext cx="5181600" cy="4351338"/>
           </a:xfrm>
         </p:spPr>
         <p:txBody>
           <a:bodyPr/>
-          <a:lstStyle>
-            <a:lvl1pPr>
-              <a:defRPr sz="2800"/>
-            </a:lvl1pPr>
-            <a:lvl2pPr>
-              <a:defRPr sz="2400"/>
-            </a:lvl2pPr>
-            <a:lvl3pPr>
-              <a:defRPr sz="2000"/>
-            </a:lvl3pPr>
-            <a:lvl4pPr>
-              <a:defRPr sz="1800"/>
-            </a:lvl4pPr>
-            <a:lvl5pPr>
-              <a:defRPr sz="1800"/>
-            </a:lvl5pPr>
-            <a:lvl6pPr>
-              <a:defRPr sz="1800"/>
-            </a:lvl6pPr>
-            <a:lvl7pPr>
-              <a:defRPr sz="1800"/>
-            </a:lvl7pPr>
-            <a:lvl8pPr>
-              <a:defRPr sz="1800"/>
-            </a:lvl8pPr>
-            <a:lvl9pPr>
-              <a:defRPr sz="1800"/>
-            </a:lvl9pPr>
-          </a:lstStyle>
+          <a:lstStyle/>
           <a:p>
             <a:pPr lvl="0"/>
             <a:r>
-              <a:rPr lang="en-US" smtClean="0"/>
+              <a:rPr lang="en-US"/>
               <a:t>Click to edit Master text styles</a:t>
             </a:r>
           </a:p>
           <a:p>
             <a:pPr lvl="1"/>
             <a:r>
-              <a:rPr lang="en-US" smtClean="0"/>
+              <a:rPr lang="en-US"/>
               <a:t>Second level</a:t>
             </a:r>
           </a:p>
           <a:p>
             <a:pPr lvl="2"/>
             <a:r>
-              <a:rPr lang="en-US" smtClean="0"/>
+              <a:rPr lang="en-US"/>
               <a:t>Third level</a:t>
             </a:r>
           </a:p>
           <a:p>
             <a:pPr lvl="3"/>
             <a:r>
-              <a:rPr lang="en-US" smtClean="0"/>
+              <a:rPr lang="en-US"/>
               <a:t>Fourth level</a:t>
             </a:r>
           </a:p>
           <a:p>
             <a:pPr lvl="4"/>
             <a:r>
-              <a:rPr lang="en-US" smtClean="0"/>
+              <a:rPr lang="en-US"/>
               <a:t>Fifth level</a:t>
             </a:r>
-            <a:endParaRPr lang="en-US"/>
-          </a:p>
-        </p:txBody>
-      </p:sp>
-      <p:sp>
-        <p:nvSpPr>
-          <p:cNvPr id="5" name="Date Placeholder 4"/>
+            <a:endParaRPr lang="en-IN"/>
+          </a:p>
+        </p:txBody>
+      </p:sp>
+      <p:sp>
+        <p:nvSpPr>
+          <p:cNvPr id="5" name="Date Placeholder 4">
+            <a:extLst>
+              <a:ext uri="{FF2B5EF4-FFF2-40B4-BE49-F238E27FC236}">
+                <a16:creationId xmlns:a16="http://schemas.microsoft.com/office/drawing/2014/main" id="{6669D85A-90BE-4B76-D852-F2EFF699742C}"/>
+              </a:ext>
+            </a:extLst>
+          </p:cNvPr>
           <p:cNvSpPr>
             <a:spLocks noGrp="1"/>
           </p:cNvSpPr>
@@ -1349,17 +2503,23 @@
           <a:bodyPr/>
           <a:lstStyle/>
           <a:p>
-            <a:fld id="{5BCAD085-E8A6-8845-BD4E-CB4CCA059FC4}" type="datetimeFigureOut">
-              <a:rPr lang="en-US" smtClean="0"/>
-              <a:t>1/27/13</a:t>
+            <a:fld id="{BD835E71-2212-4FEA-BE8F-2F4D357B223E}" type="datetimeFigureOut">
+              <a:rPr lang="en-IN" smtClean="0"/>
+              <a:t>09-06-2026</a:t>
             </a:fld>
-            <a:endParaRPr lang="en-US"/>
-          </a:p>
-        </p:txBody>
-      </p:sp>
-      <p:sp>
-        <p:nvSpPr>
-          <p:cNvPr id="6" name="Footer Placeholder 5"/>
+            <a:endParaRPr lang="en-IN"/>
+          </a:p>
+        </p:txBody>
+      </p:sp>
+      <p:sp>
+        <p:nvSpPr>
+          <p:cNvPr id="6" name="Footer Placeholder 5">
+            <a:extLst>
+              <a:ext uri="{FF2B5EF4-FFF2-40B4-BE49-F238E27FC236}">
+                <a16:creationId xmlns:a16="http://schemas.microsoft.com/office/drawing/2014/main" id="{21B9C98E-7309-F89E-8211-AA3423262529}"/>
+              </a:ext>
+            </a:extLst>
+          </p:cNvPr>
           <p:cNvSpPr>
             <a:spLocks noGrp="1"/>
           </p:cNvSpPr>
@@ -1372,13 +2532,19 @@
           <a:bodyPr/>
           <a:lstStyle/>
           <a:p>
-            <a:endParaRPr lang="en-US"/>
-          </a:p>
-        </p:txBody>
-      </p:sp>
-      <p:sp>
-        <p:nvSpPr>
-          <p:cNvPr id="7" name="Slide Number Placeholder 6"/>
+            <a:endParaRPr lang="en-IN"/>
+          </a:p>
+        </p:txBody>
+      </p:sp>
+      <p:sp>
+        <p:nvSpPr>
+          <p:cNvPr id="7" name="Slide Number Placeholder 6">
+            <a:extLst>
+              <a:ext uri="{FF2B5EF4-FFF2-40B4-BE49-F238E27FC236}">
+                <a16:creationId xmlns:a16="http://schemas.microsoft.com/office/drawing/2014/main" id="{0EEBFFBA-1607-C7C2-0BCA-D3F2FBF4DF8E}"/>
+              </a:ext>
+            </a:extLst>
+          </p:cNvPr>
           <p:cNvSpPr>
             <a:spLocks noGrp="1"/>
           </p:cNvSpPr>
@@ -1391,18 +2557,18 @@
           <a:bodyPr/>
           <a:lstStyle/>
           <a:p>
-            <a:fld id="{C1FF6DA9-008F-8B48-92A6-B652298478BF}" type="slidenum">
-              <a:rPr lang="en-US" smtClean="0"/>
+            <a:fld id="{A517286A-0854-47BE-AEC8-6C8157BD39BE}" type="slidenum">
+              <a:rPr lang="en-IN" smtClean="0"/>
               <a:t>‹#›</a:t>
             </a:fld>
-            <a:endParaRPr lang="en-US"/>
+            <a:endParaRPr lang="en-IN"/>
           </a:p>
         </p:txBody>
       </p:sp>
     </p:spTree>
     <p:extLst>
       <p:ext uri="{BB962C8B-B14F-4D97-AF65-F5344CB8AC3E}">
-        <p14:creationId xmlns:p14="http://schemas.microsoft.com/office/powerpoint/2010/main" val="2782244947"/>
+        <p14:creationId xmlns:p14="http://schemas.microsoft.com/office/powerpoint/2010/main" val="3661368759"/>
       </p:ext>
     </p:extLst>
   </p:cSld>
@@ -1431,7 +2597,13 @@
       </p:grpSpPr>
       <p:sp>
         <p:nvSpPr>
-          <p:cNvPr id="2" name="Title 1"/>
+          <p:cNvPr id="2" name="Title 1">
+            <a:extLst>
+              <a:ext uri="{FF2B5EF4-FFF2-40B4-BE49-F238E27FC236}">
+                <a16:creationId xmlns:a16="http://schemas.microsoft.com/office/drawing/2014/main" id="{BEC4F0FC-58BB-1A99-94A1-375AC67E954A}"/>
+              </a:ext>
+            </a:extLst>
+          </p:cNvPr>
           <p:cNvSpPr>
             <a:spLocks noGrp="1"/>
           </p:cNvSpPr>
@@ -1439,26 +2611,33 @@
             <p:ph type="title"/>
           </p:nvPr>
         </p:nvSpPr>
-        <p:spPr/>
+        <p:spPr>
+          <a:xfrm>
+            <a:off x="839788" y="365125"/>
+            <a:ext cx="10515600" cy="1325563"/>
+          </a:xfrm>
+        </p:spPr>
         <p:txBody>
           <a:bodyPr/>
-          <a:lstStyle>
-            <a:lvl1pPr>
-              <a:defRPr/>
-            </a:lvl1pPr>
-          </a:lstStyle>
-          <a:p>
-            <a:r>
-              <a:rPr lang="en-US" smtClean="0"/>
+          <a:lstStyle/>
+          <a:p>
+            <a:r>
+              <a:rPr lang="en-US"/>
               <a:t>Click to edit Master title style</a:t>
             </a:r>
-            <a:endParaRPr lang="en-US"/>
-          </a:p>
-        </p:txBody>
-      </p:sp>
-      <p:sp>
-        <p:nvSpPr>
-          <p:cNvPr id="3" name="Text Placeholder 2"/>
+            <a:endParaRPr lang="en-IN"/>
+          </a:p>
+        </p:txBody>
+      </p:sp>
+      <p:sp>
+        <p:nvSpPr>
+          <p:cNvPr id="3" name="Text Placeholder 2">
+            <a:extLst>
+              <a:ext uri="{FF2B5EF4-FFF2-40B4-BE49-F238E27FC236}">
+                <a16:creationId xmlns:a16="http://schemas.microsoft.com/office/drawing/2014/main" id="{7D7F9B40-1D41-B5AA-83FC-1DCD7616C9EF}"/>
+              </a:ext>
+            </a:extLst>
+          </p:cNvPr>
           <p:cNvSpPr>
             <a:spLocks noGrp="1"/>
           </p:cNvSpPr>
@@ -1468,8 +2647,8 @@
         </p:nvSpPr>
         <p:spPr>
           <a:xfrm>
-            <a:off x="457200" y="1535113"/>
-            <a:ext cx="4040188" cy="639762"/>
+            <a:off x="839788" y="1681163"/>
+            <a:ext cx="5157787" cy="823912"/>
           </a:xfrm>
         </p:spPr>
         <p:txBody>
@@ -1515,7 +2694,7 @@
           <a:p>
             <a:pPr lvl="0"/>
             <a:r>
-              <a:rPr lang="en-US" smtClean="0"/>
+              <a:rPr lang="en-US"/>
               <a:t>Click to edit Master text styles</a:t>
             </a:r>
           </a:p>
@@ -1523,7 +2702,13 @@
       </p:sp>
       <p:sp>
         <p:nvSpPr>
-          <p:cNvPr id="4" name="Content Placeholder 3"/>
+          <p:cNvPr id="4" name="Content Placeholder 3">
+            <a:extLst>
+              <a:ext uri="{FF2B5EF4-FFF2-40B4-BE49-F238E27FC236}">
+                <a16:creationId xmlns:a16="http://schemas.microsoft.com/office/drawing/2014/main" id="{4677B1AA-28F5-AD9B-AACD-51F7C8E7D242}"/>
+              </a:ext>
+            </a:extLst>
+          </p:cNvPr>
           <p:cNvSpPr>
             <a:spLocks noGrp="1"/>
           </p:cNvSpPr>
@@ -1533,82 +2718,60 @@
         </p:nvSpPr>
         <p:spPr>
           <a:xfrm>
-            <a:off x="457200" y="2174875"/>
-            <a:ext cx="4040188" cy="3951288"/>
+            <a:off x="839788" y="2505075"/>
+            <a:ext cx="5157787" cy="3684588"/>
           </a:xfrm>
         </p:spPr>
         <p:txBody>
           <a:bodyPr/>
-          <a:lstStyle>
-            <a:lvl1pPr>
-              <a:defRPr sz="2400"/>
-            </a:lvl1pPr>
-            <a:lvl2pPr>
-              <a:defRPr sz="2000"/>
-            </a:lvl2pPr>
-            <a:lvl3pPr>
-              <a:defRPr sz="1800"/>
-            </a:lvl3pPr>
-            <a:lvl4pPr>
-              <a:defRPr sz="1600"/>
-            </a:lvl4pPr>
-            <a:lvl5pPr>
-              <a:defRPr sz="1600"/>
-            </a:lvl5pPr>
-            <a:lvl6pPr>
-              <a:defRPr sz="1600"/>
-            </a:lvl6pPr>
-            <a:lvl7pPr>
-              <a:defRPr sz="1600"/>
-            </a:lvl7pPr>
-            <a:lvl8pPr>
-              <a:defRPr sz="1600"/>
-            </a:lvl8pPr>
-            <a:lvl9pPr>
-              <a:defRPr sz="1600"/>
-            </a:lvl9pPr>
-          </a:lstStyle>
+          <a:lstStyle/>
           <a:p>
             <a:pPr lvl="0"/>
             <a:r>
-              <a:rPr lang="en-US" smtClean="0"/>
+              <a:rPr lang="en-US"/>
               <a:t>Click to edit Master text styles</a:t>
             </a:r>
           </a:p>
           <a:p>
             <a:pPr lvl="1"/>
             <a:r>
-              <a:rPr lang="en-US" smtClean="0"/>
+              <a:rPr lang="en-US"/>
               <a:t>Second level</a:t>
             </a:r>
           </a:p>
           <a:p>
             <a:pPr lvl="2"/>
             <a:r>
-              <a:rPr lang="en-US" smtClean="0"/>
+              <a:rPr lang="en-US"/>
               <a:t>Third level</a:t>
             </a:r>
           </a:p>
           <a:p>
             <a:pPr lvl="3"/>
             <a:r>
-              <a:rPr lang="en-US" smtClean="0"/>
+              <a:rPr lang="en-US"/>
               <a:t>Fourth level</a:t>
             </a:r>
           </a:p>
           <a:p>
             <a:pPr lvl="4"/>
             <a:r>
-              <a:rPr lang="en-US" smtClean="0"/>
+              <a:rPr lang="en-US"/>
               <a:t>Fifth level</a:t>
             </a:r>
-            <a:endParaRPr lang="en-US"/>
-          </a:p>
-        </p:txBody>
-      </p:sp>
-      <p:sp>
-        <p:nvSpPr>
-          <p:cNvPr id="5" name="Text Placeholder 4"/>
+            <a:endParaRPr lang="en-IN"/>
+          </a:p>
+        </p:txBody>
+      </p:sp>
+      <p:sp>
+        <p:nvSpPr>
+          <p:cNvPr id="5" name="Text Placeholder 4">
+            <a:extLst>
+              <a:ext uri="{FF2B5EF4-FFF2-40B4-BE49-F238E27FC236}">
+                <a16:creationId xmlns:a16="http://schemas.microsoft.com/office/drawing/2014/main" id="{D5757B81-96F7-2831-CAB9-525C5584B24D}"/>
+              </a:ext>
+            </a:extLst>
+          </p:cNvPr>
           <p:cNvSpPr>
             <a:spLocks noGrp="1"/>
           </p:cNvSpPr>
@@ -1618,8 +2781,8 @@
         </p:nvSpPr>
         <p:spPr>
           <a:xfrm>
-            <a:off x="4645025" y="1535113"/>
-            <a:ext cx="4041775" cy="639762"/>
+            <a:off x="6172200" y="1681163"/>
+            <a:ext cx="5183188" cy="823912"/>
           </a:xfrm>
         </p:spPr>
         <p:txBody>
@@ -1665,7 +2828,7 @@
           <a:p>
             <a:pPr lvl="0"/>
             <a:r>
-              <a:rPr lang="en-US" smtClean="0"/>
+              <a:rPr lang="en-US"/>
               <a:t>Click to edit Master text styles</a:t>
             </a:r>
           </a:p>
@@ -1673,7 +2836,13 @@
       </p:sp>
       <p:sp>
         <p:nvSpPr>
-          <p:cNvPr id="6" name="Content Placeholder 5"/>
+          <p:cNvPr id="6" name="Content Placeholder 5">
+            <a:extLst>
+              <a:ext uri="{FF2B5EF4-FFF2-40B4-BE49-F238E27FC236}">
+                <a16:creationId xmlns:a16="http://schemas.microsoft.com/office/drawing/2014/main" id="{AD4F43D8-EA4F-BCD8-6153-381805963CDC}"/>
+              </a:ext>
+            </a:extLst>
+          </p:cNvPr>
           <p:cNvSpPr>
             <a:spLocks noGrp="1"/>
           </p:cNvSpPr>
@@ -1683,82 +2852,60 @@
         </p:nvSpPr>
         <p:spPr>
           <a:xfrm>
-            <a:off x="4645025" y="2174875"/>
-            <a:ext cx="4041775" cy="3951288"/>
+            <a:off x="6172200" y="2505075"/>
+            <a:ext cx="5183188" cy="3684588"/>
           </a:xfrm>
         </p:spPr>
         <p:txBody>
           <a:bodyPr/>
-          <a:lstStyle>
-            <a:lvl1pPr>
-              <a:defRPr sz="2400"/>
-            </a:lvl1pPr>
-            <a:lvl2pPr>
-              <a:defRPr sz="2000"/>
-            </a:lvl2pPr>
-            <a:lvl3pPr>
-              <a:defRPr sz="1800"/>
-            </a:lvl3pPr>
-            <a:lvl4pPr>
-              <a:defRPr sz="1600"/>
-            </a:lvl4pPr>
-            <a:lvl5pPr>
-              <a:defRPr sz="1600"/>
-            </a:lvl5pPr>
-            <a:lvl6pPr>
-              <a:defRPr sz="1600"/>
-            </a:lvl6pPr>
-            <a:lvl7pPr>
-              <a:defRPr sz="1600"/>
-            </a:lvl7pPr>
-            <a:lvl8pPr>
-              <a:defRPr sz="1600"/>
-            </a:lvl8pPr>
-            <a:lvl9pPr>
-              <a:defRPr sz="1600"/>
-            </a:lvl9pPr>
-          </a:lstStyle>
+          <a:lstStyle/>
           <a:p>
             <a:pPr lvl="0"/>
             <a:r>
-              <a:rPr lang="en-US" smtClean="0"/>
+              <a:rPr lang="en-US"/>
               <a:t>Click to edit Master text styles</a:t>
             </a:r>
           </a:p>
           <a:p>
             <a:pPr lvl="1"/>
             <a:r>
-              <a:rPr lang="en-US" smtClean="0"/>
+              <a:rPr lang="en-US"/>
               <a:t>Second level</a:t>
             </a:r>
           </a:p>
           <a:p>
             <a:pPr lvl="2"/>
             <a:r>
-              <a:rPr lang="en-US" smtClean="0"/>
+              <a:rPr lang="en-US"/>
               <a:t>Third level</a:t>
             </a:r>
           </a:p>
           <a:p>
             <a:pPr lvl="3"/>
             <a:r>
-              <a:rPr lang="en-US" smtClean="0"/>
+              <a:rPr lang="en-US"/>
               <a:t>Fourth level</a:t>
             </a:r>
           </a:p>
           <a:p>
             <a:pPr lvl="4"/>
             <a:r>
-              <a:rPr lang="en-US" smtClean="0"/>
+              <a:rPr lang="en-US"/>
               <a:t>Fifth level</a:t>
             </a:r>
-            <a:endParaRPr lang="en-US"/>
-          </a:p>
-        </p:txBody>
-      </p:sp>
-      <p:sp>
-        <p:nvSpPr>
-          <p:cNvPr id="7" name="Date Placeholder 6"/>
+            <a:endParaRPr lang="en-IN"/>
+          </a:p>
+        </p:txBody>
+      </p:sp>
+      <p:sp>
+        <p:nvSpPr>
+          <p:cNvPr id="7" name="Date Placeholder 6">
+            <a:extLst>
+              <a:ext uri="{FF2B5EF4-FFF2-40B4-BE49-F238E27FC236}">
+                <a16:creationId xmlns:a16="http://schemas.microsoft.com/office/drawing/2014/main" id="{99BD20B9-FA05-6BB0-8A72-790E0B8B79C0}"/>
+              </a:ext>
+            </a:extLst>
+          </p:cNvPr>
           <p:cNvSpPr>
             <a:spLocks noGrp="1"/>
           </p:cNvSpPr>
@@ -1771,17 +2918,23 @@
           <a:bodyPr/>
           <a:lstStyle/>
           <a:p>
-            <a:fld id="{5BCAD085-E8A6-8845-BD4E-CB4CCA059FC4}" type="datetimeFigureOut">
-              <a:rPr lang="en-US" smtClean="0"/>
-              <a:t>1/27/13</a:t>
+            <a:fld id="{BD835E71-2212-4FEA-BE8F-2F4D357B223E}" type="datetimeFigureOut">
+              <a:rPr lang="en-IN" smtClean="0"/>
+              <a:t>09-06-2026</a:t>
             </a:fld>
-            <a:endParaRPr lang="en-US"/>
-          </a:p>
-        </p:txBody>
-      </p:sp>
-      <p:sp>
-        <p:nvSpPr>
-          <p:cNvPr id="8" name="Footer Placeholder 7"/>
+            <a:endParaRPr lang="en-IN"/>
+          </a:p>
+        </p:txBody>
+      </p:sp>
+      <p:sp>
+        <p:nvSpPr>
+          <p:cNvPr id="8" name="Footer Placeholder 7">
+            <a:extLst>
+              <a:ext uri="{FF2B5EF4-FFF2-40B4-BE49-F238E27FC236}">
+                <a16:creationId xmlns:a16="http://schemas.microsoft.com/office/drawing/2014/main" id="{6B135708-F1DC-5AB1-D9F4-FD33F2F9701E}"/>
+              </a:ext>
+            </a:extLst>
+          </p:cNvPr>
           <p:cNvSpPr>
             <a:spLocks noGrp="1"/>
           </p:cNvSpPr>
@@ -1794,13 +2947,19 @@
           <a:bodyPr/>
           <a:lstStyle/>
           <a:p>
-            <a:endParaRPr lang="en-US"/>
-          </a:p>
-        </p:txBody>
-      </p:sp>
-      <p:sp>
-        <p:nvSpPr>
-          <p:cNvPr id="9" name="Slide Number Placeholder 8"/>
+            <a:endParaRPr lang="en-IN"/>
+          </a:p>
+        </p:txBody>
+      </p:sp>
+      <p:sp>
+        <p:nvSpPr>
+          <p:cNvPr id="9" name="Slide Number Placeholder 8">
+            <a:extLst>
+              <a:ext uri="{FF2B5EF4-FFF2-40B4-BE49-F238E27FC236}">
+                <a16:creationId xmlns:a16="http://schemas.microsoft.com/office/drawing/2014/main" id="{ABE88EE2-EA14-21A2-6C38-A66DB0F24EA2}"/>
+              </a:ext>
+            </a:extLst>
+          </p:cNvPr>
           <p:cNvSpPr>
             <a:spLocks noGrp="1"/>
           </p:cNvSpPr>
@@ -1813,18 +2972,18 @@
           <a:bodyPr/>
           <a:lstStyle/>
           <a:p>
-            <a:fld id="{C1FF6DA9-008F-8B48-92A6-B652298478BF}" type="slidenum">
-              <a:rPr lang="en-US" smtClean="0"/>
+            <a:fld id="{A517286A-0854-47BE-AEC8-6C8157BD39BE}" type="slidenum">
+              <a:rPr lang="en-IN" smtClean="0"/>
               <a:t>‹#›</a:t>
             </a:fld>
-            <a:endParaRPr lang="en-US"/>
+            <a:endParaRPr lang="en-IN"/>
           </a:p>
         </p:txBody>
       </p:sp>
     </p:spTree>
     <p:extLst>
       <p:ext uri="{BB962C8B-B14F-4D97-AF65-F5344CB8AC3E}">
-        <p14:creationId xmlns:p14="http://schemas.microsoft.com/office/powerpoint/2010/main" val="990158736"/>
+        <p14:creationId xmlns:p14="http://schemas.microsoft.com/office/powerpoint/2010/main" val="117355030"/>
       </p:ext>
     </p:extLst>
   </p:cSld>
@@ -1853,7 +3012,13 @@
       </p:grpSpPr>
       <p:sp>
         <p:nvSpPr>
-          <p:cNvPr id="2" name="Title 1"/>
+          <p:cNvPr id="2" name="Title 1">
+            <a:extLst>
+              <a:ext uri="{FF2B5EF4-FFF2-40B4-BE49-F238E27FC236}">
+                <a16:creationId xmlns:a16="http://schemas.microsoft.com/office/drawing/2014/main" id="{3516BD2A-FCC8-04E8-7572-5F111375BFF2}"/>
+              </a:ext>
+            </a:extLst>
+          </p:cNvPr>
           <p:cNvSpPr>
             <a:spLocks noGrp="1"/>
           </p:cNvSpPr>
@@ -1867,16 +3032,22 @@
           <a:lstStyle/>
           <a:p>
             <a:r>
-              <a:rPr lang="en-US" smtClean="0"/>
+              <a:rPr lang="en-US"/>
               <a:t>Click to edit Master title style</a:t>
             </a:r>
-            <a:endParaRPr lang="en-US"/>
-          </a:p>
-        </p:txBody>
-      </p:sp>
-      <p:sp>
-        <p:nvSpPr>
-          <p:cNvPr id="3" name="Date Placeholder 2"/>
+            <a:endParaRPr lang="en-IN"/>
+          </a:p>
+        </p:txBody>
+      </p:sp>
+      <p:sp>
+        <p:nvSpPr>
+          <p:cNvPr id="3" name="Date Placeholder 2">
+            <a:extLst>
+              <a:ext uri="{FF2B5EF4-FFF2-40B4-BE49-F238E27FC236}">
+                <a16:creationId xmlns:a16="http://schemas.microsoft.com/office/drawing/2014/main" id="{DF299E6E-614D-879A-54F5-97C2B8C4D90D}"/>
+              </a:ext>
+            </a:extLst>
+          </p:cNvPr>
           <p:cNvSpPr>
             <a:spLocks noGrp="1"/>
           </p:cNvSpPr>
@@ -1889,17 +3060,23 @@
           <a:bodyPr/>
           <a:lstStyle/>
           <a:p>
-            <a:fld id="{5BCAD085-E8A6-8845-BD4E-CB4CCA059FC4}" type="datetimeFigureOut">
-              <a:rPr lang="en-US" smtClean="0"/>
-              <a:t>1/27/13</a:t>
+            <a:fld id="{BD835E71-2212-4FEA-BE8F-2F4D357B223E}" type="datetimeFigureOut">
+              <a:rPr lang="en-IN" smtClean="0"/>
+              <a:t>09-06-2026</a:t>
             </a:fld>
-            <a:endParaRPr lang="en-US"/>
-          </a:p>
-        </p:txBody>
-      </p:sp>
-      <p:sp>
-        <p:nvSpPr>
-          <p:cNvPr id="4" name="Footer Placeholder 3"/>
+            <a:endParaRPr lang="en-IN"/>
+          </a:p>
+        </p:txBody>
+      </p:sp>
+      <p:sp>
+        <p:nvSpPr>
+          <p:cNvPr id="4" name="Footer Placeholder 3">
+            <a:extLst>
+              <a:ext uri="{FF2B5EF4-FFF2-40B4-BE49-F238E27FC236}">
+                <a16:creationId xmlns:a16="http://schemas.microsoft.com/office/drawing/2014/main" id="{79DE4A04-EE77-4319-ADDA-4A1CE61D7438}"/>
+              </a:ext>
+            </a:extLst>
+          </p:cNvPr>
           <p:cNvSpPr>
             <a:spLocks noGrp="1"/>
           </p:cNvSpPr>
@@ -1912,13 +3089,19 @@
           <a:bodyPr/>
           <a:lstStyle/>
           <a:p>
-            <a:endParaRPr lang="en-US"/>
-          </a:p>
-        </p:txBody>
-      </p:sp>
-      <p:sp>
-        <p:nvSpPr>
-          <p:cNvPr id="5" name="Slide Number Placeholder 4"/>
+            <a:endParaRPr lang="en-IN"/>
+          </a:p>
+        </p:txBody>
+      </p:sp>
+      <p:sp>
+        <p:nvSpPr>
+          <p:cNvPr id="5" name="Slide Number Placeholder 4">
+            <a:extLst>
+              <a:ext uri="{FF2B5EF4-FFF2-40B4-BE49-F238E27FC236}">
+                <a16:creationId xmlns:a16="http://schemas.microsoft.com/office/drawing/2014/main" id="{B46A849D-AC12-EA01-F624-D762D550170E}"/>
+              </a:ext>
+            </a:extLst>
+          </p:cNvPr>
           <p:cNvSpPr>
             <a:spLocks noGrp="1"/>
           </p:cNvSpPr>
@@ -1931,18 +3114,18 @@
           <a:bodyPr/>
           <a:lstStyle/>
           <a:p>
-            <a:fld id="{C1FF6DA9-008F-8B48-92A6-B652298478BF}" type="slidenum">
-              <a:rPr lang="en-US" smtClean="0"/>
+            <a:fld id="{A517286A-0854-47BE-AEC8-6C8157BD39BE}" type="slidenum">
+              <a:rPr lang="en-IN" smtClean="0"/>
               <a:t>‹#›</a:t>
             </a:fld>
-            <a:endParaRPr lang="en-US"/>
+            <a:endParaRPr lang="en-IN"/>
           </a:p>
         </p:txBody>
       </p:sp>
     </p:spTree>
     <p:extLst>
       <p:ext uri="{BB962C8B-B14F-4D97-AF65-F5344CB8AC3E}">
-        <p14:creationId xmlns:p14="http://schemas.microsoft.com/office/powerpoint/2010/main" val="727027711"/>
+        <p14:creationId xmlns:p14="http://schemas.microsoft.com/office/powerpoint/2010/main" val="2936766867"/>
       </p:ext>
     </p:extLst>
   </p:cSld>
@@ -1971,7 +3154,13 @@
       </p:grpSpPr>
       <p:sp>
         <p:nvSpPr>
-          <p:cNvPr id="2" name="Date Placeholder 1"/>
+          <p:cNvPr id="2" name="Date Placeholder 1">
+            <a:extLst>
+              <a:ext uri="{FF2B5EF4-FFF2-40B4-BE49-F238E27FC236}">
+                <a16:creationId xmlns:a16="http://schemas.microsoft.com/office/drawing/2014/main" id="{861C6932-92B5-5A87-F0B9-A83208884B9D}"/>
+              </a:ext>
+            </a:extLst>
+          </p:cNvPr>
           <p:cNvSpPr>
             <a:spLocks noGrp="1"/>
           </p:cNvSpPr>
@@ -1984,17 +3173,23 @@
           <a:bodyPr/>
           <a:lstStyle/>
           <a:p>
-            <a:fld id="{5BCAD085-E8A6-8845-BD4E-CB4CCA059FC4}" type="datetimeFigureOut">
-              <a:rPr lang="en-US" smtClean="0"/>
-              <a:t>1/27/13</a:t>
+            <a:fld id="{BD835E71-2212-4FEA-BE8F-2F4D357B223E}" type="datetimeFigureOut">
+              <a:rPr lang="en-IN" smtClean="0"/>
+              <a:t>09-06-2026</a:t>
             </a:fld>
-            <a:endParaRPr lang="en-US"/>
-          </a:p>
-        </p:txBody>
-      </p:sp>
-      <p:sp>
-        <p:nvSpPr>
-          <p:cNvPr id="3" name="Footer Placeholder 2"/>
+            <a:endParaRPr lang="en-IN"/>
+          </a:p>
+        </p:txBody>
+      </p:sp>
+      <p:sp>
+        <p:nvSpPr>
+          <p:cNvPr id="3" name="Footer Placeholder 2">
+            <a:extLst>
+              <a:ext uri="{FF2B5EF4-FFF2-40B4-BE49-F238E27FC236}">
+                <a16:creationId xmlns:a16="http://schemas.microsoft.com/office/drawing/2014/main" id="{886341DD-7E19-C3F4-9196-7EBDF4D3A096}"/>
+              </a:ext>
+            </a:extLst>
+          </p:cNvPr>
           <p:cNvSpPr>
             <a:spLocks noGrp="1"/>
           </p:cNvSpPr>
@@ -2007,13 +3202,19 @@
           <a:bodyPr/>
           <a:lstStyle/>
           <a:p>
-            <a:endParaRPr lang="en-US"/>
-          </a:p>
-        </p:txBody>
-      </p:sp>
-      <p:sp>
-        <p:nvSpPr>
-          <p:cNvPr id="4" name="Slide Number Placeholder 3"/>
+            <a:endParaRPr lang="en-IN"/>
+          </a:p>
+        </p:txBody>
+      </p:sp>
+      <p:sp>
+        <p:nvSpPr>
+          <p:cNvPr id="4" name="Slide Number Placeholder 3">
+            <a:extLst>
+              <a:ext uri="{FF2B5EF4-FFF2-40B4-BE49-F238E27FC236}">
+                <a16:creationId xmlns:a16="http://schemas.microsoft.com/office/drawing/2014/main" id="{8DE905E4-8B6E-3C53-B706-F92A5CA3414F}"/>
+              </a:ext>
+            </a:extLst>
+          </p:cNvPr>
           <p:cNvSpPr>
             <a:spLocks noGrp="1"/>
           </p:cNvSpPr>
@@ -2026,18 +3227,18 @@
           <a:bodyPr/>
           <a:lstStyle/>
           <a:p>
-            <a:fld id="{C1FF6DA9-008F-8B48-92A6-B652298478BF}" type="slidenum">
-              <a:rPr lang="en-US" smtClean="0"/>
+            <a:fld id="{A517286A-0854-47BE-AEC8-6C8157BD39BE}" type="slidenum">
+              <a:rPr lang="en-IN" smtClean="0"/>
               <a:t>‹#›</a:t>
             </a:fld>
-            <a:endParaRPr lang="en-US"/>
+            <a:endParaRPr lang="en-IN"/>
           </a:p>
         </p:txBody>
       </p:sp>
     </p:spTree>
     <p:extLst>
       <p:ext uri="{BB962C8B-B14F-4D97-AF65-F5344CB8AC3E}">
-        <p14:creationId xmlns:p14="http://schemas.microsoft.com/office/powerpoint/2010/main" val="1212999818"/>
+        <p14:creationId xmlns:p14="http://schemas.microsoft.com/office/powerpoint/2010/main" val="1986722496"/>
       </p:ext>
     </p:extLst>
   </p:cSld>
@@ -2066,7 +3267,13 @@
       </p:grpSpPr>
       <p:sp>
         <p:nvSpPr>
-          <p:cNvPr id="2" name="Title 1"/>
+          <p:cNvPr id="2" name="Title 1">
+            <a:extLst>
+              <a:ext uri="{FF2B5EF4-FFF2-40B4-BE49-F238E27FC236}">
+                <a16:creationId xmlns:a16="http://schemas.microsoft.com/office/drawing/2014/main" id="{4CF93467-2BDC-A650-461D-67F0768A5AA0}"/>
+              </a:ext>
+            </a:extLst>
+          </p:cNvPr>
           <p:cNvSpPr>
             <a:spLocks noGrp="1"/>
           </p:cNvSpPr>
@@ -2076,29 +3283,35 @@
         </p:nvSpPr>
         <p:spPr>
           <a:xfrm>
-            <a:off x="457200" y="273050"/>
-            <a:ext cx="3008313" cy="1162050"/>
+            <a:off x="839788" y="457200"/>
+            <a:ext cx="3932237" cy="1600200"/>
           </a:xfrm>
         </p:spPr>
         <p:txBody>
           <a:bodyPr anchor="b"/>
           <a:lstStyle>
-            <a:lvl1pPr algn="l">
-              <a:defRPr sz="2000" b="1"/>
+            <a:lvl1pPr>
+              <a:defRPr sz="3200"/>
             </a:lvl1pPr>
           </a:lstStyle>
           <a:p>
             <a:r>
-              <a:rPr lang="en-US" smtClean="0"/>
+              <a:rPr lang="en-US"/>
               <a:t>Click to edit Master title style</a:t>
             </a:r>
-            <a:endParaRPr lang="en-US"/>
-          </a:p>
-        </p:txBody>
-      </p:sp>
-      <p:sp>
-        <p:nvSpPr>
-          <p:cNvPr id="3" name="Content Placeholder 2"/>
+            <a:endParaRPr lang="en-IN"/>
+          </a:p>
+        </p:txBody>
+      </p:sp>
+      <p:sp>
+        <p:nvSpPr>
+          <p:cNvPr id="3" name="Content Placeholder 2">
+            <a:extLst>
+              <a:ext uri="{FF2B5EF4-FFF2-40B4-BE49-F238E27FC236}">
+                <a16:creationId xmlns:a16="http://schemas.microsoft.com/office/drawing/2014/main" id="{3A076F8D-0620-B261-1711-B1019A554C5A}"/>
+              </a:ext>
+            </a:extLst>
+          </p:cNvPr>
           <p:cNvSpPr>
             <a:spLocks noGrp="1"/>
           </p:cNvSpPr>
@@ -2108,8 +3321,8 @@
         </p:nvSpPr>
         <p:spPr>
           <a:xfrm>
-            <a:off x="3575050" y="273050"/>
-            <a:ext cx="5111750" cy="5853113"/>
+            <a:off x="5183188" y="987425"/>
+            <a:ext cx="6172200" cy="4873625"/>
           </a:xfrm>
         </p:spPr>
         <p:txBody>
@@ -2146,44 +3359,50 @@
           <a:p>
             <a:pPr lvl="0"/>
             <a:r>
-              <a:rPr lang="en-US" smtClean="0"/>
+              <a:rPr lang="en-US"/>
               <a:t>Click to edit Master text styles</a:t>
             </a:r>
           </a:p>
           <a:p>
             <a:pPr lvl="1"/>
             <a:r>
-              <a:rPr lang="en-US" smtClean="0"/>
+              <a:rPr lang="en-US"/>
               <a:t>Second level</a:t>
             </a:r>
           </a:p>
           <a:p>
             <a:pPr lvl="2"/>
             <a:r>
-              <a:rPr lang="en-US" smtClean="0"/>
+              <a:rPr lang="en-US"/>
               <a:t>Third level</a:t>
             </a:r>
           </a:p>
           <a:p>
             <a:pPr lvl="3"/>
             <a:r>
-              <a:rPr lang="en-US" smtClean="0"/>
+              <a:rPr lang="en-US"/>
               <a:t>Fourth level</a:t>
             </a:r>
           </a:p>
           <a:p>
             <a:pPr lvl="4"/>
             <a:r>
-              <a:rPr lang="en-US" smtClean="0"/>
+              <a:rPr lang="en-US"/>
               <a:t>Fifth level</a:t>
             </a:r>
-            <a:endParaRPr lang="en-US"/>
-          </a:p>
-        </p:txBody>
-      </p:sp>
-      <p:sp>
-        <p:nvSpPr>
-          <p:cNvPr id="4" name="Text Placeholder 3"/>
+            <a:endParaRPr lang="en-IN"/>
+          </a:p>
+        </p:txBody>
+      </p:sp>
+      <p:sp>
+        <p:nvSpPr>
+          <p:cNvPr id="4" name="Text Placeholder 3">
+            <a:extLst>
+              <a:ext uri="{FF2B5EF4-FFF2-40B4-BE49-F238E27FC236}">
+                <a16:creationId xmlns:a16="http://schemas.microsoft.com/office/drawing/2014/main" id="{5DBC9378-B831-D402-3A2C-598295199BCD}"/>
+              </a:ext>
+            </a:extLst>
+          </p:cNvPr>
           <p:cNvSpPr>
             <a:spLocks noGrp="1"/>
           </p:cNvSpPr>
@@ -2193,8 +3412,8 @@
         </p:nvSpPr>
         <p:spPr>
           <a:xfrm>
-            <a:off x="457200" y="1435100"/>
-            <a:ext cx="3008313" cy="4691063"/>
+            <a:off x="839788" y="2057400"/>
+            <a:ext cx="3932237" cy="3811588"/>
           </a:xfrm>
         </p:spPr>
         <p:txBody>
@@ -2202,45 +3421,45 @@
           <a:lstStyle>
             <a:lvl1pPr marL="0" indent="0">
               <a:buNone/>
-              <a:defRPr sz="1400"/>
+              <a:defRPr sz="1600"/>
             </a:lvl1pPr>
             <a:lvl2pPr marL="457200" indent="0">
               <a:buNone/>
-              <a:defRPr sz="1200"/>
+              <a:defRPr sz="1400"/>
             </a:lvl2pPr>
             <a:lvl3pPr marL="914400" indent="0">
               <a:buNone/>
-              <a:defRPr sz="1000"/>
+              <a:defRPr sz="1200"/>
             </a:lvl3pPr>
             <a:lvl4pPr marL="1371600" indent="0">
               <a:buNone/>
-              <a:defRPr sz="900"/>
+              <a:defRPr sz="1000"/>
             </a:lvl4pPr>
             <a:lvl5pPr marL="1828800" indent="0">
               <a:buNone/>
-              <a:defRPr sz="900"/>
+              <a:defRPr sz="1000"/>
             </a:lvl5pPr>
             <a:lvl6pPr marL="2286000" indent="0">
               <a:buNone/>
-              <a:defRPr sz="900"/>
+              <a:defRPr sz="1000"/>
             </a:lvl6pPr>
             <a:lvl7pPr marL="2743200" indent="0">
               <a:buNone/>
-              <a:defRPr sz="900"/>
+              <a:defRPr sz="1000"/>
             </a:lvl7pPr>
             <a:lvl8pPr marL="3200400" indent="0">
               <a:buNone/>
-              <a:defRPr sz="900"/>
+              <a:defRPr sz="1000"/>
             </a:lvl8pPr>
             <a:lvl9pPr marL="3657600" indent="0">
               <a:buNone/>
-              <a:defRPr sz="900"/>
+              <a:defRPr sz="1000"/>
             </a:lvl9pPr>
           </a:lstStyle>
           <a:p>
             <a:pPr lvl="0"/>
             <a:r>
-              <a:rPr lang="en-US" smtClean="0"/>
+              <a:rPr lang="en-US"/>
               <a:t>Click to edit Master text styles</a:t>
             </a:r>
           </a:p>
@@ -2248,7 +3467,13 @@
       </p:sp>
       <p:sp>
         <p:nvSpPr>
-          <p:cNvPr id="5" name="Date Placeholder 4"/>
+          <p:cNvPr id="5" name="Date Placeholder 4">
+            <a:extLst>
+              <a:ext uri="{FF2B5EF4-FFF2-40B4-BE49-F238E27FC236}">
+                <a16:creationId xmlns:a16="http://schemas.microsoft.com/office/drawing/2014/main" id="{43CCFB0B-7752-ECD1-66F1-D0B81232C3E0}"/>
+              </a:ext>
+            </a:extLst>
+          </p:cNvPr>
           <p:cNvSpPr>
             <a:spLocks noGrp="1"/>
           </p:cNvSpPr>
@@ -2261,17 +3486,23 @@
           <a:bodyPr/>
           <a:lstStyle/>
           <a:p>
-            <a:fld id="{5BCAD085-E8A6-8845-BD4E-CB4CCA059FC4}" type="datetimeFigureOut">
-              <a:rPr lang="en-US" smtClean="0"/>
-              <a:t>1/27/13</a:t>
+            <a:fld id="{BD835E71-2212-4FEA-BE8F-2F4D357B223E}" type="datetimeFigureOut">
+              <a:rPr lang="en-IN" smtClean="0"/>
+              <a:t>09-06-2026</a:t>
             </a:fld>
-            <a:endParaRPr lang="en-US"/>
-          </a:p>
-        </p:txBody>
-      </p:sp>
-      <p:sp>
-        <p:nvSpPr>
-          <p:cNvPr id="6" name="Footer Placeholder 5"/>
+            <a:endParaRPr lang="en-IN"/>
+          </a:p>
+        </p:txBody>
+      </p:sp>
+      <p:sp>
+        <p:nvSpPr>
+          <p:cNvPr id="6" name="Footer Placeholder 5">
+            <a:extLst>
+              <a:ext uri="{FF2B5EF4-FFF2-40B4-BE49-F238E27FC236}">
+                <a16:creationId xmlns:a16="http://schemas.microsoft.com/office/drawing/2014/main" id="{FE8AE0FC-FDCF-61AE-5A34-79DD27701A1E}"/>
+              </a:ext>
+            </a:extLst>
+          </p:cNvPr>
           <p:cNvSpPr>
             <a:spLocks noGrp="1"/>
           </p:cNvSpPr>
@@ -2284,13 +3515,19 @@
           <a:bodyPr/>
           <a:lstStyle/>
           <a:p>
-            <a:endParaRPr lang="en-US"/>
-          </a:p>
-        </p:txBody>
-      </p:sp>
-      <p:sp>
-        <p:nvSpPr>
-          <p:cNvPr id="7" name="Slide Number Placeholder 6"/>
+            <a:endParaRPr lang="en-IN"/>
+          </a:p>
+        </p:txBody>
+      </p:sp>
+      <p:sp>
+        <p:nvSpPr>
+          <p:cNvPr id="7" name="Slide Number Placeholder 6">
+            <a:extLst>
+              <a:ext uri="{FF2B5EF4-FFF2-40B4-BE49-F238E27FC236}">
+                <a16:creationId xmlns:a16="http://schemas.microsoft.com/office/drawing/2014/main" id="{3614D352-4394-B0F1-1A2E-CA414A94650B}"/>
+              </a:ext>
+            </a:extLst>
+          </p:cNvPr>
           <p:cNvSpPr>
             <a:spLocks noGrp="1"/>
           </p:cNvSpPr>
@@ -2303,18 +3540,18 @@
           <a:bodyPr/>
           <a:lstStyle/>
           <a:p>
-            <a:fld id="{C1FF6DA9-008F-8B48-92A6-B652298478BF}" type="slidenum">
-              <a:rPr lang="en-US" smtClean="0"/>
+            <a:fld id="{A517286A-0854-47BE-AEC8-6C8157BD39BE}" type="slidenum">
+              <a:rPr lang="en-IN" smtClean="0"/>
               <a:t>‹#›</a:t>
             </a:fld>
-            <a:endParaRPr lang="en-US"/>
+            <a:endParaRPr lang="en-IN"/>
           </a:p>
         </p:txBody>
       </p:sp>
     </p:spTree>
     <p:extLst>
       <p:ext uri="{BB962C8B-B14F-4D97-AF65-F5344CB8AC3E}">
-        <p14:creationId xmlns:p14="http://schemas.microsoft.com/office/powerpoint/2010/main" val="1840726560"/>
+        <p14:creationId xmlns:p14="http://schemas.microsoft.com/office/powerpoint/2010/main" val="4016457275"/>
       </p:ext>
     </p:extLst>
   </p:cSld>
@@ -2343,7 +3580,13 @@
       </p:grpSpPr>
       <p:sp>
         <p:nvSpPr>
-          <p:cNvPr id="2" name="Title 1"/>
+          <p:cNvPr id="2" name="Title 1">
+            <a:extLst>
+              <a:ext uri="{FF2B5EF4-FFF2-40B4-BE49-F238E27FC236}">
+                <a16:creationId xmlns:a16="http://schemas.microsoft.com/office/drawing/2014/main" id="{06742545-A1C7-40EC-3FE1-C82720D85965}"/>
+              </a:ext>
+            </a:extLst>
+          </p:cNvPr>
           <p:cNvSpPr>
             <a:spLocks noGrp="1"/>
           </p:cNvSpPr>
@@ -2353,29 +3596,35 @@
         </p:nvSpPr>
         <p:spPr>
           <a:xfrm>
-            <a:off x="1792288" y="4800600"/>
-            <a:ext cx="5486400" cy="566738"/>
+            <a:off x="839788" y="457200"/>
+            <a:ext cx="3932237" cy="1600200"/>
           </a:xfrm>
         </p:spPr>
         <p:txBody>
           <a:bodyPr anchor="b"/>
           <a:lstStyle>
-            <a:lvl1pPr algn="l">
-              <a:defRPr sz="2000" b="1"/>
+            <a:lvl1pPr>
+              <a:defRPr sz="3200"/>
             </a:lvl1pPr>
           </a:lstStyle>
           <a:p>
             <a:r>
-              <a:rPr lang="en-US" smtClean="0"/>
+              <a:rPr lang="en-US"/>
               <a:t>Click to edit Master title style</a:t>
             </a:r>
-            <a:endParaRPr lang="en-US"/>
-          </a:p>
-        </p:txBody>
-      </p:sp>
-      <p:sp>
-        <p:nvSpPr>
-          <p:cNvPr id="3" name="Picture Placeholder 2"/>
+            <a:endParaRPr lang="en-IN"/>
+          </a:p>
+        </p:txBody>
+      </p:sp>
+      <p:sp>
+        <p:nvSpPr>
+          <p:cNvPr id="3" name="Picture Placeholder 2">
+            <a:extLst>
+              <a:ext uri="{FF2B5EF4-FFF2-40B4-BE49-F238E27FC236}">
+                <a16:creationId xmlns:a16="http://schemas.microsoft.com/office/drawing/2014/main" id="{C0DFF387-B532-CC3D-5C9E-9F36D51F1225}"/>
+              </a:ext>
+            </a:extLst>
+          </p:cNvPr>
           <p:cNvSpPr>
             <a:spLocks noGrp="1"/>
           </p:cNvSpPr>
@@ -2385,8 +3634,8 @@
         </p:nvSpPr>
         <p:spPr>
           <a:xfrm>
-            <a:off x="1792288" y="612775"/>
-            <a:ext cx="5486400" cy="4114800"/>
+            <a:off x="5183188" y="987425"/>
+            <a:ext cx="6172200" cy="4873625"/>
           </a:xfrm>
         </p:spPr>
         <p:txBody>
@@ -2430,13 +3679,19 @@
             </a:lvl9pPr>
           </a:lstStyle>
           <a:p>
-            <a:endParaRPr lang="en-US"/>
-          </a:p>
-        </p:txBody>
-      </p:sp>
-      <p:sp>
-        <p:nvSpPr>
-          <p:cNvPr id="4" name="Text Placeholder 3"/>
+            <a:endParaRPr lang="en-IN"/>
+          </a:p>
+        </p:txBody>
+      </p:sp>
+      <p:sp>
+        <p:nvSpPr>
+          <p:cNvPr id="4" name="Text Placeholder 3">
+            <a:extLst>
+              <a:ext uri="{FF2B5EF4-FFF2-40B4-BE49-F238E27FC236}">
+                <a16:creationId xmlns:a16="http://schemas.microsoft.com/office/drawing/2014/main" id="{CF5036FD-2768-E32C-A90C-C8D658ADFB3D}"/>
+              </a:ext>
+            </a:extLst>
+          </p:cNvPr>
           <p:cNvSpPr>
             <a:spLocks noGrp="1"/>
           </p:cNvSpPr>
@@ -2446,8 +3701,8 @@
         </p:nvSpPr>
         <p:spPr>
           <a:xfrm>
-            <a:off x="1792288" y="5367338"/>
-            <a:ext cx="5486400" cy="804862"/>
+            <a:off x="839788" y="2057400"/>
+            <a:ext cx="3932237" cy="3811588"/>
           </a:xfrm>
         </p:spPr>
         <p:txBody>
@@ -2455,45 +3710,45 @@
           <a:lstStyle>
             <a:lvl1pPr marL="0" indent="0">
               <a:buNone/>
-              <a:defRPr sz="1400"/>
+              <a:defRPr sz="1600"/>
             </a:lvl1pPr>
             <a:lvl2pPr marL="457200" indent="0">
               <a:buNone/>
-              <a:defRPr sz="1200"/>
+              <a:defRPr sz="1400"/>
             </a:lvl2pPr>
             <a:lvl3pPr marL="914400" indent="0">
               <a:buNone/>
-              <a:defRPr sz="1000"/>
+              <a:defRPr sz="1200"/>
             </a:lvl3pPr>
             <a:lvl4pPr marL="1371600" indent="0">
               <a:buNone/>
-              <a:defRPr sz="900"/>
+              <a:defRPr sz="1000"/>
             </a:lvl4pPr>
             <a:lvl5pPr marL="1828800" indent="0">
               <a:buNone/>
-              <a:defRPr sz="900"/>
+              <a:defRPr sz="1000"/>
             </a:lvl5pPr>
             <a:lvl6pPr marL="2286000" indent="0">
               <a:buNone/>
-              <a:defRPr sz="900"/>
+              <a:defRPr sz="1000"/>
             </a:lvl6pPr>
             <a:lvl7pPr marL="2743200" indent="0">
               <a:buNone/>
-              <a:defRPr sz="900"/>
+              <a:defRPr sz="1000"/>
             </a:lvl7pPr>
             <a:lvl8pPr marL="3200400" indent="0">
               <a:buNone/>
-              <a:defRPr sz="900"/>
+              <a:defRPr sz="1000"/>
             </a:lvl8pPr>
             <a:lvl9pPr marL="3657600" indent="0">
               <a:buNone/>
-              <a:defRPr sz="900"/>
+              <a:defRPr sz="1000"/>
             </a:lvl9pPr>
           </a:lstStyle>
           <a:p>
             <a:pPr lvl="0"/>
             <a:r>
-              <a:rPr lang="en-US" smtClean="0"/>
+              <a:rPr lang="en-US"/>
               <a:t>Click to edit Master text styles</a:t>
             </a:r>
           </a:p>
@@ -2501,7 +3756,13 @@
       </p:sp>
       <p:sp>
         <p:nvSpPr>
-          <p:cNvPr id="5" name="Date Placeholder 4"/>
+          <p:cNvPr id="5" name="Date Placeholder 4">
+            <a:extLst>
+              <a:ext uri="{FF2B5EF4-FFF2-40B4-BE49-F238E27FC236}">
+                <a16:creationId xmlns:a16="http://schemas.microsoft.com/office/drawing/2014/main" id="{0DB77819-76DF-AF3B-B770-457ABD279671}"/>
+              </a:ext>
+            </a:extLst>
+          </p:cNvPr>
           <p:cNvSpPr>
             <a:spLocks noGrp="1"/>
           </p:cNvSpPr>
@@ -2514,17 +3775,23 @@
           <a:bodyPr/>
           <a:lstStyle/>
           <a:p>
-            <a:fld id="{5BCAD085-E8A6-8845-BD4E-CB4CCA059FC4}" type="datetimeFigureOut">
-              <a:rPr lang="en-US" smtClean="0"/>
-              <a:t>1/27/13</a:t>
+            <a:fld id="{BD835E71-2212-4FEA-BE8F-2F4D357B223E}" type="datetimeFigureOut">
+              <a:rPr lang="en-IN" smtClean="0"/>
+              <a:t>09-06-2026</a:t>
             </a:fld>
-            <a:endParaRPr lang="en-US"/>
-          </a:p>
-        </p:txBody>
-      </p:sp>
-      <p:sp>
-        <p:nvSpPr>
-          <p:cNvPr id="6" name="Footer Placeholder 5"/>
+            <a:endParaRPr lang="en-IN"/>
+          </a:p>
+        </p:txBody>
+      </p:sp>
+      <p:sp>
+        <p:nvSpPr>
+          <p:cNvPr id="6" name="Footer Placeholder 5">
+            <a:extLst>
+              <a:ext uri="{FF2B5EF4-FFF2-40B4-BE49-F238E27FC236}">
+                <a16:creationId xmlns:a16="http://schemas.microsoft.com/office/drawing/2014/main" id="{88DFBBFE-A436-F436-7835-B1297E714A3A}"/>
+              </a:ext>
+            </a:extLst>
+          </p:cNvPr>
           <p:cNvSpPr>
             <a:spLocks noGrp="1"/>
           </p:cNvSpPr>
@@ -2537,13 +3804,19 @@
           <a:bodyPr/>
           <a:lstStyle/>
           <a:p>
-            <a:endParaRPr lang="en-US"/>
-          </a:p>
-        </p:txBody>
-      </p:sp>
-      <p:sp>
-        <p:nvSpPr>
-          <p:cNvPr id="7" name="Slide Number Placeholder 6"/>
+            <a:endParaRPr lang="en-IN"/>
+          </a:p>
+        </p:txBody>
+      </p:sp>
+      <p:sp>
+        <p:nvSpPr>
+          <p:cNvPr id="7" name="Slide Number Placeholder 6">
+            <a:extLst>
+              <a:ext uri="{FF2B5EF4-FFF2-40B4-BE49-F238E27FC236}">
+                <a16:creationId xmlns:a16="http://schemas.microsoft.com/office/drawing/2014/main" id="{626A678A-3EC8-EDD4-2C75-21EEFFE04E34}"/>
+              </a:ext>
+            </a:extLst>
+          </p:cNvPr>
           <p:cNvSpPr>
             <a:spLocks noGrp="1"/>
           </p:cNvSpPr>
@@ -2556,18 +3829,18 @@
           <a:bodyPr/>
           <a:lstStyle/>
           <a:p>
-            <a:fld id="{C1FF6DA9-008F-8B48-92A6-B652298478BF}" type="slidenum">
-              <a:rPr lang="en-US" smtClean="0"/>
+            <a:fld id="{A517286A-0854-47BE-AEC8-6C8157BD39BE}" type="slidenum">
+              <a:rPr lang="en-IN" smtClean="0"/>
               <a:t>‹#›</a:t>
             </a:fld>
-            <a:endParaRPr lang="en-US"/>
+            <a:endParaRPr lang="en-IN"/>
           </a:p>
         </p:txBody>
       </p:sp>
     </p:spTree>
     <p:extLst>
       <p:ext uri="{BB962C8B-B14F-4D97-AF65-F5344CB8AC3E}">
-        <p14:creationId xmlns:p14="http://schemas.microsoft.com/office/powerpoint/2010/main" val="3889236939"/>
+        <p14:creationId xmlns:p14="http://schemas.microsoft.com/office/powerpoint/2010/main" val="1268483394"/>
       </p:ext>
     </p:extLst>
   </p:cSld>
@@ -2601,7 +3874,13 @@
       </p:grpSpPr>
       <p:sp>
         <p:nvSpPr>
-          <p:cNvPr id="2" name="Title Placeholder 1"/>
+          <p:cNvPr id="2" name="Title Placeholder 1">
+            <a:extLst>
+              <a:ext uri="{FF2B5EF4-FFF2-40B4-BE49-F238E27FC236}">
+                <a16:creationId xmlns:a16="http://schemas.microsoft.com/office/drawing/2014/main" id="{E29F8123-C023-BD17-F969-52902FB55C0C}"/>
+              </a:ext>
+            </a:extLst>
+          </p:cNvPr>
           <p:cNvSpPr>
             <a:spLocks noGrp="1"/>
           </p:cNvSpPr>
@@ -2611,8 +3890,8 @@
         </p:nvSpPr>
         <p:spPr>
           <a:xfrm>
-            <a:off x="457200" y="274638"/>
-            <a:ext cx="8229600" cy="1143000"/>
+            <a:off x="838200" y="365125"/>
+            <a:ext cx="10515600" cy="1325563"/>
           </a:xfrm>
           <a:prstGeom prst="rect">
             <a:avLst/>
@@ -2625,16 +3904,22 @@
           <a:lstStyle/>
           <a:p>
             <a:r>
-              <a:rPr lang="en-US" smtClean="0"/>
+              <a:rPr lang="en-US"/>
               <a:t>Click to edit Master title style</a:t>
             </a:r>
-            <a:endParaRPr lang="en-US"/>
-          </a:p>
-        </p:txBody>
-      </p:sp>
-      <p:sp>
-        <p:nvSpPr>
-          <p:cNvPr id="3" name="Text Placeholder 2"/>
+            <a:endParaRPr lang="en-IN"/>
+          </a:p>
+        </p:txBody>
+      </p:sp>
+      <p:sp>
+        <p:nvSpPr>
+          <p:cNvPr id="3" name="Text Placeholder 2">
+            <a:extLst>
+              <a:ext uri="{FF2B5EF4-FFF2-40B4-BE49-F238E27FC236}">
+                <a16:creationId xmlns:a16="http://schemas.microsoft.com/office/drawing/2014/main" id="{19F17698-CFC3-B104-BEF9-6AFA51420188}"/>
+              </a:ext>
+            </a:extLst>
+          </p:cNvPr>
           <p:cNvSpPr>
             <a:spLocks noGrp="1"/>
           </p:cNvSpPr>
@@ -2644,8 +3929,8 @@
         </p:nvSpPr>
         <p:spPr>
           <a:xfrm>
-            <a:off x="457200" y="1600200"/>
-            <a:ext cx="8229600" cy="4525963"/>
+            <a:off x="838200" y="1825625"/>
+            <a:ext cx="10515600" cy="4351338"/>
           </a:xfrm>
           <a:prstGeom prst="rect">
             <a:avLst/>
@@ -2659,44 +3944,50 @@
           <a:p>
             <a:pPr lvl="0"/>
             <a:r>
-              <a:rPr lang="en-US" smtClean="0"/>
+              <a:rPr lang="en-US"/>
               <a:t>Click to edit Master text styles</a:t>
             </a:r>
           </a:p>
           <a:p>
             <a:pPr lvl="1"/>
             <a:r>
-              <a:rPr lang="en-US" smtClean="0"/>
+              <a:rPr lang="en-US"/>
               <a:t>Second level</a:t>
             </a:r>
           </a:p>
           <a:p>
             <a:pPr lvl="2"/>
             <a:r>
-              <a:rPr lang="en-US" smtClean="0"/>
+              <a:rPr lang="en-US"/>
               <a:t>Third level</a:t>
             </a:r>
           </a:p>
           <a:p>
             <a:pPr lvl="3"/>
             <a:r>
-              <a:rPr lang="en-US" smtClean="0"/>
+              <a:rPr lang="en-US"/>
               <a:t>Fourth level</a:t>
             </a:r>
           </a:p>
           <a:p>
             <a:pPr lvl="4"/>
             <a:r>
-              <a:rPr lang="en-US" smtClean="0"/>
+              <a:rPr lang="en-US"/>
               <a:t>Fifth level</a:t>
             </a:r>
-            <a:endParaRPr lang="en-US"/>
-          </a:p>
-        </p:txBody>
-      </p:sp>
-      <p:sp>
-        <p:nvSpPr>
-          <p:cNvPr id="4" name="Date Placeholder 3"/>
+            <a:endParaRPr lang="en-IN"/>
+          </a:p>
+        </p:txBody>
+      </p:sp>
+      <p:sp>
+        <p:nvSpPr>
+          <p:cNvPr id="4" name="Date Placeholder 3">
+            <a:extLst>
+              <a:ext uri="{FF2B5EF4-FFF2-40B4-BE49-F238E27FC236}">
+                <a16:creationId xmlns:a16="http://schemas.microsoft.com/office/drawing/2014/main" id="{7CF11FD7-2239-1D93-9FA3-C73687349B2C}"/>
+              </a:ext>
+            </a:extLst>
+          </p:cNvPr>
           <p:cNvSpPr>
             <a:spLocks noGrp="1"/>
           </p:cNvSpPr>
@@ -2706,8 +3997,8 @@
         </p:nvSpPr>
         <p:spPr>
           <a:xfrm>
-            <a:off x="457200" y="6356350"/>
-            <a:ext cx="2133600" cy="365125"/>
+            <a:off x="838200" y="6356350"/>
+            <a:ext cx="2743200" cy="365125"/>
           </a:xfrm>
           <a:prstGeom prst="rect">
             <a:avLst/>
@@ -2727,17 +4018,23 @@
             </a:lvl1pPr>
           </a:lstStyle>
           <a:p>
-            <a:fld id="{5BCAD085-E8A6-8845-BD4E-CB4CCA059FC4}" type="datetimeFigureOut">
-              <a:rPr lang="en-US" smtClean="0"/>
-              <a:t>1/27/13</a:t>
+            <a:fld id="{BD835E71-2212-4FEA-BE8F-2F4D357B223E}" type="datetimeFigureOut">
+              <a:rPr lang="en-IN" smtClean="0"/>
+              <a:t>09-06-2026</a:t>
             </a:fld>
-            <a:endParaRPr lang="en-US"/>
-          </a:p>
-        </p:txBody>
-      </p:sp>
-      <p:sp>
-        <p:nvSpPr>
-          <p:cNvPr id="5" name="Footer Placeholder 4"/>
+            <a:endParaRPr lang="en-IN"/>
+          </a:p>
+        </p:txBody>
+      </p:sp>
+      <p:sp>
+        <p:nvSpPr>
+          <p:cNvPr id="5" name="Footer Placeholder 4">
+            <a:extLst>
+              <a:ext uri="{FF2B5EF4-FFF2-40B4-BE49-F238E27FC236}">
+                <a16:creationId xmlns:a16="http://schemas.microsoft.com/office/drawing/2014/main" id="{8A36483C-48C6-1851-0752-1232B540F98E}"/>
+              </a:ext>
+            </a:extLst>
+          </p:cNvPr>
           <p:cNvSpPr>
             <a:spLocks noGrp="1"/>
           </p:cNvSpPr>
@@ -2747,8 +4044,8 @@
         </p:nvSpPr>
         <p:spPr>
           <a:xfrm>
-            <a:off x="3124200" y="6356350"/>
-            <a:ext cx="2895600" cy="365125"/>
+            <a:off x="4038600" y="6356350"/>
+            <a:ext cx="4114800" cy="365125"/>
           </a:xfrm>
           <a:prstGeom prst="rect">
             <a:avLst/>
@@ -2768,13 +4065,19 @@
             </a:lvl1pPr>
           </a:lstStyle>
           <a:p>
-            <a:endParaRPr lang="en-US"/>
-          </a:p>
-        </p:txBody>
-      </p:sp>
-      <p:sp>
-        <p:nvSpPr>
-          <p:cNvPr id="6" name="Slide Number Placeholder 5"/>
+            <a:endParaRPr lang="en-IN"/>
+          </a:p>
+        </p:txBody>
+      </p:sp>
+      <p:sp>
+        <p:nvSpPr>
+          <p:cNvPr id="6" name="Slide Number Placeholder 5">
+            <a:extLst>
+              <a:ext uri="{FF2B5EF4-FFF2-40B4-BE49-F238E27FC236}">
+                <a16:creationId xmlns:a16="http://schemas.microsoft.com/office/drawing/2014/main" id="{8D57DB10-9E25-0180-BB57-FDC6B26C1778}"/>
+              </a:ext>
+            </a:extLst>
+          </p:cNvPr>
           <p:cNvSpPr>
             <a:spLocks noGrp="1"/>
           </p:cNvSpPr>
@@ -2784,8 +4087,8 @@
         </p:nvSpPr>
         <p:spPr>
           <a:xfrm>
-            <a:off x="6553200" y="6356350"/>
-            <a:ext cx="2133600" cy="365125"/>
+            <a:off x="8610600" y="6356350"/>
+            <a:ext cx="2743200" cy="365125"/>
           </a:xfrm>
           <a:prstGeom prst="rect">
             <a:avLst/>
@@ -2805,18 +4108,18 @@
             </a:lvl1pPr>
           </a:lstStyle>
           <a:p>
-            <a:fld id="{C1FF6DA9-008F-8B48-92A6-B652298478BF}" type="slidenum">
-              <a:rPr lang="en-US" smtClean="0"/>
+            <a:fld id="{A517286A-0854-47BE-AEC8-6C8157BD39BE}" type="slidenum">
+              <a:rPr lang="en-IN" smtClean="0"/>
               <a:t>‹#›</a:t>
             </a:fld>
-            <a:endParaRPr lang="en-US"/>
+            <a:endParaRPr lang="en-IN"/>
           </a:p>
         </p:txBody>
       </p:sp>
     </p:spTree>
     <p:extLst>
       <p:ext uri="{BB962C8B-B14F-4D97-AF65-F5344CB8AC3E}">
-        <p14:creationId xmlns:p14="http://schemas.microsoft.com/office/powerpoint/2010/main" val="2209977519"/>
+        <p14:creationId xmlns:p14="http://schemas.microsoft.com/office/powerpoint/2010/main" val="3667688493"/>
       </p:ext>
     </p:extLst>
   </p:cSld>
@@ -2833,10 +4136,15 @@
     <p:sldLayoutId id="2147483657" r:id="rId9"/>
     <p:sldLayoutId id="2147483658" r:id="rId10"/>
     <p:sldLayoutId id="2147483659" r:id="rId11"/>
+    <p:sldLayoutId id="2147483660" r:id="rId12"/>
+    <p:sldLayoutId id="2147483661" r:id="rId13"/>
   </p:sldLayoutIdLst>
   <p:txStyles>
     <p:titleStyle>
-      <a:lvl1pPr algn="ctr" defTabSz="457200" rtl="0" eaLnBrk="1" latinLnBrk="0" hangingPunct="1">
+      <a:lvl1pPr algn="l" defTabSz="914400" rtl="0" eaLnBrk="1" latinLnBrk="0" hangingPunct="1">
+        <a:lnSpc>
+          <a:spcPct val="90000"/>
+        </a:lnSpc>
         <a:spcBef>
           <a:spcPct val="0"/>
         </a:spcBef>
@@ -2852,13 +4160,16 @@
       </a:lvl1pPr>
     </p:titleStyle>
     <p:bodyStyle>
-      <a:lvl1pPr marL="342900" indent="-342900" algn="l" defTabSz="457200" rtl="0" eaLnBrk="1" latinLnBrk="0" hangingPunct="1">
+      <a:lvl1pPr marL="228600" indent="-228600" algn="l" defTabSz="914400" rtl="0" eaLnBrk="1" latinLnBrk="0" hangingPunct="1">
+        <a:lnSpc>
+          <a:spcPct val="90000"/>
+        </a:lnSpc>
         <a:spcBef>
-          <a:spcPct val="20000"/>
+          <a:spcPts val="1000"/>
         </a:spcBef>
-        <a:buFont typeface="Arial"/>
+        <a:buFont typeface="Arial" panose="020B0604020202020204" pitchFamily="34" charset="0"/>
         <a:buChar char="•"/>
-        <a:defRPr sz="3200" kern="1200">
+        <a:defRPr sz="2800" kern="1200">
           <a:solidFill>
             <a:schemeClr val="tx1"/>
           </a:solidFill>
@@ -2867,26 +4178,14 @@
           <a:cs typeface="+mn-cs"/>
         </a:defRPr>
       </a:lvl1pPr>
-      <a:lvl2pPr marL="742950" indent="-285750" algn="l" defTabSz="457200" rtl="0" eaLnBrk="1" latinLnBrk="0" hangingPunct="1">
+      <a:lvl2pPr marL="685800" indent="-228600" algn="l" defTabSz="914400" rtl="0" eaLnBrk="1" latinLnBrk="0" hangingPunct="1">
+        <a:lnSpc>
+          <a:spcPct val="90000"/>
+        </a:lnSpc>
         <a:spcBef>
-          <a:spcPct val="20000"/>
+          <a:spcPts val="500"/>
         </a:spcBef>
-        <a:buFont typeface="Arial"/>
-        <a:buChar char="–"/>
-        <a:defRPr sz="2800" kern="1200">
-          <a:solidFill>
-            <a:schemeClr val="tx1"/>
-          </a:solidFill>
-          <a:latin typeface="+mn-lt"/>
-          <a:ea typeface="+mn-ea"/>
-          <a:cs typeface="+mn-cs"/>
-        </a:defRPr>
-      </a:lvl2pPr>
-      <a:lvl3pPr marL="1143000" indent="-228600" algn="l" defTabSz="457200" rtl="0" eaLnBrk="1" latinLnBrk="0" hangingPunct="1">
-        <a:spcBef>
-          <a:spcPct val="20000"/>
-        </a:spcBef>
-        <a:buFont typeface="Arial"/>
+        <a:buFont typeface="Arial" panose="020B0604020202020204" pitchFamily="34" charset="0"/>
         <a:buChar char="•"/>
         <a:defRPr sz="2400" kern="1200">
           <a:solidFill>
@@ -2896,42 +4195,15 @@
           <a:ea typeface="+mn-ea"/>
           <a:cs typeface="+mn-cs"/>
         </a:defRPr>
-      </a:lvl3pPr>
-      <a:lvl4pPr marL="1600200" indent="-228600" algn="l" defTabSz="457200" rtl="0" eaLnBrk="1" latinLnBrk="0" hangingPunct="1">
+      </a:lvl2pPr>
+      <a:lvl3pPr marL="1143000" indent="-228600" algn="l" defTabSz="914400" rtl="0" eaLnBrk="1" latinLnBrk="0" hangingPunct="1">
+        <a:lnSpc>
+          <a:spcPct val="90000"/>
+        </a:lnSpc>
         <a:spcBef>
-          <a:spcPct val="20000"/>
+          <a:spcPts val="500"/>
         </a:spcBef>
-        <a:buFont typeface="Arial"/>
-        <a:buChar char="–"/>
-        <a:defRPr sz="2000" kern="1200">
-          <a:solidFill>
-            <a:schemeClr val="tx1"/>
-          </a:solidFill>
-          <a:latin typeface="+mn-lt"/>
-          <a:ea typeface="+mn-ea"/>
-          <a:cs typeface="+mn-cs"/>
-        </a:defRPr>
-      </a:lvl4pPr>
-      <a:lvl5pPr marL="2057400" indent="-228600" algn="l" defTabSz="457200" rtl="0" eaLnBrk="1" latinLnBrk="0" hangingPunct="1">
-        <a:spcBef>
-          <a:spcPct val="20000"/>
-        </a:spcBef>
-        <a:buFont typeface="Arial"/>
-        <a:buChar char="»"/>
-        <a:defRPr sz="2000" kern="1200">
-          <a:solidFill>
-            <a:schemeClr val="tx1"/>
-          </a:solidFill>
-          <a:latin typeface="+mn-lt"/>
-          <a:ea typeface="+mn-ea"/>
-          <a:cs typeface="+mn-cs"/>
-        </a:defRPr>
-      </a:lvl5pPr>
-      <a:lvl6pPr marL="2514600" indent="-228600" algn="l" defTabSz="457200" rtl="0" eaLnBrk="1" latinLnBrk="0" hangingPunct="1">
-        <a:spcBef>
-          <a:spcPct val="20000"/>
-        </a:spcBef>
-        <a:buFont typeface="Arial"/>
+        <a:buFont typeface="Arial" panose="020B0604020202020204" pitchFamily="34" charset="0"/>
         <a:buChar char="•"/>
         <a:defRPr sz="2000" kern="1200">
           <a:solidFill>
@@ -2941,14 +4213,71 @@
           <a:ea typeface="+mn-ea"/>
           <a:cs typeface="+mn-cs"/>
         </a:defRPr>
+      </a:lvl3pPr>
+      <a:lvl4pPr marL="1600200" indent="-228600" algn="l" defTabSz="914400" rtl="0" eaLnBrk="1" latinLnBrk="0" hangingPunct="1">
+        <a:lnSpc>
+          <a:spcPct val="90000"/>
+        </a:lnSpc>
+        <a:spcBef>
+          <a:spcPts val="500"/>
+        </a:spcBef>
+        <a:buFont typeface="Arial" panose="020B0604020202020204" pitchFamily="34" charset="0"/>
+        <a:buChar char="•"/>
+        <a:defRPr sz="1800" kern="1200">
+          <a:solidFill>
+            <a:schemeClr val="tx1"/>
+          </a:solidFill>
+          <a:latin typeface="+mn-lt"/>
+          <a:ea typeface="+mn-ea"/>
+          <a:cs typeface="+mn-cs"/>
+        </a:defRPr>
+      </a:lvl4pPr>
+      <a:lvl5pPr marL="2057400" indent="-228600" algn="l" defTabSz="914400" rtl="0" eaLnBrk="1" latinLnBrk="0" hangingPunct="1">
+        <a:lnSpc>
+          <a:spcPct val="90000"/>
+        </a:lnSpc>
+        <a:spcBef>
+          <a:spcPts val="500"/>
+        </a:spcBef>
+        <a:buFont typeface="Arial" panose="020B0604020202020204" pitchFamily="34" charset="0"/>
+        <a:buChar char="•"/>
+        <a:defRPr sz="1800" kern="1200">
+          <a:solidFill>
+            <a:schemeClr val="tx1"/>
+          </a:solidFill>
+          <a:latin typeface="+mn-lt"/>
+          <a:ea typeface="+mn-ea"/>
+          <a:cs typeface="+mn-cs"/>
+        </a:defRPr>
+      </a:lvl5pPr>
+      <a:lvl6pPr marL="2514600" indent="-228600" algn="l" defTabSz="914400" rtl="0" eaLnBrk="1" latinLnBrk="0" hangingPunct="1">
+        <a:lnSpc>
+          <a:spcPct val="90000"/>
+        </a:lnSpc>
+        <a:spcBef>
+          <a:spcPts val="500"/>
+        </a:spcBef>
+        <a:buFont typeface="Arial" panose="020B0604020202020204" pitchFamily="34" charset="0"/>
+        <a:buChar char="•"/>
+        <a:defRPr sz="1800" kern="1200">
+          <a:solidFill>
+            <a:schemeClr val="tx1"/>
+          </a:solidFill>
+          <a:latin typeface="+mn-lt"/>
+          <a:ea typeface="+mn-ea"/>
+          <a:cs typeface="+mn-cs"/>
+        </a:defRPr>
       </a:lvl6pPr>
-      <a:lvl7pPr marL="2971800" indent="-228600" algn="l" defTabSz="457200" rtl="0" eaLnBrk="1" latinLnBrk="0" hangingPunct="1">
+      <a:lvl7pPr marL="2971800" indent="-228600" algn="l" defTabSz="914400" rtl="0" eaLnBrk="1" latinLnBrk="0" hangingPunct="1">
+        <a:lnSpc>
+          <a:spcPct val="90000"/>
+        </a:lnSpc>
         <a:spcBef>
-          <a:spcPct val="20000"/>
+          <a:spcPts val="500"/>
         </a:spcBef>
-        <a:buFont typeface="Arial"/>
+        <a:buFont typeface="Arial" panose="020B0604020202020204" pitchFamily="34" charset="0"/>
         <a:buChar char="•"/>
-        <a:defRPr sz="2000" kern="1200">
+        <a:defRPr sz="1800" kern="1200">
           <a:solidFill>
             <a:schemeClr val="tx1"/>
           </a:solidFill>
@@ -2957,13 +4286,16 @@
           <a:cs typeface="+mn-cs"/>
         </a:defRPr>
       </a:lvl7pPr>
-      <a:lvl8pPr marL="3429000" indent="-228600" algn="l" defTabSz="457200" rtl="0" eaLnBrk="1" latinLnBrk="0" hangingPunct="1">
+      <a:lvl8pPr marL="3429000" indent="-228600" algn="l" defTabSz="914400" rtl="0" eaLnBrk="1" latinLnBrk="0" hangingPunct="1">
+        <a:lnSpc>
+          <a:spcPct val="90000"/>
+        </a:lnSpc>
         <a:spcBef>
-          <a:spcPct val="20000"/>
+          <a:spcPts val="500"/>
         </a:spcBef>
-        <a:buFont typeface="Arial"/>
+        <a:buFont typeface="Arial" panose="020B0604020202020204" pitchFamily="34" charset="0"/>
         <a:buChar char="•"/>
-        <a:defRPr sz="2000" kern="1200">
+        <a:defRPr sz="1800" kern="1200">
           <a:solidFill>
             <a:schemeClr val="tx1"/>
           </a:solidFill>
@@ -2972,13 +4304,16 @@
           <a:cs typeface="+mn-cs"/>
         </a:defRPr>
       </a:lvl8pPr>
-      <a:lvl9pPr marL="3886200" indent="-228600" algn="l" defTabSz="457200" rtl="0" eaLnBrk="1" latinLnBrk="0" hangingPunct="1">
+      <a:lvl9pPr marL="3886200" indent="-228600" algn="l" defTabSz="914400" rtl="0" eaLnBrk="1" latinLnBrk="0" hangingPunct="1">
+        <a:lnSpc>
+          <a:spcPct val="90000"/>
+        </a:lnSpc>
         <a:spcBef>
-          <a:spcPct val="20000"/>
+          <a:spcPts val="500"/>
         </a:spcBef>
-        <a:buFont typeface="Arial"/>
+        <a:buFont typeface="Arial" panose="020B0604020202020204" pitchFamily="34" charset="0"/>
         <a:buChar char="•"/>
-        <a:defRPr sz="2000" kern="1200">
+        <a:defRPr sz="1800" kern="1200">
           <a:solidFill>
             <a:schemeClr val="tx1"/>
           </a:solidFill>
@@ -2992,7 +4327,7 @@
       <a:defPPr>
         <a:defRPr lang="en-US"/>
       </a:defPPr>
-      <a:lvl1pPr marL="0" algn="l" defTabSz="457200" rtl="0" eaLnBrk="1" latinLnBrk="0" hangingPunct="1">
+      <a:lvl1pPr marL="0" algn="l" defTabSz="914400" rtl="0" eaLnBrk="1" latinLnBrk="0" hangingPunct="1">
         <a:defRPr sz="1800" kern="1200">
           <a:solidFill>
             <a:schemeClr val="tx1"/>
@@ -3002,7 +4337,7 @@
           <a:cs typeface="+mn-cs"/>
         </a:defRPr>
       </a:lvl1pPr>
-      <a:lvl2pPr marL="457200" algn="l" defTabSz="457200" rtl="0" eaLnBrk="1" latinLnBrk="0" hangingPunct="1">
+      <a:lvl2pPr marL="457200" algn="l" defTabSz="914400" rtl="0" eaLnBrk="1" latinLnBrk="0" hangingPunct="1">
         <a:defRPr sz="1800" kern="1200">
           <a:solidFill>
             <a:schemeClr val="tx1"/>
@@ -3012,7 +4347,7 @@
           <a:cs typeface="+mn-cs"/>
         </a:defRPr>
       </a:lvl2pPr>
-      <a:lvl3pPr marL="914400" algn="l" defTabSz="457200" rtl="0" eaLnBrk="1" latinLnBrk="0" hangingPunct="1">
+      <a:lvl3pPr marL="914400" algn="l" defTabSz="914400" rtl="0" eaLnBrk="1" latinLnBrk="0" hangingPunct="1">
         <a:defRPr sz="1800" kern="1200">
           <a:solidFill>
             <a:schemeClr val="tx1"/>
@@ -3022,7 +4357,7 @@
           <a:cs typeface="+mn-cs"/>
         </a:defRPr>
       </a:lvl3pPr>
-      <a:lvl4pPr marL="1371600" algn="l" defTabSz="457200" rtl="0" eaLnBrk="1" latinLnBrk="0" hangingPunct="1">
+      <a:lvl4pPr marL="1371600" algn="l" defTabSz="914400" rtl="0" eaLnBrk="1" latinLnBrk="0" hangingPunct="1">
         <a:defRPr sz="1800" kern="1200">
           <a:solidFill>
             <a:schemeClr val="tx1"/>
@@ -3032,7 +4367,7 @@
           <a:cs typeface="+mn-cs"/>
         </a:defRPr>
       </a:lvl4pPr>
-      <a:lvl5pPr marL="1828800" algn="l" defTabSz="457200" rtl="0" eaLnBrk="1" latinLnBrk="0" hangingPunct="1">
+      <a:lvl5pPr marL="1828800" algn="l" defTabSz="914400" rtl="0" eaLnBrk="1" latinLnBrk="0" hangingPunct="1">
         <a:defRPr sz="1800" kern="1200">
           <a:solidFill>
             <a:schemeClr val="tx1"/>
@@ -3042,7 +4377,7 @@
           <a:cs typeface="+mn-cs"/>
         </a:defRPr>
       </a:lvl5pPr>
-      <a:lvl6pPr marL="2286000" algn="l" defTabSz="457200" rtl="0" eaLnBrk="1" latinLnBrk="0" hangingPunct="1">
+      <a:lvl6pPr marL="2286000" algn="l" defTabSz="914400" rtl="0" eaLnBrk="1" latinLnBrk="0" hangingPunct="1">
         <a:defRPr sz="1800" kern="1200">
           <a:solidFill>
             <a:schemeClr val="tx1"/>
@@ -3052,7 +4387,7 @@
           <a:cs typeface="+mn-cs"/>
         </a:defRPr>
       </a:lvl6pPr>
-      <a:lvl7pPr marL="2743200" algn="l" defTabSz="457200" rtl="0" eaLnBrk="1" latinLnBrk="0" hangingPunct="1">
+      <a:lvl7pPr marL="2743200" algn="l" defTabSz="914400" rtl="0" eaLnBrk="1" latinLnBrk="0" hangingPunct="1">
         <a:defRPr sz="1800" kern="1200">
           <a:solidFill>
             <a:schemeClr val="tx1"/>
@@ -3062,7 +4397,7 @@
           <a:cs typeface="+mn-cs"/>
         </a:defRPr>
       </a:lvl7pPr>
-      <a:lvl8pPr marL="3200400" algn="l" defTabSz="457200" rtl="0" eaLnBrk="1" latinLnBrk="0" hangingPunct="1">
+      <a:lvl8pPr marL="3200400" algn="l" defTabSz="914400" rtl="0" eaLnBrk="1" latinLnBrk="0" hangingPunct="1">
         <a:defRPr sz="1800" kern="1200">
           <a:solidFill>
             <a:schemeClr val="tx1"/>
@@ -3072,7 +4407,7 @@
           <a:cs typeface="+mn-cs"/>
         </a:defRPr>
       </a:lvl8pPr>
-      <a:lvl9pPr marL="3657600" algn="l" defTabSz="457200" rtl="0" eaLnBrk="1" latinLnBrk="0" hangingPunct="1">
+      <a:lvl9pPr marL="3657600" algn="l" defTabSz="914400" rtl="0" eaLnBrk="1" latinLnBrk="0" hangingPunct="1">
         <a:defRPr sz="1800" kern="1200">
           <a:solidFill>
             <a:schemeClr val="tx1"/>
@@ -3088,7 +4423,7 @@
 </file>
 
 <file path=ppt/slides/slide1.xml><?xml version="1.0" encoding="utf-8"?>
-<p:sld xmlns:a="http://schemas.openxmlformats.org/drawingml/2006/main" xmlns:p="http://schemas.openxmlformats.org/presentationml/2006/main" xmlns:r="http://schemas.openxmlformats.org/officeDocument/2006/relationships">
+<p:sld xmlns:a="http://schemas.openxmlformats.org/drawingml/2006/main" xmlns:r="http://schemas.openxmlformats.org/officeDocument/2006/relationships" xmlns:p="http://schemas.openxmlformats.org/presentationml/2006/main">
   <p:cSld>
     <p:spTree>
       <p:nvGrpSpPr>
@@ -3096,99 +4431,546 @@
         <p:cNvGrpSpPr/>
         <p:nvPr/>
       </p:nvGrpSpPr>
-      <p:grpSpPr/>
-      <p:sp>
-        <p:nvSpPr>
-          <p:cNvPr id="2" name="TextBox 1"/>
-          <p:cNvSpPr txBox="1"/>
-          <p:nvPr/>
+      <p:grpSpPr>
+        <a:xfrm>
+          <a:off x="0" y="0"/>
+          <a:ext cx="0" cy="0"/>
+          <a:chOff x="0" y="0"/>
+          <a:chExt cx="0" cy="0"/>
+        </a:xfrm>
+      </p:grpSpPr>
+      <p:sp>
+        <p:nvSpPr>
+          <p:cNvPr id="5" name="Text Placeholder 4">
+            <a:extLst>
+              <a:ext uri="{FF2B5EF4-FFF2-40B4-BE49-F238E27FC236}">
+                <a16:creationId xmlns:a16="http://schemas.microsoft.com/office/drawing/2014/main" id="{E890DF3D-6B47-AD79-1AA7-3D8A011FEE85}"/>
+              </a:ext>
+            </a:extLst>
+          </p:cNvPr>
+          <p:cNvSpPr>
+            <a:spLocks noGrp="1"/>
+          </p:cNvSpPr>
+          <p:nvPr>
+            <p:ph type="body" sz="quarter" idx="11"/>
+          </p:nvPr>
         </p:nvSpPr>
         <p:spPr>
           <a:xfrm>
-            <a:off x="731520" y="2194560"/>
-            <a:ext cx="10698480" cy="2011680"/>
+            <a:off x="610503" y="2428297"/>
+            <a:ext cx="6541411" cy="965014"/>
+          </a:xfrm>
+        </p:spPr>
+        <p:txBody>
+          <a:bodyPr/>
+          <a:lstStyle/>
+          <a:p>
+            <a:pPr marL="0" indent="0">
+              <a:buNone/>
+            </a:pPr>
+            <a:r>
+              <a:rPr lang="en-US" sz="3200" dirty="0">
+                <a:latin typeface="HCLTech Roobert" panose="020B0504030202060203" pitchFamily="34" charset="0"/>
+                <a:cs typeface="HCLTech Roobert" panose="020B0504030202060203" pitchFamily="34" charset="0"/>
+              </a:rPr>
+              <a:t>Chubb – Project Radical</a:t>
+            </a:r>
+          </a:p>
+          <a:p>
+            <a:pPr marL="0" indent="0">
+              <a:buNone/>
+            </a:pPr>
+            <a:r>
+              <a:rPr lang="en-US" sz="2000" dirty="0">
+                <a:latin typeface="HCLTech Roobert" panose="020B0504030202060203" pitchFamily="34" charset="0"/>
+                <a:cs typeface="HCLTech Roobert" panose="020B0504030202060203" pitchFamily="34" charset="0"/>
+              </a:rPr>
+              <a:t>Take-home Assessment Submission</a:t>
+            </a:r>
+            <a:endParaRPr lang="en-US" sz="2000" b="1" dirty="0">
+              <a:solidFill>
+                <a:schemeClr val="bg1"/>
+              </a:solidFill>
+              <a:latin typeface="HCLTech Roobert" panose="020B0504030202060203" pitchFamily="34" charset="0"/>
+              <a:cs typeface="HCLTech Roobert" panose="020B0504030202060203" pitchFamily="34" charset="0"/>
+            </a:endParaRPr>
+          </a:p>
+        </p:txBody>
+      </p:sp>
+      <p:sp>
+        <p:nvSpPr>
+          <p:cNvPr id="2" name="Text Placeholder 4">
+            <a:extLst>
+              <a:ext uri="{FF2B5EF4-FFF2-40B4-BE49-F238E27FC236}">
+                <a16:creationId xmlns:a16="http://schemas.microsoft.com/office/drawing/2014/main" id="{897CC6C5-A4C4-E725-82DA-B57DEE310A8B}"/>
+              </a:ext>
+            </a:extLst>
+          </p:cNvPr>
+          <p:cNvSpPr txBox="1">
+            <a:spLocks/>
+          </p:cNvSpPr>
+          <p:nvPr/>
+        </p:nvSpPr>
+        <p:spPr>
+          <a:xfrm>
+            <a:off x="687087" y="4217377"/>
+            <a:ext cx="6057960" cy="965014"/>
           </a:xfrm>
           <a:prstGeom prst="rect">
             <a:avLst/>
           </a:prstGeom>
-          <a:noFill/>
         </p:spPr>
         <p:txBody>
-          <a:bodyPr wrap="square">
-            <a:spAutoFit/>
+          <a:bodyPr vert="horz" lIns="0" tIns="45720" rIns="91440" bIns="45720" rtlCol="0" anchor="b">
+            <a:noAutofit/>
           </a:bodyPr>
-          <a:lstStyle/>
-          <a:p>
-            <a:pPr>
-              <a:defRPr sz="3800" b="1">
-                <a:solidFill>
-                  <a:srgbClr val="006D77"/>
-                </a:solidFill>
-              </a:defRPr>
-            </a:pPr>
-            <a:r>
-              <a:t>Policy Overview Dashboard - Insurance BFF Service</a:t>
-            </a:r>
-          </a:p>
-          <a:p>
-            <a:pPr>
-              <a:defRPr sz="2000">
-                <a:solidFill>
-                  <a:srgbClr val="222222"/>
-                </a:solidFill>
-              </a:defRPr>
-            </a:pPr>
-            <a:r>
-              <a:t>Contract-first, hexagonal Spring Boot service</a:t>
-            </a:r>
-          </a:p>
-        </p:txBody>
-      </p:sp>
-      <p:sp>
-        <p:nvSpPr>
-          <p:cNvPr id="3" name="TextBox 2"/>
-          <p:cNvSpPr txBox="1"/>
+          <a:lstStyle>
+            <a:lvl1pPr marL="0" indent="0" algn="l" defTabSz="914400" rtl="0" eaLnBrk="1" latinLnBrk="0" hangingPunct="1">
+              <a:lnSpc>
+                <a:spcPct val="100000"/>
+              </a:lnSpc>
+              <a:spcBef>
+                <a:spcPts val="0"/>
+              </a:spcBef>
+              <a:buFont typeface="Arial" panose="020B0604020202020204" pitchFamily="34" charset="0"/>
+              <a:buNone/>
+              <a:defRPr sz="4800" b="1" kern="1200">
+                <a:solidFill>
+                  <a:schemeClr val="bg1"/>
+                </a:solidFill>
+                <a:latin typeface="HCLTech Roobert" pitchFamily="50" charset="0"/>
+                <a:ea typeface="+mn-ea"/>
+                <a:cs typeface="HCLTech Roobert" pitchFamily="50" charset="0"/>
+              </a:defRPr>
+            </a:lvl1pPr>
+            <a:lvl2pPr marL="457200" indent="0" algn="l" defTabSz="914400" rtl="0" eaLnBrk="1" latinLnBrk="0" hangingPunct="1">
+              <a:lnSpc>
+                <a:spcPct val="90000"/>
+              </a:lnSpc>
+              <a:spcBef>
+                <a:spcPts val="500"/>
+              </a:spcBef>
+              <a:buFont typeface="Arial" panose="020B0604020202020204" pitchFamily="34" charset="0"/>
+              <a:buNone/>
+              <a:defRPr sz="2400" kern="1200">
+                <a:solidFill>
+                  <a:schemeClr val="bg1"/>
+                </a:solidFill>
+                <a:latin typeface="HCLTech Roobert" pitchFamily="50" charset="0"/>
+                <a:ea typeface="+mn-ea"/>
+                <a:cs typeface="HCLTech Roobert" pitchFamily="50" charset="0"/>
+              </a:defRPr>
+            </a:lvl2pPr>
+            <a:lvl3pPr marL="914400" indent="0" algn="l" defTabSz="914400" rtl="0" eaLnBrk="1" latinLnBrk="0" hangingPunct="1">
+              <a:lnSpc>
+                <a:spcPct val="90000"/>
+              </a:lnSpc>
+              <a:spcBef>
+                <a:spcPts val="500"/>
+              </a:spcBef>
+              <a:buFont typeface="Arial" panose="020B0604020202020204" pitchFamily="34" charset="0"/>
+              <a:buNone/>
+              <a:defRPr sz="2000" kern="1200">
+                <a:solidFill>
+                  <a:schemeClr val="bg1"/>
+                </a:solidFill>
+                <a:latin typeface="HCLTech Roobert" pitchFamily="50" charset="0"/>
+                <a:ea typeface="+mn-ea"/>
+                <a:cs typeface="HCLTech Roobert" pitchFamily="50" charset="0"/>
+              </a:defRPr>
+            </a:lvl3pPr>
+            <a:lvl4pPr marL="1371600" indent="0" algn="l" defTabSz="914400" rtl="0" eaLnBrk="1" latinLnBrk="0" hangingPunct="1">
+              <a:lnSpc>
+                <a:spcPct val="90000"/>
+              </a:lnSpc>
+              <a:spcBef>
+                <a:spcPts val="500"/>
+              </a:spcBef>
+              <a:buFont typeface="Arial" panose="020B0604020202020204" pitchFamily="34" charset="0"/>
+              <a:buNone/>
+              <a:defRPr sz="1800" kern="1200">
+                <a:solidFill>
+                  <a:schemeClr val="bg1"/>
+                </a:solidFill>
+                <a:latin typeface="HCLTech Roobert" pitchFamily="50" charset="0"/>
+                <a:ea typeface="+mn-ea"/>
+                <a:cs typeface="HCLTech Roobert" pitchFamily="50" charset="0"/>
+              </a:defRPr>
+            </a:lvl4pPr>
+            <a:lvl5pPr marL="1828800" indent="0" algn="l" defTabSz="914400" rtl="0" eaLnBrk="1" latinLnBrk="0" hangingPunct="1">
+              <a:lnSpc>
+                <a:spcPct val="90000"/>
+              </a:lnSpc>
+              <a:spcBef>
+                <a:spcPts val="500"/>
+              </a:spcBef>
+              <a:buFont typeface="Arial" panose="020B0604020202020204" pitchFamily="34" charset="0"/>
+              <a:buNone/>
+              <a:defRPr sz="1800" kern="1200">
+                <a:solidFill>
+                  <a:schemeClr val="bg1"/>
+                </a:solidFill>
+                <a:latin typeface="HCLTech Roobert" pitchFamily="50" charset="0"/>
+                <a:ea typeface="+mn-ea"/>
+                <a:cs typeface="HCLTech Roobert" pitchFamily="50" charset="0"/>
+              </a:defRPr>
+            </a:lvl5pPr>
+            <a:lvl6pPr marL="2514600" indent="-228600" algn="l" defTabSz="914400" rtl="0" eaLnBrk="1" latinLnBrk="0" hangingPunct="1">
+              <a:lnSpc>
+                <a:spcPct val="90000"/>
+              </a:lnSpc>
+              <a:spcBef>
+                <a:spcPts val="500"/>
+              </a:spcBef>
+              <a:buFont typeface="Arial" panose="020B0604020202020204" pitchFamily="34" charset="0"/>
+              <a:buChar char="•"/>
+              <a:defRPr sz="1800" kern="1200">
+                <a:solidFill>
+                  <a:schemeClr val="tx1"/>
+                </a:solidFill>
+                <a:latin typeface="+mn-lt"/>
+                <a:ea typeface="+mn-ea"/>
+                <a:cs typeface="+mn-cs"/>
+              </a:defRPr>
+            </a:lvl6pPr>
+            <a:lvl7pPr marL="2971800" indent="-228600" algn="l" defTabSz="914400" rtl="0" eaLnBrk="1" latinLnBrk="0" hangingPunct="1">
+              <a:lnSpc>
+                <a:spcPct val="90000"/>
+              </a:lnSpc>
+              <a:spcBef>
+                <a:spcPts val="500"/>
+              </a:spcBef>
+              <a:buFont typeface="Arial" panose="020B0604020202020204" pitchFamily="34" charset="0"/>
+              <a:buChar char="•"/>
+              <a:defRPr sz="1800" kern="1200">
+                <a:solidFill>
+                  <a:schemeClr val="tx1"/>
+                </a:solidFill>
+                <a:latin typeface="+mn-lt"/>
+                <a:ea typeface="+mn-ea"/>
+                <a:cs typeface="+mn-cs"/>
+              </a:defRPr>
+            </a:lvl7pPr>
+            <a:lvl8pPr marL="3429000" indent="-228600" algn="l" defTabSz="914400" rtl="0" eaLnBrk="1" latinLnBrk="0" hangingPunct="1">
+              <a:lnSpc>
+                <a:spcPct val="90000"/>
+              </a:lnSpc>
+              <a:spcBef>
+                <a:spcPts val="500"/>
+              </a:spcBef>
+              <a:buFont typeface="Arial" panose="020B0604020202020204" pitchFamily="34" charset="0"/>
+              <a:buChar char="•"/>
+              <a:defRPr sz="1800" kern="1200">
+                <a:solidFill>
+                  <a:schemeClr val="tx1"/>
+                </a:solidFill>
+                <a:latin typeface="+mn-lt"/>
+                <a:ea typeface="+mn-ea"/>
+                <a:cs typeface="+mn-cs"/>
+              </a:defRPr>
+            </a:lvl8pPr>
+            <a:lvl9pPr marL="3886200" indent="-228600" algn="l" defTabSz="914400" rtl="0" eaLnBrk="1" latinLnBrk="0" hangingPunct="1">
+              <a:lnSpc>
+                <a:spcPct val="90000"/>
+              </a:lnSpc>
+              <a:spcBef>
+                <a:spcPts val="500"/>
+              </a:spcBef>
+              <a:buFont typeface="Arial" panose="020B0604020202020204" pitchFamily="34" charset="0"/>
+              <a:buChar char="•"/>
+              <a:defRPr sz="1800" kern="1200">
+                <a:solidFill>
+                  <a:schemeClr val="tx1"/>
+                </a:solidFill>
+                <a:latin typeface="+mn-lt"/>
+                <a:ea typeface="+mn-ea"/>
+                <a:cs typeface="+mn-cs"/>
+              </a:defRPr>
+            </a:lvl9pPr>
+          </a:lstStyle>
+          <a:p>
+            <a:endParaRPr lang="en-US" sz="2400" b="0" dirty="0">
+              <a:latin typeface="HCLTech Roobert" panose="020B0504030202060203" pitchFamily="34" charset="0"/>
+              <a:cs typeface="HCLTech Roobert" panose="020B0504030202060203" pitchFamily="34" charset="0"/>
+            </a:endParaRPr>
+          </a:p>
+          <a:p>
+            <a:r>
+              <a:rPr lang="en-US" sz="2400" b="0" dirty="0">
+                <a:latin typeface="HCLTech Roobert" panose="020B0504030202060203" pitchFamily="34" charset="0"/>
+                <a:cs typeface="HCLTech Roobert" panose="020B0504030202060203" pitchFamily="34" charset="0"/>
+              </a:rPr>
+              <a:t>&lt; Assessment Name &gt;</a:t>
+            </a:r>
+          </a:p>
+          <a:p>
+            <a:endParaRPr lang="en-US" sz="2400" b="0" dirty="0">
+              <a:latin typeface="HCLTech Roobert" panose="020B0504030202060203" pitchFamily="34" charset="0"/>
+              <a:cs typeface="HCLTech Roobert" panose="020B0504030202060203" pitchFamily="34" charset="0"/>
+            </a:endParaRPr>
+          </a:p>
+          <a:p>
+            <a:r>
+              <a:rPr lang="en-US" sz="2400" b="0" dirty="0">
+                <a:latin typeface="HCLTech Roobert" panose="020B0504030202060203" pitchFamily="34" charset="0"/>
+                <a:cs typeface="HCLTech Roobert" panose="020B0504030202060203" pitchFamily="34" charset="0"/>
+              </a:rPr>
+              <a:t>By &lt;Resource Name&gt;</a:t>
+            </a:r>
+          </a:p>
+        </p:txBody>
+      </p:sp>
+      <p:sp>
+        <p:nvSpPr>
+          <p:cNvPr id="3" name="Text Placeholder 4">
+            <a:extLst>
+              <a:ext uri="{FF2B5EF4-FFF2-40B4-BE49-F238E27FC236}">
+                <a16:creationId xmlns:a16="http://schemas.microsoft.com/office/drawing/2014/main" id="{1DF68CBF-8848-D4E7-1B4C-76CDF62C8340}"/>
+              </a:ext>
+            </a:extLst>
+          </p:cNvPr>
+          <p:cNvSpPr txBox="1">
+            <a:spLocks/>
+          </p:cNvSpPr>
           <p:nvPr/>
         </p:nvSpPr>
         <p:spPr>
           <a:xfrm>
-            <a:off x="731520" y="6035040"/>
-            <a:ext cx="10698480" cy="548640"/>
+            <a:off x="610503" y="4900496"/>
+            <a:ext cx="11367231" cy="1412877"/>
           </a:xfrm>
           <a:prstGeom prst="rect">
             <a:avLst/>
           </a:prstGeom>
-          <a:noFill/>
         </p:spPr>
         <p:txBody>
-          <a:bodyPr wrap="none">
-            <a:spAutoFit/>
+          <a:bodyPr vert="horz" lIns="0" tIns="45720" rIns="91440" bIns="45720" rtlCol="0" anchor="b">
+            <a:noAutofit/>
           </a:bodyPr>
-          <a:lstStyle/>
-          <a:p>
-            <a:pPr>
-              <a:defRPr sz="1200">
-                <a:solidFill>
-                  <a:srgbClr val="666666"/>
-                </a:solidFill>
-              </a:defRPr>
+          <a:lstStyle>
+            <a:lvl1pPr marL="0" indent="0" algn="l" defTabSz="914400" rtl="0" eaLnBrk="1" latinLnBrk="0" hangingPunct="1">
+              <a:lnSpc>
+                <a:spcPct val="100000"/>
+              </a:lnSpc>
+              <a:spcBef>
+                <a:spcPts val="0"/>
+              </a:spcBef>
+              <a:buFont typeface="Arial" panose="020B0604020202020204" pitchFamily="34" charset="0"/>
+              <a:buNone/>
+              <a:defRPr sz="4800" b="1" kern="1200">
+                <a:solidFill>
+                  <a:schemeClr val="bg1"/>
+                </a:solidFill>
+                <a:latin typeface="HCLTech Roobert" pitchFamily="50" charset="0"/>
+                <a:ea typeface="+mn-ea"/>
+                <a:cs typeface="HCLTech Roobert" pitchFamily="50" charset="0"/>
+              </a:defRPr>
+            </a:lvl1pPr>
+            <a:lvl2pPr marL="457200" indent="0" algn="l" defTabSz="914400" rtl="0" eaLnBrk="1" latinLnBrk="0" hangingPunct="1">
+              <a:lnSpc>
+                <a:spcPct val="90000"/>
+              </a:lnSpc>
+              <a:spcBef>
+                <a:spcPts val="500"/>
+              </a:spcBef>
+              <a:buFont typeface="Arial" panose="020B0604020202020204" pitchFamily="34" charset="0"/>
+              <a:buNone/>
+              <a:defRPr sz="2400" kern="1200">
+                <a:solidFill>
+                  <a:schemeClr val="bg1"/>
+                </a:solidFill>
+                <a:latin typeface="HCLTech Roobert" pitchFamily="50" charset="0"/>
+                <a:ea typeface="+mn-ea"/>
+                <a:cs typeface="HCLTech Roobert" pitchFamily="50" charset="0"/>
+              </a:defRPr>
+            </a:lvl2pPr>
+            <a:lvl3pPr marL="914400" indent="0" algn="l" defTabSz="914400" rtl="0" eaLnBrk="1" latinLnBrk="0" hangingPunct="1">
+              <a:lnSpc>
+                <a:spcPct val="90000"/>
+              </a:lnSpc>
+              <a:spcBef>
+                <a:spcPts val="500"/>
+              </a:spcBef>
+              <a:buFont typeface="Arial" panose="020B0604020202020204" pitchFamily="34" charset="0"/>
+              <a:buNone/>
+              <a:defRPr sz="2000" kern="1200">
+                <a:solidFill>
+                  <a:schemeClr val="bg1"/>
+                </a:solidFill>
+                <a:latin typeface="HCLTech Roobert" pitchFamily="50" charset="0"/>
+                <a:ea typeface="+mn-ea"/>
+                <a:cs typeface="HCLTech Roobert" pitchFamily="50" charset="0"/>
+              </a:defRPr>
+            </a:lvl3pPr>
+            <a:lvl4pPr marL="1371600" indent="0" algn="l" defTabSz="914400" rtl="0" eaLnBrk="1" latinLnBrk="0" hangingPunct="1">
+              <a:lnSpc>
+                <a:spcPct val="90000"/>
+              </a:lnSpc>
+              <a:spcBef>
+                <a:spcPts val="500"/>
+              </a:spcBef>
+              <a:buFont typeface="Arial" panose="020B0604020202020204" pitchFamily="34" charset="0"/>
+              <a:buNone/>
+              <a:defRPr sz="1800" kern="1200">
+                <a:solidFill>
+                  <a:schemeClr val="bg1"/>
+                </a:solidFill>
+                <a:latin typeface="HCLTech Roobert" pitchFamily="50" charset="0"/>
+                <a:ea typeface="+mn-ea"/>
+                <a:cs typeface="HCLTech Roobert" pitchFamily="50" charset="0"/>
+              </a:defRPr>
+            </a:lvl4pPr>
+            <a:lvl5pPr marL="1828800" indent="0" algn="l" defTabSz="914400" rtl="0" eaLnBrk="1" latinLnBrk="0" hangingPunct="1">
+              <a:lnSpc>
+                <a:spcPct val="90000"/>
+              </a:lnSpc>
+              <a:spcBef>
+                <a:spcPts val="500"/>
+              </a:spcBef>
+              <a:buFont typeface="Arial" panose="020B0604020202020204" pitchFamily="34" charset="0"/>
+              <a:buNone/>
+              <a:defRPr sz="1800" kern="1200">
+                <a:solidFill>
+                  <a:schemeClr val="bg1"/>
+                </a:solidFill>
+                <a:latin typeface="HCLTech Roobert" pitchFamily="50" charset="0"/>
+                <a:ea typeface="+mn-ea"/>
+                <a:cs typeface="HCLTech Roobert" pitchFamily="50" charset="0"/>
+              </a:defRPr>
+            </a:lvl5pPr>
+            <a:lvl6pPr marL="2514600" indent="-228600" algn="l" defTabSz="914400" rtl="0" eaLnBrk="1" latinLnBrk="0" hangingPunct="1">
+              <a:lnSpc>
+                <a:spcPct val="90000"/>
+              </a:lnSpc>
+              <a:spcBef>
+                <a:spcPts val="500"/>
+              </a:spcBef>
+              <a:buFont typeface="Arial" panose="020B0604020202020204" pitchFamily="34" charset="0"/>
+              <a:buChar char="•"/>
+              <a:defRPr sz="1800" kern="1200">
+                <a:solidFill>
+                  <a:schemeClr val="tx1"/>
+                </a:solidFill>
+                <a:latin typeface="+mn-lt"/>
+                <a:ea typeface="+mn-ea"/>
+                <a:cs typeface="+mn-cs"/>
+              </a:defRPr>
+            </a:lvl6pPr>
+            <a:lvl7pPr marL="2971800" indent="-228600" algn="l" defTabSz="914400" rtl="0" eaLnBrk="1" latinLnBrk="0" hangingPunct="1">
+              <a:lnSpc>
+                <a:spcPct val="90000"/>
+              </a:lnSpc>
+              <a:spcBef>
+                <a:spcPts val="500"/>
+              </a:spcBef>
+              <a:buFont typeface="Arial" panose="020B0604020202020204" pitchFamily="34" charset="0"/>
+              <a:buChar char="•"/>
+              <a:defRPr sz="1800" kern="1200">
+                <a:solidFill>
+                  <a:schemeClr val="tx1"/>
+                </a:solidFill>
+                <a:latin typeface="+mn-lt"/>
+                <a:ea typeface="+mn-ea"/>
+                <a:cs typeface="+mn-cs"/>
+              </a:defRPr>
+            </a:lvl7pPr>
+            <a:lvl8pPr marL="3429000" indent="-228600" algn="l" defTabSz="914400" rtl="0" eaLnBrk="1" latinLnBrk="0" hangingPunct="1">
+              <a:lnSpc>
+                <a:spcPct val="90000"/>
+              </a:lnSpc>
+              <a:spcBef>
+                <a:spcPts val="500"/>
+              </a:spcBef>
+              <a:buFont typeface="Arial" panose="020B0604020202020204" pitchFamily="34" charset="0"/>
+              <a:buChar char="•"/>
+              <a:defRPr sz="1800" kern="1200">
+                <a:solidFill>
+                  <a:schemeClr val="tx1"/>
+                </a:solidFill>
+                <a:latin typeface="+mn-lt"/>
+                <a:ea typeface="+mn-ea"/>
+                <a:cs typeface="+mn-cs"/>
+              </a:defRPr>
+            </a:lvl8pPr>
+            <a:lvl9pPr marL="3886200" indent="-228600" algn="l" defTabSz="914400" rtl="0" eaLnBrk="1" latinLnBrk="0" hangingPunct="1">
+              <a:lnSpc>
+                <a:spcPct val="90000"/>
+              </a:lnSpc>
+              <a:spcBef>
+                <a:spcPts val="500"/>
+              </a:spcBef>
+              <a:buFont typeface="Arial" panose="020B0604020202020204" pitchFamily="34" charset="0"/>
+              <a:buChar char="•"/>
+              <a:defRPr sz="1800" kern="1200">
+                <a:solidFill>
+                  <a:schemeClr val="tx1"/>
+                </a:solidFill>
+                <a:latin typeface="+mn-lt"/>
+                <a:ea typeface="+mn-ea"/>
+                <a:cs typeface="+mn-cs"/>
+              </a:defRPr>
+            </a:lvl9pPr>
+          </a:lstStyle>
+          <a:p>
+            <a:pPr marL="0" marR="0" lvl="0" indent="0" algn="r" defTabSz="914400" rtl="0" eaLnBrk="1" fontAlgn="auto" latinLnBrk="0" hangingPunct="1">
+              <a:lnSpc>
+                <a:spcPct val="100000"/>
+              </a:lnSpc>
+              <a:spcBef>
+                <a:spcPts val="0"/>
+              </a:spcBef>
+              <a:spcAft>
+                <a:spcPts val="0"/>
+              </a:spcAft>
+              <a:buClrTx/>
+              <a:buSzTx/>
+              <a:buFont typeface="Arial" panose="020B0604020202020204" pitchFamily="34" charset="0"/>
+              <a:buNone/>
+              <a:tabLst/>
+              <a:defRPr/>
             </a:pPr>
             <a:r>
-              <a:t>Ravi G  |  Date  |  HCLTech</a:t>
+              <a:rPr kumimoji="0" lang="fr-FR" sz="1400" b="0" i="0" u="none" strike="noStrike" kern="1200" cap="none" spc="0" normalizeH="0" baseline="0" noProof="0" dirty="0">
+                <a:ln>
+                  <a:noFill/>
+                </a:ln>
+                <a:effectLst/>
+                <a:uLnTx/>
+                <a:uFillTx/>
+                <a:latin typeface="+mn-lt"/>
+              </a:rPr>
+              <a:t>Jun 10, 2026</a:t>
             </a:r>
           </a:p>
         </p:txBody>
       </p:sp>
     </p:spTree>
+    <p:extLst>
+      <p:ext uri="{BB962C8B-B14F-4D97-AF65-F5344CB8AC3E}">
+        <p14:creationId xmlns:p14="http://schemas.microsoft.com/office/powerpoint/2010/main" val="831996949"/>
+      </p:ext>
+    </p:extLst>
   </p:cSld>
   <p:clrMapOvr>
     <a:masterClrMapping/>
   </p:clrMapOvr>
+  <mc:AlternateContent xmlns:mc="http://schemas.openxmlformats.org/markup-compatibility/2006" xmlns:p14="http://schemas.microsoft.com/office/powerpoint/2010/main">
+    <mc:Choice Requires="p14">
+      <p:transition spd="med" p14:dur="700">
+        <p:fade/>
+      </p:transition>
+    </mc:Choice>
+    <mc:Fallback xmlns="">
+      <p:transition spd="med">
+        <p:fade/>
+      </p:transition>
+    </mc:Fallback>
+  </mc:AlternateContent>
 </p:sld>
 </file>
 
-<file path=ppt/slides/slide10.xml><?xml version="1.0" encoding="utf-8"?>
-<p:sld xmlns:a="http://schemas.openxmlformats.org/drawingml/2006/main" xmlns:p="http://schemas.openxmlformats.org/presentationml/2006/main" xmlns:r="http://schemas.openxmlformats.org/officeDocument/2006/relationships">
+<file path=ppt/slides/slide2.xml><?xml version="1.0" encoding="utf-8"?>
+<p:sld xmlns:a="http://schemas.openxmlformats.org/drawingml/2006/main" xmlns:r="http://schemas.openxmlformats.org/officeDocument/2006/relationships" xmlns:p="http://schemas.openxmlformats.org/presentationml/2006/main">
   <p:cSld>
     <p:spTree>
       <p:nvGrpSpPr>
@@ -3196,17 +4978,1271 @@
         <p:cNvGrpSpPr/>
         <p:nvPr/>
       </p:nvGrpSpPr>
-      <p:grpSpPr/>
-      <p:sp>
-        <p:nvSpPr>
-          <p:cNvPr id="2" name="TextBox 1"/>
+      <p:grpSpPr>
+        <a:xfrm>
+          <a:off x="0" y="0"/>
+          <a:ext cx="0" cy="0"/>
+          <a:chOff x="0" y="0"/>
+          <a:chExt cx="0" cy="0"/>
+        </a:xfrm>
+      </p:grpSpPr>
+      <p:graphicFrame>
+        <p:nvGraphicFramePr>
+          <p:cNvPr id="2" name="Table 4">
+            <a:extLst>
+              <a:ext uri="{FF2B5EF4-FFF2-40B4-BE49-F238E27FC236}">
+                <a16:creationId xmlns:a16="http://schemas.microsoft.com/office/drawing/2014/main" id="{37EC8BA2-9E81-D5F2-E409-10AD780181DD}"/>
+              </a:ext>
+            </a:extLst>
+          </p:cNvPr>
+          <p:cNvGraphicFramePr>
+            <a:graphicFrameLocks noGrp="1"/>
+          </p:cNvGraphicFramePr>
+          <p:nvPr/>
+        </p:nvGraphicFramePr>
+        <p:xfrm>
+          <a:off x="4615316" y="1859149"/>
+          <a:ext cx="7229138" cy="3199170"/>
+        </p:xfrm>
+        <a:graphic>
+          <a:graphicData uri="http://schemas.openxmlformats.org/drawingml/2006/table">
+            <a:tbl>
+              <a:tblPr firstRow="1" bandRow="1">
+                <a:tableStyleId>{2D5ABB26-0587-4C30-8999-92F81FD0307C}</a:tableStyleId>
+              </a:tblPr>
+              <a:tblGrid>
+                <a:gridCol w="683422">
+                  <a:extLst>
+                    <a:ext uri="{9D8B030D-6E8A-4147-A177-3AD203B41FA5}">
+                      <a16:colId xmlns:a16="http://schemas.microsoft.com/office/drawing/2014/main" val="3817094022"/>
+                    </a:ext>
+                  </a:extLst>
+                </a:gridCol>
+                <a:gridCol w="6545716">
+                  <a:extLst>
+                    <a:ext uri="{9D8B030D-6E8A-4147-A177-3AD203B41FA5}">
+                      <a16:colId xmlns:a16="http://schemas.microsoft.com/office/drawing/2014/main" val="1451733573"/>
+                    </a:ext>
+                  </a:extLst>
+                </a:gridCol>
+              </a:tblGrid>
+              <a:tr h="639834">
+                <a:tc>
+                  <a:txBody>
+                    <a:bodyPr/>
+                    <a:lstStyle/>
+                    <a:p>
+                      <a:pPr marL="0" marR="0" lvl="0" indent="0" algn="ctr" defTabSz="914400" rtl="0" eaLnBrk="1" fontAlgn="auto" latinLnBrk="0" hangingPunct="1">
+                        <a:lnSpc>
+                          <a:spcPct val="100000"/>
+                        </a:lnSpc>
+                        <a:spcBef>
+                          <a:spcPts val="0"/>
+                        </a:spcBef>
+                        <a:spcAft>
+                          <a:spcPts val="0"/>
+                        </a:spcAft>
+                        <a:buClrTx/>
+                        <a:buSzTx/>
+                        <a:buFontTx/>
+                        <a:buNone/>
+                        <a:tabLst/>
+                        <a:defRPr/>
+                      </a:pPr>
+                      <a:r>
+                        <a:rPr kumimoji="0" lang="en-US" sz="2000" b="1" i="0" u="none" strike="noStrike" kern="1200" cap="none" spc="0" normalizeH="0" baseline="0" noProof="0" dirty="0">
+                          <a:ln>
+                            <a:noFill/>
+                          </a:ln>
+                          <a:solidFill>
+                            <a:schemeClr val="tx2"/>
+                          </a:solidFill>
+                          <a:effectLst/>
+                          <a:uLnTx/>
+                          <a:uFillTx/>
+                          <a:latin typeface="HCLTech Roobert" panose="020B0504030202060203" pitchFamily="34" charset="77"/>
+                          <a:ea typeface="+mn-ea"/>
+                          <a:cs typeface="HCLTech Roobert" panose="020B0504030202060203" pitchFamily="34" charset="77"/>
+                        </a:rPr>
+                        <a:t>1</a:t>
+                      </a:r>
+                    </a:p>
+                  </a:txBody>
+                  <a:tcPr marL="150781" marR="150781" marT="75390" marB="75390" anchor="ctr">
+                    <a:lnL w="12700" cap="flat" cmpd="sng" algn="ctr">
+                      <a:noFill/>
+                      <a:prstDash val="solid"/>
+                      <a:round/>
+                      <a:headEnd type="none" w="med" len="med"/>
+                      <a:tailEnd type="none" w="med" len="med"/>
+                    </a:lnL>
+                    <a:lnR w="12700" cap="flat" cmpd="sng" algn="ctr">
+                      <a:noFill/>
+                      <a:prstDash val="solid"/>
+                      <a:round/>
+                      <a:headEnd type="none" w="med" len="med"/>
+                      <a:tailEnd type="none" w="med" len="med"/>
+                    </a:lnR>
+                    <a:lnT w="12700" cap="flat" cmpd="sng" algn="ctr">
+                      <a:solidFill>
+                        <a:schemeClr val="bg1">
+                          <a:lumMod val="85000"/>
+                        </a:schemeClr>
+                      </a:solidFill>
+                      <a:prstDash val="solid"/>
+                      <a:round/>
+                      <a:headEnd type="none" w="med" len="med"/>
+                      <a:tailEnd type="none" w="med" len="med"/>
+                    </a:lnT>
+                    <a:lnB w="12700" cap="flat" cmpd="sng" algn="ctr">
+                      <a:solidFill>
+                        <a:schemeClr val="bg1">
+                          <a:lumMod val="85000"/>
+                        </a:schemeClr>
+                      </a:solidFill>
+                      <a:prstDash val="solid"/>
+                      <a:round/>
+                      <a:headEnd type="none" w="med" len="med"/>
+                      <a:tailEnd type="none" w="med" len="med"/>
+                    </a:lnB>
+                    <a:lnTlToBr w="12700" cmpd="sng">
+                      <a:noFill/>
+                      <a:prstDash val="solid"/>
+                    </a:lnTlToBr>
+                    <a:lnBlToTr w="12700" cmpd="sng">
+                      <a:noFill/>
+                      <a:prstDash val="solid"/>
+                    </a:lnBlToTr>
+                  </a:tcPr>
+                </a:tc>
+                <a:tc>
+                  <a:txBody>
+                    <a:bodyPr/>
+                    <a:lstStyle/>
+                    <a:p>
+                      <a:pPr marL="0" marR="0" lvl="0" indent="0" algn="l" defTabSz="914400" rtl="0" eaLnBrk="1" fontAlgn="auto" latinLnBrk="0" hangingPunct="1">
+                        <a:lnSpc>
+                          <a:spcPct val="100000"/>
+                        </a:lnSpc>
+                        <a:spcBef>
+                          <a:spcPts val="0"/>
+                        </a:spcBef>
+                        <a:spcAft>
+                          <a:spcPts val="0"/>
+                        </a:spcAft>
+                        <a:buClrTx/>
+                        <a:buSzTx/>
+                        <a:buFontTx/>
+                        <a:buNone/>
+                        <a:tabLst/>
+                        <a:defRPr/>
+                      </a:pPr>
+                      <a:r>
+                        <a:rPr kumimoji="0" lang="en-US" sz="1600" b="1" i="0" u="none" strike="noStrike" kern="1200" cap="none" spc="0" normalizeH="0" baseline="0" noProof="0" dirty="0">
+                          <a:ln>
+                            <a:noFill/>
+                          </a:ln>
+                          <a:solidFill>
+                            <a:schemeClr val="tx1">
+                              <a:lumMod val="85000"/>
+                              <a:lumOff val="15000"/>
+                            </a:schemeClr>
+                          </a:solidFill>
+                          <a:effectLst/>
+                          <a:uLnTx/>
+                          <a:uFillTx/>
+                          <a:latin typeface="HCLTech Roobert" panose="020B0504030202060203" pitchFamily="34" charset="77"/>
+                          <a:ea typeface="+mn-ea"/>
+                          <a:cs typeface="HCLTech Roobert" panose="020B0504030202060203" pitchFamily="34" charset="77"/>
+                        </a:rPr>
+                        <a:t>Architecture Design &amp; Decisions</a:t>
+                      </a:r>
+                    </a:p>
+                  </a:txBody>
+                  <a:tcPr marL="150781" marR="150781" marT="75390" marB="75390" anchor="ctr">
+                    <a:lnL w="12700" cap="flat" cmpd="sng" algn="ctr">
+                      <a:noFill/>
+                      <a:prstDash val="solid"/>
+                      <a:round/>
+                      <a:headEnd type="none" w="med" len="med"/>
+                      <a:tailEnd type="none" w="med" len="med"/>
+                    </a:lnL>
+                    <a:lnR w="12700" cap="flat" cmpd="sng" algn="ctr">
+                      <a:noFill/>
+                      <a:prstDash val="solid"/>
+                      <a:round/>
+                      <a:headEnd type="none" w="med" len="med"/>
+                      <a:tailEnd type="none" w="med" len="med"/>
+                    </a:lnR>
+                    <a:lnT w="12700" cap="flat" cmpd="sng" algn="ctr">
+                      <a:solidFill>
+                        <a:schemeClr val="bg1">
+                          <a:lumMod val="85000"/>
+                        </a:schemeClr>
+                      </a:solidFill>
+                      <a:prstDash val="solid"/>
+                      <a:round/>
+                      <a:headEnd type="none" w="med" len="med"/>
+                      <a:tailEnd type="none" w="med" len="med"/>
+                    </a:lnT>
+                    <a:lnB w="12700" cap="flat" cmpd="sng" algn="ctr">
+                      <a:solidFill>
+                        <a:schemeClr val="bg1">
+                          <a:lumMod val="85000"/>
+                        </a:schemeClr>
+                      </a:solidFill>
+                      <a:prstDash val="solid"/>
+                      <a:round/>
+                      <a:headEnd type="none" w="med" len="med"/>
+                      <a:tailEnd type="none" w="med" len="med"/>
+                    </a:lnB>
+                    <a:lnTlToBr w="12700" cmpd="sng">
+                      <a:noFill/>
+                      <a:prstDash val="solid"/>
+                    </a:lnTlToBr>
+                    <a:lnBlToTr w="12700" cmpd="sng">
+                      <a:noFill/>
+                      <a:prstDash val="solid"/>
+                    </a:lnBlToTr>
+                  </a:tcPr>
+                </a:tc>
+                <a:extLst>
+                  <a:ext uri="{0D108BD9-81ED-4DB2-BD59-A6C34878D82A}">
+                    <a16:rowId xmlns:a16="http://schemas.microsoft.com/office/drawing/2014/main" val="2504520857"/>
+                  </a:ext>
+                </a:extLst>
+              </a:tr>
+              <a:tr h="639834">
+                <a:tc>
+                  <a:txBody>
+                    <a:bodyPr/>
+                    <a:lstStyle/>
+                    <a:p>
+                      <a:pPr marL="0" marR="0" lvl="0" indent="0" algn="ctr" defTabSz="914400" rtl="0" eaLnBrk="1" fontAlgn="auto" latinLnBrk="0" hangingPunct="1">
+                        <a:lnSpc>
+                          <a:spcPct val="100000"/>
+                        </a:lnSpc>
+                        <a:spcBef>
+                          <a:spcPts val="0"/>
+                        </a:spcBef>
+                        <a:spcAft>
+                          <a:spcPts val="0"/>
+                        </a:spcAft>
+                        <a:buClrTx/>
+                        <a:buSzTx/>
+                        <a:buFontTx/>
+                        <a:buNone/>
+                        <a:tabLst/>
+                        <a:defRPr/>
+                      </a:pPr>
+                      <a:r>
+                        <a:rPr kumimoji="0" lang="en-US" sz="2000" b="1" i="0" u="none" strike="noStrike" kern="1200" cap="none" spc="0" normalizeH="0" baseline="0" noProof="0">
+                          <a:ln>
+                            <a:noFill/>
+                          </a:ln>
+                          <a:solidFill>
+                            <a:schemeClr val="tx2"/>
+                          </a:solidFill>
+                          <a:effectLst/>
+                          <a:uLnTx/>
+                          <a:uFillTx/>
+                          <a:latin typeface="HCLTech Roobert" panose="020B0504030202060203" pitchFamily="34" charset="77"/>
+                          <a:ea typeface="+mn-ea"/>
+                          <a:cs typeface="HCLTech Roobert" panose="020B0504030202060203" pitchFamily="34" charset="77"/>
+                        </a:rPr>
+                        <a:t>2</a:t>
+                      </a:r>
+                    </a:p>
+                  </a:txBody>
+                  <a:tcPr marL="150781" marR="150781" marT="75390" marB="75390" anchor="ctr">
+                    <a:lnL w="12700" cap="flat" cmpd="sng" algn="ctr">
+                      <a:noFill/>
+                      <a:prstDash val="solid"/>
+                      <a:round/>
+                      <a:headEnd type="none" w="med" len="med"/>
+                      <a:tailEnd type="none" w="med" len="med"/>
+                    </a:lnL>
+                    <a:lnR w="12700" cap="flat" cmpd="sng" algn="ctr">
+                      <a:noFill/>
+                      <a:prstDash val="solid"/>
+                      <a:round/>
+                      <a:headEnd type="none" w="med" len="med"/>
+                      <a:tailEnd type="none" w="med" len="med"/>
+                    </a:lnR>
+                    <a:lnT w="12700" cap="flat" cmpd="sng" algn="ctr">
+                      <a:solidFill>
+                        <a:schemeClr val="bg1">
+                          <a:lumMod val="85000"/>
+                        </a:schemeClr>
+                      </a:solidFill>
+                      <a:prstDash val="solid"/>
+                      <a:round/>
+                      <a:headEnd type="none" w="med" len="med"/>
+                      <a:tailEnd type="none" w="med" len="med"/>
+                    </a:lnT>
+                    <a:lnB w="12700" cap="flat" cmpd="sng" algn="ctr">
+                      <a:solidFill>
+                        <a:schemeClr val="bg1">
+                          <a:lumMod val="85000"/>
+                        </a:schemeClr>
+                      </a:solidFill>
+                      <a:prstDash val="solid"/>
+                      <a:round/>
+                      <a:headEnd type="none" w="med" len="med"/>
+                      <a:tailEnd type="none" w="med" len="med"/>
+                    </a:lnB>
+                    <a:lnTlToBr w="12700" cmpd="sng">
+                      <a:noFill/>
+                      <a:prstDash val="solid"/>
+                    </a:lnTlToBr>
+                    <a:lnBlToTr w="12700" cmpd="sng">
+                      <a:noFill/>
+                      <a:prstDash val="solid"/>
+                    </a:lnBlToTr>
+                    <a:solidFill>
+                      <a:schemeClr val="accent1">
+                        <a:lumMod val="20000"/>
+                        <a:lumOff val="80000"/>
+                      </a:schemeClr>
+                    </a:solidFill>
+                  </a:tcPr>
+                </a:tc>
+                <a:tc>
+                  <a:txBody>
+                    <a:bodyPr/>
+                    <a:lstStyle/>
+                    <a:p>
+                      <a:pPr marL="0" marR="0" lvl="0" indent="0" algn="l" defTabSz="914400" rtl="0" eaLnBrk="1" fontAlgn="auto" latinLnBrk="0" hangingPunct="1">
+                        <a:lnSpc>
+                          <a:spcPct val="100000"/>
+                        </a:lnSpc>
+                        <a:spcBef>
+                          <a:spcPts val="0"/>
+                        </a:spcBef>
+                        <a:spcAft>
+                          <a:spcPts val="0"/>
+                        </a:spcAft>
+                        <a:buClrTx/>
+                        <a:buSzTx/>
+                        <a:buFontTx/>
+                        <a:buNone/>
+                        <a:tabLst/>
+                        <a:defRPr/>
+                      </a:pPr>
+                      <a:r>
+                        <a:rPr kumimoji="0" lang="en-US" sz="1600" b="1" i="0" u="none" strike="noStrike" kern="1200" cap="none" spc="0" normalizeH="0" baseline="0" noProof="0" dirty="0">
+                          <a:ln>
+                            <a:noFill/>
+                          </a:ln>
+                          <a:solidFill>
+                            <a:schemeClr val="tx1">
+                              <a:lumMod val="85000"/>
+                              <a:lumOff val="15000"/>
+                            </a:schemeClr>
+                          </a:solidFill>
+                          <a:effectLst/>
+                          <a:uLnTx/>
+                          <a:uFillTx/>
+                          <a:latin typeface="HCLTech Roobert" panose="020B0504030202060203" pitchFamily="34" charset="77"/>
+                          <a:ea typeface="+mn-ea"/>
+                          <a:cs typeface="HCLTech Roobert" panose="020B0504030202060203" pitchFamily="34" charset="77"/>
+                        </a:rPr>
+                        <a:t>GIT details &amp; working platform </a:t>
+                      </a:r>
+                    </a:p>
+                  </a:txBody>
+                  <a:tcPr marL="150781" marR="150781" marT="75390" marB="75390" anchor="ctr">
+                    <a:lnL w="12700" cap="flat" cmpd="sng" algn="ctr">
+                      <a:noFill/>
+                      <a:prstDash val="solid"/>
+                      <a:round/>
+                      <a:headEnd type="none" w="med" len="med"/>
+                      <a:tailEnd type="none" w="med" len="med"/>
+                    </a:lnL>
+                    <a:lnR w="12700" cap="flat" cmpd="sng" algn="ctr">
+                      <a:noFill/>
+                      <a:prstDash val="solid"/>
+                      <a:round/>
+                      <a:headEnd type="none" w="med" len="med"/>
+                      <a:tailEnd type="none" w="med" len="med"/>
+                    </a:lnR>
+                    <a:lnT w="12700" cap="flat" cmpd="sng" algn="ctr">
+                      <a:solidFill>
+                        <a:schemeClr val="bg1">
+                          <a:lumMod val="85000"/>
+                        </a:schemeClr>
+                      </a:solidFill>
+                      <a:prstDash val="solid"/>
+                      <a:round/>
+                      <a:headEnd type="none" w="med" len="med"/>
+                      <a:tailEnd type="none" w="med" len="med"/>
+                    </a:lnT>
+                    <a:lnB w="12700" cap="flat" cmpd="sng" algn="ctr">
+                      <a:solidFill>
+                        <a:schemeClr val="bg1">
+                          <a:lumMod val="85000"/>
+                        </a:schemeClr>
+                      </a:solidFill>
+                      <a:prstDash val="solid"/>
+                      <a:round/>
+                      <a:headEnd type="none" w="med" len="med"/>
+                      <a:tailEnd type="none" w="med" len="med"/>
+                    </a:lnB>
+                    <a:lnTlToBr w="12700" cmpd="sng">
+                      <a:noFill/>
+                      <a:prstDash val="solid"/>
+                    </a:lnTlToBr>
+                    <a:lnBlToTr w="12700" cmpd="sng">
+                      <a:noFill/>
+                      <a:prstDash val="solid"/>
+                    </a:lnBlToTr>
+                    <a:solidFill>
+                      <a:schemeClr val="accent1">
+                        <a:lumMod val="20000"/>
+                        <a:lumOff val="80000"/>
+                      </a:schemeClr>
+                    </a:solidFill>
+                  </a:tcPr>
+                </a:tc>
+                <a:extLst>
+                  <a:ext uri="{0D108BD9-81ED-4DB2-BD59-A6C34878D82A}">
+                    <a16:rowId xmlns:a16="http://schemas.microsoft.com/office/drawing/2014/main" val="1629832316"/>
+                  </a:ext>
+                </a:extLst>
+              </a:tr>
+              <a:tr h="639834">
+                <a:tc>
+                  <a:txBody>
+                    <a:bodyPr/>
+                    <a:lstStyle/>
+                    <a:p>
+                      <a:pPr marL="0" marR="0" lvl="0" indent="0" algn="ctr" defTabSz="914400" rtl="0" eaLnBrk="1" fontAlgn="auto" latinLnBrk="0" hangingPunct="1">
+                        <a:lnSpc>
+                          <a:spcPct val="100000"/>
+                        </a:lnSpc>
+                        <a:spcBef>
+                          <a:spcPts val="0"/>
+                        </a:spcBef>
+                        <a:spcAft>
+                          <a:spcPts val="0"/>
+                        </a:spcAft>
+                        <a:buClrTx/>
+                        <a:buSzTx/>
+                        <a:buFontTx/>
+                        <a:buNone/>
+                        <a:tabLst/>
+                        <a:defRPr/>
+                      </a:pPr>
+                      <a:r>
+                        <a:rPr kumimoji="0" lang="en-US" sz="2000" b="1" i="0" u="none" strike="noStrike" kern="1200" cap="none" spc="0" normalizeH="0" baseline="0" noProof="0">
+                          <a:ln>
+                            <a:noFill/>
+                          </a:ln>
+                          <a:solidFill>
+                            <a:schemeClr val="tx2"/>
+                          </a:solidFill>
+                          <a:effectLst/>
+                          <a:uLnTx/>
+                          <a:uFillTx/>
+                          <a:latin typeface="HCLTech Roobert" panose="020B0504030202060203" pitchFamily="34" charset="77"/>
+                          <a:ea typeface="+mn-ea"/>
+                          <a:cs typeface="HCLTech Roobert" panose="020B0504030202060203" pitchFamily="34" charset="77"/>
+                        </a:rPr>
+                        <a:t>3</a:t>
+                      </a:r>
+                    </a:p>
+                  </a:txBody>
+                  <a:tcPr marL="150781" marR="150781" marT="75390" marB="75390" anchor="ctr">
+                    <a:lnL w="12700" cap="flat" cmpd="sng" algn="ctr">
+                      <a:noFill/>
+                      <a:prstDash val="solid"/>
+                      <a:round/>
+                      <a:headEnd type="none" w="med" len="med"/>
+                      <a:tailEnd type="none" w="med" len="med"/>
+                    </a:lnL>
+                    <a:lnR w="12700" cap="flat" cmpd="sng" algn="ctr">
+                      <a:noFill/>
+                      <a:prstDash val="solid"/>
+                      <a:round/>
+                      <a:headEnd type="none" w="med" len="med"/>
+                      <a:tailEnd type="none" w="med" len="med"/>
+                    </a:lnR>
+                    <a:lnT w="12700" cap="flat" cmpd="sng" algn="ctr">
+                      <a:solidFill>
+                        <a:schemeClr val="bg1">
+                          <a:lumMod val="85000"/>
+                        </a:schemeClr>
+                      </a:solidFill>
+                      <a:prstDash val="solid"/>
+                      <a:round/>
+                      <a:headEnd type="none" w="med" len="med"/>
+                      <a:tailEnd type="none" w="med" len="med"/>
+                    </a:lnT>
+                    <a:lnB w="12700" cap="flat" cmpd="sng" algn="ctr">
+                      <a:solidFill>
+                        <a:schemeClr val="bg1">
+                          <a:lumMod val="85000"/>
+                        </a:schemeClr>
+                      </a:solidFill>
+                      <a:prstDash val="solid"/>
+                      <a:round/>
+                      <a:headEnd type="none" w="med" len="med"/>
+                      <a:tailEnd type="none" w="med" len="med"/>
+                    </a:lnB>
+                    <a:lnTlToBr w="12700" cmpd="sng">
+                      <a:noFill/>
+                      <a:prstDash val="solid"/>
+                    </a:lnTlToBr>
+                    <a:lnBlToTr w="12700" cmpd="sng">
+                      <a:noFill/>
+                      <a:prstDash val="solid"/>
+                    </a:lnBlToTr>
+                  </a:tcPr>
+                </a:tc>
+                <a:tc>
+                  <a:txBody>
+                    <a:bodyPr/>
+                    <a:lstStyle/>
+                    <a:p>
+                      <a:pPr marL="0" marR="0" lvl="0" indent="0" algn="l" defTabSz="914400" rtl="0" eaLnBrk="1" fontAlgn="auto" latinLnBrk="0" hangingPunct="1">
+                        <a:lnSpc>
+                          <a:spcPct val="100000"/>
+                        </a:lnSpc>
+                        <a:spcBef>
+                          <a:spcPts val="0"/>
+                        </a:spcBef>
+                        <a:spcAft>
+                          <a:spcPts val="0"/>
+                        </a:spcAft>
+                        <a:buClrTx/>
+                        <a:buSzTx/>
+                        <a:buFontTx/>
+                        <a:buNone/>
+                        <a:tabLst/>
+                        <a:defRPr/>
+                      </a:pPr>
+                      <a:r>
+                        <a:rPr kumimoji="0" lang="en-US" sz="1600" b="1" i="0" u="none" strike="noStrike" kern="1200" cap="none" spc="0" normalizeH="0" baseline="0" noProof="0" dirty="0">
+                          <a:ln>
+                            <a:noFill/>
+                          </a:ln>
+                          <a:solidFill>
+                            <a:schemeClr val="tx1">
+                              <a:lumMod val="85000"/>
+                              <a:lumOff val="15000"/>
+                            </a:schemeClr>
+                          </a:solidFill>
+                          <a:effectLst/>
+                          <a:uLnTx/>
+                          <a:uFillTx/>
+                          <a:latin typeface="HCLTech Roobert" panose="020B0504030202060203" pitchFamily="34" charset="77"/>
+                          <a:ea typeface="+mn-ea"/>
+                          <a:cs typeface="HCLTech Roobert" panose="020B0504030202060203" pitchFamily="34" charset="77"/>
+                        </a:rPr>
+                        <a:t>API Specification</a:t>
+                      </a:r>
+                    </a:p>
+                  </a:txBody>
+                  <a:tcPr marL="150781" marR="150781" marT="75390" marB="75390" anchor="ctr">
+                    <a:lnL w="12700" cap="flat" cmpd="sng" algn="ctr">
+                      <a:noFill/>
+                      <a:prstDash val="solid"/>
+                      <a:round/>
+                      <a:headEnd type="none" w="med" len="med"/>
+                      <a:tailEnd type="none" w="med" len="med"/>
+                    </a:lnL>
+                    <a:lnR w="12700" cap="flat" cmpd="sng" algn="ctr">
+                      <a:noFill/>
+                      <a:prstDash val="solid"/>
+                      <a:round/>
+                      <a:headEnd type="none" w="med" len="med"/>
+                      <a:tailEnd type="none" w="med" len="med"/>
+                    </a:lnR>
+                    <a:lnT w="12700" cap="flat" cmpd="sng" algn="ctr">
+                      <a:solidFill>
+                        <a:schemeClr val="bg1">
+                          <a:lumMod val="85000"/>
+                        </a:schemeClr>
+                      </a:solidFill>
+                      <a:prstDash val="solid"/>
+                      <a:round/>
+                      <a:headEnd type="none" w="med" len="med"/>
+                      <a:tailEnd type="none" w="med" len="med"/>
+                    </a:lnT>
+                    <a:lnB w="12700" cap="flat" cmpd="sng" algn="ctr">
+                      <a:solidFill>
+                        <a:schemeClr val="bg1">
+                          <a:lumMod val="85000"/>
+                        </a:schemeClr>
+                      </a:solidFill>
+                      <a:prstDash val="solid"/>
+                      <a:round/>
+                      <a:headEnd type="none" w="med" len="med"/>
+                      <a:tailEnd type="none" w="med" len="med"/>
+                    </a:lnB>
+                    <a:lnTlToBr w="12700" cmpd="sng">
+                      <a:noFill/>
+                      <a:prstDash val="solid"/>
+                    </a:lnTlToBr>
+                    <a:lnBlToTr w="12700" cmpd="sng">
+                      <a:noFill/>
+                      <a:prstDash val="solid"/>
+                    </a:lnBlToTr>
+                  </a:tcPr>
+                </a:tc>
+                <a:extLst>
+                  <a:ext uri="{0D108BD9-81ED-4DB2-BD59-A6C34878D82A}">
+                    <a16:rowId xmlns:a16="http://schemas.microsoft.com/office/drawing/2014/main" val="305017611"/>
+                  </a:ext>
+                </a:extLst>
+              </a:tr>
+              <a:tr h="639834">
+                <a:tc>
+                  <a:txBody>
+                    <a:bodyPr/>
+                    <a:lstStyle/>
+                    <a:p>
+                      <a:pPr marL="0" marR="0" lvl="0" indent="0" algn="ctr" defTabSz="914400" rtl="0" eaLnBrk="1" fontAlgn="auto" latinLnBrk="0" hangingPunct="1">
+                        <a:lnSpc>
+                          <a:spcPct val="100000"/>
+                        </a:lnSpc>
+                        <a:spcBef>
+                          <a:spcPts val="0"/>
+                        </a:spcBef>
+                        <a:spcAft>
+                          <a:spcPts val="0"/>
+                        </a:spcAft>
+                        <a:buClrTx/>
+                        <a:buSzTx/>
+                        <a:buFontTx/>
+                        <a:buNone/>
+                        <a:tabLst/>
+                        <a:defRPr/>
+                      </a:pPr>
+                      <a:r>
+                        <a:rPr kumimoji="0" lang="en-US" sz="2000" b="1" i="0" u="none" strike="noStrike" kern="1200" cap="none" spc="0" normalizeH="0" baseline="0" noProof="0">
+                          <a:ln>
+                            <a:noFill/>
+                          </a:ln>
+                          <a:solidFill>
+                            <a:schemeClr val="tx2"/>
+                          </a:solidFill>
+                          <a:effectLst/>
+                          <a:uLnTx/>
+                          <a:uFillTx/>
+                          <a:latin typeface="HCLTech Roobert" panose="020B0504030202060203" pitchFamily="34" charset="77"/>
+                          <a:ea typeface="+mn-ea"/>
+                          <a:cs typeface="HCLTech Roobert" panose="020B0504030202060203" pitchFamily="34" charset="77"/>
+                        </a:rPr>
+                        <a:t>4</a:t>
+                      </a:r>
+                    </a:p>
+                  </a:txBody>
+                  <a:tcPr marL="150781" marR="150781" marT="75390" marB="75390" anchor="ctr">
+                    <a:lnL w="12700" cap="flat" cmpd="sng" algn="ctr">
+                      <a:noFill/>
+                      <a:prstDash val="solid"/>
+                      <a:round/>
+                      <a:headEnd type="none" w="med" len="med"/>
+                      <a:tailEnd type="none" w="med" len="med"/>
+                    </a:lnL>
+                    <a:lnR w="12700" cap="flat" cmpd="sng" algn="ctr">
+                      <a:noFill/>
+                      <a:prstDash val="solid"/>
+                      <a:round/>
+                      <a:headEnd type="none" w="med" len="med"/>
+                      <a:tailEnd type="none" w="med" len="med"/>
+                    </a:lnR>
+                    <a:lnT w="12700" cap="flat" cmpd="sng" algn="ctr">
+                      <a:solidFill>
+                        <a:schemeClr val="bg1">
+                          <a:lumMod val="85000"/>
+                        </a:schemeClr>
+                      </a:solidFill>
+                      <a:prstDash val="solid"/>
+                      <a:round/>
+                      <a:headEnd type="none" w="med" len="med"/>
+                      <a:tailEnd type="none" w="med" len="med"/>
+                    </a:lnT>
+                    <a:lnB w="12700" cap="flat" cmpd="sng" algn="ctr">
+                      <a:solidFill>
+                        <a:schemeClr val="bg1">
+                          <a:lumMod val="85000"/>
+                        </a:schemeClr>
+                      </a:solidFill>
+                      <a:prstDash val="solid"/>
+                      <a:round/>
+                      <a:headEnd type="none" w="med" len="med"/>
+                      <a:tailEnd type="none" w="med" len="med"/>
+                    </a:lnB>
+                    <a:lnTlToBr w="12700" cmpd="sng">
+                      <a:noFill/>
+                      <a:prstDash val="solid"/>
+                    </a:lnTlToBr>
+                    <a:lnBlToTr w="12700" cmpd="sng">
+                      <a:noFill/>
+                      <a:prstDash val="solid"/>
+                    </a:lnBlToTr>
+                    <a:solidFill>
+                      <a:schemeClr val="accent1">
+                        <a:lumMod val="20000"/>
+                        <a:lumOff val="80000"/>
+                      </a:schemeClr>
+                    </a:solidFill>
+                  </a:tcPr>
+                </a:tc>
+                <a:tc>
+                  <a:txBody>
+                    <a:bodyPr/>
+                    <a:lstStyle/>
+                    <a:p>
+                      <a:pPr marL="0" marR="0" lvl="0" indent="0" algn="l" defTabSz="914400" rtl="0" eaLnBrk="1" fontAlgn="auto" latinLnBrk="0" hangingPunct="1">
+                        <a:lnSpc>
+                          <a:spcPct val="100000"/>
+                        </a:lnSpc>
+                        <a:spcBef>
+                          <a:spcPts val="0"/>
+                        </a:spcBef>
+                        <a:spcAft>
+                          <a:spcPts val="0"/>
+                        </a:spcAft>
+                        <a:buClrTx/>
+                        <a:buSzTx/>
+                        <a:buFontTx/>
+                        <a:buNone/>
+                        <a:tabLst/>
+                        <a:defRPr/>
+                      </a:pPr>
+                      <a:r>
+                        <a:rPr lang="en-US" sz="1600" b="1" dirty="0">
+                          <a:solidFill>
+                            <a:schemeClr val="tx1"/>
+                          </a:solidFill>
+                          <a:latin typeface="HCLTech Roobert" panose="020B0504030202060203" pitchFamily="34" charset="0"/>
+                          <a:cs typeface="HCLTech Roobert" panose="020B0504030202060203" pitchFamily="34" charset="0"/>
+                        </a:rPr>
+                        <a:t>AI Working Journal</a:t>
+                      </a:r>
+                      <a:endParaRPr kumimoji="0" lang="en-US" sz="1600" b="1" i="0" u="none" strike="noStrike" kern="1200" cap="none" spc="0" normalizeH="0" baseline="0" noProof="0" dirty="0">
+                        <a:ln>
+                          <a:noFill/>
+                        </a:ln>
+                        <a:solidFill>
+                          <a:schemeClr val="tx1">
+                            <a:lumMod val="85000"/>
+                            <a:lumOff val="15000"/>
+                          </a:schemeClr>
+                        </a:solidFill>
+                        <a:effectLst/>
+                        <a:uLnTx/>
+                        <a:uFillTx/>
+                        <a:latin typeface="HCLTech Roobert" panose="020B0504030202060203" pitchFamily="34" charset="77"/>
+                        <a:ea typeface="+mn-ea"/>
+                        <a:cs typeface="HCLTech Roobert" panose="020B0504030202060203" pitchFamily="34" charset="77"/>
+                      </a:endParaRPr>
+                    </a:p>
+                  </a:txBody>
+                  <a:tcPr marL="150781" marR="150781" marT="75390" marB="75390" anchor="ctr">
+                    <a:lnL w="12700" cap="flat" cmpd="sng" algn="ctr">
+                      <a:noFill/>
+                      <a:prstDash val="solid"/>
+                      <a:round/>
+                      <a:headEnd type="none" w="med" len="med"/>
+                      <a:tailEnd type="none" w="med" len="med"/>
+                    </a:lnL>
+                    <a:lnR w="12700" cap="flat" cmpd="sng" algn="ctr">
+                      <a:noFill/>
+                      <a:prstDash val="solid"/>
+                      <a:round/>
+                      <a:headEnd type="none" w="med" len="med"/>
+                      <a:tailEnd type="none" w="med" len="med"/>
+                    </a:lnR>
+                    <a:lnT w="12700" cap="flat" cmpd="sng" algn="ctr">
+                      <a:solidFill>
+                        <a:schemeClr val="bg1">
+                          <a:lumMod val="85000"/>
+                        </a:schemeClr>
+                      </a:solidFill>
+                      <a:prstDash val="solid"/>
+                      <a:round/>
+                      <a:headEnd type="none" w="med" len="med"/>
+                      <a:tailEnd type="none" w="med" len="med"/>
+                    </a:lnT>
+                    <a:lnB w="12700" cap="flat" cmpd="sng" algn="ctr">
+                      <a:solidFill>
+                        <a:schemeClr val="bg1">
+                          <a:lumMod val="85000"/>
+                        </a:schemeClr>
+                      </a:solidFill>
+                      <a:prstDash val="solid"/>
+                      <a:round/>
+                      <a:headEnd type="none" w="med" len="med"/>
+                      <a:tailEnd type="none" w="med" len="med"/>
+                    </a:lnB>
+                    <a:lnTlToBr w="12700" cmpd="sng">
+                      <a:noFill/>
+                      <a:prstDash val="solid"/>
+                    </a:lnTlToBr>
+                    <a:lnBlToTr w="12700" cmpd="sng">
+                      <a:noFill/>
+                      <a:prstDash val="solid"/>
+                    </a:lnBlToTr>
+                    <a:solidFill>
+                      <a:schemeClr val="accent1">
+                        <a:lumMod val="20000"/>
+                        <a:lumOff val="80000"/>
+                      </a:schemeClr>
+                    </a:solidFill>
+                  </a:tcPr>
+                </a:tc>
+                <a:extLst>
+                  <a:ext uri="{0D108BD9-81ED-4DB2-BD59-A6C34878D82A}">
+                    <a16:rowId xmlns:a16="http://schemas.microsoft.com/office/drawing/2014/main" val="2791932003"/>
+                  </a:ext>
+                </a:extLst>
+              </a:tr>
+              <a:tr h="639834">
+                <a:tc>
+                  <a:txBody>
+                    <a:bodyPr/>
+                    <a:lstStyle/>
+                    <a:p>
+                      <a:pPr marL="0" marR="0" lvl="0" indent="0" algn="ctr" defTabSz="914400" rtl="0" eaLnBrk="1" fontAlgn="auto" latinLnBrk="0" hangingPunct="1">
+                        <a:lnSpc>
+                          <a:spcPct val="100000"/>
+                        </a:lnSpc>
+                        <a:spcBef>
+                          <a:spcPts val="0"/>
+                        </a:spcBef>
+                        <a:spcAft>
+                          <a:spcPts val="0"/>
+                        </a:spcAft>
+                        <a:buClrTx/>
+                        <a:buSzTx/>
+                        <a:buFontTx/>
+                        <a:buNone/>
+                        <a:tabLst/>
+                        <a:defRPr/>
+                      </a:pPr>
+                      <a:r>
+                        <a:rPr kumimoji="0" lang="en-US" sz="2000" b="1" i="0" u="none" strike="noStrike" kern="1200" cap="none" spc="0" normalizeH="0" baseline="0" noProof="0" dirty="0">
+                          <a:ln>
+                            <a:noFill/>
+                          </a:ln>
+                          <a:solidFill>
+                            <a:schemeClr val="tx2"/>
+                          </a:solidFill>
+                          <a:effectLst/>
+                          <a:uLnTx/>
+                          <a:uFillTx/>
+                          <a:latin typeface="HCLTech Roobert" panose="020B0504030202060203" pitchFamily="34" charset="77"/>
+                          <a:ea typeface="+mn-ea"/>
+                          <a:cs typeface="HCLTech Roobert" panose="020B0504030202060203" pitchFamily="34" charset="77"/>
+                        </a:rPr>
+                        <a:t>5</a:t>
+                      </a:r>
+                    </a:p>
+                  </a:txBody>
+                  <a:tcPr marL="150781" marR="150781" marT="75390" marB="75390" anchor="ctr">
+                    <a:lnL w="12700" cap="flat" cmpd="sng" algn="ctr">
+                      <a:noFill/>
+                      <a:prstDash val="solid"/>
+                      <a:round/>
+                      <a:headEnd type="none" w="med" len="med"/>
+                      <a:tailEnd type="none" w="med" len="med"/>
+                    </a:lnL>
+                    <a:lnR w="12700" cap="flat" cmpd="sng" algn="ctr">
+                      <a:noFill/>
+                      <a:prstDash val="solid"/>
+                      <a:round/>
+                      <a:headEnd type="none" w="med" len="med"/>
+                      <a:tailEnd type="none" w="med" len="med"/>
+                    </a:lnR>
+                    <a:lnT w="12700" cap="flat" cmpd="sng" algn="ctr">
+                      <a:solidFill>
+                        <a:schemeClr val="bg1">
+                          <a:lumMod val="85000"/>
+                        </a:schemeClr>
+                      </a:solidFill>
+                      <a:prstDash val="solid"/>
+                      <a:round/>
+                      <a:headEnd type="none" w="med" len="med"/>
+                      <a:tailEnd type="none" w="med" len="med"/>
+                    </a:lnT>
+                    <a:lnB w="12700" cap="flat" cmpd="sng" algn="ctr">
+                      <a:solidFill>
+                        <a:schemeClr val="bg1">
+                          <a:lumMod val="85000"/>
+                        </a:schemeClr>
+                      </a:solidFill>
+                      <a:prstDash val="solid"/>
+                      <a:round/>
+                      <a:headEnd type="none" w="med" len="med"/>
+                      <a:tailEnd type="none" w="med" len="med"/>
+                    </a:lnB>
+                    <a:lnTlToBr w="12700" cmpd="sng">
+                      <a:noFill/>
+                      <a:prstDash val="solid"/>
+                    </a:lnTlToBr>
+                    <a:lnBlToTr w="12700" cmpd="sng">
+                      <a:noFill/>
+                      <a:prstDash val="solid"/>
+                    </a:lnBlToTr>
+                    <a:solidFill>
+                      <a:schemeClr val="accent1">
+                        <a:lumMod val="20000"/>
+                        <a:lumOff val="80000"/>
+                      </a:schemeClr>
+                    </a:solidFill>
+                  </a:tcPr>
+                </a:tc>
+                <a:tc>
+                  <a:txBody>
+                    <a:bodyPr/>
+                    <a:lstStyle/>
+                    <a:p>
+                      <a:pPr marL="0" marR="0" lvl="0" indent="0" algn="l" defTabSz="914400" rtl="0" eaLnBrk="1" fontAlgn="auto" latinLnBrk="0" hangingPunct="1">
+                        <a:lnSpc>
+                          <a:spcPct val="100000"/>
+                        </a:lnSpc>
+                        <a:spcBef>
+                          <a:spcPts val="0"/>
+                        </a:spcBef>
+                        <a:spcAft>
+                          <a:spcPts val="0"/>
+                        </a:spcAft>
+                        <a:buClrTx/>
+                        <a:buSzTx/>
+                        <a:buFontTx/>
+                        <a:buNone/>
+                        <a:tabLst/>
+                        <a:defRPr/>
+                      </a:pPr>
+                      <a:r>
+                        <a:rPr kumimoji="0" lang="en-US" sz="1600" b="1" i="0" u="none" strike="noStrike" kern="1200" cap="none" spc="0" normalizeH="0" baseline="0" noProof="0" dirty="0">
+                          <a:ln>
+                            <a:noFill/>
+                          </a:ln>
+                          <a:solidFill>
+                            <a:schemeClr val="tx1">
+                              <a:lumMod val="85000"/>
+                              <a:lumOff val="15000"/>
+                            </a:schemeClr>
+                          </a:solidFill>
+                          <a:effectLst/>
+                          <a:uLnTx/>
+                          <a:uFillTx/>
+                          <a:latin typeface="HCLTech Roobert" panose="020B0504030202060203" pitchFamily="34" charset="77"/>
+                          <a:ea typeface="+mn-ea"/>
+                          <a:cs typeface="HCLTech Roobert" panose="020B0504030202060203" pitchFamily="34" charset="77"/>
+                        </a:rPr>
+                        <a:t>Testing Strategy</a:t>
+                      </a:r>
+                    </a:p>
+                  </a:txBody>
+                  <a:tcPr marL="150781" marR="150781" marT="75390" marB="75390" anchor="ctr">
+                    <a:lnL w="12700" cap="flat" cmpd="sng" algn="ctr">
+                      <a:noFill/>
+                      <a:prstDash val="solid"/>
+                      <a:round/>
+                      <a:headEnd type="none" w="med" len="med"/>
+                      <a:tailEnd type="none" w="med" len="med"/>
+                    </a:lnL>
+                    <a:lnR w="12700" cap="flat" cmpd="sng" algn="ctr">
+                      <a:noFill/>
+                      <a:prstDash val="solid"/>
+                      <a:round/>
+                      <a:headEnd type="none" w="med" len="med"/>
+                      <a:tailEnd type="none" w="med" len="med"/>
+                    </a:lnR>
+                    <a:lnT w="12700" cap="flat" cmpd="sng" algn="ctr">
+                      <a:solidFill>
+                        <a:schemeClr val="bg1">
+                          <a:lumMod val="85000"/>
+                        </a:schemeClr>
+                      </a:solidFill>
+                      <a:prstDash val="solid"/>
+                      <a:round/>
+                      <a:headEnd type="none" w="med" len="med"/>
+                      <a:tailEnd type="none" w="med" len="med"/>
+                    </a:lnT>
+                    <a:lnB w="12700" cap="flat" cmpd="sng" algn="ctr">
+                      <a:solidFill>
+                        <a:schemeClr val="bg1">
+                          <a:lumMod val="85000"/>
+                        </a:schemeClr>
+                      </a:solidFill>
+                      <a:prstDash val="solid"/>
+                      <a:round/>
+                      <a:headEnd type="none" w="med" len="med"/>
+                      <a:tailEnd type="none" w="med" len="med"/>
+                    </a:lnB>
+                    <a:lnTlToBr w="12700" cmpd="sng">
+                      <a:noFill/>
+                      <a:prstDash val="solid"/>
+                    </a:lnTlToBr>
+                    <a:lnBlToTr w="12700" cmpd="sng">
+                      <a:noFill/>
+                      <a:prstDash val="solid"/>
+                    </a:lnBlToTr>
+                    <a:solidFill>
+                      <a:schemeClr val="accent1">
+                        <a:lumMod val="20000"/>
+                        <a:lumOff val="80000"/>
+                      </a:schemeClr>
+                    </a:solidFill>
+                  </a:tcPr>
+                </a:tc>
+                <a:extLst>
+                  <a:ext uri="{0D108BD9-81ED-4DB2-BD59-A6C34878D82A}">
+                    <a16:rowId xmlns:a16="http://schemas.microsoft.com/office/drawing/2014/main" val="2207156234"/>
+                  </a:ext>
+                </a:extLst>
+              </a:tr>
+            </a:tbl>
+          </a:graphicData>
+        </a:graphic>
+      </p:graphicFrame>
+      <p:sp>
+        <p:nvSpPr>
+          <p:cNvPr id="6" name="Text Placeholder 3">
+            <a:extLst>
+              <a:ext uri="{FF2B5EF4-FFF2-40B4-BE49-F238E27FC236}">
+                <a16:creationId xmlns:a16="http://schemas.microsoft.com/office/drawing/2014/main" id="{53E8C3DB-A52A-0E2F-A6B4-4DE5BB4A2C96}"/>
+              </a:ext>
+            </a:extLst>
+          </p:cNvPr>
+          <p:cNvSpPr txBox="1">
+            <a:spLocks/>
+          </p:cNvSpPr>
+          <p:nvPr/>
+        </p:nvSpPr>
+        <p:spPr>
+          <a:xfrm>
+            <a:off x="5675724" y="1653773"/>
+            <a:ext cx="5574167" cy="785743"/>
+          </a:xfrm>
+          <a:prstGeom prst="rect">
+            <a:avLst/>
+          </a:prstGeom>
+        </p:spPr>
+        <p:txBody>
+          <a:bodyPr vert="horz" lIns="91440" tIns="45720" rIns="91440" bIns="45720" rtlCol="0" anchor="ctr">
+            <a:noAutofit/>
+          </a:bodyPr>
+          <a:lstStyle>
+            <a:lvl1pPr marL="0" indent="0" algn="l" defTabSz="914400" rtl="0" eaLnBrk="1" latinLnBrk="0" hangingPunct="1">
+              <a:lnSpc>
+                <a:spcPct val="100000"/>
+              </a:lnSpc>
+              <a:spcBef>
+                <a:spcPts val="0"/>
+              </a:spcBef>
+              <a:buFont typeface="Arial" panose="020B0604020202020204" pitchFamily="34" charset="0"/>
+              <a:buNone/>
+              <a:defRPr sz="1800" b="1" kern="1200">
+                <a:solidFill>
+                  <a:schemeClr val="tx2"/>
+                </a:solidFill>
+                <a:latin typeface="HCLTech Roobert" pitchFamily="50" charset="0"/>
+                <a:ea typeface="+mn-ea"/>
+                <a:cs typeface="+mn-cs"/>
+              </a:defRPr>
+            </a:lvl1pPr>
+            <a:lvl2pPr marL="685800" indent="-228600" algn="l" defTabSz="914400" rtl="0" eaLnBrk="1" latinLnBrk="0" hangingPunct="1">
+              <a:lnSpc>
+                <a:spcPct val="90000"/>
+              </a:lnSpc>
+              <a:spcBef>
+                <a:spcPts val="500"/>
+              </a:spcBef>
+              <a:buFont typeface="Arial" panose="020B0604020202020204" pitchFamily="34" charset="0"/>
+              <a:buChar char="•"/>
+              <a:defRPr sz="2400" kern="1200">
+                <a:solidFill>
+                  <a:schemeClr val="tx1"/>
+                </a:solidFill>
+                <a:latin typeface="HCLTech Roobert" pitchFamily="50" charset="0"/>
+                <a:ea typeface="+mn-ea"/>
+                <a:cs typeface="+mn-cs"/>
+              </a:defRPr>
+            </a:lvl2pPr>
+            <a:lvl3pPr marL="1143000" indent="-228600" algn="l" defTabSz="914400" rtl="0" eaLnBrk="1" latinLnBrk="0" hangingPunct="1">
+              <a:lnSpc>
+                <a:spcPct val="90000"/>
+              </a:lnSpc>
+              <a:spcBef>
+                <a:spcPts val="500"/>
+              </a:spcBef>
+              <a:buFont typeface="Arial" panose="020B0604020202020204" pitchFamily="34" charset="0"/>
+              <a:buChar char="•"/>
+              <a:defRPr sz="2000" kern="1200">
+                <a:solidFill>
+                  <a:schemeClr val="tx1"/>
+                </a:solidFill>
+                <a:latin typeface="HCLTech Roobert" pitchFamily="50" charset="0"/>
+                <a:ea typeface="+mn-ea"/>
+                <a:cs typeface="+mn-cs"/>
+              </a:defRPr>
+            </a:lvl3pPr>
+            <a:lvl4pPr marL="1600200" indent="-228600" algn="l" defTabSz="914400" rtl="0" eaLnBrk="1" latinLnBrk="0" hangingPunct="1">
+              <a:lnSpc>
+                <a:spcPct val="90000"/>
+              </a:lnSpc>
+              <a:spcBef>
+                <a:spcPts val="500"/>
+              </a:spcBef>
+              <a:buFont typeface="Arial" panose="020B0604020202020204" pitchFamily="34" charset="0"/>
+              <a:buChar char="•"/>
+              <a:defRPr sz="1800" kern="1200">
+                <a:solidFill>
+                  <a:schemeClr val="tx1"/>
+                </a:solidFill>
+                <a:latin typeface="HCLTech Roobert" pitchFamily="50" charset="0"/>
+                <a:ea typeface="+mn-ea"/>
+                <a:cs typeface="+mn-cs"/>
+              </a:defRPr>
+            </a:lvl4pPr>
+            <a:lvl5pPr marL="2057400" indent="-228600" algn="l" defTabSz="914400" rtl="0" eaLnBrk="1" latinLnBrk="0" hangingPunct="1">
+              <a:lnSpc>
+                <a:spcPct val="90000"/>
+              </a:lnSpc>
+              <a:spcBef>
+                <a:spcPts val="500"/>
+              </a:spcBef>
+              <a:buFont typeface="Arial" panose="020B0604020202020204" pitchFamily="34" charset="0"/>
+              <a:buChar char="•"/>
+              <a:defRPr sz="1800" kern="1200">
+                <a:solidFill>
+                  <a:schemeClr val="tx1"/>
+                </a:solidFill>
+                <a:latin typeface="HCLTech Roobert" pitchFamily="50" charset="0"/>
+                <a:ea typeface="+mn-ea"/>
+                <a:cs typeface="+mn-cs"/>
+              </a:defRPr>
+            </a:lvl5pPr>
+            <a:lvl6pPr marL="2514600" indent="-228600" algn="l" defTabSz="914400" rtl="0" eaLnBrk="1" latinLnBrk="0" hangingPunct="1">
+              <a:lnSpc>
+                <a:spcPct val="90000"/>
+              </a:lnSpc>
+              <a:spcBef>
+                <a:spcPts val="500"/>
+              </a:spcBef>
+              <a:buFont typeface="Arial" panose="020B0604020202020204" pitchFamily="34" charset="0"/>
+              <a:buChar char="•"/>
+              <a:defRPr sz="1800" kern="1200">
+                <a:solidFill>
+                  <a:schemeClr val="tx1"/>
+                </a:solidFill>
+                <a:latin typeface="+mn-lt"/>
+                <a:ea typeface="+mn-ea"/>
+                <a:cs typeface="+mn-cs"/>
+              </a:defRPr>
+            </a:lvl6pPr>
+            <a:lvl7pPr marL="2971800" indent="-228600" algn="l" defTabSz="914400" rtl="0" eaLnBrk="1" latinLnBrk="0" hangingPunct="1">
+              <a:lnSpc>
+                <a:spcPct val="90000"/>
+              </a:lnSpc>
+              <a:spcBef>
+                <a:spcPts val="500"/>
+              </a:spcBef>
+              <a:buFont typeface="Arial" panose="020B0604020202020204" pitchFamily="34" charset="0"/>
+              <a:buChar char="•"/>
+              <a:defRPr sz="1800" kern="1200">
+                <a:solidFill>
+                  <a:schemeClr val="tx1"/>
+                </a:solidFill>
+                <a:latin typeface="+mn-lt"/>
+                <a:ea typeface="+mn-ea"/>
+                <a:cs typeface="+mn-cs"/>
+              </a:defRPr>
+            </a:lvl7pPr>
+            <a:lvl8pPr marL="3429000" indent="-228600" algn="l" defTabSz="914400" rtl="0" eaLnBrk="1" latinLnBrk="0" hangingPunct="1">
+              <a:lnSpc>
+                <a:spcPct val="90000"/>
+              </a:lnSpc>
+              <a:spcBef>
+                <a:spcPts val="500"/>
+              </a:spcBef>
+              <a:buFont typeface="Arial" panose="020B0604020202020204" pitchFamily="34" charset="0"/>
+              <a:buChar char="•"/>
+              <a:defRPr sz="1800" kern="1200">
+                <a:solidFill>
+                  <a:schemeClr val="tx1"/>
+                </a:solidFill>
+                <a:latin typeface="+mn-lt"/>
+                <a:ea typeface="+mn-ea"/>
+                <a:cs typeface="+mn-cs"/>
+              </a:defRPr>
+            </a:lvl8pPr>
+            <a:lvl9pPr marL="3886200" indent="-228600" algn="l" defTabSz="914400" rtl="0" eaLnBrk="1" latinLnBrk="0" hangingPunct="1">
+              <a:lnSpc>
+                <a:spcPct val="90000"/>
+              </a:lnSpc>
+              <a:spcBef>
+                <a:spcPts val="500"/>
+              </a:spcBef>
+              <a:buFont typeface="Arial" panose="020B0604020202020204" pitchFamily="34" charset="0"/>
+              <a:buChar char="•"/>
+              <a:defRPr sz="1800" kern="1200">
+                <a:solidFill>
+                  <a:schemeClr val="tx1"/>
+                </a:solidFill>
+                <a:latin typeface="+mn-lt"/>
+                <a:ea typeface="+mn-ea"/>
+                <a:cs typeface="+mn-cs"/>
+              </a:defRPr>
+            </a:lvl9pPr>
+          </a:lstStyle>
+          <a:p>
+            <a:pPr marL="0" marR="0" lvl="0" indent="0" algn="l" defTabSz="914400" rtl="0" eaLnBrk="1" fontAlgn="auto" latinLnBrk="0" hangingPunct="1">
+              <a:lnSpc>
+                <a:spcPct val="100000"/>
+              </a:lnSpc>
+              <a:spcBef>
+                <a:spcPts val="0"/>
+              </a:spcBef>
+              <a:spcAft>
+                <a:spcPts val="0"/>
+              </a:spcAft>
+              <a:buClrTx/>
+              <a:buSzTx/>
+              <a:buFont typeface="Arial" panose="020B0604020202020204" pitchFamily="34" charset="0"/>
+              <a:buNone/>
+              <a:tabLst/>
+              <a:defRPr/>
+            </a:pPr>
+            <a:endParaRPr kumimoji="0" lang="en-US" sz="1800" b="1" i="0" u="none" strike="noStrike" kern="1200" cap="none" spc="0" normalizeH="0" baseline="0" noProof="0">
+              <a:ln>
+                <a:noFill/>
+              </a:ln>
+              <a:solidFill>
+                <a:srgbClr val="5F1EBE"/>
+              </a:solidFill>
+              <a:effectLst/>
+              <a:uLnTx/>
+              <a:uFillTx/>
+              <a:latin typeface="+mj-lt"/>
+            </a:endParaRPr>
+          </a:p>
+        </p:txBody>
+      </p:sp>
+      <p:sp>
+        <p:nvSpPr>
+          <p:cNvPr id="7" name="TextBox 6">
+            <a:extLst>
+              <a:ext uri="{FF2B5EF4-FFF2-40B4-BE49-F238E27FC236}">
+                <a16:creationId xmlns:a16="http://schemas.microsoft.com/office/drawing/2014/main" id="{C4499E65-74E8-3872-EF1D-6AE5BECF0B6E}"/>
+              </a:ext>
+            </a:extLst>
+          </p:cNvPr>
           <p:cNvSpPr txBox="1"/>
           <p:nvPr/>
         </p:nvSpPr>
         <p:spPr>
           <a:xfrm>
-            <a:off x="548640" y="365760"/>
-            <a:ext cx="11064240" cy="822960"/>
+            <a:off x="4432151" y="245690"/>
+            <a:ext cx="4362289" cy="584775"/>
           </a:xfrm>
           <a:prstGeom prst="rect">
             <a:avLst/>
@@ -3214,117 +6250,85 @@
           <a:noFill/>
         </p:spPr>
         <p:txBody>
-          <a:bodyPr wrap="none">
+          <a:bodyPr wrap="square" rtlCol="0">
             <a:spAutoFit/>
           </a:bodyPr>
           <a:lstStyle/>
           <a:p>
-            <a:pPr>
-              <a:defRPr sz="2600" b="1">
-                <a:solidFill>
-                  <a:srgbClr val="006D77"/>
-                </a:solidFill>
-              </a:defRPr>
+            <a:pPr marL="0" marR="0" lvl="0" indent="0" algn="l" defTabSz="914400" rtl="0" eaLnBrk="1" fontAlgn="auto" latinLnBrk="0" hangingPunct="1">
+              <a:lnSpc>
+                <a:spcPct val="100000"/>
+              </a:lnSpc>
+              <a:spcBef>
+                <a:spcPts val="0"/>
+              </a:spcBef>
+              <a:spcAft>
+                <a:spcPts val="0"/>
+              </a:spcAft>
+              <a:buClrTx/>
+              <a:buSzTx/>
+              <a:buFontTx/>
+              <a:buNone/>
+              <a:tabLst/>
+              <a:defRPr/>
             </a:pPr>
             <a:r>
-              <a:t>Summary</a:t>
-            </a:r>
-          </a:p>
-        </p:txBody>
-      </p:sp>
-      <p:sp>
-        <p:nvSpPr>
-          <p:cNvPr id="3" name="TextBox 2"/>
-          <p:cNvSpPr txBox="1"/>
-          <p:nvPr/>
-        </p:nvSpPr>
-        <p:spPr>
-          <a:xfrm>
-            <a:off x="731520" y="1325880"/>
-            <a:ext cx="10881360" cy="5212080"/>
-          </a:xfrm>
-          <a:prstGeom prst="rect">
-            <a:avLst/>
-          </a:prstGeom>
-          <a:noFill/>
-        </p:spPr>
-        <p:txBody>
-          <a:bodyPr wrap="square">
-            <a:spAutoFit/>
-          </a:bodyPr>
-          <a:lstStyle/>
-          <a:p>
-            <a:pPr>
-              <a:spcAft>
-                <a:spcPts val="500"/>
-              </a:spcAft>
-              <a:defRPr sz="1800">
-                <a:solidFill>
-                  <a:srgbClr val="222222"/>
-                </a:solidFill>
-              </a:defRPr>
-            </a:pPr>
-            <a:r>
-              <a:t>- Production-grade BFF: SOLID, clean (hexagonal) architecture, 12-factor, contract-first</a:t>
-            </a:r>
-          </a:p>
-          <a:p>
-            <a:pPr>
-              <a:spcAft>
-                <a:spcPts val="500"/>
-              </a:spcAft>
-              <a:defRPr sz="1800">
-                <a:solidFill>
-                  <a:srgbClr val="222222"/>
-                </a:solidFill>
-              </a:defRPr>
-            </a:pPr>
-            <a:r>
-              <a:t>- Cross-cutting covered: caching, logging (no PII), error handling, health checks, externalised config</a:t>
-            </a:r>
-          </a:p>
-          <a:p>
-            <a:pPr>
-              <a:spcAft>
-                <a:spcPts val="500"/>
-              </a:spcAft>
-              <a:defRPr sz="1800">
-                <a:solidFill>
-                  <a:srgbClr val="222222"/>
-                </a:solidFill>
-              </a:defRPr>
-            </a:pPr>
-            <a:r>
-              <a:t>- Tested (38 + load), coverage-gated, performance-gated, CI/CD to GHCR with supply-chain hardening</a:t>
-            </a:r>
-          </a:p>
-          <a:p>
-            <a:pPr>
-              <a:spcAft>
-                <a:spcPts val="500"/>
-              </a:spcAft>
-              <a:defRPr sz="1800">
-                <a:solidFill>
-                  <a:srgbClr val="222222"/>
-                </a:solidFill>
-              </a:defRPr>
-            </a:pPr>
-            <a:r>
-              <a:t>- Repo: github.com/meetravig-collab/InsurancePolicyListDemo  (branch: dev)</a:t>
-            </a:r>
+              <a:rPr kumimoji="0" lang="en-US" sz="3200" b="1" i="0" u="none" strike="noStrike" kern="1200" cap="none" spc="0" normalizeH="0" baseline="0" noProof="0" dirty="0">
+                <a:ln>
+                  <a:noFill/>
+                </a:ln>
+                <a:solidFill>
+                  <a:schemeClr val="tx2"/>
+                </a:solidFill>
+                <a:effectLst/>
+                <a:uLnTx/>
+                <a:uFillTx/>
+                <a:latin typeface="Aptos" panose="020B0004020202020204" pitchFamily="34" charset="0"/>
+              </a:rPr>
+              <a:t>Agenda</a:t>
+            </a:r>
+            <a:endParaRPr kumimoji="0" lang="en-GB" sz="3200" b="1" i="0" u="none" strike="noStrike" kern="1200" cap="none" spc="0" normalizeH="0" baseline="0" noProof="0" dirty="0">
+              <a:ln>
+                <a:noFill/>
+              </a:ln>
+              <a:solidFill>
+                <a:schemeClr val="tx2"/>
+              </a:solidFill>
+              <a:effectLst/>
+              <a:uLnTx/>
+              <a:uFillTx/>
+              <a:latin typeface="Aptos" panose="020B0004020202020204" pitchFamily="34" charset="0"/>
+            </a:endParaRPr>
           </a:p>
         </p:txBody>
       </p:sp>
     </p:spTree>
+    <p:extLst>
+      <p:ext uri="{BB962C8B-B14F-4D97-AF65-F5344CB8AC3E}">
+        <p14:creationId xmlns:p14="http://schemas.microsoft.com/office/powerpoint/2010/main" val="2786012801"/>
+      </p:ext>
+    </p:extLst>
   </p:cSld>
   <p:clrMapOvr>
     <a:masterClrMapping/>
   </p:clrMapOvr>
+  <mc:AlternateContent xmlns:mc="http://schemas.openxmlformats.org/markup-compatibility/2006" xmlns:p14="http://schemas.microsoft.com/office/powerpoint/2010/main">
+    <mc:Choice Requires="p14">
+      <p:transition spd="med" p14:dur="700">
+        <p:fade/>
+      </p:transition>
+    </mc:Choice>
+    <mc:Fallback xmlns="">
+      <p:transition spd="med">
+        <p:fade/>
+      </p:transition>
+    </mc:Fallback>
+  </mc:AlternateContent>
 </p:sld>
 </file>
 
-<file path=ppt/slides/slide2.xml><?xml version="1.0" encoding="utf-8"?>
-<p:sld xmlns:a="http://schemas.openxmlformats.org/drawingml/2006/main" xmlns:p="http://schemas.openxmlformats.org/presentationml/2006/main" xmlns:r="http://schemas.openxmlformats.org/officeDocument/2006/relationships">
+<file path=ppt/slides/slide3.xml><?xml version="1.0" encoding="utf-8"?>
+<p:sld xmlns:a="http://schemas.openxmlformats.org/drawingml/2006/main" xmlns:r="http://schemas.openxmlformats.org/officeDocument/2006/relationships" xmlns:p="http://schemas.openxmlformats.org/presentationml/2006/main">
   <p:cSld>
     <p:spTree>
       <p:nvGrpSpPr>
@@ -3332,337 +6336,74 @@
         <p:cNvGrpSpPr/>
         <p:nvPr/>
       </p:nvGrpSpPr>
-      <p:grpSpPr/>
-      <p:sp>
-        <p:nvSpPr>
-          <p:cNvPr id="2" name="TextBox 1"/>
-          <p:cNvSpPr txBox="1"/>
-          <p:nvPr/>
-        </p:nvSpPr>
-        <p:spPr>
-          <a:xfrm>
-            <a:off x="548640" y="365760"/>
-            <a:ext cx="11064240" cy="822960"/>
-          </a:xfrm>
-          <a:prstGeom prst="rect">
-            <a:avLst/>
-          </a:prstGeom>
-          <a:noFill/>
-        </p:spPr>
-        <p:txBody>
-          <a:bodyPr wrap="none">
-            <a:spAutoFit/>
-          </a:bodyPr>
+      <p:grpSpPr>
+        <a:xfrm>
+          <a:off x="0" y="0"/>
+          <a:ext cx="0" cy="0"/>
+          <a:chOff x="0" y="0"/>
+          <a:chExt cx="0" cy="0"/>
+        </a:xfrm>
+      </p:grpSpPr>
+      <p:sp>
+        <p:nvSpPr>
+          <p:cNvPr id="2" name="Title 1">
+            <a:extLst>
+              <a:ext uri="{FF2B5EF4-FFF2-40B4-BE49-F238E27FC236}">
+                <a16:creationId xmlns:a16="http://schemas.microsoft.com/office/drawing/2014/main" id="{92F1C83F-7176-4B8F-9C6D-E1CA114EC267}"/>
+              </a:ext>
+            </a:extLst>
+          </p:cNvPr>
+          <p:cNvSpPr>
+            <a:spLocks noGrp="1"/>
+          </p:cNvSpPr>
+          <p:nvPr>
+            <p:ph type="ctrTitle"/>
+          </p:nvPr>
+        </p:nvSpPr>
+        <p:spPr/>
+        <p:txBody>
+          <a:bodyPr/>
           <a:lstStyle/>
           <a:p>
-            <a:pPr>
-              <a:defRPr sz="2600" b="1">
-                <a:solidFill>
-                  <a:srgbClr val="006D77"/>
-                </a:solidFill>
-              </a:defRPr>
-            </a:pPr>
-            <a:r>
-              <a:t>Agenda</a:t>
-            </a:r>
-          </a:p>
-        </p:txBody>
-      </p:sp>
-      <p:sp>
-        <p:nvSpPr>
-          <p:cNvPr id="3" name="TextBox 2"/>
-          <p:cNvSpPr txBox="1"/>
-          <p:nvPr/>
-        </p:nvSpPr>
-        <p:spPr>
-          <a:xfrm>
-            <a:off x="731520" y="1325880"/>
-            <a:ext cx="10881360" cy="5212080"/>
-          </a:xfrm>
-          <a:prstGeom prst="rect">
-            <a:avLst/>
-          </a:prstGeom>
-          <a:noFill/>
-        </p:spPr>
-        <p:txBody>
-          <a:bodyPr wrap="square">
-            <a:spAutoFit/>
-          </a:bodyPr>
+            <a:r>
+              <a:t>Policy Overview Dashboard</a:t>
+            </a:r>
+          </a:p>
+        </p:txBody>
+      </p:sp>
+      <p:sp>
+        <p:nvSpPr>
+          <p:cNvPr id="3" name="Subtitle 2">
+            <a:extLst>
+              <a:ext uri="{FF2B5EF4-FFF2-40B4-BE49-F238E27FC236}">
+                <a16:creationId xmlns:a16="http://schemas.microsoft.com/office/drawing/2014/main" id="{9E014135-B595-E67F-AA71-191FC7DE2796}"/>
+              </a:ext>
+            </a:extLst>
+          </p:cNvPr>
+          <p:cNvSpPr>
+            <a:spLocks noGrp="1"/>
+          </p:cNvSpPr>
+          <p:nvPr>
+            <p:ph type="subTitle" idx="1"/>
+          </p:nvPr>
+        </p:nvSpPr>
+        <p:spPr/>
+        <p:txBody>
+          <a:bodyPr/>
           <a:lstStyle/>
           <a:p>
-            <a:pPr>
-              <a:spcAft>
-                <a:spcPts val="500"/>
-              </a:spcAft>
-              <a:defRPr sz="1800">
-                <a:solidFill>
-                  <a:srgbClr val="222222"/>
-                </a:solidFill>
-              </a:defRPr>
-            </a:pPr>
-            <a:r>
-              <a:t>- 1. Architecture Design &amp; Decisions</a:t>
-            </a:r>
-          </a:p>
-          <a:p>
-            <a:pPr>
-              <a:spcAft>
-                <a:spcPts val="500"/>
-              </a:spcAft>
-              <a:defRPr sz="1800">
-                <a:solidFill>
-                  <a:srgbClr val="222222"/>
-                </a:solidFill>
-              </a:defRPr>
-            </a:pPr>
-            <a:r>
-              <a:t>- 2. Git Details &amp; Working Platform</a:t>
-            </a:r>
-          </a:p>
-          <a:p>
-            <a:pPr>
-              <a:spcAft>
-                <a:spcPts val="500"/>
-              </a:spcAft>
-              <a:defRPr sz="1800">
-                <a:solidFill>
-                  <a:srgbClr val="222222"/>
-                </a:solidFill>
-              </a:defRPr>
-            </a:pPr>
-            <a:r>
-              <a:t>- 3. API Specification</a:t>
-            </a:r>
-          </a:p>
-          <a:p>
-            <a:pPr>
-              <a:spcAft>
-                <a:spcPts val="500"/>
-              </a:spcAft>
-              <a:defRPr sz="1800">
-                <a:solidFill>
-                  <a:srgbClr val="222222"/>
-                </a:solidFill>
-              </a:defRPr>
-            </a:pPr>
-            <a:r>
-              <a:t>- 4. Working Journal</a:t>
-            </a:r>
-          </a:p>
-          <a:p>
-            <a:pPr>
-              <a:spcAft>
-                <a:spcPts val="500"/>
-              </a:spcAft>
-              <a:defRPr sz="1800">
-                <a:solidFill>
-                  <a:srgbClr val="222222"/>
-                </a:solidFill>
-              </a:defRPr>
-            </a:pPr>
-            <a:r>
-              <a:t>- 5. Testing Strategy</a:t>
+            <a:r>
+              <a:t>Insurance Policy BFF — Solution Walkthrough</a:t>
             </a:r>
           </a:p>
         </p:txBody>
       </p:sp>
     </p:spTree>
-  </p:cSld>
-  <p:clrMapOvr>
-    <a:masterClrMapping/>
-  </p:clrMapOvr>
-</p:sld>
-</file>
-
-<file path=ppt/slides/slide3.xml><?xml version="1.0" encoding="utf-8"?>
-<p:sld xmlns:a="http://schemas.openxmlformats.org/drawingml/2006/main" xmlns:p="http://schemas.openxmlformats.org/presentationml/2006/main" xmlns:r="http://schemas.openxmlformats.org/officeDocument/2006/relationships">
-  <p:cSld>
-    <p:spTree>
-      <p:nvGrpSpPr>
-        <p:cNvPr id="1" name=""/>
-        <p:cNvGrpSpPr/>
-        <p:nvPr/>
-      </p:nvGrpSpPr>
-      <p:grpSpPr/>
-      <p:sp>
-        <p:nvSpPr>
-          <p:cNvPr id="2" name="TextBox 1"/>
-          <p:cNvSpPr txBox="1"/>
-          <p:nvPr/>
-        </p:nvSpPr>
-        <p:spPr>
-          <a:xfrm>
-            <a:off x="548640" y="365760"/>
-            <a:ext cx="11064240" cy="822960"/>
-          </a:xfrm>
-          <a:prstGeom prst="rect">
-            <a:avLst/>
-          </a:prstGeom>
-          <a:noFill/>
-        </p:spPr>
-        <p:txBody>
-          <a:bodyPr wrap="none">
-            <a:spAutoFit/>
-          </a:bodyPr>
-          <a:lstStyle/>
-          <a:p>
-            <a:pPr>
-              <a:defRPr sz="2600" b="1">
-                <a:solidFill>
-                  <a:srgbClr val="006D77"/>
-                </a:solidFill>
-              </a:defRPr>
-            </a:pPr>
-            <a:r>
-              <a:t>1. Architecture Design &amp; Decisions</a:t>
-            </a:r>
-          </a:p>
-        </p:txBody>
-      </p:sp>
-      <p:sp>
-        <p:nvSpPr>
-          <p:cNvPr id="3" name="TextBox 2"/>
-          <p:cNvSpPr txBox="1"/>
-          <p:nvPr/>
-        </p:nvSpPr>
-        <p:spPr>
-          <a:xfrm>
-            <a:off x="731520" y="1325880"/>
-            <a:ext cx="10881360" cy="5212080"/>
-          </a:xfrm>
-          <a:prstGeom prst="rect">
-            <a:avLst/>
-          </a:prstGeom>
-          <a:noFill/>
-        </p:spPr>
-        <p:txBody>
-          <a:bodyPr wrap="square">
-            <a:spAutoFit/>
-          </a:bodyPr>
-          <a:lstStyle/>
-          <a:p>
-            <a:pPr>
-              <a:spcAft>
-                <a:spcPts val="500"/>
-              </a:spcAft>
-              <a:defRPr sz="1800">
-                <a:solidFill>
-                  <a:srgbClr val="222222"/>
-                </a:solidFill>
-              </a:defRPr>
-            </a:pPr>
-            <a:r>
-              <a:t>- Hexagonal (ports &amp; adapters); dependencies point inward:</a:t>
-            </a:r>
-          </a:p>
-          <a:p>
-            <a:pPr lvl="1">
-              <a:spcAft>
-                <a:spcPts val="500"/>
-              </a:spcAft>
-              <a:defRPr sz="1500">
-                <a:solidFill>
-                  <a:srgbClr val="222222"/>
-                </a:solidFill>
-              </a:defRPr>
-            </a:pPr>
-            <a:r>
-              <a:t>  - api -&gt; service -&gt; domain ;  infrastructure -&gt; domain</a:t>
-            </a:r>
-          </a:p>
-          <a:p>
-            <a:pPr>
-              <a:spcAft>
-                <a:spcPts val="500"/>
-              </a:spcAft>
-              <a:defRPr sz="1800">
-                <a:solidFill>
-                  <a:srgbClr val="222222"/>
-                </a:solidFill>
-              </a:defRPr>
-            </a:pPr>
-            <a:r>
-              <a:t>- Layers:</a:t>
-            </a:r>
-          </a:p>
-          <a:p>
-            <a:pPr lvl="1">
-              <a:spcAft>
-                <a:spcPts val="500"/>
-              </a:spcAft>
-              <a:defRPr sz="1500">
-                <a:solidFill>
-                  <a:srgbClr val="222222"/>
-                </a:solidFill>
-              </a:defRPr>
-            </a:pPr>
-            <a:r>
-              <a:t>  - api: controller, request/response DTOs, mapper, exception handler</a:t>
-            </a:r>
-          </a:p>
-          <a:p>
-            <a:pPr lvl="1">
-              <a:spcAft>
-                <a:spcPts val="500"/>
-              </a:spcAft>
-              <a:defRPr sz="1500">
-                <a:solidFill>
-                  <a:srgbClr val="222222"/>
-                </a:solidFill>
-              </a:defRPr>
-            </a:pPr>
-            <a:r>
-              <a:t>  - service: use cases (PolicyService / PolicyServiceImpl), PolicySummary</a:t>
-            </a:r>
-          </a:p>
-          <a:p>
-            <a:pPr lvl="1">
-              <a:spcAft>
-                <a:spcPts val="500"/>
-              </a:spcAft>
-              <a:defRPr sz="1500">
-                <a:solidFill>
-                  <a:srgbClr val="222222"/>
-                </a:solidFill>
-              </a:defRPr>
-            </a:pPr>
-            <a:r>
-              <a:t>  - domain: POJO Policy + enums, PolicyRepositoryPort, query value objects, domain exception</a:t>
-            </a:r>
-          </a:p>
-          <a:p>
-            <a:pPr lvl="1">
-              <a:spcAft>
-                <a:spcPts val="500"/>
-              </a:spcAft>
-              <a:defRPr sz="1500">
-                <a:solidFill>
-                  <a:srgbClr val="222222"/>
-                </a:solidFill>
-              </a:defRPr>
-            </a:pPr>
-            <a:r>
-              <a:t>  - infrastructure: PolicyEntity (JPA), PolicyJpaRepository, persistence adapter, PolicySpecification</a:t>
-            </a:r>
-          </a:p>
-          <a:p>
-            <a:pPr>
-              <a:spcAft>
-                <a:spcPts val="500"/>
-              </a:spcAft>
-              <a:defRPr sz="1800">
-                <a:solidFill>
-                  <a:srgbClr val="222222"/>
-                </a:solidFill>
-              </a:defRPr>
-            </a:pPr>
-            <a:r>
-              <a:t>- Verified: domain has zero JPA/Spring imports; service has zero infra/Spring-Data imports</a:t>
-            </a:r>
-          </a:p>
-        </p:txBody>
-      </p:sp>
-    </p:spTree>
+    <p:extLst>
+      <p:ext uri="{BB962C8B-B14F-4D97-AF65-F5344CB8AC3E}">
+        <p14:creationId xmlns:p14="http://schemas.microsoft.com/office/powerpoint/2010/main" val="3906173298"/>
+      </p:ext>
+    </p:extLst>
   </p:cSld>
   <p:clrMapOvr>
     <a:masterClrMapping/>
@@ -3671,7 +6412,7 @@
 </file>
 
 <file path=ppt/slides/slide4.xml><?xml version="1.0" encoding="utf-8"?>
-<p:sld xmlns:a="http://schemas.openxmlformats.org/drawingml/2006/main" xmlns:p="http://schemas.openxmlformats.org/presentationml/2006/main" xmlns:r="http://schemas.openxmlformats.org/officeDocument/2006/relationships">
+<p:sld xmlns:a="http://schemas.openxmlformats.org/drawingml/2006/main" xmlns:r="http://schemas.openxmlformats.org/officeDocument/2006/relationships" xmlns:p="http://schemas.openxmlformats.org/presentationml/2006/main">
   <p:cSld>
     <p:spTree>
       <p:nvGrpSpPr>
@@ -3679,7 +6420,14 @@
         <p:cNvGrpSpPr/>
         <p:nvPr/>
       </p:nvGrpSpPr>
-      <p:grpSpPr/>
+      <p:grpSpPr>
+        <a:xfrm>
+          <a:off x="0" y="0"/>
+          <a:ext cx="0" cy="0"/>
+          <a:chOff x="0" y="0"/>
+          <a:chExt cx="0" cy="0"/>
+        </a:xfrm>
+      </p:grpSpPr>
       <p:sp>
         <p:nvSpPr>
           <p:cNvPr id="2" name="TextBox 1"/>
@@ -3688,7 +6436,7 @@
         </p:nvSpPr>
         <p:spPr>
           <a:xfrm>
-            <a:off x="548640" y="365760"/>
+            <a:off x="548640" y="411480"/>
             <a:ext cx="11064240" cy="822960"/>
           </a:xfrm>
           <a:prstGeom prst="rect">
@@ -3703,14 +6451,15 @@
           <a:lstStyle/>
           <a:p>
             <a:pPr>
-              <a:defRPr sz="2600" b="1">
-                <a:solidFill>
-                  <a:srgbClr val="006D77"/>
-                </a:solidFill>
+              <a:defRPr sz="2800" b="1">
+                <a:solidFill>
+                  <a:srgbClr val="5F1EBE"/>
+                </a:solidFill>
+                <a:latin typeface="Calibri Light"/>
               </a:defRPr>
             </a:pPr>
             <a:r>
-              <a:t>1. Architecture - Key Decisions</a:t>
+              <a:t>1. Architecture Design &amp; Decisions</a:t>
             </a:r>
           </a:p>
         </p:txBody>
@@ -3723,8 +6472,8 @@
         </p:nvSpPr>
         <p:spPr>
           <a:xfrm>
-            <a:off x="731520" y="1325880"/>
-            <a:ext cx="10881360" cy="5212080"/>
+            <a:off x="640080" y="1371600"/>
+            <a:ext cx="10972800" cy="5120640"/>
           </a:xfrm>
           <a:prstGeom prst="rect">
             <a:avLst/>
@@ -3741,14 +6490,15 @@
               <a:spcAft>
                 <a:spcPts val="500"/>
               </a:spcAft>
-              <a:defRPr sz="1800">
-                <a:solidFill>
-                  <a:srgbClr val="222222"/>
-                </a:solidFill>
+              <a:defRPr sz="1700">
+                <a:solidFill>
+                  <a:srgbClr val="262626"/>
+                </a:solidFill>
+                <a:latin typeface="Calibri"/>
               </a:defRPr>
             </a:pPr>
             <a:r>
-              <a:t>- DIP: service depends on domain-owned PolicyRepositoryPort; Spring Data adapter is injected</a:t>
+              <a:t>• Hexagonal (ports &amp; adapters); dependencies point inward: api → service → domain; infrastructure → domain</a:t>
             </a:r>
           </a:p>
           <a:p>
@@ -3756,14 +6506,79 @@
               <a:spcAft>
                 <a:spcPts val="500"/>
               </a:spcAft>
-              <a:defRPr sz="1800">
-                <a:solidFill>
-                  <a:srgbClr val="222222"/>
-                </a:solidFill>
+              <a:defRPr sz="1700">
+                <a:solidFill>
+                  <a:srgbClr val="262626"/>
+                </a:solidFill>
+                <a:latin typeface="Calibri"/>
               </a:defRPr>
             </a:pPr>
             <a:r>
-              <a:t>- POJO domain vs JPA entity split (PolicyEntityMapper translates) - ORM never leaks into logic</a:t>
+              <a:t>• Layers</a:t>
+            </a:r>
+          </a:p>
+          <a:p>
+            <a:pPr lvl="1">
+              <a:spcAft>
+                <a:spcPts val="500"/>
+              </a:spcAft>
+              <a:defRPr sz="1400">
+                <a:solidFill>
+                  <a:srgbClr val="262626"/>
+                </a:solidFill>
+                <a:latin typeface="Calibri"/>
+              </a:defRPr>
+            </a:pPr>
+            <a:r>
+              <a:t>– api: controller, request/response DTOs, mapper, exception handler</a:t>
+            </a:r>
+          </a:p>
+          <a:p>
+            <a:pPr lvl="1">
+              <a:spcAft>
+                <a:spcPts val="500"/>
+              </a:spcAft>
+              <a:defRPr sz="1400">
+                <a:solidFill>
+                  <a:srgbClr val="262626"/>
+                </a:solidFill>
+                <a:latin typeface="Calibri"/>
+              </a:defRPr>
+            </a:pPr>
+            <a:r>
+              <a:t>– service: use cases (PolicyService / PolicyServiceImpl), PolicySummary</a:t>
+            </a:r>
+          </a:p>
+          <a:p>
+            <a:pPr lvl="1">
+              <a:spcAft>
+                <a:spcPts val="500"/>
+              </a:spcAft>
+              <a:defRPr sz="1400">
+                <a:solidFill>
+                  <a:srgbClr val="262626"/>
+                </a:solidFill>
+                <a:latin typeface="Calibri"/>
+              </a:defRPr>
+            </a:pPr>
+            <a:r>
+              <a:t>– domain: framework-free Policy POJO + enums, PolicyRepositoryPort, query value objects, exception</a:t>
+            </a:r>
+          </a:p>
+          <a:p>
+            <a:pPr lvl="1">
+              <a:spcAft>
+                <a:spcPts val="500"/>
+              </a:spcAft>
+              <a:defRPr sz="1400">
+                <a:solidFill>
+                  <a:srgbClr val="262626"/>
+                </a:solidFill>
+                <a:latin typeface="Calibri"/>
+              </a:defRPr>
+            </a:pPr>
+            <a:r>
+              <a:t>– infrastructure: PolicyEntity (JPA), PolicyJpaRepository, persistence adapter, PolicySpecification</a:t>
             </a:r>
           </a:p>
           <a:p>
@@ -3771,88 +6586,142 @@
               <a:spcAft>
                 <a:spcPts val="500"/>
               </a:spcAft>
-              <a:defRPr sz="1800">
-                <a:solidFill>
-                  <a:srgbClr val="222222"/>
-                </a:solidFill>
+              <a:defRPr sz="1700">
+                <a:solidFill>
+                  <a:srgbClr val="262626"/>
+                </a:solidFill>
+                <a:latin typeface="Calibri"/>
               </a:defRPr>
             </a:pPr>
             <a:r>
-              <a:t>- OCP: filtering = one composable, null-safe Specification per criterion (Specification.allOf)</a:t>
-            </a:r>
-          </a:p>
-          <a:p>
-            <a:pPr>
+              <a:t>• Key decisions</a:t>
+            </a:r>
+          </a:p>
+          <a:p>
+            <a:pPr lvl="1">
               <a:spcAft>
                 <a:spcPts val="500"/>
               </a:spcAft>
-              <a:defRPr sz="1800">
-                <a:solidFill>
-                  <a:srgbClr val="222222"/>
-                </a:solidFill>
+              <a:defRPr sz="1400">
+                <a:solidFill>
+                  <a:srgbClr val="262626"/>
+                </a:solidFill>
+                <a:latin typeface="Calibri"/>
               </a:defRPr>
             </a:pPr>
             <a:r>
-              <a:t>- SRP: controller = HTTP only; mapper = translation/formatting; service = use cases</a:t>
-            </a:r>
-          </a:p>
-          <a:p>
-            <a:pPr>
+              <a:t>– DIP: service depends on domain-owned port; Spring Data adapter injected</a:t>
+            </a:r>
+          </a:p>
+          <a:p>
+            <a:pPr lvl="1">
               <a:spcAft>
                 <a:spcPts val="500"/>
               </a:spcAft>
-              <a:defRPr sz="1800">
-                <a:solidFill>
-                  <a:srgbClr val="222222"/>
-                </a:solidFill>
+              <a:defRPr sz="1400">
+                <a:solidFill>
+                  <a:srgbClr val="262626"/>
+                </a:solidFill>
+                <a:latin typeface="Calibri"/>
               </a:defRPr>
             </a:pPr>
             <a:r>
-              <a:t>- Schema as code: Flyway (V1 schema, V2 seed 220 rows); Hibernate ddl-auto=validate</a:t>
-            </a:r>
-          </a:p>
-          <a:p>
-            <a:pPr>
+              <a:t>– POJO domain vs JPA entity split (mapper translates) — ORM never leaks into business logic</a:t>
+            </a:r>
+          </a:p>
+          <a:p>
+            <a:pPr lvl="1">
               <a:spcAft>
                 <a:spcPts val="500"/>
               </a:spcAft>
-              <a:defRPr sz="1800">
-                <a:solidFill>
-                  <a:srgbClr val="222222"/>
-                </a:solidFill>
+              <a:defRPr sz="1400">
+                <a:solidFill>
+                  <a:srgbClr val="262626"/>
+                </a:solidFill>
+                <a:latin typeface="Calibri"/>
               </a:defRPr>
             </a:pPr>
             <a:r>
-              <a:t>- Caching: Caffeine (policyListings / policyById / policySummary), TTL + event-based eviction</a:t>
-            </a:r>
-          </a:p>
-          <a:p>
-            <a:pPr>
+              <a:t>– OCP filtering: one composable, null-safe Specification per criterion (Specification.allOf)</a:t>
+            </a:r>
+          </a:p>
+          <a:p>
+            <a:pPr lvl="1">
               <a:spcAft>
                 <a:spcPts val="500"/>
               </a:spcAft>
-              <a:defRPr sz="1800">
-                <a:solidFill>
-                  <a:srgbClr val="222222"/>
-                </a:solidFill>
+              <a:defRPr sz="1400">
+                <a:solidFill>
+                  <a:srgbClr val="262626"/>
+                </a:solidFill>
+                <a:latin typeface="Calibri"/>
               </a:defRPr>
             </a:pPr>
             <a:r>
-              <a:t>- 12-factor config; structured errors (404/400/503, no stack traces); Actuator health probes</a:t>
+              <a:t>– Flyway owns schema (V1 schema, V2 seed); Hibernate ddl-auto=validate</a:t>
+            </a:r>
+          </a:p>
+          <a:p>
+            <a:pPr lvl="1">
+              <a:spcAft>
+                <a:spcPts val="500"/>
+              </a:spcAft>
+              <a:defRPr sz="1400">
+                <a:solidFill>
+                  <a:srgbClr val="262626"/>
+                </a:solidFill>
+                <a:latin typeface="Calibri"/>
+              </a:defRPr>
+            </a:pPr>
+            <a:r>
+              <a:t>– Caffeine caching (listings / by-id / summary) with TTL + event-based eviction</a:t>
+            </a:r>
+          </a:p>
+          <a:p>
+            <a:pPr lvl="1">
+              <a:spcAft>
+                <a:spcPts val="500"/>
+              </a:spcAft>
+              <a:defRPr sz="1400">
+                <a:solidFill>
+                  <a:srgbClr val="262626"/>
+                </a:solidFill>
+                <a:latin typeface="Calibri"/>
+              </a:defRPr>
+            </a:pPr>
+            <a:r>
+              <a:t>– 12-factor config; structured errors (404/400/503, no stack traces); Actuator health probes</a:t>
             </a:r>
           </a:p>
         </p:txBody>
       </p:sp>
     </p:spTree>
+    <p:extLst>
+      <p:ext uri="{BB962C8B-B14F-4D97-AF65-F5344CB8AC3E}">
+        <p14:creationId xmlns:p14="http://schemas.microsoft.com/office/powerpoint/2010/main" val="1079604564"/>
+      </p:ext>
+    </p:extLst>
   </p:cSld>
   <p:clrMapOvr>
     <a:masterClrMapping/>
   </p:clrMapOvr>
+  <mc:AlternateContent xmlns:mc="http://schemas.openxmlformats.org/markup-compatibility/2006" xmlns:p14="http://schemas.microsoft.com/office/powerpoint/2010/main">
+    <mc:Choice Requires="p14">
+      <p:transition spd="med" p14:dur="700">
+        <p:fade/>
+      </p:transition>
+    </mc:Choice>
+    <mc:Fallback xmlns="">
+      <p:transition spd="med">
+        <p:fade/>
+      </p:transition>
+    </mc:Fallback>
+  </mc:AlternateContent>
 </p:sld>
 </file>
 
 <file path=ppt/slides/slide5.xml><?xml version="1.0" encoding="utf-8"?>
-<p:sld xmlns:a="http://schemas.openxmlformats.org/drawingml/2006/main" xmlns:p="http://schemas.openxmlformats.org/presentationml/2006/main" xmlns:r="http://schemas.openxmlformats.org/officeDocument/2006/relationships">
+<p:sld xmlns:a="http://schemas.openxmlformats.org/drawingml/2006/main" xmlns:r="http://schemas.openxmlformats.org/officeDocument/2006/relationships" xmlns:p="http://schemas.openxmlformats.org/presentationml/2006/main">
   <p:cSld>
     <p:spTree>
       <p:nvGrpSpPr>
@@ -3860,7 +6729,14 @@
         <p:cNvGrpSpPr/>
         <p:nvPr/>
       </p:nvGrpSpPr>
-      <p:grpSpPr/>
+      <p:grpSpPr>
+        <a:xfrm>
+          <a:off x="0" y="0"/>
+          <a:ext cx="0" cy="0"/>
+          <a:chOff x="0" y="0"/>
+          <a:chExt cx="0" cy="0"/>
+        </a:xfrm>
+      </p:grpSpPr>
       <p:sp>
         <p:nvSpPr>
           <p:cNvPr id="2" name="TextBox 1"/>
@@ -3869,7 +6745,7 @@
         </p:nvSpPr>
         <p:spPr>
           <a:xfrm>
-            <a:off x="548640" y="365760"/>
+            <a:off x="548640" y="411480"/>
             <a:ext cx="11064240" cy="822960"/>
           </a:xfrm>
           <a:prstGeom prst="rect">
@@ -3884,14 +6760,15 @@
           <a:lstStyle/>
           <a:p>
             <a:pPr>
-              <a:defRPr sz="2600" b="1">
-                <a:solidFill>
-                  <a:srgbClr val="006D77"/>
-                </a:solidFill>
+              <a:defRPr sz="2800" b="1">
+                <a:solidFill>
+                  <a:srgbClr val="5F1EBE"/>
+                </a:solidFill>
+                <a:latin typeface="Calibri Light"/>
               </a:defRPr>
             </a:pPr>
             <a:r>
-              <a:t>2. Git Details &amp; Working Platform</a:t>
+              <a:t>2. GIT Details &amp; Working Platform</a:t>
             </a:r>
           </a:p>
         </p:txBody>
@@ -3904,8 +6781,8 @@
         </p:nvSpPr>
         <p:spPr>
           <a:xfrm>
-            <a:off x="731520" y="1325880"/>
-            <a:ext cx="10881360" cy="5212080"/>
+            <a:off x="640080" y="1371600"/>
+            <a:ext cx="10972800" cy="5120640"/>
           </a:xfrm>
           <a:prstGeom prst="rect">
             <a:avLst/>
@@ -3922,14 +6799,15 @@
               <a:spcAft>
                 <a:spcPts val="500"/>
               </a:spcAft>
-              <a:defRPr sz="1800">
-                <a:solidFill>
-                  <a:srgbClr val="222222"/>
-                </a:solidFill>
+              <a:defRPr sz="1700">
+                <a:solidFill>
+                  <a:srgbClr val="262626"/>
+                </a:solidFill>
+                <a:latin typeface="Calibri"/>
               </a:defRPr>
             </a:pPr>
             <a:r>
-              <a:t>- Repository: github.com/meetravig-collab/InsurancePolicyListDemo (public)</a:t>
+              <a:t>• Repository: github.com/meetravig-collab/InsurancePolicyListDemo (public)</a:t>
             </a:r>
           </a:p>
           <a:p>
@@ -3937,14 +6815,15 @@
               <a:spcAft>
                 <a:spcPts val="500"/>
               </a:spcAft>
-              <a:defRPr sz="1800">
-                <a:solidFill>
-                  <a:srgbClr val="222222"/>
-                </a:solidFill>
+              <a:defRPr sz="1700">
+                <a:solidFill>
+                  <a:srgbClr val="262626"/>
+                </a:solidFill>
+                <a:latin typeface="Calibri"/>
               </a:defRPr>
             </a:pPr>
             <a:r>
-              <a:t>- Default branch: dev  (master kept in sync via fast-forward)</a:t>
+              <a:t>• Default branch: dev  (master kept in sync via fast-forward)</a:t>
             </a:r>
           </a:p>
           <a:p>
@@ -3952,14 +6831,15 @@
               <a:spcAft>
                 <a:spcPts val="500"/>
               </a:spcAft>
-              <a:defRPr sz="1800">
-                <a:solidFill>
-                  <a:srgbClr val="222222"/>
-                </a:solidFill>
+              <a:defRPr sz="1700">
+                <a:solidFill>
+                  <a:srgbClr val="262626"/>
+                </a:solidFill>
+                <a:latin typeface="Calibri"/>
               </a:defRPr>
             </a:pPr>
             <a:r>
-              <a:t>- Workflow: work on dev -&gt; CI gate (mvn verify) -&gt; container image published to GHCR</a:t>
+              <a:t>• Workflow: work on dev → CI gate (mvn verify) → container image published to GHCR</a:t>
             </a:r>
           </a:p>
           <a:p>
@@ -3967,14 +6847,15 @@
               <a:spcAft>
                 <a:spcPts val="500"/>
               </a:spcAft>
-              <a:defRPr sz="1800">
-                <a:solidFill>
-                  <a:srgbClr val="222222"/>
-                </a:solidFill>
+              <a:defRPr sz="1700">
+                <a:solidFill>
+                  <a:srgbClr val="262626"/>
+                </a:solidFill>
+                <a:latin typeface="Calibri"/>
               </a:defRPr>
             </a:pPr>
             <a:r>
-              <a:t>- Commit style: descriptive messages with Co-Authored-By trailer</a:t>
+              <a:t>• Commit style: descriptive messages with Co-Authored-By trailer</a:t>
             </a:r>
           </a:p>
           <a:p>
@@ -3982,14 +6863,15 @@
               <a:spcAft>
                 <a:spcPts val="500"/>
               </a:spcAft>
-              <a:defRPr sz="1800">
-                <a:solidFill>
-                  <a:srgbClr val="222222"/>
-                </a:solidFill>
+              <a:defRPr sz="1700">
+                <a:solidFill>
+                  <a:srgbClr val="262626"/>
+                </a:solidFill>
+                <a:latin typeface="Calibri"/>
               </a:defRPr>
             </a:pPr>
             <a:r>
-              <a:t>- Working platform / tooling:</a:t>
+              <a:t>• Working platform / tooling</a:t>
             </a:r>
           </a:p>
           <a:p>
@@ -3997,14 +6879,15 @@
               <a:spcAft>
                 <a:spcPts val="500"/>
               </a:spcAft>
-              <a:defRPr sz="1500">
-                <a:solidFill>
-                  <a:srgbClr val="222222"/>
-                </a:solidFill>
+              <a:defRPr sz="1400">
+                <a:solidFill>
+                  <a:srgbClr val="262626"/>
+                </a:solidFill>
+                <a:latin typeface="Calibri"/>
               </a:defRPr>
             </a:pPr>
             <a:r>
-              <a:t>  - Windows 11 | JDK 17 (Temurin) | Maven 3.9 | PostgreSQL 16 | Docker Desktop | Git + GitHub CLI</a:t>
+              <a:t>– Windows 11 | JDK 17 (Temurin) | Maven 3.9 | PostgreSQL 16 | Docker Desktop | Git + GitHub CLI</a:t>
             </a:r>
           </a:p>
           <a:p>
@@ -4012,28 +6895,78 @@
               <a:spcAft>
                 <a:spcPts val="500"/>
               </a:spcAft>
-              <a:defRPr sz="1800">
-                <a:solidFill>
-                  <a:srgbClr val="222222"/>
-                </a:solidFill>
+              <a:defRPr sz="1700">
+                <a:solidFill>
+                  <a:srgbClr val="262626"/>
+                </a:solidFill>
+                <a:latin typeface="Calibri"/>
               </a:defRPr>
             </a:pPr>
             <a:r>
-              <a:t>- CI/CD: GitHub Actions -&gt; GHCR; actions pinned to commit SHAs; Dependabot + security alerts enabled</a:t>
+              <a:t>• CI/CD: GitHub Actions → GHCR</a:t>
+            </a:r>
+          </a:p>
+          <a:p>
+            <a:pPr lvl="1">
+              <a:spcAft>
+                <a:spcPts val="500"/>
+              </a:spcAft>
+              <a:defRPr sz="1400">
+                <a:solidFill>
+                  <a:srgbClr val="262626"/>
+                </a:solidFill>
+                <a:latin typeface="Calibri"/>
+              </a:defRPr>
+            </a:pPr>
+            <a:r>
+              <a:t>– actions pinned to commit SHAs; Dependabot + security alerts enabled</a:t>
+            </a:r>
+          </a:p>
+          <a:p>
+            <a:pPr lvl="1">
+              <a:spcAft>
+                <a:spcPts val="500"/>
+              </a:spcAft>
+              <a:defRPr sz="1400">
+                <a:solidFill>
+                  <a:srgbClr val="262626"/>
+                </a:solidFill>
+                <a:latin typeface="Calibri"/>
+              </a:defRPr>
+            </a:pPr>
+            <a:r>
+              <a:t>– build runs full Testcontainers suite + coverage gate before publishing the image</a:t>
             </a:r>
           </a:p>
         </p:txBody>
       </p:sp>
     </p:spTree>
+    <p:extLst>
+      <p:ext uri="{BB962C8B-B14F-4D97-AF65-F5344CB8AC3E}">
+        <p14:creationId xmlns:p14="http://schemas.microsoft.com/office/powerpoint/2010/main" val="1514319899"/>
+      </p:ext>
+    </p:extLst>
   </p:cSld>
   <p:clrMapOvr>
     <a:masterClrMapping/>
   </p:clrMapOvr>
+  <mc:AlternateContent xmlns:mc="http://schemas.openxmlformats.org/markup-compatibility/2006" xmlns:p14="http://schemas.microsoft.com/office/powerpoint/2010/main">
+    <mc:Choice Requires="p14">
+      <p:transition spd="med" p14:dur="700">
+        <p:fade/>
+      </p:transition>
+    </mc:Choice>
+    <mc:Fallback xmlns="">
+      <p:transition spd="med">
+        <p:fade/>
+      </p:transition>
+    </mc:Fallback>
+  </mc:AlternateContent>
 </p:sld>
 </file>
 
 <file path=ppt/slides/slide6.xml><?xml version="1.0" encoding="utf-8"?>
-<p:sld xmlns:a="http://schemas.openxmlformats.org/drawingml/2006/main" xmlns:p="http://schemas.openxmlformats.org/presentationml/2006/main" xmlns:r="http://schemas.openxmlformats.org/officeDocument/2006/relationships">
+<p:sld xmlns:a="http://schemas.openxmlformats.org/drawingml/2006/main" xmlns:r="http://schemas.openxmlformats.org/officeDocument/2006/relationships" xmlns:p="http://schemas.openxmlformats.org/presentationml/2006/main">
   <p:cSld>
     <p:spTree>
       <p:nvGrpSpPr>
@@ -4041,7 +6974,14 @@
         <p:cNvGrpSpPr/>
         <p:nvPr/>
       </p:nvGrpSpPr>
-      <p:grpSpPr/>
+      <p:grpSpPr>
+        <a:xfrm>
+          <a:off x="0" y="0"/>
+          <a:ext cx="0" cy="0"/>
+          <a:chOff x="0" y="0"/>
+          <a:chExt cx="0" cy="0"/>
+        </a:xfrm>
+      </p:grpSpPr>
       <p:sp>
         <p:nvSpPr>
           <p:cNvPr id="2" name="TextBox 1"/>
@@ -4050,7 +6990,7 @@
         </p:nvSpPr>
         <p:spPr>
           <a:xfrm>
-            <a:off x="548640" y="365760"/>
+            <a:off x="548640" y="411480"/>
             <a:ext cx="11064240" cy="822960"/>
           </a:xfrm>
           <a:prstGeom prst="rect">
@@ -4065,14 +7005,15 @@
           <a:lstStyle/>
           <a:p>
             <a:pPr>
-              <a:defRPr sz="2600" b="1">
-                <a:solidFill>
-                  <a:srgbClr val="006D77"/>
-                </a:solidFill>
+              <a:defRPr sz="2800" b="1">
+                <a:solidFill>
+                  <a:srgbClr val="5F1EBE"/>
+                </a:solidFill>
+                <a:latin typeface="Calibri Light"/>
               </a:defRPr>
             </a:pPr>
             <a:r>
-              <a:t>3. API Specification - Endpoints</a:t>
+              <a:t>3. API Specification</a:t>
             </a:r>
           </a:p>
         </p:txBody>
@@ -4085,8 +7026,8 @@
         </p:nvSpPr>
         <p:spPr>
           <a:xfrm>
-            <a:off x="731520" y="1325880"/>
-            <a:ext cx="10881360" cy="5212080"/>
+            <a:off x="640080" y="1371600"/>
+            <a:ext cx="10972800" cy="5120640"/>
           </a:xfrm>
           <a:prstGeom prst="rect">
             <a:avLst/>
@@ -4103,14 +7044,15 @@
               <a:spcAft>
                 <a:spcPts val="500"/>
               </a:spcAft>
-              <a:defRPr sz="1800">
-                <a:solidFill>
-                  <a:srgbClr val="222222"/>
-                </a:solidFill>
+              <a:defRPr sz="1700">
+                <a:solidFill>
+                  <a:srgbClr val="262626"/>
+                </a:solidFill>
+                <a:latin typeface="Calibri"/>
               </a:defRPr>
             </a:pPr>
             <a:r>
-              <a:t>- Base path: /api/v1/policies   (contract-first openapi.yaml served via Swagger UI)</a:t>
+              <a:t>• Base path: /api/v1/policies  —  contract-first openapi.yaml served via Swagger UI</a:t>
             </a:r>
           </a:p>
           <a:p>
@@ -4118,14 +7060,79 @@
               <a:spcAft>
                 <a:spcPts val="500"/>
               </a:spcAft>
-              <a:defRPr sz="1800">
-                <a:solidFill>
-                  <a:srgbClr val="222222"/>
-                </a:solidFill>
+              <a:defRPr sz="1700">
+                <a:solidFill>
+                  <a:srgbClr val="262626"/>
+                </a:solidFill>
+                <a:latin typeface="Calibri"/>
               </a:defRPr>
             </a:pPr>
             <a:r>
-              <a:t>- GET /api/v1/policies            - list: filter, sort, search, paginate (Spring Page)</a:t>
+              <a:t>• Endpoints</a:t>
+            </a:r>
+          </a:p>
+          <a:p>
+            <a:pPr lvl="1">
+              <a:spcAft>
+                <a:spcPts val="500"/>
+              </a:spcAft>
+              <a:defRPr sz="1400">
+                <a:solidFill>
+                  <a:srgbClr val="262626"/>
+                </a:solidFill>
+                <a:latin typeface="Calibri"/>
+              </a:defRPr>
+            </a:pPr>
+            <a:r>
+              <a:t>– GET /api/v1/policies — list: filter, sort, search, paginate (Spring Page)</a:t>
+            </a:r>
+          </a:p>
+          <a:p>
+            <a:pPr lvl="1">
+              <a:spcAft>
+                <a:spcPts val="500"/>
+              </a:spcAft>
+              <a:defRPr sz="1400">
+                <a:solidFill>
+                  <a:srgbClr val="262626"/>
+                </a:solidFill>
+                <a:latin typeface="Calibri"/>
+              </a:defRPr>
+            </a:pPr>
+            <a:r>
+              <a:t>– GET /api/v1/policies/{id} — single policy by UUID (404 if unknown)</a:t>
+            </a:r>
+          </a:p>
+          <a:p>
+            <a:pPr lvl="1">
+              <a:spcAft>
+                <a:spcPts val="500"/>
+              </a:spcAft>
+              <a:defRPr sz="1400">
+                <a:solidFill>
+                  <a:srgbClr val="262626"/>
+                </a:solidFill>
+                <a:latin typeface="Calibri"/>
+              </a:defRPr>
+            </a:pPr>
+            <a:r>
+              <a:t>– PATCH /api/v1/policies/flag — bulk flag for review; body { policyIds: [uuid] }</a:t>
+            </a:r>
+          </a:p>
+          <a:p>
+            <a:pPr lvl="1">
+              <a:spcAft>
+                <a:spcPts val="500"/>
+              </a:spcAft>
+              <a:defRPr sz="1400">
+                <a:solidFill>
+                  <a:srgbClr val="262626"/>
+                </a:solidFill>
+                <a:latin typeface="Calibri"/>
+              </a:defRPr>
+            </a:pPr>
+            <a:r>
+              <a:t>– GET /api/v1/policies/summary — counts by status, premium by line of business, expiring-soon</a:t>
             </a:r>
           </a:p>
           <a:p>
@@ -4133,14 +7140,63 @@
               <a:spcAft>
                 <a:spcPts val="500"/>
               </a:spcAft>
-              <a:defRPr sz="1800">
-                <a:solidFill>
-                  <a:srgbClr val="222222"/>
-                </a:solidFill>
+              <a:defRPr sz="1700">
+                <a:solidFill>
+                  <a:srgbClr val="262626"/>
+                </a:solidFill>
+                <a:latin typeface="Calibri"/>
               </a:defRPr>
             </a:pPr>
             <a:r>
-              <a:t>- GET /api/v1/policies/{id}       - single policy by UUID (404 if unknown)</a:t>
+              <a:t>• List query parameters</a:t>
+            </a:r>
+          </a:p>
+          <a:p>
+            <a:pPr lvl="1">
+              <a:spcAft>
+                <a:spcPts val="500"/>
+              </a:spcAft>
+              <a:defRPr sz="1400">
+                <a:solidFill>
+                  <a:srgbClr val="262626"/>
+                </a:solidFill>
+                <a:latin typeface="Calibri"/>
+              </a:defRPr>
+            </a:pPr>
+            <a:r>
+              <a:t>– status, region (8 APAC), lineOfBusiness (PROPERTY/CASUALTY/ACCIDENT_AND_HEALTH/MARINE)</a:t>
+            </a:r>
+          </a:p>
+          <a:p>
+            <a:pPr lvl="1">
+              <a:spcAft>
+                <a:spcPts val="500"/>
+              </a:spcAft>
+              <a:defRPr sz="1400">
+                <a:solidFill>
+                  <a:srgbClr val="262626"/>
+                </a:solidFill>
+                <a:latin typeface="Calibri"/>
+              </a:defRPr>
+            </a:pPr>
+            <a:r>
+              <a:t>– effectiveDateFrom / effectiveDateTo (yyyy-MM-dd); search (policyNumber + policyholderName + underwriter)</a:t>
+            </a:r>
+          </a:p>
+          <a:p>
+            <a:pPr lvl="1">
+              <a:spcAft>
+                <a:spcPts val="500"/>
+              </a:spcAft>
+              <a:defRPr sz="1400">
+                <a:solidFill>
+                  <a:srgbClr val="262626"/>
+                </a:solidFill>
+                <a:latin typeface="Calibri"/>
+              </a:defRPr>
+            </a:pPr>
+            <a:r>
+              <a:t>– page / size (default 0 / 10); sort (default effectiveDate,desc)</a:t>
             </a:r>
           </a:p>
           <a:p>
@@ -4148,43 +7204,46 @@
               <a:spcAft>
                 <a:spcPts val="500"/>
               </a:spcAft>
-              <a:defRPr sz="1800">
-                <a:solidFill>
-                  <a:srgbClr val="222222"/>
-                </a:solidFill>
+              <a:defRPr sz="1700">
+                <a:solidFill>
+                  <a:srgbClr val="262626"/>
+                </a:solidFill>
+                <a:latin typeface="Calibri"/>
               </a:defRPr>
             </a:pPr>
             <a:r>
-              <a:t>- PATCH /api/v1/policies/flag     - bulk flag for review; body { policyIds: [uuid] }</a:t>
-            </a:r>
-          </a:p>
-          <a:p>
-            <a:pPr>
-              <a:spcAft>
-                <a:spcPts val="500"/>
-              </a:spcAft>
-              <a:defRPr sz="1800">
-                <a:solidFill>
-                  <a:srgbClr val="222222"/>
-                </a:solidFill>
-              </a:defRPr>
-            </a:pPr>
-            <a:r>
-              <a:t>- GET /api/v1/policies/summary    - counts by status, premium by line of business, expiring-soon</a:t>
+              <a:t>• Errors: 404 unknown id | 400 validation/type-mismatch | 503 DB unavailable — structured, no stack traces</a:t>
             </a:r>
           </a:p>
         </p:txBody>
       </p:sp>
     </p:spTree>
+    <p:extLst>
+      <p:ext uri="{BB962C8B-B14F-4D97-AF65-F5344CB8AC3E}">
+        <p14:creationId xmlns:p14="http://schemas.microsoft.com/office/powerpoint/2010/main" val="1933645531"/>
+      </p:ext>
+    </p:extLst>
   </p:cSld>
   <p:clrMapOvr>
     <a:masterClrMapping/>
   </p:clrMapOvr>
+  <mc:AlternateContent xmlns:mc="http://schemas.openxmlformats.org/markup-compatibility/2006" xmlns:p14="http://schemas.microsoft.com/office/powerpoint/2010/main">
+    <mc:Choice Requires="p14">
+      <p:transition spd="med" p14:dur="700">
+        <p:fade/>
+      </p:transition>
+    </mc:Choice>
+    <mc:Fallback xmlns="">
+      <p:transition spd="med">
+        <p:fade/>
+      </p:transition>
+    </mc:Fallback>
+  </mc:AlternateContent>
 </p:sld>
 </file>
 
 <file path=ppt/slides/slide7.xml><?xml version="1.0" encoding="utf-8"?>
-<p:sld xmlns:a="http://schemas.openxmlformats.org/drawingml/2006/main" xmlns:p="http://schemas.openxmlformats.org/presentationml/2006/main" xmlns:r="http://schemas.openxmlformats.org/officeDocument/2006/relationships">
+<p:sld xmlns:a="http://schemas.openxmlformats.org/drawingml/2006/main" xmlns:r="http://schemas.openxmlformats.org/officeDocument/2006/relationships" xmlns:p="http://schemas.openxmlformats.org/presentationml/2006/main">
   <p:cSld>
     <p:spTree>
       <p:nvGrpSpPr>
@@ -4192,7 +7251,14 @@
         <p:cNvGrpSpPr/>
         <p:nvPr/>
       </p:nvGrpSpPr>
-      <p:grpSpPr/>
+      <p:grpSpPr>
+        <a:xfrm>
+          <a:off x="0" y="0"/>
+          <a:ext cx="0" cy="0"/>
+          <a:chOff x="0" y="0"/>
+          <a:chExt cx="0" cy="0"/>
+        </a:xfrm>
+      </p:grpSpPr>
       <p:sp>
         <p:nvSpPr>
           <p:cNvPr id="2" name="TextBox 1"/>
@@ -4201,7 +7267,7 @@
         </p:nvSpPr>
         <p:spPr>
           <a:xfrm>
-            <a:off x="548640" y="365760"/>
+            <a:off x="548640" y="411480"/>
             <a:ext cx="11064240" cy="822960"/>
           </a:xfrm>
           <a:prstGeom prst="rect">
@@ -4216,14 +7282,15 @@
           <a:lstStyle/>
           <a:p>
             <a:pPr>
-              <a:defRPr sz="2600" b="1">
-                <a:solidFill>
-                  <a:srgbClr val="006D77"/>
-                </a:solidFill>
+              <a:defRPr sz="2800" b="1">
+                <a:solidFill>
+                  <a:srgbClr val="5F1EBE"/>
+                </a:solidFill>
+                <a:latin typeface="Calibri Light"/>
               </a:defRPr>
             </a:pPr>
             <a:r>
-              <a:t>3. API Specification - List Query &amp; Errors</a:t>
+              <a:t>4. AI Working Journal</a:t>
             </a:r>
           </a:p>
         </p:txBody>
@@ -4236,8 +7303,8 @@
         </p:nvSpPr>
         <p:spPr>
           <a:xfrm>
-            <a:off x="731520" y="1325880"/>
-            <a:ext cx="10881360" cy="5212080"/>
+            <a:off x="640080" y="1371600"/>
+            <a:ext cx="10972800" cy="5120640"/>
           </a:xfrm>
           <a:prstGeom prst="rect">
             <a:avLst/>
@@ -4254,14 +7321,31 @@
               <a:spcAft>
                 <a:spcPts val="500"/>
               </a:spcAft>
-              <a:defRPr sz="1800">
-                <a:solidFill>
-                  <a:srgbClr val="222222"/>
-                </a:solidFill>
+              <a:defRPr sz="1700">
+                <a:solidFill>
+                  <a:srgbClr val="262626"/>
+                </a:solidFill>
+                <a:latin typeface="Calibri"/>
               </a:defRPr>
             </a:pPr>
             <a:r>
-              <a:t>- GET /api/v1/policies parameters:</a:t>
+              <a:t>• Accepted: feature / schema / Docker / branching / k6 requests implemented as specified</a:t>
+            </a:r>
+          </a:p>
+          <a:p>
+            <a:pPr>
+              <a:spcAft>
+                <a:spcPts val="500"/>
+              </a:spcAft>
+              <a:defRPr sz="1700">
+                <a:solidFill>
+                  <a:srgbClr val="262626"/>
+                </a:solidFill>
+                <a:latin typeface="Calibri"/>
+              </a:defRPr>
+            </a:pPr>
+            <a:r>
+              <a:t>• Challenged / pushed back</a:t>
             </a:r>
           </a:p>
           <a:p>
@@ -4269,14 +7353,15 @@
               <a:spcAft>
                 <a:spcPts val="500"/>
               </a:spcAft>
-              <a:defRPr sz="1500">
-                <a:solidFill>
-                  <a:srgbClr val="222222"/>
-                </a:solidFill>
+              <a:defRPr sz="1400">
+                <a:solidFill>
+                  <a:srgbClr val="262626"/>
+                </a:solidFill>
+                <a:latin typeface="Calibri"/>
               </a:defRPr>
             </a:pPr>
             <a:r>
-              <a:t>  - status (ACTIVE/EXPIRED/PENDING/CANCELLED), region (8 APAC), lineOfBusiness (PROPERTY/CASUALTY/ACCIDENT_AND_HEALTH/MARINE)</a:t>
+              <a:t>– flagged 3 layering violations (service→api, infra→service, infra→domain leak) and fixed them</a:t>
             </a:r>
           </a:p>
           <a:p>
@@ -4284,14 +7369,15 @@
               <a:spcAft>
                 <a:spcPts val="500"/>
               </a:spcAft>
-              <a:defRPr sz="1500">
-                <a:solidFill>
-                  <a:srgbClr val="222222"/>
-                </a:solidFill>
+              <a:defRPr sz="1400">
+                <a:solidFill>
+                  <a:srgbClr val="262626"/>
+                </a:solidFill>
+                <a:latin typeface="Calibri"/>
               </a:defRPr>
             </a:pPr>
             <a:r>
-              <a:t>  - effectiveDateFrom / effectiveDateTo (yyyy-MM-dd); search (policyNumber + policyholderName + underwriter)</a:t>
+              <a:t>– caught duplicated toTitleCase + presentation logic in the service</a:t>
             </a:r>
           </a:p>
           <a:p>
@@ -4299,14 +7385,31 @@
               <a:spcAft>
                 <a:spcPts val="500"/>
               </a:spcAft>
-              <a:defRPr sz="1500">
-                <a:solidFill>
-                  <a:srgbClr val="222222"/>
-                </a:solidFill>
+              <a:defRPr sz="1400">
+                <a:solidFill>
+                  <a:srgbClr val="262626"/>
+                </a:solidFill>
+                <a:latin typeface="Calibri"/>
               </a:defRPr>
             </a:pPr>
             <a:r>
-              <a:t>  - page / size (default 0 / 10); sort (default effectiveDate,desc; e.g. premiumAmount,desc)</a:t>
+              <a:t>– flagged a stale duplicate load test; advised against auto-merging breaking Dependabot PRs</a:t>
+            </a:r>
+          </a:p>
+          <a:p>
+            <a:pPr lvl="1">
+              <a:spcAft>
+                <a:spcPts val="500"/>
+              </a:spcAft>
+              <a:defRPr sz="1400">
+                <a:solidFill>
+                  <a:srgbClr val="262626"/>
+                </a:solidFill>
+                <a:latin typeface="Calibri"/>
+              </a:defRPr>
+            </a:pPr>
+            <a:r>
+              <a:t>– flagged PII risk — free-text search value was being logged — and removed it</a:t>
             </a:r>
           </a:p>
           <a:p>
@@ -4314,29 +7417,15 @@
               <a:spcAft>
                 <a:spcPts val="500"/>
               </a:spcAft>
-              <a:defRPr sz="1800">
-                <a:solidFill>
-                  <a:srgbClr val="222222"/>
-                </a:solidFill>
+              <a:defRPr sz="1700">
+                <a:solidFill>
+                  <a:srgbClr val="262626"/>
+                </a:solidFill>
+                <a:latin typeface="Calibri"/>
               </a:defRPr>
             </a:pPr>
             <a:r>
-              <a:t>- Response fields: id, policyNumber, policyholderName, lineOfBusiness (display, e.g. A&amp;H), status (title-case),</a:t>
-            </a:r>
-          </a:p>
-          <a:p>
-            <a:pPr lvl="1">
-              <a:spcAft>
-                <a:spcPts val="500"/>
-              </a:spcAft>
-              <a:defRPr sz="1500">
-                <a:solidFill>
-                  <a:srgbClr val="222222"/>
-                </a:solidFill>
-              </a:defRPr>
-            </a:pPr>
-            <a:r>
-              <a:t>  - premiumAmount, currency, effectiveDate, expiryDate, region, underwriter, flaggedForReview, isExpiringSoon, createdAt, updatedAt</a:t>
+              <a:t>• Overrode: openapi → static/ for Swagger; line-gate then instruction-gate coverage; Dockerfile.local for proxy</a:t>
             </a:r>
           </a:p>
           <a:p>
@@ -4344,19 +7433,41 @@
               <a:spcAft>
                 <a:spcPts val="500"/>
               </a:spcAft>
-              <a:defRPr sz="1800">
-                <a:solidFill>
-                  <a:srgbClr val="222222"/>
-                </a:solidFill>
+              <a:defRPr sz="1700">
+                <a:solidFill>
+                  <a:srgbClr val="262626"/>
+                </a:solidFill>
+                <a:latin typeface="Calibri"/>
               </a:defRPr>
             </a:pPr>
             <a:r>
-              <a:t>- Errors: 404 unknown id | 400 validation/type-mismatch | 503 DB unavailable - structured, no stack traces</a:t>
+              <a:t>• Corrected: retracted the ‘JPA enums on domain POJO’ caveat after validating the domain is framework-free</a:t>
+            </a:r>
+          </a:p>
+          <a:p>
+            <a:pPr>
+              <a:spcAft>
+                <a:spcPts val="500"/>
+              </a:spcAft>
+              <a:defRPr sz="1700">
+                <a:solidFill>
+                  <a:srgbClr val="262626"/>
+                </a:solidFill>
+                <a:latin typeface="Calibri"/>
+              </a:defRPr>
+            </a:pPr>
+            <a:r>
+              <a:t>• Full log committed at docs/AI-WORKING-JOURNAL.md</a:t>
             </a:r>
           </a:p>
         </p:txBody>
       </p:sp>
     </p:spTree>
+    <p:extLst>
+      <p:ext uri="{BB962C8B-B14F-4D97-AF65-F5344CB8AC3E}">
+        <p14:creationId xmlns:p14="http://schemas.microsoft.com/office/powerpoint/2010/main" val="1290552111"/>
+      </p:ext>
+    </p:extLst>
   </p:cSld>
   <p:clrMapOvr>
     <a:masterClrMapping/>
@@ -4365,7 +7476,7 @@
 </file>
 
 <file path=ppt/slides/slide8.xml><?xml version="1.0" encoding="utf-8"?>
-<p:sld xmlns:a="http://schemas.openxmlformats.org/drawingml/2006/main" xmlns:p="http://schemas.openxmlformats.org/presentationml/2006/main" xmlns:r="http://schemas.openxmlformats.org/officeDocument/2006/relationships">
+<p:sld xmlns:a="http://schemas.openxmlformats.org/drawingml/2006/main" xmlns:r="http://schemas.openxmlformats.org/officeDocument/2006/relationships" xmlns:p="http://schemas.openxmlformats.org/presentationml/2006/main">
   <p:cSld>
     <p:spTree>
       <p:nvGrpSpPr>
@@ -4373,7 +7484,14 @@
         <p:cNvGrpSpPr/>
         <p:nvPr/>
       </p:nvGrpSpPr>
-      <p:grpSpPr/>
+      <p:grpSpPr>
+        <a:xfrm>
+          <a:off x="0" y="0"/>
+          <a:ext cx="0" cy="0"/>
+          <a:chOff x="0" y="0"/>
+          <a:chExt cx="0" cy="0"/>
+        </a:xfrm>
+      </p:grpSpPr>
       <p:sp>
         <p:nvSpPr>
           <p:cNvPr id="2" name="TextBox 1"/>
@@ -4382,7 +7500,7 @@
         </p:nvSpPr>
         <p:spPr>
           <a:xfrm>
-            <a:off x="548640" y="365760"/>
+            <a:off x="548640" y="411480"/>
             <a:ext cx="11064240" cy="822960"/>
           </a:xfrm>
           <a:prstGeom prst="rect">
@@ -4397,14 +7515,15 @@
           <a:lstStyle/>
           <a:p>
             <a:pPr>
-              <a:defRPr sz="2600" b="1">
-                <a:solidFill>
-                  <a:srgbClr val="006D77"/>
-                </a:solidFill>
+              <a:defRPr sz="2800" b="1">
+                <a:solidFill>
+                  <a:srgbClr val="5F1EBE"/>
+                </a:solidFill>
+                <a:latin typeface="Calibri Light"/>
               </a:defRPr>
             </a:pPr>
             <a:r>
-              <a:t>4. Working Journal (process highlights)</a:t>
+              <a:t>5. Testing Strategy</a:t>
             </a:r>
           </a:p>
         </p:txBody>
@@ -4417,8 +7536,8 @@
         </p:nvSpPr>
         <p:spPr>
           <a:xfrm>
-            <a:off x="731520" y="1325880"/>
-            <a:ext cx="10881360" cy="5212080"/>
+            <a:off x="640080" y="1371600"/>
+            <a:ext cx="10972800" cy="5120640"/>
           </a:xfrm>
           <a:prstGeom prst="rect">
             <a:avLst/>
@@ -4435,14 +7554,47 @@
               <a:spcAft>
                 <a:spcPts val="500"/>
               </a:spcAft>
-              <a:defRPr sz="1800">
-                <a:solidFill>
-                  <a:srgbClr val="222222"/>
-                </a:solidFill>
+              <a:defRPr sz="1700">
+                <a:solidFill>
+                  <a:srgbClr val="262626"/>
+                </a:solidFill>
+                <a:latin typeface="Calibri"/>
               </a:defRPr>
             </a:pPr>
             <a:r>
-              <a:t>- Accepted: feature / schema / Docker / branching / k6 requests implemented as specified</a:t>
+              <a:t>• Layered suite (38 tests)</a:t>
+            </a:r>
+          </a:p>
+          <a:p>
+            <a:pPr lvl="1">
+              <a:spcAft>
+                <a:spcPts val="500"/>
+              </a:spcAft>
+              <a:defRPr sz="1400">
+                <a:solidFill>
+                  <a:srgbClr val="262626"/>
+                </a:solidFill>
+                <a:latin typeface="Calibri"/>
+              </a:defRPr>
+            </a:pPr>
+            <a:r>
+              <a:t>– service unit (port mocked) | caching (hits + eviction) | controller slice (real mapper)</a:t>
+            </a:r>
+          </a:p>
+          <a:p>
+            <a:pPr lvl="1">
+              <a:spcAft>
+                <a:spcPts val="500"/>
+              </a:spcAft>
+              <a:defRPr sz="1400">
+                <a:solidFill>
+                  <a:srgbClr val="262626"/>
+                </a:solidFill>
+                <a:latin typeface="Calibri"/>
+              </a:defRPr>
+            </a:pPr>
+            <a:r>
+              <a:t>– full-stack acceptance on Testcontainers PostgreSQL (@Transactional rollback) | DB-failure path (503)</a:t>
             </a:r>
           </a:p>
           <a:p>
@@ -4450,14 +7602,47 @@
               <a:spcAft>
                 <a:spcPts val="500"/>
               </a:spcAft>
-              <a:defRPr sz="1800">
-                <a:solidFill>
-                  <a:srgbClr val="222222"/>
-                </a:solidFill>
+              <a:defRPr sz="1700">
+                <a:solidFill>
+                  <a:srgbClr val="262626"/>
+                </a:solidFill>
+                <a:latin typeface="Calibri"/>
               </a:defRPr>
             </a:pPr>
             <a:r>
-              <a:t>- Challenged / pushed back:</a:t>
+              <a:t>• Edge / negative: invalid enum → 400, malformed UUID → 400, no match → empty page, flag unknown → no-op</a:t>
+            </a:r>
+          </a:p>
+          <a:p>
+            <a:pPr>
+              <a:spcAft>
+                <a:spcPts val="500"/>
+              </a:spcAft>
+              <a:defRPr sz="1700">
+                <a:solidFill>
+                  <a:srgbClr val="262626"/>
+                </a:solidFill>
+                <a:latin typeface="Calibri"/>
+              </a:defRPr>
+            </a:pPr>
+            <a:r>
+              <a:t>• Coverage: 92.5% line / 93.9% instruction (Lombok excluded); gated line ≥ 80%, instruction ≥ 85% (JaCoCo)</a:t>
+            </a:r>
+          </a:p>
+          <a:p>
+            <a:pPr>
+              <a:spcAft>
+                <a:spcPts val="500"/>
+              </a:spcAft>
+              <a:defRPr sz="1700">
+                <a:solidFill>
+                  <a:srgbClr val="262626"/>
+                </a:solidFill>
+                <a:latin typeface="Calibri"/>
+              </a:defRPr>
+            </a:pPr>
+            <a:r>
+              <a:t>• Load testing: Gatling (in-build gate) + k6; p95 &lt; 300ms for list &amp; detail @ 50 concurrent sessions</a:t>
             </a:r>
           </a:p>
           <a:p>
@@ -4465,59 +7650,15 @@
               <a:spcAft>
                 <a:spcPts val="500"/>
               </a:spcAft>
-              <a:defRPr sz="1500">
-                <a:solidFill>
-                  <a:srgbClr val="222222"/>
-                </a:solidFill>
+              <a:defRPr sz="1400">
+                <a:solidFill>
+                  <a:srgbClr val="262626"/>
+                </a:solidFill>
+                <a:latin typeface="Calibri"/>
               </a:defRPr>
             </a:pPr>
             <a:r>
-              <a:t>  - flagged 3 layering violations (service-&gt;api, infra-&gt;service, infra-&gt;domain leak) and fixed them</a:t>
-            </a:r>
-          </a:p>
-          <a:p>
-            <a:pPr lvl="1">
-              <a:spcAft>
-                <a:spcPts val="500"/>
-              </a:spcAft>
-              <a:defRPr sz="1500">
-                <a:solidFill>
-                  <a:srgbClr val="222222"/>
-                </a:solidFill>
-              </a:defRPr>
-            </a:pPr>
-            <a:r>
-              <a:t>  - caught duplicated toTitleCase + presentation logic in the service; flagged a stale duplicate load test</a:t>
-            </a:r>
-          </a:p>
-          <a:p>
-            <a:pPr lvl="1">
-              <a:spcAft>
-                <a:spcPts val="500"/>
-              </a:spcAft>
-              <a:defRPr sz="1500">
-                <a:solidFill>
-                  <a:srgbClr val="222222"/>
-                </a:solidFill>
-              </a:defRPr>
-            </a:pPr>
-            <a:r>
-              <a:t>  - recommended NOT auto-merging breaking Dependabot PRs (Spring Boot 4, future JDKs)</a:t>
-            </a:r>
-          </a:p>
-          <a:p>
-            <a:pPr lvl="1">
-              <a:spcAft>
-                <a:spcPts val="500"/>
-              </a:spcAft>
-              <a:defRPr sz="1500">
-                <a:solidFill>
-                  <a:srgbClr val="222222"/>
-                </a:solidFill>
-              </a:defRPr>
-            </a:pPr>
-            <a:r>
-              <a:t>  - flagged PII risk - free-text search value was being logged - and removed it</a:t>
+              <a:t>– measured: list ~150ms, detail ~80ms, 0 errors</a:t>
             </a:r>
           </a:p>
           <a:p>
@@ -4525,245 +7666,25 @@
               <a:spcAft>
                 <a:spcPts val="500"/>
               </a:spcAft>
-              <a:defRPr sz="1800">
-                <a:solidFill>
-                  <a:srgbClr val="222222"/>
-                </a:solidFill>
+              <a:defRPr sz="1700">
+                <a:solidFill>
+                  <a:srgbClr val="262626"/>
+                </a:solidFill>
+                <a:latin typeface="Calibri"/>
               </a:defRPr>
             </a:pPr>
             <a:r>
-              <a:t>- Overrode: openapi -&gt; static/ for Swagger; line-gate then instruction-gate coverage; Dockerfile.local for proxy</a:t>
-            </a:r>
-          </a:p>
-          <a:p>
-            <a:pPr>
-              <a:spcAft>
-                <a:spcPts val="500"/>
-              </a:spcAft>
-              <a:defRPr sz="1800">
-                <a:solidFill>
-                  <a:srgbClr val="222222"/>
-                </a:solidFill>
-              </a:defRPr>
-            </a:pPr>
-            <a:r>
-              <a:t>- Corrected: retracted the 'JPA enums on domain POJO' caveat after validating the domain is framework-free</a:t>
-            </a:r>
-          </a:p>
-          <a:p>
-            <a:pPr>
-              <a:spcAft>
-                <a:spcPts val="500"/>
-              </a:spcAft>
-              <a:defRPr sz="1800">
-                <a:solidFill>
-                  <a:srgbClr val="222222"/>
-                </a:solidFill>
-              </a:defRPr>
-            </a:pPr>
-            <a:r>
-              <a:t>- Full log: docs/AI-WORKING-JOURNAL.md</a:t>
+              <a:t>• CI: mvn verify (Testcontainers + coverage gate) must pass before the image is published</a:t>
             </a:r>
           </a:p>
         </p:txBody>
       </p:sp>
     </p:spTree>
-  </p:cSld>
-  <p:clrMapOvr>
-    <a:masterClrMapping/>
-  </p:clrMapOvr>
-</p:sld>
-</file>
-
-<file path=ppt/slides/slide9.xml><?xml version="1.0" encoding="utf-8"?>
-<p:sld xmlns:a="http://schemas.openxmlformats.org/drawingml/2006/main" xmlns:p="http://schemas.openxmlformats.org/presentationml/2006/main" xmlns:r="http://schemas.openxmlformats.org/officeDocument/2006/relationships">
-  <p:cSld>
-    <p:spTree>
-      <p:nvGrpSpPr>
-        <p:cNvPr id="1" name=""/>
-        <p:cNvGrpSpPr/>
-        <p:nvPr/>
-      </p:nvGrpSpPr>
-      <p:grpSpPr/>
-      <p:sp>
-        <p:nvSpPr>
-          <p:cNvPr id="2" name="TextBox 1"/>
-          <p:cNvSpPr txBox="1"/>
-          <p:nvPr/>
-        </p:nvSpPr>
-        <p:spPr>
-          <a:xfrm>
-            <a:off x="548640" y="365760"/>
-            <a:ext cx="11064240" cy="822960"/>
-          </a:xfrm>
-          <a:prstGeom prst="rect">
-            <a:avLst/>
-          </a:prstGeom>
-          <a:noFill/>
-        </p:spPr>
-        <p:txBody>
-          <a:bodyPr wrap="none">
-            <a:spAutoFit/>
-          </a:bodyPr>
-          <a:lstStyle/>
-          <a:p>
-            <a:pPr>
-              <a:defRPr sz="2600" b="1">
-                <a:solidFill>
-                  <a:srgbClr val="006D77"/>
-                </a:solidFill>
-              </a:defRPr>
-            </a:pPr>
-            <a:r>
-              <a:t>5. Testing Strategy</a:t>
-            </a:r>
-          </a:p>
-        </p:txBody>
-      </p:sp>
-      <p:sp>
-        <p:nvSpPr>
-          <p:cNvPr id="3" name="TextBox 2"/>
-          <p:cNvSpPr txBox="1"/>
-          <p:nvPr/>
-        </p:nvSpPr>
-        <p:spPr>
-          <a:xfrm>
-            <a:off x="731520" y="1325880"/>
-            <a:ext cx="10881360" cy="5212080"/>
-          </a:xfrm>
-          <a:prstGeom prst="rect">
-            <a:avLst/>
-          </a:prstGeom>
-          <a:noFill/>
-        </p:spPr>
-        <p:txBody>
-          <a:bodyPr wrap="square">
-            <a:spAutoFit/>
-          </a:bodyPr>
-          <a:lstStyle/>
-          <a:p>
-            <a:pPr>
-              <a:spcAft>
-                <a:spcPts val="500"/>
-              </a:spcAft>
-              <a:defRPr sz="1800">
-                <a:solidFill>
-                  <a:srgbClr val="222222"/>
-                </a:solidFill>
-              </a:defRPr>
-            </a:pPr>
-            <a:r>
-              <a:t>- Layered suite (38 tests):</a:t>
-            </a:r>
-          </a:p>
-          <a:p>
-            <a:pPr lvl="1">
-              <a:spcAft>
-                <a:spcPts val="500"/>
-              </a:spcAft>
-              <a:defRPr sz="1500">
-                <a:solidFill>
-                  <a:srgbClr val="222222"/>
-                </a:solidFill>
-              </a:defRPr>
-            </a:pPr>
-            <a:r>
-              <a:t>  - service unit (port mocked) | caching (hits + eviction) | controller slice (real mapper)</a:t>
-            </a:r>
-          </a:p>
-          <a:p>
-            <a:pPr lvl="1">
-              <a:spcAft>
-                <a:spcPts val="500"/>
-              </a:spcAft>
-              <a:defRPr sz="1500">
-                <a:solidFill>
-                  <a:srgbClr val="222222"/>
-                </a:solidFill>
-              </a:defRPr>
-            </a:pPr>
-            <a:r>
-              <a:t>  - full-stack acceptance on Testcontainers PostgreSQL (@Transactional rollback) | DB-failure path (503)</a:t>
-            </a:r>
-          </a:p>
-          <a:p>
-            <a:pPr>
-              <a:spcAft>
-                <a:spcPts val="500"/>
-              </a:spcAft>
-              <a:defRPr sz="1800">
-                <a:solidFill>
-                  <a:srgbClr val="222222"/>
-                </a:solidFill>
-              </a:defRPr>
-            </a:pPr>
-            <a:r>
-              <a:t>- Edge / negative: invalid enum -&gt; 400, malformed UUID -&gt; 400, no match -&gt; empty page, flag unknown -&gt; no-op</a:t>
-            </a:r>
-          </a:p>
-          <a:p>
-            <a:pPr>
-              <a:spcAft>
-                <a:spcPts val="500"/>
-              </a:spcAft>
-              <a:defRPr sz="1800">
-                <a:solidFill>
-                  <a:srgbClr val="222222"/>
-                </a:solidFill>
-              </a:defRPr>
-            </a:pPr>
-            <a:r>
-              <a:t>- Coverage: 92.5% line / 93.9% instruction (Lombok excluded); gated line &gt;= 80%, instruction &gt;= 85% (JaCoCo)</a:t>
-            </a:r>
-          </a:p>
-          <a:p>
-            <a:pPr>
-              <a:spcAft>
-                <a:spcPts val="500"/>
-              </a:spcAft>
-              <a:defRPr sz="1800">
-                <a:solidFill>
-                  <a:srgbClr val="222222"/>
-                </a:solidFill>
-              </a:defRPr>
-            </a:pPr>
-            <a:r>
-              <a:t>- Load testing: Gatling (in-build gate) + k6; p95 &lt; 300ms list &amp; detail @ 50 concurrent sessions</a:t>
-            </a:r>
-          </a:p>
-          <a:p>
-            <a:pPr lvl="1">
-              <a:spcAft>
-                <a:spcPts val="500"/>
-              </a:spcAft>
-              <a:defRPr sz="1500">
-                <a:solidFill>
-                  <a:srgbClr val="222222"/>
-                </a:solidFill>
-              </a:defRPr>
-            </a:pPr>
-            <a:r>
-              <a:t>  - measured: list ~150ms, detail ~80ms, 0 errors</a:t>
-            </a:r>
-          </a:p>
-          <a:p>
-            <a:pPr>
-              <a:spcAft>
-                <a:spcPts val="500"/>
-              </a:spcAft>
-              <a:defRPr sz="1800">
-                <a:solidFill>
-                  <a:srgbClr val="222222"/>
-                </a:solidFill>
-              </a:defRPr>
-            </a:pPr>
-            <a:r>
-              <a:t>- CI: mvn verify (Testcontainers + coverage gate) must pass before the image is published</a:t>
-            </a:r>
-          </a:p>
-        </p:txBody>
-      </p:sp>
-    </p:spTree>
+    <p:extLst>
+      <p:ext uri="{BB962C8B-B14F-4D97-AF65-F5344CB8AC3E}">
+        <p14:creationId xmlns:p14="http://schemas.microsoft.com/office/powerpoint/2010/main" val="1647963943"/>
+      </p:ext>
+    </p:extLst>
   </p:cSld>
   <p:clrMapOvr>
     <a:masterClrMapping/>
@@ -4782,44 +7703,44 @@
         <a:sysClr val="window" lastClr="FFFFFF"/>
       </a:lt1>
       <a:dk2>
-        <a:srgbClr val="1F497D"/>
+        <a:srgbClr val="44546A"/>
       </a:dk2>
       <a:lt2>
-        <a:srgbClr val="EEECE1"/>
+        <a:srgbClr val="E7E6E6"/>
       </a:lt2>
       <a:accent1>
-        <a:srgbClr val="4F81BD"/>
+        <a:srgbClr val="4472C4"/>
       </a:accent1>
       <a:accent2>
-        <a:srgbClr val="C0504D"/>
+        <a:srgbClr val="ED7D31"/>
       </a:accent2>
       <a:accent3>
-        <a:srgbClr val="9BBB59"/>
+        <a:srgbClr val="A5A5A5"/>
       </a:accent3>
       <a:accent4>
-        <a:srgbClr val="8064A2"/>
+        <a:srgbClr val="FFC000"/>
       </a:accent4>
       <a:accent5>
-        <a:srgbClr val="4BACC6"/>
+        <a:srgbClr val="5B9BD5"/>
       </a:accent5>
       <a:accent6>
-        <a:srgbClr val="F79646"/>
+        <a:srgbClr val="70AD47"/>
       </a:accent6>
       <a:hlink>
-        <a:srgbClr val="0000FF"/>
+        <a:srgbClr val="0563C1"/>
       </a:hlink>
       <a:folHlink>
-        <a:srgbClr val="800080"/>
+        <a:srgbClr val="954F72"/>
       </a:folHlink>
     </a:clrScheme>
     <a:fontScheme name="Office">
       <a:majorFont>
-        <a:latin typeface="Calibri"/>
+        <a:latin typeface="Calibri Light" panose="020F0302020204030204"/>
         <a:ea typeface=""/>
         <a:cs typeface=""/>
-        <a:font script="Jpan" typeface="ＭＳ Ｐゴシック"/>
+        <a:font script="Jpan" typeface="游ゴシック Light"/>
         <a:font script="Hang" typeface="맑은 고딕"/>
-        <a:font script="Hans" typeface="宋体"/>
+        <a:font script="Hans" typeface="等线 Light"/>
         <a:font script="Hant" typeface="新細明體"/>
         <a:font script="Arab" typeface="Times New Roman"/>
         <a:font script="Hebr" typeface="Times New Roman"/>
@@ -4847,14 +7768,31 @@
         <a:font script="Viet" typeface="Times New Roman"/>
         <a:font script="Uigh" typeface="Microsoft Uighur"/>
         <a:font script="Geor" typeface="Sylfaen"/>
+        <a:font script="Armn" typeface="Arial"/>
+        <a:font script="Bugi" typeface="Leelawadee UI"/>
+        <a:font script="Bopo" typeface="Microsoft JhengHei"/>
+        <a:font script="Java" typeface="Javanese Text"/>
+        <a:font script="Lisu" typeface="Segoe UI"/>
+        <a:font script="Mymr" typeface="Myanmar Text"/>
+        <a:font script="Nkoo" typeface="Ebrima"/>
+        <a:font script="Olck" typeface="Nirmala UI"/>
+        <a:font script="Osma" typeface="Ebrima"/>
+        <a:font script="Phag" typeface="Phagspa"/>
+        <a:font script="Syrn" typeface="Estrangelo Edessa"/>
+        <a:font script="Syrj" typeface="Estrangelo Edessa"/>
+        <a:font script="Syre" typeface="Estrangelo Edessa"/>
+        <a:font script="Sora" typeface="Nirmala UI"/>
+        <a:font script="Tale" typeface="Microsoft Tai Le"/>
+        <a:font script="Talu" typeface="Microsoft New Tai Lue"/>
+        <a:font script="Tfng" typeface="Ebrima"/>
       </a:majorFont>
       <a:minorFont>
-        <a:latin typeface="Calibri"/>
+        <a:latin typeface="Calibri" panose="020F0502020204030204"/>
         <a:ea typeface=""/>
         <a:cs typeface=""/>
-        <a:font script="Jpan" typeface="ＭＳ Ｐゴシック"/>
+        <a:font script="Jpan" typeface="游ゴシック"/>
         <a:font script="Hang" typeface="맑은 고딕"/>
-        <a:font script="Hans" typeface="宋体"/>
+        <a:font script="Hans" typeface="等线"/>
         <a:font script="Hant" typeface="新細明體"/>
         <a:font script="Arab" typeface="Arial"/>
         <a:font script="Hebr" typeface="Arial"/>
@@ -4882,6 +7820,23 @@
         <a:font script="Viet" typeface="Arial"/>
         <a:font script="Uigh" typeface="Microsoft Uighur"/>
         <a:font script="Geor" typeface="Sylfaen"/>
+        <a:font script="Armn" typeface="Arial"/>
+        <a:font script="Bugi" typeface="Leelawadee UI"/>
+        <a:font script="Bopo" typeface="Microsoft JhengHei"/>
+        <a:font script="Java" typeface="Javanese Text"/>
+        <a:font script="Lisu" typeface="Segoe UI"/>
+        <a:font script="Mymr" typeface="Myanmar Text"/>
+        <a:font script="Nkoo" typeface="Ebrima"/>
+        <a:font script="Olck" typeface="Nirmala UI"/>
+        <a:font script="Osma" typeface="Ebrima"/>
+        <a:font script="Phag" typeface="Phagspa"/>
+        <a:font script="Syrn" typeface="Estrangelo Edessa"/>
+        <a:font script="Syrj" typeface="Estrangelo Edessa"/>
+        <a:font script="Syre" typeface="Estrangelo Edessa"/>
+        <a:font script="Sora" typeface="Nirmala UI"/>
+        <a:font script="Tale" typeface="Microsoft Tai Le"/>
+        <a:font script="Talu" typeface="Microsoft New Tai Lue"/>
+        <a:font script="Tfng" typeface="Ebrima"/>
       </a:minorFont>
     </a:fontScheme>
     <a:fmtScheme name="Office">
@@ -4893,109 +7848,294 @@
           <a:gsLst>
             <a:gs pos="0">
               <a:schemeClr val="phClr">
-                <a:tint val="50000"/>
-                <a:satMod val="300000"/>
+                <a:lumMod val="110000"/>
+                <a:satMod val="105000"/>
+                <a:tint val="67000"/>
               </a:schemeClr>
             </a:gs>
-            <a:gs pos="35000">
+            <a:gs pos="50000">
               <a:schemeClr val="phClr">
-                <a:tint val="37000"/>
-                <a:satMod val="300000"/>
+                <a:lumMod val="105000"/>
+                <a:satMod val="103000"/>
+                <a:tint val="73000"/>
               </a:schemeClr>
             </a:gs>
             <a:gs pos="100000">
               <a:schemeClr val="phClr">
-                <a:tint val="15000"/>
-                <a:satMod val="350000"/>
+                <a:lumMod val="105000"/>
+                <a:satMod val="109000"/>
+                <a:tint val="81000"/>
               </a:schemeClr>
             </a:gs>
           </a:gsLst>
-          <a:lin ang="16200000" scaled="1"/>
+          <a:lin ang="5400000" scaled="0"/>
         </a:gradFill>
         <a:gradFill rotWithShape="1">
           <a:gsLst>
             <a:gs pos="0">
               <a:schemeClr val="phClr">
-                <a:tint val="100000"/>
+                <a:satMod val="103000"/>
+                <a:lumMod val="102000"/>
+                <a:tint val="94000"/>
+              </a:schemeClr>
+            </a:gs>
+            <a:gs pos="50000">
+              <a:schemeClr val="phClr">
+                <a:satMod val="110000"/>
+                <a:lumMod val="100000"/>
                 <a:shade val="100000"/>
-                <a:satMod val="130000"/>
               </a:schemeClr>
             </a:gs>
             <a:gs pos="100000">
               <a:schemeClr val="phClr">
-                <a:tint val="50000"/>
-                <a:shade val="100000"/>
-                <a:satMod val="350000"/>
+                <a:lumMod val="99000"/>
+                <a:satMod val="120000"/>
+                <a:shade val="78000"/>
               </a:schemeClr>
             </a:gs>
           </a:gsLst>
-          <a:lin ang="16200000" scaled="0"/>
+          <a:lin ang="5400000" scaled="0"/>
         </a:gradFill>
       </a:fillStyleLst>
       <a:lnStyleLst>
-        <a:ln w="9525" cap="flat" cmpd="sng" algn="ctr">
-          <a:solidFill>
-            <a:schemeClr val="phClr">
-              <a:shade val="95000"/>
-              <a:satMod val="105000"/>
-            </a:schemeClr>
-          </a:solidFill>
-          <a:prstDash val="solid"/>
-        </a:ln>
-        <a:ln w="25400" cap="flat" cmpd="sng" algn="ctr">
+        <a:ln w="6350" cap="flat" cmpd="sng" algn="ctr">
           <a:solidFill>
             <a:schemeClr val="phClr"/>
           </a:solidFill>
           <a:prstDash val="solid"/>
+          <a:miter lim="800000"/>
         </a:ln>
-        <a:ln w="38100" cap="flat" cmpd="sng" algn="ctr">
+        <a:ln w="12700" cap="flat" cmpd="sng" algn="ctr">
           <a:solidFill>
             <a:schemeClr val="phClr"/>
           </a:solidFill>
           <a:prstDash val="solid"/>
+          <a:miter lim="800000"/>
+        </a:ln>
+        <a:ln w="19050" cap="flat" cmpd="sng" algn="ctr">
+          <a:solidFill>
+            <a:schemeClr val="phClr"/>
+          </a:solidFill>
+          <a:prstDash val="solid"/>
+          <a:miter lim="800000"/>
         </a:ln>
       </a:lnStyleLst>
       <a:effectStyleLst>
         <a:effectStyle>
+          <a:effectLst/>
+        </a:effectStyle>
+        <a:effectStyle>
+          <a:effectLst/>
+        </a:effectStyle>
+        <a:effectStyle>
           <a:effectLst>
-            <a:outerShdw blurRad="40000" dist="20000" dir="5400000" rotWithShape="0">
+            <a:outerShdw blurRad="57150" dist="19050" dir="5400000" algn="ctr" rotWithShape="0">
               <a:srgbClr val="000000">
-                <a:alpha val="38000"/>
+                <a:alpha val="63000"/>
               </a:srgbClr>
             </a:outerShdw>
           </a:effectLst>
         </a:effectStyle>
-        <a:effectStyle>
-          <a:effectLst>
-            <a:outerShdw blurRad="40000" dist="23000" dir="5400000" rotWithShape="0">
-              <a:srgbClr val="000000">
-                <a:alpha val="35000"/>
-              </a:srgbClr>
-            </a:outerShdw>
-          </a:effectLst>
-        </a:effectStyle>
-        <a:effectStyle>
-          <a:effectLst>
-            <a:outerShdw blurRad="40000" dist="23000" dir="5400000" rotWithShape="0">
-              <a:srgbClr val="000000">
-                <a:alpha val="35000"/>
-              </a:srgbClr>
-            </a:outerShdw>
-          </a:effectLst>
-          <a:scene3d>
-            <a:camera prst="orthographicFront">
-              <a:rot lat="0" lon="0" rev="0"/>
-            </a:camera>
-            <a:lightRig rig="threePt" dir="t">
-              <a:rot lat="0" lon="0" rev="1200000"/>
-            </a:lightRig>
-          </a:scene3d>
-          <a:sp3d>
-            <a:bevelT w="63500" h="25400"/>
-          </a:sp3d>
-        </a:effectStyle>
       </a:effectStyleLst>
       <a:bgFillStyleLst>
+        <a:solidFill>
+          <a:schemeClr val="phClr"/>
+        </a:solidFill>
+        <a:solidFill>
+          <a:schemeClr val="phClr">
+            <a:tint val="95000"/>
+            <a:satMod val="170000"/>
+          </a:schemeClr>
+        </a:solidFill>
+        <a:gradFill rotWithShape="1">
+          <a:gsLst>
+            <a:gs pos="0">
+              <a:schemeClr val="phClr">
+                <a:tint val="93000"/>
+                <a:satMod val="150000"/>
+                <a:shade val="98000"/>
+                <a:lumMod val="102000"/>
+              </a:schemeClr>
+            </a:gs>
+            <a:gs pos="50000">
+              <a:schemeClr val="phClr">
+                <a:tint val="98000"/>
+                <a:satMod val="130000"/>
+                <a:shade val="90000"/>
+                <a:lumMod val="103000"/>
+              </a:schemeClr>
+            </a:gs>
+            <a:gs pos="100000">
+              <a:schemeClr val="phClr">
+                <a:shade val="63000"/>
+                <a:satMod val="120000"/>
+              </a:schemeClr>
+            </a:gs>
+          </a:gsLst>
+          <a:lin ang="5400000" scaled="0"/>
+        </a:gradFill>
+      </a:bgFillStyleLst>
+    </a:fmtScheme>
+  </a:themeElements>
+  <a:objectDefaults/>
+  <a:extraClrSchemeLst/>
+  <a:extLst>
+    <a:ext uri="{05A4C25C-085E-4340-85A3-A5531E510DB2}">
+      <thm15:themeFamily xmlns:thm15="http://schemas.microsoft.com/office/thememl/2012/main" name="Office Theme" id="{62F939B6-93AF-4DB8-9C6B-D6C7DFDC589F}" vid="{4A3C46E8-61CC-4603-A589-7422A47A8E4A}"/>
+    </a:ext>
+  </a:extLst>
+</a:theme>
+</file>
+
+<file path=ppt/theme/theme2.xml><?xml version="1.0" encoding="utf-8"?>
+<a:theme xmlns:a="http://schemas.openxmlformats.org/drawingml/2006/main" name="Office Theme">
+  <a:themeElements>
+    <a:clrScheme name="Office">
+      <a:dk1>
+        <a:sysClr val="windowText" lastClr="000000"/>
+      </a:dk1>
+      <a:lt1>
+        <a:sysClr val="window" lastClr="FFFFFF"/>
+      </a:lt1>
+      <a:dk2>
+        <a:srgbClr val="44546A"/>
+      </a:dk2>
+      <a:lt2>
+        <a:srgbClr val="E7E6E6"/>
+      </a:lt2>
+      <a:accent1>
+        <a:srgbClr val="4472C4"/>
+      </a:accent1>
+      <a:accent2>
+        <a:srgbClr val="ED7D31"/>
+      </a:accent2>
+      <a:accent3>
+        <a:srgbClr val="A5A5A5"/>
+      </a:accent3>
+      <a:accent4>
+        <a:srgbClr val="FFC000"/>
+      </a:accent4>
+      <a:accent5>
+        <a:srgbClr val="5B9BD5"/>
+      </a:accent5>
+      <a:accent6>
+        <a:srgbClr val="70AD47"/>
+      </a:accent6>
+      <a:hlink>
+        <a:srgbClr val="0563C1"/>
+      </a:hlink>
+      <a:folHlink>
+        <a:srgbClr val="954F72"/>
+      </a:folHlink>
+    </a:clrScheme>
+    <a:fontScheme name="Office">
+      <a:majorFont>
+        <a:latin typeface="Calibri Light" panose="020F0302020204030204"/>
+        <a:ea typeface=""/>
+        <a:cs typeface=""/>
+        <a:font script="Jpan" typeface="游ゴシック Light"/>
+        <a:font script="Hang" typeface="맑은 고딕"/>
+        <a:font script="Hans" typeface="等线 Light"/>
+        <a:font script="Hant" typeface="新細明體"/>
+        <a:font script="Arab" typeface="Times New Roman"/>
+        <a:font script="Hebr" typeface="Times New Roman"/>
+        <a:font script="Thai" typeface="Angsana New"/>
+        <a:font script="Ethi" typeface="Nyala"/>
+        <a:font script="Beng" typeface="Vrinda"/>
+        <a:font script="Gujr" typeface="Shruti"/>
+        <a:font script="Khmr" typeface="MoolBoran"/>
+        <a:font script="Knda" typeface="Tunga"/>
+        <a:font script="Guru" typeface="Raavi"/>
+        <a:font script="Cans" typeface="Euphemia"/>
+        <a:font script="Cher" typeface="Plantagenet Cherokee"/>
+        <a:font script="Yiii" typeface="Microsoft Yi Baiti"/>
+        <a:font script="Tibt" typeface="Microsoft Himalaya"/>
+        <a:font script="Thaa" typeface="MV Boli"/>
+        <a:font script="Deva" typeface="Mangal"/>
+        <a:font script="Telu" typeface="Gautami"/>
+        <a:font script="Taml" typeface="Latha"/>
+        <a:font script="Syrc" typeface="Estrangelo Edessa"/>
+        <a:font script="Orya" typeface="Kalinga"/>
+        <a:font script="Mlym" typeface="Kartika"/>
+        <a:font script="Laoo" typeface="DokChampa"/>
+        <a:font script="Sinh" typeface="Iskoola Pota"/>
+        <a:font script="Mong" typeface="Mongolian Baiti"/>
+        <a:font script="Viet" typeface="Times New Roman"/>
+        <a:font script="Uigh" typeface="Microsoft Uighur"/>
+        <a:font script="Geor" typeface="Sylfaen"/>
+        <a:font script="Armn" typeface="Arial"/>
+        <a:font script="Bugi" typeface="Leelawadee UI"/>
+        <a:font script="Bopo" typeface="Microsoft JhengHei"/>
+        <a:font script="Java" typeface="Javanese Text"/>
+        <a:font script="Lisu" typeface="Segoe UI"/>
+        <a:font script="Mymr" typeface="Myanmar Text"/>
+        <a:font script="Nkoo" typeface="Ebrima"/>
+        <a:font script="Olck" typeface="Nirmala UI"/>
+        <a:font script="Osma" typeface="Ebrima"/>
+        <a:font script="Phag" typeface="Phagspa"/>
+        <a:font script="Syrn" typeface="Estrangelo Edessa"/>
+        <a:font script="Syrj" typeface="Estrangelo Edessa"/>
+        <a:font script="Syre" typeface="Estrangelo Edessa"/>
+        <a:font script="Sora" typeface="Nirmala UI"/>
+        <a:font script="Tale" typeface="Microsoft Tai Le"/>
+        <a:font script="Talu" typeface="Microsoft New Tai Lue"/>
+        <a:font script="Tfng" typeface="Ebrima"/>
+      </a:majorFont>
+      <a:minorFont>
+        <a:latin typeface="Calibri" panose="020F0502020204030204"/>
+        <a:ea typeface=""/>
+        <a:cs typeface=""/>
+        <a:font script="Jpan" typeface="游ゴシック"/>
+        <a:font script="Hang" typeface="맑은 고딕"/>
+        <a:font script="Hans" typeface="等线"/>
+        <a:font script="Hant" typeface="新細明體"/>
+        <a:font script="Arab" typeface="Arial"/>
+        <a:font script="Hebr" typeface="Arial"/>
+        <a:font script="Thai" typeface="Cordia New"/>
+        <a:font script="Ethi" typeface="Nyala"/>
+        <a:font script="Beng" typeface="Vrinda"/>
+        <a:font script="Gujr" typeface="Shruti"/>
+        <a:font script="Khmr" typeface="DaunPenh"/>
+        <a:font script="Knda" typeface="Tunga"/>
+        <a:font script="Guru" typeface="Raavi"/>
+        <a:font script="Cans" typeface="Euphemia"/>
+        <a:font script="Cher" typeface="Plantagenet Cherokee"/>
+        <a:font script="Yiii" typeface="Microsoft Yi Baiti"/>
+        <a:font script="Tibt" typeface="Microsoft Himalaya"/>
+        <a:font script="Thaa" typeface="MV Boli"/>
+        <a:font script="Deva" typeface="Mangal"/>
+        <a:font script="Telu" typeface="Gautami"/>
+        <a:font script="Taml" typeface="Latha"/>
+        <a:font script="Syrc" typeface="Estrangelo Edessa"/>
+        <a:font script="Orya" typeface="Kalinga"/>
+        <a:font script="Mlym" typeface="Kartika"/>
+        <a:font script="Laoo" typeface="DokChampa"/>
+        <a:font script="Sinh" typeface="Iskoola Pota"/>
+        <a:font script="Mong" typeface="Mongolian Baiti"/>
+        <a:font script="Viet" typeface="Arial"/>
+        <a:font script="Uigh" typeface="Microsoft Uighur"/>
+        <a:font script="Geor" typeface="Sylfaen"/>
+        <a:font script="Armn" typeface="Arial"/>
+        <a:font script="Bugi" typeface="Leelawadee UI"/>
+        <a:font script="Bopo" typeface="Microsoft JhengHei"/>
+        <a:font script="Java" typeface="Javanese Text"/>
+        <a:font script="Lisu" typeface="Segoe UI"/>
+        <a:font script="Mymr" typeface="Myanmar Text"/>
+        <a:font script="Nkoo" typeface="Ebrima"/>
+        <a:font script="Olck" typeface="Nirmala UI"/>
+        <a:font script="Osma" typeface="Ebrima"/>
+        <a:font script="Phag" typeface="Phagspa"/>
+        <a:font script="Syrn" typeface="Estrangelo Edessa"/>
+        <a:font script="Syrj" typeface="Estrangelo Edessa"/>
+        <a:font script="Syre" typeface="Estrangelo Edessa"/>
+        <a:font script="Sora" typeface="Nirmala UI"/>
+        <a:font script="Tale" typeface="Microsoft Tai Le"/>
+        <a:font script="Talu" typeface="Microsoft New Tai Lue"/>
+        <a:font script="Tfng" typeface="Ebrima"/>
+      </a:minorFont>
+    </a:fontScheme>
+    <a:fmtScheme name="Office">
+      <a:fillStyleLst>
         <a:solidFill>
           <a:schemeClr val="phClr"/>
         </a:solidFill>
@@ -5003,90 +8143,141 @@
           <a:gsLst>
             <a:gs pos="0">
               <a:schemeClr val="phClr">
-                <a:tint val="40000"/>
-                <a:satMod val="350000"/>
+                <a:lumMod val="110000"/>
+                <a:satMod val="105000"/>
+                <a:tint val="67000"/>
               </a:schemeClr>
             </a:gs>
-            <a:gs pos="40000">
+            <a:gs pos="50000">
               <a:schemeClr val="phClr">
-                <a:tint val="45000"/>
-                <a:shade val="99000"/>
-                <a:satMod val="350000"/>
+                <a:lumMod val="105000"/>
+                <a:satMod val="103000"/>
+                <a:tint val="73000"/>
               </a:schemeClr>
             </a:gs>
             <a:gs pos="100000">
               <a:schemeClr val="phClr">
-                <a:shade val="20000"/>
-                <a:satMod val="255000"/>
+                <a:lumMod val="105000"/>
+                <a:satMod val="109000"/>
+                <a:tint val="81000"/>
               </a:schemeClr>
             </a:gs>
           </a:gsLst>
-          <a:path path="circle">
-            <a:fillToRect l="50000" t="-80000" r="50000" b="180000"/>
-          </a:path>
+          <a:lin ang="5400000" scaled="0"/>
         </a:gradFill>
         <a:gradFill rotWithShape="1">
           <a:gsLst>
             <a:gs pos="0">
               <a:schemeClr val="phClr">
-                <a:tint val="80000"/>
-                <a:satMod val="300000"/>
+                <a:satMod val="103000"/>
+                <a:lumMod val="102000"/>
+                <a:tint val="94000"/>
+              </a:schemeClr>
+            </a:gs>
+            <a:gs pos="50000">
+              <a:schemeClr val="phClr">
+                <a:satMod val="110000"/>
+                <a:lumMod val="100000"/>
+                <a:shade val="100000"/>
               </a:schemeClr>
             </a:gs>
             <a:gs pos="100000">
               <a:schemeClr val="phClr">
-                <a:shade val="30000"/>
-                <a:satMod val="200000"/>
+                <a:lumMod val="99000"/>
+                <a:satMod val="120000"/>
+                <a:shade val="78000"/>
               </a:schemeClr>
             </a:gs>
           </a:gsLst>
-          <a:path path="circle">
-            <a:fillToRect l="50000" t="50000" r="50000" b="50000"/>
-          </a:path>
+          <a:lin ang="5400000" scaled="0"/>
+        </a:gradFill>
+      </a:fillStyleLst>
+      <a:lnStyleLst>
+        <a:ln w="6350" cap="flat" cmpd="sng" algn="ctr">
+          <a:solidFill>
+            <a:schemeClr val="phClr"/>
+          </a:solidFill>
+          <a:prstDash val="solid"/>
+          <a:miter lim="800000"/>
+        </a:ln>
+        <a:ln w="12700" cap="flat" cmpd="sng" algn="ctr">
+          <a:solidFill>
+            <a:schemeClr val="phClr"/>
+          </a:solidFill>
+          <a:prstDash val="solid"/>
+          <a:miter lim="800000"/>
+        </a:ln>
+        <a:ln w="19050" cap="flat" cmpd="sng" algn="ctr">
+          <a:solidFill>
+            <a:schemeClr val="phClr"/>
+          </a:solidFill>
+          <a:prstDash val="solid"/>
+          <a:miter lim="800000"/>
+        </a:ln>
+      </a:lnStyleLst>
+      <a:effectStyleLst>
+        <a:effectStyle>
+          <a:effectLst/>
+        </a:effectStyle>
+        <a:effectStyle>
+          <a:effectLst/>
+        </a:effectStyle>
+        <a:effectStyle>
+          <a:effectLst>
+            <a:outerShdw blurRad="57150" dist="19050" dir="5400000" algn="ctr" rotWithShape="0">
+              <a:srgbClr val="000000">
+                <a:alpha val="63000"/>
+              </a:srgbClr>
+            </a:outerShdw>
+          </a:effectLst>
+        </a:effectStyle>
+      </a:effectStyleLst>
+      <a:bgFillStyleLst>
+        <a:solidFill>
+          <a:schemeClr val="phClr"/>
+        </a:solidFill>
+        <a:solidFill>
+          <a:schemeClr val="phClr">
+            <a:tint val="95000"/>
+            <a:satMod val="170000"/>
+          </a:schemeClr>
+        </a:solidFill>
+        <a:gradFill rotWithShape="1">
+          <a:gsLst>
+            <a:gs pos="0">
+              <a:schemeClr val="phClr">
+                <a:tint val="93000"/>
+                <a:satMod val="150000"/>
+                <a:shade val="98000"/>
+                <a:lumMod val="102000"/>
+              </a:schemeClr>
+            </a:gs>
+            <a:gs pos="50000">
+              <a:schemeClr val="phClr">
+                <a:tint val="98000"/>
+                <a:satMod val="130000"/>
+                <a:shade val="90000"/>
+                <a:lumMod val="103000"/>
+              </a:schemeClr>
+            </a:gs>
+            <a:gs pos="100000">
+              <a:schemeClr val="phClr">
+                <a:shade val="63000"/>
+                <a:satMod val="120000"/>
+              </a:schemeClr>
+            </a:gs>
+          </a:gsLst>
+          <a:lin ang="5400000" scaled="0"/>
         </a:gradFill>
       </a:bgFillStyleLst>
     </a:fmtScheme>
   </a:themeElements>
-  <a:objectDefaults>
-    <a:spDef>
-      <a:spPr/>
-      <a:bodyPr/>
-      <a:lstStyle/>
-      <a:style>
-        <a:lnRef idx="1">
-          <a:schemeClr val="accent1"/>
-        </a:lnRef>
-        <a:fillRef idx="3">
-          <a:schemeClr val="accent1"/>
-        </a:fillRef>
-        <a:effectRef idx="2">
-          <a:schemeClr val="accent1"/>
-        </a:effectRef>
-        <a:fontRef idx="minor">
-          <a:schemeClr val="lt1"/>
-        </a:fontRef>
-      </a:style>
-    </a:spDef>
-    <a:lnDef>
-      <a:spPr/>
-      <a:bodyPr/>
-      <a:lstStyle/>
-      <a:style>
-        <a:lnRef idx="2">
-          <a:schemeClr val="accent1"/>
-        </a:lnRef>
-        <a:fillRef idx="0">
-          <a:schemeClr val="accent1"/>
-        </a:fillRef>
-        <a:effectRef idx="1">
-          <a:schemeClr val="accent1"/>
-        </a:effectRef>
-        <a:fontRef idx="minor">
-          <a:schemeClr val="tx1"/>
-        </a:fontRef>
-      </a:style>
-    </a:lnDef>
-  </a:objectDefaults>
+  <a:objectDefaults/>
   <a:extraClrSchemeLst/>
+  <a:extLst>
+    <a:ext uri="{05A4C25C-085E-4340-85A3-A5531E510DB2}">
+      <thm15:themeFamily xmlns:thm15="http://schemas.microsoft.com/office/thememl/2012/main" name="Office Theme" id="{62F939B6-93AF-4DB8-9C6B-D6C7DFDC589F}" vid="{4A3C46E8-61CC-4603-A589-7422A47A8E4A}"/>
+    </a:ext>
+  </a:extLst>
 </a:theme>
 </file>
--- a/docs/Policy-Overview-Dashboard.pptx
+++ b/docs/Policy-Overview-Dashboard.pptx
@@ -4700,7 +4700,7 @@
                 <a:latin typeface="HCLTech Roobert" panose="020B0504030202060203" pitchFamily="34" charset="0"/>
                 <a:cs typeface="HCLTech Roobert" panose="020B0504030202060203" pitchFamily="34" charset="0"/>
               </a:rPr>
-              <a:t>&lt; Assessment Name &gt;</a:t>
+              <a:t>Policy Overview Dashboard</a:t>
             </a:r>
           </a:p>
           <a:p>
@@ -4715,7 +4715,7 @@
                 <a:latin typeface="HCLTech Roobert" panose="020B0504030202060203" pitchFamily="34" charset="0"/>
                 <a:cs typeface="HCLTech Roobert" panose="020B0504030202060203" pitchFamily="34" charset="0"/>
               </a:rPr>
-              <a:t>By &lt;Resource Name&gt;</a:t>
+              <a:t>By Ravi G</a:t>
             </a:r>
           </a:p>
         </p:txBody>

--- a/docs/Policy-Overview-Dashboard.pptx
+++ b/docs/Policy-Overview-Dashboard.pptx
@@ -10,12 +10,13 @@
   <p:sldIdLst>
     <p:sldId id="277" r:id="rId2"/>
     <p:sldId id="2147472225" r:id="rId3"/>
-    <p:sldId id="256" r:id="rId4"/>
-    <p:sldId id="257" r:id="rId5"/>
-    <p:sldId id="2147472226" r:id="rId6"/>
-    <p:sldId id="2147472227" r:id="rId7"/>
-    <p:sldId id="2147472228" r:id="rId8"/>
-    <p:sldId id="2147472229" r:id="rId9"/>
+    <p:sldId id="2147472226" r:id="rId9"/>
+    <p:sldId id="2147472227" r:id="rId8"/>
+    <p:sldId id="2147472228" r:id="rId7"/>
+    <p:sldId id="2147472229" r:id="rId6"/>
+    <p:sldId id="2147472230" r:id="rId5"/>
+    <p:sldId id="2147472231" r:id="rId4"/>
+    <p:sldId id="2147472232" r:id="rId15"/>
   </p:sldIdLst>
   <p:sldSz cx="12192000" cy="6858000"/>
   <p:notesSz cx="6858000" cy="9144000"/>
@@ -628,6 +629,496 @@
         <p14:creationId xmlns:p14="http://schemas.microsoft.com/office/powerpoint/2010/main" val="544541371"/>
       </p:ext>
     </p:extLst>
+  </p:cSld>
+  <p:clrMapOvr>
+    <a:masterClrMapping/>
+  </p:clrMapOvr>
+</p:notes>
+</file>
+
+<file path=ppt/notesSlides/notesSlide3.xml><?xml version="1.0" encoding="utf-8"?>
+<p:notes xmlns:a="http://schemas.openxmlformats.org/drawingml/2006/main" xmlns:p="http://schemas.openxmlformats.org/presentationml/2006/main" xmlns:r="http://schemas.openxmlformats.org/officeDocument/2006/relationships">
+  <p:cSld>
+    <p:spTree>
+      <p:nvGrpSpPr>
+        <p:cNvPr id="1" name=""/>
+        <p:cNvGrpSpPr/>
+        <p:nvPr/>
+      </p:nvGrpSpPr>
+      <p:grpSpPr>
+        <a:xfrm>
+          <a:off x="0" y="0"/>
+          <a:ext cx="0" cy="0"/>
+          <a:chOff x="0" y="0"/>
+          <a:chExt cx="0" cy="0"/>
+        </a:xfrm>
+      </p:grpSpPr>
+      <p:sp>
+        <p:nvSpPr>
+          <p:cNvPr id="2" name="Slide Image Placeholder 1"/>
+          <p:cNvSpPr>
+            <a:spLocks noGrp="1"/>
+          </p:cNvSpPr>
+          <p:nvPr>
+            <p:ph type="sldImg" idx="2"/>
+          </p:nvPr>
+        </p:nvSpPr>
+        <p:spPr/>
+      </p:sp>
+      <p:sp>
+        <p:nvSpPr>
+          <p:cNvPr id="3" name="Notes Placeholder 2"/>
+          <p:cNvSpPr>
+            <a:spLocks noGrp="1"/>
+          </p:cNvSpPr>
+          <p:nvPr>
+            <p:ph type="body" idx="3" sz="quarter"/>
+          </p:nvPr>
+        </p:nvSpPr>
+        <p:spPr/>
+        <p:txBody>
+          <a:bodyPr/>
+          <a:lstStyle/>
+          <a:p>
+            <a:r>
+              <a:t>The design is hexagonal / clean architecture. The domain at the centre is a plain POJO model with no JPA or Spring imports - we verified this. The service orchestrates use cases and depends only on the domain's PolicyRepositoryPort interface. Infrastructure implements that port, so the database technology can change without touching domain or service code. API sits on the outside and only handles HTTP.</a:t>
+            </a:r>
+          </a:p>
+        </p:txBody>
+      </p:sp>
+      <p:sp>
+        <p:nvSpPr>
+          <p:cNvPr id="4" name="Slide Number Placeholder 3"/>
+          <p:cNvSpPr>
+            <a:spLocks noGrp="1"/>
+          </p:cNvSpPr>
+          <p:nvPr>
+            <p:ph type="sldNum" idx="5" sz="quarter"/>
+          </p:nvPr>
+        </p:nvSpPr>
+        <p:spPr/>
+      </p:sp>
+    </p:spTree>
+  </p:cSld>
+  <p:clrMapOvr>
+    <a:masterClrMapping/>
+  </p:clrMapOvr>
+</p:notes>
+</file>
+
+<file path=ppt/notesSlides/notesSlide4.xml><?xml version="1.0" encoding="utf-8"?>
+<p:notes xmlns:a="http://schemas.openxmlformats.org/drawingml/2006/main" xmlns:p="http://schemas.openxmlformats.org/presentationml/2006/main" xmlns:r="http://schemas.openxmlformats.org/officeDocument/2006/relationships">
+  <p:cSld>
+    <p:spTree>
+      <p:nvGrpSpPr>
+        <p:cNvPr id="1" name=""/>
+        <p:cNvGrpSpPr/>
+        <p:nvPr/>
+      </p:nvGrpSpPr>
+      <p:grpSpPr>
+        <a:xfrm>
+          <a:off x="0" y="0"/>
+          <a:ext cx="0" cy="0"/>
+          <a:chOff x="0" y="0"/>
+          <a:chExt cx="0" cy="0"/>
+        </a:xfrm>
+      </p:grpSpPr>
+      <p:sp>
+        <p:nvSpPr>
+          <p:cNvPr id="2" name="Slide Image Placeholder 1"/>
+          <p:cNvSpPr>
+            <a:spLocks noGrp="1"/>
+          </p:cNvSpPr>
+          <p:nvPr>
+            <p:ph type="sldImg" idx="2"/>
+          </p:nvPr>
+        </p:nvSpPr>
+        <p:spPr/>
+      </p:sp>
+      <p:sp>
+        <p:nvSpPr>
+          <p:cNvPr id="3" name="Notes Placeholder 2"/>
+          <p:cNvSpPr>
+            <a:spLocks noGrp="1"/>
+          </p:cNvSpPr>
+          <p:nvPr>
+            <p:ph type="body" idx="3" sz="quarter"/>
+          </p:nvPr>
+        </p:nvSpPr>
+        <p:spPr/>
+        <p:txBody>
+          <a:bodyPr/>
+          <a:lstStyle/>
+          <a:p>
+            <a:r>
+              <a:t>Each architectural choice was made for a concrete payoff, not for its own sake. The recurring theme is isolation: the domain is protected from frameworks, persistence, and presentation, which keeps the core testable and the system easy to change.</a:t>
+            </a:r>
+          </a:p>
+        </p:txBody>
+      </p:sp>
+      <p:sp>
+        <p:nvSpPr>
+          <p:cNvPr id="4" name="Slide Number Placeholder 3"/>
+          <p:cNvSpPr>
+            <a:spLocks noGrp="1"/>
+          </p:cNvSpPr>
+          <p:nvPr>
+            <p:ph type="sldNum" idx="5" sz="quarter"/>
+          </p:nvPr>
+        </p:nvSpPr>
+        <p:spPr/>
+      </p:sp>
+    </p:spTree>
+  </p:cSld>
+  <p:clrMapOvr>
+    <a:masterClrMapping/>
+  </p:clrMapOvr>
+</p:notes>
+</file>
+
+<file path=ppt/notesSlides/notesSlide5.xml><?xml version="1.0" encoding="utf-8"?>
+<p:notes xmlns:a="http://schemas.openxmlformats.org/drawingml/2006/main" xmlns:p="http://schemas.openxmlformats.org/presentationml/2006/main" xmlns:r="http://schemas.openxmlformats.org/officeDocument/2006/relationships">
+  <p:cSld>
+    <p:spTree>
+      <p:nvGrpSpPr>
+        <p:cNvPr id="1" name=""/>
+        <p:cNvGrpSpPr/>
+        <p:nvPr/>
+      </p:nvGrpSpPr>
+      <p:grpSpPr>
+        <a:xfrm>
+          <a:off x="0" y="0"/>
+          <a:ext cx="0" cy="0"/>
+          <a:chOff x="0" y="0"/>
+          <a:chExt cx="0" cy="0"/>
+        </a:xfrm>
+      </p:grpSpPr>
+      <p:sp>
+        <p:nvSpPr>
+          <p:cNvPr id="2" name="Slide Image Placeholder 1"/>
+          <p:cNvSpPr>
+            <a:spLocks noGrp="1"/>
+          </p:cNvSpPr>
+          <p:nvPr>
+            <p:ph type="sldImg" idx="2"/>
+          </p:nvPr>
+        </p:nvSpPr>
+        <p:spPr/>
+      </p:sp>
+      <p:sp>
+        <p:nvSpPr>
+          <p:cNvPr id="3" name="Notes Placeholder 2"/>
+          <p:cNvSpPr>
+            <a:spLocks noGrp="1"/>
+          </p:cNvSpPr>
+          <p:nvPr>
+            <p:ph type="body" idx="3" sz="quarter"/>
+          </p:nvPr>
+        </p:nvSpPr>
+        <p:spPr/>
+        <p:txBody>
+          <a:bodyPr/>
+          <a:lstStyle/>
+          <a:p>
+            <a:r>
+              <a:t>The repository is public on GitHub. We work on dev and keep master in sync. Every push runs the CI pipeline, which must pass tests and the coverage gate before a Docker image is published to GHCR. Actions are pinned to commit SHAs and Dependabot is enabled for supply-chain security.</a:t>
+            </a:r>
+          </a:p>
+        </p:txBody>
+      </p:sp>
+      <p:sp>
+        <p:nvSpPr>
+          <p:cNvPr id="4" name="Slide Number Placeholder 3"/>
+          <p:cNvSpPr>
+            <a:spLocks noGrp="1"/>
+          </p:cNvSpPr>
+          <p:nvPr>
+            <p:ph type="sldNum" idx="5" sz="quarter"/>
+          </p:nvPr>
+        </p:nvSpPr>
+        <p:spPr/>
+      </p:sp>
+    </p:spTree>
+  </p:cSld>
+  <p:clrMapOvr>
+    <a:masterClrMapping/>
+  </p:clrMapOvr>
+</p:notes>
+</file>
+
+<file path=ppt/notesSlides/notesSlide6.xml><?xml version="1.0" encoding="utf-8"?>
+<p:notes xmlns:a="http://schemas.openxmlformats.org/drawingml/2006/main" xmlns:p="http://schemas.openxmlformats.org/presentationml/2006/main" xmlns:r="http://schemas.openxmlformats.org/officeDocument/2006/relationships">
+  <p:cSld>
+    <p:spTree>
+      <p:nvGrpSpPr>
+        <p:cNvPr id="1" name=""/>
+        <p:cNvGrpSpPr/>
+        <p:nvPr/>
+      </p:nvGrpSpPr>
+      <p:grpSpPr>
+        <a:xfrm>
+          <a:off x="0" y="0"/>
+          <a:ext cx="0" cy="0"/>
+          <a:chOff x="0" y="0"/>
+          <a:chExt cx="0" cy="0"/>
+        </a:xfrm>
+      </p:grpSpPr>
+      <p:sp>
+        <p:nvSpPr>
+          <p:cNvPr id="2" name="Slide Image Placeholder 1"/>
+          <p:cNvSpPr>
+            <a:spLocks noGrp="1"/>
+          </p:cNvSpPr>
+          <p:nvPr>
+            <p:ph type="sldImg" idx="2"/>
+          </p:nvPr>
+        </p:nvSpPr>
+        <p:spPr/>
+      </p:sp>
+      <p:sp>
+        <p:nvSpPr>
+          <p:cNvPr id="3" name="Notes Placeholder 2"/>
+          <p:cNvSpPr>
+            <a:spLocks noGrp="1"/>
+          </p:cNvSpPr>
+          <p:nvPr>
+            <p:ph type="body" idx="3" sz="quarter"/>
+          </p:nvPr>
+        </p:nvSpPr>
+        <p:spPr/>
+        <p:txBody>
+          <a:bodyPr/>
+          <a:lstStyle/>
+          <a:p>
+            <a:r>
+              <a:t>Four endpoints, all under /api/v1/policies. The list endpoint is the workhorse with filtering, sorting, search and pagination. We are contract-first: the OpenAPI spec is authored alongside the code and served live through Swagger UI, so consumers always have an accurate contract.</a:t>
+            </a:r>
+          </a:p>
+        </p:txBody>
+      </p:sp>
+      <p:sp>
+        <p:nvSpPr>
+          <p:cNvPr id="4" name="Slide Number Placeholder 3"/>
+          <p:cNvSpPr>
+            <a:spLocks noGrp="1"/>
+          </p:cNvSpPr>
+          <p:nvPr>
+            <p:ph type="sldNum" idx="5" sz="quarter"/>
+          </p:nvPr>
+        </p:nvSpPr>
+        <p:spPr/>
+      </p:sp>
+    </p:spTree>
+  </p:cSld>
+  <p:clrMapOvr>
+    <a:masterClrMapping/>
+  </p:clrMapOvr>
+</p:notes>
+</file>
+
+<file path=ppt/notesSlides/notesSlide7.xml><?xml version="1.0" encoding="utf-8"?>
+<p:notes xmlns:a="http://schemas.openxmlformats.org/drawingml/2006/main" xmlns:p="http://schemas.openxmlformats.org/presentationml/2006/main" xmlns:r="http://schemas.openxmlformats.org/officeDocument/2006/relationships">
+  <p:cSld>
+    <p:spTree>
+      <p:nvGrpSpPr>
+        <p:cNvPr id="1" name=""/>
+        <p:cNvGrpSpPr/>
+        <p:nvPr/>
+      </p:nvGrpSpPr>
+      <p:grpSpPr>
+        <a:xfrm>
+          <a:off x="0" y="0"/>
+          <a:ext cx="0" cy="0"/>
+          <a:chOff x="0" y="0"/>
+          <a:chExt cx="0" cy="0"/>
+        </a:xfrm>
+      </p:grpSpPr>
+      <p:sp>
+        <p:nvSpPr>
+          <p:cNvPr id="2" name="Slide Image Placeholder 1"/>
+          <p:cNvSpPr>
+            <a:spLocks noGrp="1"/>
+          </p:cNvSpPr>
+          <p:nvPr>
+            <p:ph type="sldImg" idx="2"/>
+          </p:nvPr>
+        </p:nvSpPr>
+        <p:spPr/>
+      </p:sp>
+      <p:sp>
+        <p:nvSpPr>
+          <p:cNvPr id="3" name="Notes Placeholder 2"/>
+          <p:cNvSpPr>
+            <a:spLocks noGrp="1"/>
+          </p:cNvSpPr>
+          <p:nvPr>
+            <p:ph type="body" idx="3" sz="quarter"/>
+          </p:nvPr>
+        </p:nvSpPr>
+        <p:spPr/>
+        <p:txBody>
+          <a:bodyPr/>
+          <a:lstStyle/>
+          <a:p>
+            <a:r>
+              <a:t>The list endpoint accepts a set of optional, composable filters plus standard paging and sorting. Errors are deliberate and clean: 404 for an unknown id, 400 for bad input, 503 when the database is down - always a structured body, never a stack trace. Note the search term is never logged because it can contain PII.</a:t>
+            </a:r>
+          </a:p>
+        </p:txBody>
+      </p:sp>
+      <p:sp>
+        <p:nvSpPr>
+          <p:cNvPr id="4" name="Slide Number Placeholder 3"/>
+          <p:cNvSpPr>
+            <a:spLocks noGrp="1"/>
+          </p:cNvSpPr>
+          <p:nvPr>
+            <p:ph type="sldNum" idx="5" sz="quarter"/>
+          </p:nvPr>
+        </p:nvSpPr>
+        <p:spPr/>
+      </p:sp>
+    </p:spTree>
+  </p:cSld>
+  <p:clrMapOvr>
+    <a:masterClrMapping/>
+  </p:clrMapOvr>
+</p:notes>
+</file>
+
+<file path=ppt/notesSlides/notesSlide8.xml><?xml version="1.0" encoding="utf-8"?>
+<p:notes xmlns:a="http://schemas.openxmlformats.org/drawingml/2006/main" xmlns:p="http://schemas.openxmlformats.org/presentationml/2006/main" xmlns:r="http://schemas.openxmlformats.org/officeDocument/2006/relationships">
+  <p:cSld>
+    <p:spTree>
+      <p:nvGrpSpPr>
+        <p:cNvPr id="1" name=""/>
+        <p:cNvGrpSpPr/>
+        <p:nvPr/>
+      </p:nvGrpSpPr>
+      <p:grpSpPr>
+        <a:xfrm>
+          <a:off x="0" y="0"/>
+          <a:ext cx="0" cy="0"/>
+          <a:chOff x="0" y="0"/>
+          <a:chExt cx="0" cy="0"/>
+        </a:xfrm>
+      </p:grpSpPr>
+      <p:sp>
+        <p:nvSpPr>
+          <p:cNvPr id="2" name="Slide Image Placeholder 1"/>
+          <p:cNvSpPr>
+            <a:spLocks noGrp="1"/>
+          </p:cNvSpPr>
+          <p:nvPr>
+            <p:ph type="sldImg" idx="2"/>
+          </p:nvPr>
+        </p:nvSpPr>
+        <p:spPr/>
+      </p:sp>
+      <p:sp>
+        <p:nvSpPr>
+          <p:cNvPr id="3" name="Notes Placeholder 2"/>
+          <p:cNvSpPr>
+            <a:spLocks noGrp="1"/>
+          </p:cNvSpPr>
+          <p:nvPr>
+            <p:ph type="body" idx="3" sz="quarter"/>
+          </p:nvPr>
+        </p:nvSpPr>
+        <p:spPr/>
+        <p:txBody>
+          <a:bodyPr/>
+          <a:lstStyle/>
+          <a:p>
+            <a:r>
+              <a:t>The working journal is honest about the collaboration. We accepted clear requests, but also pushed back when something violated the architecture or risked leaking PII, steered a few decisions, and corrected our own mistakes. The full log lives in the repo.</a:t>
+            </a:r>
+          </a:p>
+        </p:txBody>
+      </p:sp>
+      <p:sp>
+        <p:nvSpPr>
+          <p:cNvPr id="4" name="Slide Number Placeholder 3"/>
+          <p:cNvSpPr>
+            <a:spLocks noGrp="1"/>
+          </p:cNvSpPr>
+          <p:nvPr>
+            <p:ph type="sldNum" idx="5" sz="quarter"/>
+          </p:nvPr>
+        </p:nvSpPr>
+        <p:spPr/>
+      </p:sp>
+    </p:spTree>
+  </p:cSld>
+  <p:clrMapOvr>
+    <a:masterClrMapping/>
+  </p:clrMapOvr>
+</p:notes>
+</file>
+
+<file path=ppt/notesSlides/notesSlide9.xml><?xml version="1.0" encoding="utf-8"?>
+<p:notes xmlns:a="http://schemas.openxmlformats.org/drawingml/2006/main" xmlns:p="http://schemas.openxmlformats.org/presentationml/2006/main" xmlns:r="http://schemas.openxmlformats.org/officeDocument/2006/relationships">
+  <p:cSld>
+    <p:spTree>
+      <p:nvGrpSpPr>
+        <p:cNvPr id="1" name=""/>
+        <p:cNvGrpSpPr/>
+        <p:nvPr/>
+      </p:nvGrpSpPr>
+      <p:grpSpPr>
+        <a:xfrm>
+          <a:off x="0" y="0"/>
+          <a:ext cx="0" cy="0"/>
+          <a:chOff x="0" y="0"/>
+          <a:chExt cx="0" cy="0"/>
+        </a:xfrm>
+      </p:grpSpPr>
+      <p:sp>
+        <p:nvSpPr>
+          <p:cNvPr id="2" name="Slide Image Placeholder 1"/>
+          <p:cNvSpPr>
+            <a:spLocks noGrp="1"/>
+          </p:cNvSpPr>
+          <p:nvPr>
+            <p:ph type="sldImg" idx="2"/>
+          </p:nvPr>
+        </p:nvSpPr>
+        <p:spPr/>
+      </p:sp>
+      <p:sp>
+        <p:nvSpPr>
+          <p:cNvPr id="3" name="Notes Placeholder 2"/>
+          <p:cNvSpPr>
+            <a:spLocks noGrp="1"/>
+          </p:cNvSpPr>
+          <p:nvPr>
+            <p:ph type="body" idx="3" sz="quarter"/>
+          </p:nvPr>
+        </p:nvSpPr>
+        <p:spPr/>
+        <p:txBody>
+          <a:bodyPr/>
+          <a:lstStyle/>
+          <a:p>
+            <a:r>
+              <a:t>Testing is layered: fast unit tests, a controller slice, and full-stack acceptance tests running against a real PostgreSQL via Testcontainers, plus an explicit database-failure path. Quality is enforced, not just measured - JaCoCo gates coverage and Gatling gates latency inside the build, so a regression fails CI before anything ships.</a:t>
+            </a:r>
+          </a:p>
+        </p:txBody>
+      </p:sp>
+      <p:sp>
+        <p:nvSpPr>
+          <p:cNvPr id="4" name="Slide Number Placeholder 3"/>
+          <p:cNvSpPr>
+            <a:spLocks noGrp="1"/>
+          </p:cNvSpPr>
+          <p:nvPr>
+            <p:ph type="sldNum" idx="5" sz="quarter"/>
+          </p:nvPr>
+        </p:nvSpPr>
+        <p:spPr/>
+      </p:sp>
+    </p:spTree>
   </p:cSld>
   <p:clrMapOvr>
     <a:masterClrMapping/>
@@ -6328,7 +6819,7 @@
 </file>
 
 <file path=ppt/slides/slide3.xml><?xml version="1.0" encoding="utf-8"?>
-<p:sld xmlns:a="http://schemas.openxmlformats.org/drawingml/2006/main" xmlns:r="http://schemas.openxmlformats.org/officeDocument/2006/relationships" xmlns:p="http://schemas.openxmlformats.org/presentationml/2006/main">
+<p:sld xmlns:a="http://schemas.openxmlformats.org/drawingml/2006/main" xmlns:p="http://schemas.openxmlformats.org/presentationml/2006/main" xmlns:r="http://schemas.openxmlformats.org/officeDocument/2006/relationships">
   <p:cSld>
     <p:spTree>
       <p:nvGrpSpPr>
@@ -6336,74 +6827,593 @@
         <p:cNvGrpSpPr/>
         <p:nvPr/>
       </p:nvGrpSpPr>
-      <p:grpSpPr>
-        <a:xfrm>
-          <a:off x="0" y="0"/>
-          <a:ext cx="0" cy="0"/>
-          <a:chOff x="0" y="0"/>
-          <a:chExt cx="0" cy="0"/>
-        </a:xfrm>
-      </p:grpSpPr>
-      <p:sp>
-        <p:nvSpPr>
-          <p:cNvPr id="2" name="Title 1">
-            <a:extLst>
-              <a:ext uri="{FF2B5EF4-FFF2-40B4-BE49-F238E27FC236}">
-                <a16:creationId xmlns:a16="http://schemas.microsoft.com/office/drawing/2014/main" id="{92F1C83F-7176-4B8F-9C6D-E1CA114EC267}"/>
-              </a:ext>
-            </a:extLst>
-          </p:cNvPr>
-          <p:cNvSpPr>
-            <a:spLocks noGrp="1"/>
-          </p:cNvSpPr>
-          <p:nvPr>
-            <p:ph type="ctrTitle"/>
-          </p:nvPr>
-        </p:nvSpPr>
-        <p:spPr/>
-        <p:txBody>
-          <a:bodyPr/>
+      <p:grpSpPr/>
+      <p:sp>
+        <p:nvSpPr>
+          <p:cNvPr id="2" name="TextBox 1"/>
+          <p:cNvSpPr txBox="1"/>
+          <p:nvPr/>
+        </p:nvSpPr>
+        <p:spPr>
+          <a:xfrm>
+            <a:off x="502920" y="320040"/>
+            <a:ext cx="11155680" cy="731520"/>
+          </a:xfrm>
+          <a:prstGeom prst="rect">
+            <a:avLst/>
+          </a:prstGeom>
+          <a:noFill/>
+        </p:spPr>
+        <p:txBody>
+          <a:bodyPr wrap="none">
+            <a:spAutoFit/>
+          </a:bodyPr>
           <a:lstStyle/>
           <a:p>
-            <a:r>
-              <a:t>Policy Overview Dashboard</a:t>
-            </a:r>
-          </a:p>
-        </p:txBody>
-      </p:sp>
-      <p:sp>
-        <p:nvSpPr>
-          <p:cNvPr id="3" name="Subtitle 2">
-            <a:extLst>
-              <a:ext uri="{FF2B5EF4-FFF2-40B4-BE49-F238E27FC236}">
-                <a16:creationId xmlns:a16="http://schemas.microsoft.com/office/drawing/2014/main" id="{9E014135-B595-E67F-AA71-191FC7DE2796}"/>
-              </a:ext>
-            </a:extLst>
-          </p:cNvPr>
-          <p:cNvSpPr>
-            <a:spLocks noGrp="1"/>
-          </p:cNvSpPr>
-          <p:nvPr>
-            <p:ph type="subTitle" idx="1"/>
-          </p:nvPr>
-        </p:nvSpPr>
-        <p:spPr/>
-        <p:txBody>
-          <a:bodyPr/>
+            <a:pPr>
+              <a:defRPr sz="2700" b="1">
+                <a:solidFill>
+                  <a:srgbClr val="5F1EBE"/>
+                </a:solidFill>
+                <a:latin typeface="Calibri Light"/>
+              </a:defRPr>
+            </a:pPr>
+            <a:r>
+              <a:t>1. Architecture Design &amp; Decisions</a:t>
+            </a:r>
+          </a:p>
+        </p:txBody>
+      </p:sp>
+      <p:sp>
+        <p:nvSpPr>
+          <p:cNvPr id="3" name="Rectangle 2"/>
+          <p:cNvSpPr/>
+          <p:nvPr/>
+        </p:nvSpPr>
+        <p:spPr>
+          <a:xfrm>
+            <a:off x="530352" y="1024128"/>
+            <a:ext cx="2194560" cy="38100"/>
+          </a:xfrm>
+          <a:prstGeom prst="rect">
+            <a:avLst/>
+          </a:prstGeom>
+          <a:solidFill>
+            <a:srgbClr val="5F1EBE"/>
+          </a:solidFill>
+          <a:ln>
+            <a:noFill/>
+          </a:ln>
+          <a:effectLst/>
+        </p:spPr>
+        <p:style>
+          <a:lnRef idx="1">
+            <a:schemeClr val="accent1"/>
+          </a:lnRef>
+          <a:fillRef idx="3">
+            <a:schemeClr val="accent1"/>
+          </a:fillRef>
+          <a:effectRef idx="2">
+            <a:schemeClr val="accent1"/>
+          </a:effectRef>
+          <a:fontRef idx="minor">
+            <a:schemeClr val="lt1"/>
+          </a:fontRef>
+        </p:style>
+        <p:txBody>
+          <a:bodyPr rtlCol="0" anchor="ctr"/>
           <a:lstStyle/>
           <a:p>
-            <a:r>
-              <a:t>Insurance Policy BFF — Solution Walkthrough</a:t>
+            <a:pPr algn="ctr"/>
+          </a:p>
+        </p:txBody>
+      </p:sp>
+      <p:sp>
+        <p:nvSpPr>
+          <p:cNvPr id="4" name="Rounded Rectangle 3"/>
+          <p:cNvSpPr/>
+          <p:nvPr/>
+        </p:nvSpPr>
+        <p:spPr>
+          <a:xfrm>
+            <a:off x="2240280" y="1298448"/>
+            <a:ext cx="7726679" cy="868680"/>
+          </a:xfrm>
+          <a:prstGeom prst="roundRect">
+            <a:avLst/>
+          </a:prstGeom>
+          <a:solidFill>
+            <a:srgbClr val="ECE6FB"/>
+          </a:solidFill>
+          <a:ln w="15875">
+            <a:solidFill>
+              <a:srgbClr val="5F1EBE"/>
+            </a:solidFill>
+          </a:ln>
+          <a:effectLst/>
+        </p:spPr>
+        <p:style>
+          <a:lnRef idx="1">
+            <a:schemeClr val="accent1"/>
+          </a:lnRef>
+          <a:fillRef idx="3">
+            <a:schemeClr val="accent1"/>
+          </a:fillRef>
+          <a:effectRef idx="2">
+            <a:schemeClr val="accent1"/>
+          </a:effectRef>
+          <a:fontRef idx="minor">
+            <a:schemeClr val="lt1"/>
+          </a:fontRef>
+        </p:style>
+        <p:txBody>
+          <a:bodyPr rtlCol="0" anchor="ctr" wrap="square" lIns="101600" rIns="101600" tIns="50800" bIns="50800"/>
+          <a:lstStyle/>
+          <a:p>
+            <a:pPr algn="l">
+              <a:spcAft>
+                <a:spcPts val="200"/>
+              </a:spcAft>
+              <a:defRPr sz="1500" b="1">
+                <a:solidFill>
+                  <a:srgbClr val="262626"/>
+                </a:solidFill>
+                <a:latin typeface="Calibri"/>
+              </a:defRPr>
+            </a:pPr>
+            <a:r>
+              <a:t>API</a:t>
+            </a:r>
+          </a:p>
+          <a:p>
+            <a:pPr algn="l">
+              <a:spcAft>
+                <a:spcPts val="200"/>
+              </a:spcAft>
+              <a:defRPr sz="1100" b="0">
+                <a:solidFill>
+                  <a:srgbClr val="262626"/>
+                </a:solidFill>
+                <a:latin typeface="Calibri"/>
+              </a:defRPr>
+            </a:pPr>
+            <a:r>
+              <a:t>controllers · request/response DTOs · mapper · global exception handler</a:t>
+            </a:r>
+          </a:p>
+        </p:txBody>
+      </p:sp>
+      <p:sp>
+        <p:nvSpPr>
+          <p:cNvPr id="5" name="Rounded Rectangle 4"/>
+          <p:cNvSpPr/>
+          <p:nvPr/>
+        </p:nvSpPr>
+        <p:spPr>
+          <a:xfrm>
+            <a:off x="2240280" y="2487168"/>
+            <a:ext cx="7726679" cy="868680"/>
+          </a:xfrm>
+          <a:prstGeom prst="roundRect">
+            <a:avLst/>
+          </a:prstGeom>
+          <a:solidFill>
+            <a:srgbClr val="ECE6FB"/>
+          </a:solidFill>
+          <a:ln w="15875">
+            <a:solidFill>
+              <a:srgbClr val="5F1EBE"/>
+            </a:solidFill>
+          </a:ln>
+          <a:effectLst/>
+        </p:spPr>
+        <p:style>
+          <a:lnRef idx="1">
+            <a:schemeClr val="accent1"/>
+          </a:lnRef>
+          <a:fillRef idx="3">
+            <a:schemeClr val="accent1"/>
+          </a:fillRef>
+          <a:effectRef idx="2">
+            <a:schemeClr val="accent1"/>
+          </a:effectRef>
+          <a:fontRef idx="minor">
+            <a:schemeClr val="lt1"/>
+          </a:fontRef>
+        </p:style>
+        <p:txBody>
+          <a:bodyPr rtlCol="0" anchor="ctr" wrap="square" lIns="101600" rIns="101600" tIns="50800" bIns="50800"/>
+          <a:lstStyle/>
+          <a:p>
+            <a:pPr algn="l">
+              <a:spcAft>
+                <a:spcPts val="200"/>
+              </a:spcAft>
+              <a:defRPr sz="1500" b="1">
+                <a:solidFill>
+                  <a:srgbClr val="262626"/>
+                </a:solidFill>
+                <a:latin typeface="Calibri"/>
+              </a:defRPr>
+            </a:pPr>
+            <a:r>
+              <a:t>Service</a:t>
+            </a:r>
+          </a:p>
+          <a:p>
+            <a:pPr algn="l">
+              <a:spcAft>
+                <a:spcPts val="200"/>
+              </a:spcAft>
+              <a:defRPr sz="1100" b="0">
+                <a:solidFill>
+                  <a:srgbClr val="262626"/>
+                </a:solidFill>
+                <a:latin typeface="Calibri"/>
+              </a:defRPr>
+            </a:pPr>
+            <a:r>
+              <a:t>use cases (PolicyService) · PolicySummary · caching · transactions</a:t>
+            </a:r>
+          </a:p>
+        </p:txBody>
+      </p:sp>
+      <p:sp>
+        <p:nvSpPr>
+          <p:cNvPr id="6" name="Rounded Rectangle 5"/>
+          <p:cNvSpPr/>
+          <p:nvPr/>
+        </p:nvSpPr>
+        <p:spPr>
+          <a:xfrm>
+            <a:off x="2240280" y="3675887"/>
+            <a:ext cx="7726679" cy="868680"/>
+          </a:xfrm>
+          <a:prstGeom prst="roundRect">
+            <a:avLst/>
+          </a:prstGeom>
+          <a:solidFill>
+            <a:srgbClr val="5F1EBE"/>
+          </a:solidFill>
+          <a:ln>
+            <a:noFill/>
+          </a:ln>
+          <a:effectLst/>
+        </p:spPr>
+        <p:style>
+          <a:lnRef idx="1">
+            <a:schemeClr val="accent1"/>
+          </a:lnRef>
+          <a:fillRef idx="3">
+            <a:schemeClr val="accent1"/>
+          </a:fillRef>
+          <a:effectRef idx="2">
+            <a:schemeClr val="accent1"/>
+          </a:effectRef>
+          <a:fontRef idx="minor">
+            <a:schemeClr val="lt1"/>
+          </a:fontRef>
+        </p:style>
+        <p:txBody>
+          <a:bodyPr rtlCol="0" anchor="ctr" wrap="square" lIns="101600" rIns="101600" tIns="50800" bIns="50800"/>
+          <a:lstStyle/>
+          <a:p>
+            <a:pPr algn="l">
+              <a:spcAft>
+                <a:spcPts val="200"/>
+              </a:spcAft>
+              <a:defRPr sz="1500" b="1">
+                <a:solidFill>
+                  <a:srgbClr val="FFFFFF"/>
+                </a:solidFill>
+                <a:latin typeface="Calibri"/>
+              </a:defRPr>
+            </a:pPr>
+            <a:r>
+              <a:t>Domain  (core)</a:t>
+            </a:r>
+          </a:p>
+          <a:p>
+            <a:pPr algn="l">
+              <a:spcAft>
+                <a:spcPts val="200"/>
+              </a:spcAft>
+              <a:defRPr sz="1100" b="0">
+                <a:solidFill>
+                  <a:srgbClr val="FFFFFF"/>
+                </a:solidFill>
+                <a:latin typeface="Calibri"/>
+              </a:defRPr>
+            </a:pPr>
+            <a:r>
+              <a:t>Policy POJO + enums · PolicyRepositoryPort · query value objects  —  zero framework imports</a:t>
+            </a:r>
+          </a:p>
+        </p:txBody>
+      </p:sp>
+      <p:sp>
+        <p:nvSpPr>
+          <p:cNvPr id="7" name="Rounded Rectangle 6"/>
+          <p:cNvSpPr/>
+          <p:nvPr/>
+        </p:nvSpPr>
+        <p:spPr>
+          <a:xfrm>
+            <a:off x="2240280" y="4956048"/>
+            <a:ext cx="7726679" cy="868680"/>
+          </a:xfrm>
+          <a:prstGeom prst="roundRect">
+            <a:avLst/>
+          </a:prstGeom>
+          <a:solidFill>
+            <a:srgbClr val="ECE6FB"/>
+          </a:solidFill>
+          <a:ln w="15875">
+            <a:solidFill>
+              <a:srgbClr val="5F1EBE"/>
+            </a:solidFill>
+          </a:ln>
+          <a:effectLst/>
+        </p:spPr>
+        <p:style>
+          <a:lnRef idx="1">
+            <a:schemeClr val="accent1"/>
+          </a:lnRef>
+          <a:fillRef idx="3">
+            <a:schemeClr val="accent1"/>
+          </a:fillRef>
+          <a:effectRef idx="2">
+            <a:schemeClr val="accent1"/>
+          </a:effectRef>
+          <a:fontRef idx="minor">
+            <a:schemeClr val="lt1"/>
+          </a:fontRef>
+        </p:style>
+        <p:txBody>
+          <a:bodyPr rtlCol="0" anchor="ctr" wrap="square" lIns="101600" rIns="101600" tIns="50800" bIns="50800"/>
+          <a:lstStyle/>
+          <a:p>
+            <a:pPr algn="l">
+              <a:spcAft>
+                <a:spcPts val="200"/>
+              </a:spcAft>
+              <a:defRPr sz="1500" b="1">
+                <a:solidFill>
+                  <a:srgbClr val="262626"/>
+                </a:solidFill>
+                <a:latin typeface="Calibri"/>
+              </a:defRPr>
+            </a:pPr>
+            <a:r>
+              <a:t>Infrastructure</a:t>
+            </a:r>
+          </a:p>
+          <a:p>
+            <a:pPr algn="l">
+              <a:spcAft>
+                <a:spcPts val="200"/>
+              </a:spcAft>
+              <a:defRPr sz="1100" b="0">
+                <a:solidFill>
+                  <a:srgbClr val="262626"/>
+                </a:solidFill>
+                <a:latin typeface="Calibri"/>
+              </a:defRPr>
+            </a:pPr>
+            <a:r>
+              <a:t>JPA entity &amp; mapper · Spring Data repo · persistence adapter · Specifications</a:t>
+            </a:r>
+          </a:p>
+        </p:txBody>
+      </p:sp>
+      <p:sp>
+        <p:nvSpPr>
+          <p:cNvPr id="8" name="Down Arrow 7"/>
+          <p:cNvSpPr/>
+          <p:nvPr/>
+        </p:nvSpPr>
+        <p:spPr>
+          <a:xfrm>
+            <a:off x="5897880" y="2194560"/>
+            <a:ext cx="402336" cy="274320"/>
+          </a:xfrm>
+          <a:prstGeom prst="downArrow">
+            <a:avLst/>
+          </a:prstGeom>
+          <a:solidFill>
+            <a:srgbClr val="C9B8F0"/>
+          </a:solidFill>
+          <a:ln>
+            <a:noFill/>
+          </a:ln>
+          <a:effectLst/>
+        </p:spPr>
+        <p:style>
+          <a:lnRef idx="1">
+            <a:schemeClr val="accent1"/>
+          </a:lnRef>
+          <a:fillRef idx="3">
+            <a:schemeClr val="accent1"/>
+          </a:fillRef>
+          <a:effectRef idx="2">
+            <a:schemeClr val="accent1"/>
+          </a:effectRef>
+          <a:fontRef idx="minor">
+            <a:schemeClr val="lt1"/>
+          </a:fontRef>
+        </p:style>
+        <p:txBody>
+          <a:bodyPr rtlCol="0" anchor="ctr"/>
+          <a:lstStyle/>
+          <a:p>
+            <a:pPr algn="ctr"/>
+          </a:p>
+        </p:txBody>
+      </p:sp>
+      <p:sp>
+        <p:nvSpPr>
+          <p:cNvPr id="9" name="Down Arrow 8"/>
+          <p:cNvSpPr/>
+          <p:nvPr/>
+        </p:nvSpPr>
+        <p:spPr>
+          <a:xfrm>
+            <a:off x="5897880" y="3383280"/>
+            <a:ext cx="402336" cy="274320"/>
+          </a:xfrm>
+          <a:prstGeom prst="downArrow">
+            <a:avLst/>
+          </a:prstGeom>
+          <a:solidFill>
+            <a:srgbClr val="C9B8F0"/>
+          </a:solidFill>
+          <a:ln>
+            <a:noFill/>
+          </a:ln>
+          <a:effectLst/>
+        </p:spPr>
+        <p:style>
+          <a:lnRef idx="1">
+            <a:schemeClr val="accent1"/>
+          </a:lnRef>
+          <a:fillRef idx="3">
+            <a:schemeClr val="accent1"/>
+          </a:fillRef>
+          <a:effectRef idx="2">
+            <a:schemeClr val="accent1"/>
+          </a:effectRef>
+          <a:fontRef idx="minor">
+            <a:schemeClr val="lt1"/>
+          </a:fontRef>
+        </p:style>
+        <p:txBody>
+          <a:bodyPr rtlCol="0" anchor="ctr"/>
+          <a:lstStyle/>
+          <a:p>
+            <a:pPr algn="ctr"/>
+          </a:p>
+        </p:txBody>
+      </p:sp>
+      <p:sp>
+        <p:nvSpPr>
+          <p:cNvPr id="10" name="Up Arrow 9"/>
+          <p:cNvSpPr/>
+          <p:nvPr/>
+        </p:nvSpPr>
+        <p:spPr>
+          <a:xfrm>
+            <a:off x="5897880" y="4626864"/>
+            <a:ext cx="402336" cy="310896"/>
+          </a:xfrm>
+          <a:prstGeom prst="upArrow">
+            <a:avLst/>
+          </a:prstGeom>
+          <a:solidFill>
+            <a:srgbClr val="C9B8F0"/>
+          </a:solidFill>
+          <a:ln>
+            <a:noFill/>
+          </a:ln>
+          <a:effectLst/>
+        </p:spPr>
+        <p:style>
+          <a:lnRef idx="1">
+            <a:schemeClr val="accent1"/>
+          </a:lnRef>
+          <a:fillRef idx="3">
+            <a:schemeClr val="accent1"/>
+          </a:fillRef>
+          <a:effectRef idx="2">
+            <a:schemeClr val="accent1"/>
+          </a:effectRef>
+          <a:fontRef idx="minor">
+            <a:schemeClr val="lt1"/>
+          </a:fontRef>
+        </p:style>
+        <p:txBody>
+          <a:bodyPr rtlCol="0" anchor="ctr"/>
+          <a:lstStyle/>
+          <a:p>
+            <a:pPr algn="ctr"/>
+          </a:p>
+        </p:txBody>
+      </p:sp>
+      <p:sp>
+        <p:nvSpPr>
+          <p:cNvPr id="11" name="TextBox 10"/>
+          <p:cNvSpPr txBox="1"/>
+          <p:nvPr/>
+        </p:nvSpPr>
+        <p:spPr>
+          <a:xfrm>
+            <a:off x="6446520" y="4626864"/>
+            <a:ext cx="3383280" cy="310896"/>
+          </a:xfrm>
+          <a:prstGeom prst="rect">
+            <a:avLst/>
+          </a:prstGeom>
+          <a:noFill/>
+        </p:spPr>
+        <p:txBody>
+          <a:bodyPr wrap="square" anchor="ctr" lIns="101600" rIns="101600" tIns="50800" bIns="50800">
+            <a:spAutoFit/>
+          </a:bodyPr>
+          <a:lstStyle/>
+          <a:p>
+            <a:pPr algn="l">
+              <a:spcAft>
+                <a:spcPts val="200"/>
+              </a:spcAft>
+              <a:defRPr sz="1100" b="1">
+                <a:solidFill>
+                  <a:srgbClr val="5F1EBE"/>
+                </a:solidFill>
+                <a:latin typeface="Calibri"/>
+              </a:defRPr>
+            </a:pPr>
+            <a:r>
+              <a:t>implements the port  →  DIP</a:t>
+            </a:r>
+          </a:p>
+        </p:txBody>
+      </p:sp>
+      <p:sp>
+        <p:nvSpPr>
+          <p:cNvPr id="12" name="TextBox 11"/>
+          <p:cNvSpPr txBox="1"/>
+          <p:nvPr/>
+        </p:nvSpPr>
+        <p:spPr>
+          <a:xfrm>
+            <a:off x="548640" y="5989320"/>
+            <a:ext cx="11064240" cy="548640"/>
+          </a:xfrm>
+          <a:prstGeom prst="rect">
+            <a:avLst/>
+          </a:prstGeom>
+          <a:noFill/>
+        </p:spPr>
+        <p:txBody>
+          <a:bodyPr wrap="none">
+            <a:spAutoFit/>
+          </a:bodyPr>
+          <a:lstStyle/>
+          <a:p>
+            <a:pPr>
+              <a:defRPr sz="1200" i="1">
+                <a:solidFill>
+                  <a:srgbClr val="595959"/>
+                </a:solidFill>
+                <a:latin typeface="Calibri"/>
+              </a:defRPr>
+            </a:pPr>
+            <a:r>
+              <a:t>Hexagonal / ports &amp; adapters: every dependency arrow points inward. The domain depends on nothing; infrastructure implements the domain-owned PolicyRepositoryPort.</a:t>
             </a:r>
           </a:p>
         </p:txBody>
       </p:sp>
     </p:spTree>
-    <p:extLst>
-      <p:ext uri="{BB962C8B-B14F-4D97-AF65-F5344CB8AC3E}">
-        <p14:creationId xmlns:p14="http://schemas.microsoft.com/office/powerpoint/2010/main" val="3906173298"/>
-      </p:ext>
-    </p:extLst>
   </p:cSld>
   <p:clrMapOvr>
     <a:masterClrMapping/>
@@ -6412,7 +7422,7 @@
 </file>
 
 <file path=ppt/slides/slide4.xml><?xml version="1.0" encoding="utf-8"?>
-<p:sld xmlns:a="http://schemas.openxmlformats.org/drawingml/2006/main" xmlns:r="http://schemas.openxmlformats.org/officeDocument/2006/relationships" xmlns:p="http://schemas.openxmlformats.org/presentationml/2006/main">
+<p:sld xmlns:a="http://schemas.openxmlformats.org/drawingml/2006/main" xmlns:p="http://schemas.openxmlformats.org/presentationml/2006/main" xmlns:r="http://schemas.openxmlformats.org/officeDocument/2006/relationships">
   <p:cSld>
     <p:spTree>
       <p:nvGrpSpPr>
@@ -6420,14 +7430,7 @@
         <p:cNvGrpSpPr/>
         <p:nvPr/>
       </p:nvGrpSpPr>
-      <p:grpSpPr>
-        <a:xfrm>
-          <a:off x="0" y="0"/>
-          <a:ext cx="0" cy="0"/>
-          <a:chOff x="0" y="0"/>
-          <a:chExt cx="0" cy="0"/>
-        </a:xfrm>
-      </p:grpSpPr>
+      <p:grpSpPr/>
       <p:sp>
         <p:nvSpPr>
           <p:cNvPr id="2" name="TextBox 1"/>
@@ -6436,8 +7439,8 @@
         </p:nvSpPr>
         <p:spPr>
           <a:xfrm>
-            <a:off x="548640" y="411480"/>
-            <a:ext cx="11064240" cy="822960"/>
+            <a:off x="502920" y="320040"/>
+            <a:ext cx="11155680" cy="731520"/>
           </a:xfrm>
           <a:prstGeom prst="rect">
             <a:avLst/>
@@ -6451,7 +7454,7 @@
           <a:lstStyle/>
           <a:p>
             <a:pPr>
-              <a:defRPr sz="2800" b="1">
+              <a:defRPr sz="2700" b="1">
                 <a:solidFill>
                   <a:srgbClr val="5F1EBE"/>
                 </a:solidFill>
@@ -6459,38 +7462,102 @@
               </a:defRPr>
             </a:pPr>
             <a:r>
-              <a:t>1. Architecture Design &amp; Decisions</a:t>
-            </a:r>
-          </a:p>
-        </p:txBody>
-      </p:sp>
-      <p:sp>
-        <p:nvSpPr>
-          <p:cNvPr id="3" name="TextBox 2"/>
-          <p:cNvSpPr txBox="1"/>
+              <a:t>1. Architecture — Key Decisions &amp; Why</a:t>
+            </a:r>
+          </a:p>
+        </p:txBody>
+      </p:sp>
+      <p:sp>
+        <p:nvSpPr>
+          <p:cNvPr id="3" name="Rectangle 2"/>
+          <p:cNvSpPr/>
           <p:nvPr/>
         </p:nvSpPr>
         <p:spPr>
           <a:xfrm>
-            <a:off x="640080" y="1371600"/>
-            <a:ext cx="10972800" cy="5120640"/>
+            <a:off x="530352" y="1024128"/>
+            <a:ext cx="2194560" cy="38100"/>
           </a:xfrm>
           <a:prstGeom prst="rect">
             <a:avLst/>
           </a:prstGeom>
-          <a:noFill/>
+          <a:solidFill>
+            <a:srgbClr val="5F1EBE"/>
+          </a:solidFill>
+          <a:ln>
+            <a:noFill/>
+          </a:ln>
+          <a:effectLst/>
         </p:spPr>
-        <p:txBody>
-          <a:bodyPr wrap="square">
-            <a:spAutoFit/>
-          </a:bodyPr>
+        <p:style>
+          <a:lnRef idx="1">
+            <a:schemeClr val="accent1"/>
+          </a:lnRef>
+          <a:fillRef idx="3">
+            <a:schemeClr val="accent1"/>
+          </a:fillRef>
+          <a:effectRef idx="2">
+            <a:schemeClr val="accent1"/>
+          </a:effectRef>
+          <a:fontRef idx="minor">
+            <a:schemeClr val="lt1"/>
+          </a:fontRef>
+        </p:style>
+        <p:txBody>
+          <a:bodyPr rtlCol="0" anchor="ctr"/>
           <a:lstStyle/>
           <a:p>
-            <a:pPr>
+            <a:pPr algn="ctr"/>
+          </a:p>
+        </p:txBody>
+      </p:sp>
+      <p:sp>
+        <p:nvSpPr>
+          <p:cNvPr id="4" name="Rounded Rectangle 3"/>
+          <p:cNvSpPr/>
+          <p:nvPr/>
+        </p:nvSpPr>
+        <p:spPr>
+          <a:xfrm>
+            <a:off x="548640" y="1325880"/>
+            <a:ext cx="11109960" cy="713232"/>
+          </a:xfrm>
+          <a:prstGeom prst="roundRect">
+            <a:avLst/>
+          </a:prstGeom>
+          <a:solidFill>
+            <a:srgbClr val="ECE6FB"/>
+          </a:solidFill>
+          <a:ln w="15875">
+            <a:solidFill>
+              <a:srgbClr val="C9B8F0"/>
+            </a:solidFill>
+          </a:ln>
+          <a:effectLst/>
+        </p:spPr>
+        <p:style>
+          <a:lnRef idx="1">
+            <a:schemeClr val="accent1"/>
+          </a:lnRef>
+          <a:fillRef idx="3">
+            <a:schemeClr val="accent1"/>
+          </a:fillRef>
+          <a:effectRef idx="2">
+            <a:schemeClr val="accent1"/>
+          </a:effectRef>
+          <a:fontRef idx="minor">
+            <a:schemeClr val="lt1"/>
+          </a:fontRef>
+        </p:style>
+        <p:txBody>
+          <a:bodyPr rtlCol="0" anchor="ctr" wrap="square" lIns="101600" rIns="101600" tIns="50800" bIns="50800"/>
+          <a:lstStyle/>
+          <a:p>
+            <a:pPr algn="l">
               <a:spcAft>
-                <a:spcPts val="500"/>
+                <a:spcPts val="200"/>
               </a:spcAft>
-              <a:defRPr sz="1700">
+              <a:defRPr sz="1350" b="0">
                 <a:solidFill>
                   <a:srgbClr val="262626"/>
                 </a:solidFill>
@@ -6498,15 +7565,59 @@
               </a:defRPr>
             </a:pPr>
             <a:r>
-              <a:t>• Hexagonal (ports &amp; adapters); dependencies point inward: api → service → domain; infrastructure → domain</a:t>
-            </a:r>
-          </a:p>
-          <a:p>
-            <a:pPr>
+              <a:rPr b="0"/>
+              <a:t>Domain-owned persistence port (DIP)  —  swap persistence technology without touching domain or service code</a:t>
+            </a:r>
+          </a:p>
+        </p:txBody>
+      </p:sp>
+      <p:sp>
+        <p:nvSpPr>
+          <p:cNvPr id="5" name="Rounded Rectangle 4"/>
+          <p:cNvSpPr/>
+          <p:nvPr/>
+        </p:nvSpPr>
+        <p:spPr>
+          <a:xfrm>
+            <a:off x="548640" y="2148840"/>
+            <a:ext cx="11109960" cy="713232"/>
+          </a:xfrm>
+          <a:prstGeom prst="roundRect">
+            <a:avLst/>
+          </a:prstGeom>
+          <a:solidFill>
+            <a:srgbClr val="ECE6FB"/>
+          </a:solidFill>
+          <a:ln w="15875">
+            <a:solidFill>
+              <a:srgbClr val="C9B8F0"/>
+            </a:solidFill>
+          </a:ln>
+          <a:effectLst/>
+        </p:spPr>
+        <p:style>
+          <a:lnRef idx="1">
+            <a:schemeClr val="accent1"/>
+          </a:lnRef>
+          <a:fillRef idx="3">
+            <a:schemeClr val="accent1"/>
+          </a:fillRef>
+          <a:effectRef idx="2">
+            <a:schemeClr val="accent1"/>
+          </a:effectRef>
+          <a:fontRef idx="minor">
+            <a:schemeClr val="lt1"/>
+          </a:fontRef>
+        </p:style>
+        <p:txBody>
+          <a:bodyPr rtlCol="0" anchor="ctr" wrap="square" lIns="101600" rIns="101600" tIns="50800" bIns="50800"/>
+          <a:lstStyle/>
+          <a:p>
+            <a:pPr algn="l">
               <a:spcAft>
-                <a:spcPts val="500"/>
+                <a:spcPts val="200"/>
               </a:spcAft>
-              <a:defRPr sz="1700">
+              <a:defRPr sz="1350" b="0">
                 <a:solidFill>
                   <a:srgbClr val="262626"/>
                 </a:solidFill>
@@ -6514,15 +7625,59 @@
               </a:defRPr>
             </a:pPr>
             <a:r>
-              <a:t>• Layers</a:t>
-            </a:r>
-          </a:p>
-          <a:p>
-            <a:pPr lvl="1">
+              <a:rPr b="0"/>
+              <a:t>POJO domain vs JPA entity split  —  ORM concerns never leak into business logic; the two evolve independently</a:t>
+            </a:r>
+          </a:p>
+        </p:txBody>
+      </p:sp>
+      <p:sp>
+        <p:nvSpPr>
+          <p:cNvPr id="6" name="Rounded Rectangle 5"/>
+          <p:cNvSpPr/>
+          <p:nvPr/>
+        </p:nvSpPr>
+        <p:spPr>
+          <a:xfrm>
+            <a:off x="548640" y="2971800"/>
+            <a:ext cx="11109960" cy="713232"/>
+          </a:xfrm>
+          <a:prstGeom prst="roundRect">
+            <a:avLst/>
+          </a:prstGeom>
+          <a:solidFill>
+            <a:srgbClr val="ECE6FB"/>
+          </a:solidFill>
+          <a:ln w="15875">
+            <a:solidFill>
+              <a:srgbClr val="C9B8F0"/>
+            </a:solidFill>
+          </a:ln>
+          <a:effectLst/>
+        </p:spPr>
+        <p:style>
+          <a:lnRef idx="1">
+            <a:schemeClr val="accent1"/>
+          </a:lnRef>
+          <a:fillRef idx="3">
+            <a:schemeClr val="accent1"/>
+          </a:fillRef>
+          <a:effectRef idx="2">
+            <a:schemeClr val="accent1"/>
+          </a:effectRef>
+          <a:fontRef idx="minor">
+            <a:schemeClr val="lt1"/>
+          </a:fontRef>
+        </p:style>
+        <p:txBody>
+          <a:bodyPr rtlCol="0" anchor="ctr" wrap="square" lIns="101600" rIns="101600" tIns="50800" bIns="50800"/>
+          <a:lstStyle/>
+          <a:p>
+            <a:pPr algn="l">
               <a:spcAft>
-                <a:spcPts val="500"/>
+                <a:spcPts val="200"/>
               </a:spcAft>
-              <a:defRPr sz="1400">
+              <a:defRPr sz="1350" b="0">
                 <a:solidFill>
                   <a:srgbClr val="262626"/>
                 </a:solidFill>
@@ -6530,15 +7685,59 @@
               </a:defRPr>
             </a:pPr>
             <a:r>
-              <a:t>– api: controller, request/response DTOs, mapper, exception handler</a:t>
-            </a:r>
-          </a:p>
-          <a:p>
-            <a:pPr lvl="1">
+              <a:rPr b="0"/>
+              <a:t>Open/Closed filtering via Specifications  —  add a new filter = add one null-safe criterion; existing ones untouched</a:t>
+            </a:r>
+          </a:p>
+        </p:txBody>
+      </p:sp>
+      <p:sp>
+        <p:nvSpPr>
+          <p:cNvPr id="7" name="Rounded Rectangle 6"/>
+          <p:cNvSpPr/>
+          <p:nvPr/>
+        </p:nvSpPr>
+        <p:spPr>
+          <a:xfrm>
+            <a:off x="548640" y="3794760"/>
+            <a:ext cx="11109960" cy="713232"/>
+          </a:xfrm>
+          <a:prstGeom prst="roundRect">
+            <a:avLst/>
+          </a:prstGeom>
+          <a:solidFill>
+            <a:srgbClr val="ECE6FB"/>
+          </a:solidFill>
+          <a:ln w="15875">
+            <a:solidFill>
+              <a:srgbClr val="C9B8F0"/>
+            </a:solidFill>
+          </a:ln>
+          <a:effectLst/>
+        </p:spPr>
+        <p:style>
+          <a:lnRef idx="1">
+            <a:schemeClr val="accent1"/>
+          </a:lnRef>
+          <a:fillRef idx="3">
+            <a:schemeClr val="accent1"/>
+          </a:fillRef>
+          <a:effectRef idx="2">
+            <a:schemeClr val="accent1"/>
+          </a:effectRef>
+          <a:fontRef idx="minor">
+            <a:schemeClr val="lt1"/>
+          </a:fontRef>
+        </p:style>
+        <p:txBody>
+          <a:bodyPr rtlCol="0" anchor="ctr" wrap="square" lIns="101600" rIns="101600" tIns="50800" bIns="50800"/>
+          <a:lstStyle/>
+          <a:p>
+            <a:pPr algn="l">
               <a:spcAft>
-                <a:spcPts val="500"/>
+                <a:spcPts val="200"/>
               </a:spcAft>
-              <a:defRPr sz="1400">
+              <a:defRPr sz="1350" b="0">
                 <a:solidFill>
                   <a:srgbClr val="262626"/>
                 </a:solidFill>
@@ -6546,15 +7745,59 @@
               </a:defRPr>
             </a:pPr>
             <a:r>
-              <a:t>– service: use cases (PolicyService / PolicyServiceImpl), PolicySummary</a:t>
-            </a:r>
-          </a:p>
-          <a:p>
-            <a:pPr lvl="1">
+              <a:rPr b="0"/>
+              <a:t>Flyway owns schema, Hibernate validates  —  reproducible schema; no silent table changes from ddl-auto=update</a:t>
+            </a:r>
+          </a:p>
+        </p:txBody>
+      </p:sp>
+      <p:sp>
+        <p:nvSpPr>
+          <p:cNvPr id="8" name="Rounded Rectangle 7"/>
+          <p:cNvSpPr/>
+          <p:nvPr/>
+        </p:nvSpPr>
+        <p:spPr>
+          <a:xfrm>
+            <a:off x="548640" y="4617720"/>
+            <a:ext cx="11109960" cy="713232"/>
+          </a:xfrm>
+          <a:prstGeom prst="roundRect">
+            <a:avLst/>
+          </a:prstGeom>
+          <a:solidFill>
+            <a:srgbClr val="ECE6FB"/>
+          </a:solidFill>
+          <a:ln w="15875">
+            <a:solidFill>
+              <a:srgbClr val="C9B8F0"/>
+            </a:solidFill>
+          </a:ln>
+          <a:effectLst/>
+        </p:spPr>
+        <p:style>
+          <a:lnRef idx="1">
+            <a:schemeClr val="accent1"/>
+          </a:lnRef>
+          <a:fillRef idx="3">
+            <a:schemeClr val="accent1"/>
+          </a:fillRef>
+          <a:effectRef idx="2">
+            <a:schemeClr val="accent1"/>
+          </a:effectRef>
+          <a:fontRef idx="minor">
+            <a:schemeClr val="lt1"/>
+          </a:fontRef>
+        </p:style>
+        <p:txBody>
+          <a:bodyPr rtlCol="0" anchor="ctr" wrap="square" lIns="101600" rIns="101600" tIns="50800" bIns="50800"/>
+          <a:lstStyle/>
+          <a:p>
+            <a:pPr algn="l">
               <a:spcAft>
-                <a:spcPts val="500"/>
+                <a:spcPts val="200"/>
               </a:spcAft>
-              <a:defRPr sz="1400">
+              <a:defRPr sz="1350" b="0">
                 <a:solidFill>
                   <a:srgbClr val="262626"/>
                 </a:solidFill>
@@ -6562,15 +7805,59 @@
               </a:defRPr>
             </a:pPr>
             <a:r>
-              <a:t>– domain: framework-free Policy POJO + enums, PolicyRepositoryPort, query value objects, exception</a:t>
-            </a:r>
-          </a:p>
-          <a:p>
-            <a:pPr lvl="1">
+              <a:rPr b="0"/>
+              <a:t>Caffeine caching: TTL + event eviction  —  fast reads with bounded staleness; flagging evicts listings/detail at once</a:t>
+            </a:r>
+          </a:p>
+        </p:txBody>
+      </p:sp>
+      <p:sp>
+        <p:nvSpPr>
+          <p:cNvPr id="9" name="Rounded Rectangle 8"/>
+          <p:cNvSpPr/>
+          <p:nvPr/>
+        </p:nvSpPr>
+        <p:spPr>
+          <a:xfrm>
+            <a:off x="548640" y="5440680"/>
+            <a:ext cx="11109960" cy="713232"/>
+          </a:xfrm>
+          <a:prstGeom prst="roundRect">
+            <a:avLst/>
+          </a:prstGeom>
+          <a:solidFill>
+            <a:srgbClr val="ECE6FB"/>
+          </a:solidFill>
+          <a:ln w="15875">
+            <a:solidFill>
+              <a:srgbClr val="C9B8F0"/>
+            </a:solidFill>
+          </a:ln>
+          <a:effectLst/>
+        </p:spPr>
+        <p:style>
+          <a:lnRef idx="1">
+            <a:schemeClr val="accent1"/>
+          </a:lnRef>
+          <a:fillRef idx="3">
+            <a:schemeClr val="accent1"/>
+          </a:fillRef>
+          <a:effectRef idx="2">
+            <a:schemeClr val="accent1"/>
+          </a:effectRef>
+          <a:fontRef idx="minor">
+            <a:schemeClr val="lt1"/>
+          </a:fontRef>
+        </p:style>
+        <p:txBody>
+          <a:bodyPr rtlCol="0" anchor="ctr" wrap="square" lIns="101600" rIns="101600" tIns="50800" bIns="50800"/>
+          <a:lstStyle/>
+          <a:p>
+            <a:pPr algn="l">
               <a:spcAft>
-                <a:spcPts val="500"/>
+                <a:spcPts val="200"/>
               </a:spcAft>
-              <a:defRPr sz="1400">
+              <a:defRPr sz="1350" b="0">
                 <a:solidFill>
                   <a:srgbClr val="262626"/>
                 </a:solidFill>
@@ -6578,150 +7865,22 @@
               </a:defRPr>
             </a:pPr>
             <a:r>
-              <a:t>– infrastructure: PolicyEntity (JPA), PolicyJpaRepository, persistence adapter, PolicySpecification</a:t>
-            </a:r>
-          </a:p>
-          <a:p>
-            <a:pPr>
-              <a:spcAft>
-                <a:spcPts val="500"/>
-              </a:spcAft>
-              <a:defRPr sz="1700">
-                <a:solidFill>
-                  <a:srgbClr val="262626"/>
-                </a:solidFill>
-                <a:latin typeface="Calibri"/>
-              </a:defRPr>
-            </a:pPr>
-            <a:r>
-              <a:t>• Key decisions</a:t>
-            </a:r>
-          </a:p>
-          <a:p>
-            <a:pPr lvl="1">
-              <a:spcAft>
-                <a:spcPts val="500"/>
-              </a:spcAft>
-              <a:defRPr sz="1400">
-                <a:solidFill>
-                  <a:srgbClr val="262626"/>
-                </a:solidFill>
-                <a:latin typeface="Calibri"/>
-              </a:defRPr>
-            </a:pPr>
-            <a:r>
-              <a:t>– DIP: service depends on domain-owned port; Spring Data adapter injected</a:t>
-            </a:r>
-          </a:p>
-          <a:p>
-            <a:pPr lvl="1">
-              <a:spcAft>
-                <a:spcPts val="500"/>
-              </a:spcAft>
-              <a:defRPr sz="1400">
-                <a:solidFill>
-                  <a:srgbClr val="262626"/>
-                </a:solidFill>
-                <a:latin typeface="Calibri"/>
-              </a:defRPr>
-            </a:pPr>
-            <a:r>
-              <a:t>– POJO domain vs JPA entity split (mapper translates) — ORM never leaks into business logic</a:t>
-            </a:r>
-          </a:p>
-          <a:p>
-            <a:pPr lvl="1">
-              <a:spcAft>
-                <a:spcPts val="500"/>
-              </a:spcAft>
-              <a:defRPr sz="1400">
-                <a:solidFill>
-                  <a:srgbClr val="262626"/>
-                </a:solidFill>
-                <a:latin typeface="Calibri"/>
-              </a:defRPr>
-            </a:pPr>
-            <a:r>
-              <a:t>– OCP filtering: one composable, null-safe Specification per criterion (Specification.allOf)</a:t>
-            </a:r>
-          </a:p>
-          <a:p>
-            <a:pPr lvl="1">
-              <a:spcAft>
-                <a:spcPts val="500"/>
-              </a:spcAft>
-              <a:defRPr sz="1400">
-                <a:solidFill>
-                  <a:srgbClr val="262626"/>
-                </a:solidFill>
-                <a:latin typeface="Calibri"/>
-              </a:defRPr>
-            </a:pPr>
-            <a:r>
-              <a:t>– Flyway owns schema (V1 schema, V2 seed); Hibernate ddl-auto=validate</a:t>
-            </a:r>
-          </a:p>
-          <a:p>
-            <a:pPr lvl="1">
-              <a:spcAft>
-                <a:spcPts val="500"/>
-              </a:spcAft>
-              <a:defRPr sz="1400">
-                <a:solidFill>
-                  <a:srgbClr val="262626"/>
-                </a:solidFill>
-                <a:latin typeface="Calibri"/>
-              </a:defRPr>
-            </a:pPr>
-            <a:r>
-              <a:t>– Caffeine caching (listings / by-id / summary) with TTL + event-based eviction</a:t>
-            </a:r>
-          </a:p>
-          <a:p>
-            <a:pPr lvl="1">
-              <a:spcAft>
-                <a:spcPts val="500"/>
-              </a:spcAft>
-              <a:defRPr sz="1400">
-                <a:solidFill>
-                  <a:srgbClr val="262626"/>
-                </a:solidFill>
-                <a:latin typeface="Calibri"/>
-              </a:defRPr>
-            </a:pPr>
-            <a:r>
-              <a:t>– 12-factor config; structured errors (404/400/503, no stack traces); Actuator health probes</a:t>
+              <a:rPr b="0"/>
+              <a:t>12-factor config + Actuator health  —  env-driven settings; liveness/readiness probes for orchestration</a:t>
             </a:r>
           </a:p>
         </p:txBody>
       </p:sp>
     </p:spTree>
-    <p:extLst>
-      <p:ext uri="{BB962C8B-B14F-4D97-AF65-F5344CB8AC3E}">
-        <p14:creationId xmlns:p14="http://schemas.microsoft.com/office/powerpoint/2010/main" val="1079604564"/>
-      </p:ext>
-    </p:extLst>
   </p:cSld>
   <p:clrMapOvr>
     <a:masterClrMapping/>
   </p:clrMapOvr>
-  <mc:AlternateContent xmlns:mc="http://schemas.openxmlformats.org/markup-compatibility/2006" xmlns:p14="http://schemas.microsoft.com/office/powerpoint/2010/main">
-    <mc:Choice Requires="p14">
-      <p:transition spd="med" p14:dur="700">
-        <p:fade/>
-      </p:transition>
-    </mc:Choice>
-    <mc:Fallback xmlns="">
-      <p:transition spd="med">
-        <p:fade/>
-      </p:transition>
-    </mc:Fallback>
-  </mc:AlternateContent>
 </p:sld>
 </file>
 
 <file path=ppt/slides/slide5.xml><?xml version="1.0" encoding="utf-8"?>
-<p:sld xmlns:a="http://schemas.openxmlformats.org/drawingml/2006/main" xmlns:r="http://schemas.openxmlformats.org/officeDocument/2006/relationships" xmlns:p="http://schemas.openxmlformats.org/presentationml/2006/main">
+<p:sld xmlns:a="http://schemas.openxmlformats.org/drawingml/2006/main" xmlns:p="http://schemas.openxmlformats.org/presentationml/2006/main" xmlns:r="http://schemas.openxmlformats.org/officeDocument/2006/relationships">
   <p:cSld>
     <p:spTree>
       <p:nvGrpSpPr>
@@ -6729,14 +7888,7 @@
         <p:cNvGrpSpPr/>
         <p:nvPr/>
       </p:nvGrpSpPr>
-      <p:grpSpPr>
-        <a:xfrm>
-          <a:off x="0" y="0"/>
-          <a:ext cx="0" cy="0"/>
-          <a:chOff x="0" y="0"/>
-          <a:chExt cx="0" cy="0"/>
-        </a:xfrm>
-      </p:grpSpPr>
+      <p:grpSpPr/>
       <p:sp>
         <p:nvSpPr>
           <p:cNvPr id="2" name="TextBox 1"/>
@@ -6745,8 +7897,8 @@
         </p:nvSpPr>
         <p:spPr>
           <a:xfrm>
-            <a:off x="548640" y="411480"/>
-            <a:ext cx="11064240" cy="822960"/>
+            <a:off x="502920" y="320040"/>
+            <a:ext cx="11155680" cy="731520"/>
           </a:xfrm>
           <a:prstGeom prst="rect">
             <a:avLst/>
@@ -6760,7 +7912,7 @@
           <a:lstStyle/>
           <a:p>
             <a:pPr>
-              <a:defRPr sz="2800" b="1">
+              <a:defRPr sz="2700" b="1">
                 <a:solidFill>
                   <a:srgbClr val="5F1EBE"/>
                 </a:solidFill>
@@ -6775,14 +7927,587 @@
       </p:sp>
       <p:sp>
         <p:nvSpPr>
-          <p:cNvPr id="3" name="TextBox 2"/>
+          <p:cNvPr id="3" name="Rectangle 2"/>
+          <p:cNvSpPr/>
+          <p:nvPr/>
+        </p:nvSpPr>
+        <p:spPr>
+          <a:xfrm>
+            <a:off x="530352" y="1024128"/>
+            <a:ext cx="2194560" cy="38100"/>
+          </a:xfrm>
+          <a:prstGeom prst="rect">
+            <a:avLst/>
+          </a:prstGeom>
+          <a:solidFill>
+            <a:srgbClr val="5F1EBE"/>
+          </a:solidFill>
+          <a:ln>
+            <a:noFill/>
+          </a:ln>
+          <a:effectLst/>
+        </p:spPr>
+        <p:style>
+          <a:lnRef idx="1">
+            <a:schemeClr val="accent1"/>
+          </a:lnRef>
+          <a:fillRef idx="3">
+            <a:schemeClr val="accent1"/>
+          </a:fillRef>
+          <a:effectRef idx="2">
+            <a:schemeClr val="accent1"/>
+          </a:effectRef>
+          <a:fontRef idx="minor">
+            <a:schemeClr val="lt1"/>
+          </a:fontRef>
+        </p:style>
+        <p:txBody>
+          <a:bodyPr rtlCol="0" anchor="ctr"/>
+          <a:lstStyle/>
+          <a:p>
+            <a:pPr algn="ctr"/>
+          </a:p>
+        </p:txBody>
+      </p:sp>
+      <p:sp>
+        <p:nvSpPr>
+          <p:cNvPr id="4" name="Rounded Rectangle 3"/>
+          <p:cNvSpPr/>
+          <p:nvPr/>
+        </p:nvSpPr>
+        <p:spPr>
+          <a:xfrm>
+            <a:off x="548640" y="1325880"/>
+            <a:ext cx="5897880" cy="4297680"/>
+          </a:xfrm>
+          <a:prstGeom prst="roundRect">
+            <a:avLst/>
+          </a:prstGeom>
+          <a:solidFill>
+            <a:srgbClr val="ECE6FB"/>
+          </a:solidFill>
+          <a:ln>
+            <a:noFill/>
+          </a:ln>
+          <a:effectLst/>
+        </p:spPr>
+        <p:style>
+          <a:lnRef idx="1">
+            <a:schemeClr val="accent1"/>
+          </a:lnRef>
+          <a:fillRef idx="3">
+            <a:schemeClr val="accent1"/>
+          </a:fillRef>
+          <a:effectRef idx="2">
+            <a:schemeClr val="accent1"/>
+          </a:effectRef>
+          <a:fontRef idx="minor">
+            <a:schemeClr val="lt1"/>
+          </a:fontRef>
+        </p:style>
+        <p:txBody>
+          <a:bodyPr rtlCol="0" anchor="t" wrap="square" lIns="127000" rIns="127000" tIns="101600" bIns="76200"/>
+          <a:lstStyle/>
+          <a:p>
+            <a:pPr algn="ctr">
+              <a:spcAft>
+                <a:spcPts val="400"/>
+              </a:spcAft>
+              <a:defRPr sz="1500" b="1">
+                <a:solidFill>
+                  <a:srgbClr val="5F1EBE"/>
+                </a:solidFill>
+                <a:latin typeface="Calibri Light"/>
+              </a:defRPr>
+            </a:pPr>
+            <a:r>
+              <a:t>Repository &amp; workflow</a:t>
+            </a:r>
+          </a:p>
+          <a:p>
+            <a:pPr>
+              <a:spcAft>
+                <a:spcPts val="300"/>
+              </a:spcAft>
+              <a:defRPr sz="1200">
+                <a:solidFill>
+                  <a:srgbClr val="262626"/>
+                </a:solidFill>
+                <a:latin typeface="Calibri"/>
+              </a:defRPr>
+            </a:pPr>
+            <a:r>
+              <a:t>•  github.com/meetravig-collab/InsurancePolicyListDemo  (public)</a:t>
+            </a:r>
+          </a:p>
+          <a:p>
+            <a:pPr>
+              <a:spcAft>
+                <a:spcPts val="300"/>
+              </a:spcAft>
+              <a:defRPr sz="1200">
+                <a:solidFill>
+                  <a:srgbClr val="262626"/>
+                </a:solidFill>
+                <a:latin typeface="Calibri"/>
+              </a:defRPr>
+            </a:pPr>
+            <a:r>
+              <a:t>•  Default branch: dev  (master kept in sync via fast-forward)</a:t>
+            </a:r>
+          </a:p>
+          <a:p>
+            <a:pPr>
+              <a:spcAft>
+                <a:spcPts val="300"/>
+              </a:spcAft>
+              <a:defRPr sz="1200">
+                <a:solidFill>
+                  <a:srgbClr val="262626"/>
+                </a:solidFill>
+                <a:latin typeface="Calibri"/>
+              </a:defRPr>
+            </a:pPr>
+            <a:r>
+              <a:t>•  Flow: work on dev → CI gate (mvn verify) → image to GHCR</a:t>
+            </a:r>
+          </a:p>
+          <a:p>
+            <a:pPr>
+              <a:spcAft>
+                <a:spcPts val="300"/>
+              </a:spcAft>
+              <a:defRPr sz="1200">
+                <a:solidFill>
+                  <a:srgbClr val="262626"/>
+                </a:solidFill>
+                <a:latin typeface="Calibri"/>
+              </a:defRPr>
+            </a:pPr>
+            <a:r>
+              <a:t>•  GitHub Actions pinned to commit SHAs (supply-chain hardening)</a:t>
+            </a:r>
+          </a:p>
+          <a:p>
+            <a:pPr>
+              <a:spcAft>
+                <a:spcPts val="300"/>
+              </a:spcAft>
+              <a:defRPr sz="1200">
+                <a:solidFill>
+                  <a:srgbClr val="262626"/>
+                </a:solidFill>
+                <a:latin typeface="Calibri"/>
+              </a:defRPr>
+            </a:pPr>
+            <a:r>
+              <a:t>•  Dependabot + security alerts enabled</a:t>
+            </a:r>
+          </a:p>
+          <a:p>
+            <a:pPr>
+              <a:spcAft>
+                <a:spcPts val="300"/>
+              </a:spcAft>
+              <a:defRPr sz="1200">
+                <a:solidFill>
+                  <a:srgbClr val="262626"/>
+                </a:solidFill>
+                <a:latin typeface="Calibri"/>
+              </a:defRPr>
+            </a:pPr>
+            <a:r>
+              <a:t>•  Commits carry a descriptive message + Co-Authored-By trailer</a:t>
+            </a:r>
+          </a:p>
+        </p:txBody>
+      </p:sp>
+      <p:graphicFrame>
+        <p:nvGraphicFramePr>
+          <p:cNvPr id="5" name="Table 4"/>
+          <p:cNvGraphicFramePr>
+            <a:graphicFrameLocks noGrp="1"/>
+          </p:cNvGraphicFramePr>
+          <p:nvPr/>
+        </p:nvGraphicFramePr>
+        <p:xfrm>
+          <a:off x="6629400" y="1463040"/>
+          <a:ext cx="4983480" cy="3200400"/>
+        </p:xfrm>
+        <a:graphic>
+          <a:graphicData uri="http://schemas.openxmlformats.org/drawingml/2006/table">
+            <a:tbl>
+              <a:tblPr firstRow="1" bandRow="1">
+                <a:tableStyleId>{5C22544A-7EE6-4342-B048-85BDC9FD1C3A}</a:tableStyleId>
+              </a:tblPr>
+              <a:tblGrid>
+                <a:gridCol w="1828800"/>
+                <a:gridCol w="3154680"/>
+              </a:tblGrid>
+              <a:tr h="457200">
+                <a:tc>
+                  <a:txBody>
+                    <a:bodyPr/>
+                    <a:lstStyle/>
+                    <a:p>
+                      <a:pPr>
+                        <a:defRPr sz="1250" b="1">
+                          <a:solidFill>
+                            <a:srgbClr val="FFFFFF"/>
+                          </a:solidFill>
+                          <a:latin typeface="Calibri"/>
+                        </a:defRPr>
+                      </a:pPr>
+                      <a:r>
+                        <a:t>Concern</a:t>
+                      </a:r>
+                    </a:p>
+                  </a:txBody>
+                  <a:tcPr anchor="ctr" marT="25400" marB="25400" marL="88900" marR="88900">
+                    <a:solidFill>
+                      <a:srgbClr val="5F1EBE"/>
+                    </a:solidFill>
+                  </a:tcPr>
+                </a:tc>
+                <a:tc>
+                  <a:txBody>
+                    <a:bodyPr/>
+                    <a:lstStyle/>
+                    <a:p>
+                      <a:pPr>
+                        <a:defRPr sz="1250" b="1">
+                          <a:solidFill>
+                            <a:srgbClr val="FFFFFF"/>
+                          </a:solidFill>
+                          <a:latin typeface="Calibri"/>
+                        </a:defRPr>
+                      </a:pPr>
+                      <a:r>
+                        <a:t>Choice</a:t>
+                      </a:r>
+                    </a:p>
+                  </a:txBody>
+                  <a:tcPr anchor="ctr" marT="25400" marB="25400" marL="88900" marR="88900">
+                    <a:solidFill>
+                      <a:srgbClr val="5F1EBE"/>
+                    </a:solidFill>
+                  </a:tcPr>
+                </a:tc>
+              </a:tr>
+              <a:tr h="457200">
+                <a:tc>
+                  <a:txBody>
+                    <a:bodyPr/>
+                    <a:lstStyle/>
+                    <a:p>
+                      <a:pPr>
+                        <a:defRPr sz="1250">
+                          <a:solidFill>
+                            <a:srgbClr val="262626"/>
+                          </a:solidFill>
+                          <a:latin typeface="Calibri"/>
+                        </a:defRPr>
+                      </a:pPr>
+                      <a:r>
+                        <a:t>Language</a:t>
+                      </a:r>
+                    </a:p>
+                  </a:txBody>
+                  <a:tcPr anchor="ctr" marT="25400" marB="25400" marL="88900" marR="88900">
+                    <a:solidFill>
+                      <a:srgbClr val="FFFFFF"/>
+                    </a:solidFill>
+                  </a:tcPr>
+                </a:tc>
+                <a:tc>
+                  <a:txBody>
+                    <a:bodyPr/>
+                    <a:lstStyle/>
+                    <a:p>
+                      <a:pPr>
+                        <a:defRPr sz="1250">
+                          <a:solidFill>
+                            <a:srgbClr val="262626"/>
+                          </a:solidFill>
+                          <a:latin typeface="Calibri"/>
+                        </a:defRPr>
+                      </a:pPr>
+                      <a:r>
+                        <a:t>Java 17 (Temurin)</a:t>
+                      </a:r>
+                    </a:p>
+                  </a:txBody>
+                  <a:tcPr anchor="ctr" marT="25400" marB="25400" marL="88900" marR="88900">
+                    <a:solidFill>
+                      <a:srgbClr val="FFFFFF"/>
+                    </a:solidFill>
+                  </a:tcPr>
+                </a:tc>
+              </a:tr>
+              <a:tr h="457200">
+                <a:tc>
+                  <a:txBody>
+                    <a:bodyPr/>
+                    <a:lstStyle/>
+                    <a:p>
+                      <a:pPr>
+                        <a:defRPr sz="1250">
+                          <a:solidFill>
+                            <a:srgbClr val="262626"/>
+                          </a:solidFill>
+                          <a:latin typeface="Calibri"/>
+                        </a:defRPr>
+                      </a:pPr>
+                      <a:r>
+                        <a:t>Build</a:t>
+                      </a:r>
+                    </a:p>
+                  </a:txBody>
+                  <a:tcPr anchor="ctr" marT="25400" marB="25400" marL="88900" marR="88900">
+                    <a:solidFill>
+                      <a:srgbClr val="ECE6FB"/>
+                    </a:solidFill>
+                  </a:tcPr>
+                </a:tc>
+                <a:tc>
+                  <a:txBody>
+                    <a:bodyPr/>
+                    <a:lstStyle/>
+                    <a:p>
+                      <a:pPr>
+                        <a:defRPr sz="1250">
+                          <a:solidFill>
+                            <a:srgbClr val="262626"/>
+                          </a:solidFill>
+                          <a:latin typeface="Calibri"/>
+                        </a:defRPr>
+                      </a:pPr>
+                      <a:r>
+                        <a:t>Maven 3.9</a:t>
+                      </a:r>
+                    </a:p>
+                  </a:txBody>
+                  <a:tcPr anchor="ctr" marT="25400" marB="25400" marL="88900" marR="88900">
+                    <a:solidFill>
+                      <a:srgbClr val="ECE6FB"/>
+                    </a:solidFill>
+                  </a:tcPr>
+                </a:tc>
+              </a:tr>
+              <a:tr h="457200">
+                <a:tc>
+                  <a:txBody>
+                    <a:bodyPr/>
+                    <a:lstStyle/>
+                    <a:p>
+                      <a:pPr>
+                        <a:defRPr sz="1250">
+                          <a:solidFill>
+                            <a:srgbClr val="262626"/>
+                          </a:solidFill>
+                          <a:latin typeface="Calibri"/>
+                        </a:defRPr>
+                      </a:pPr>
+                      <a:r>
+                        <a:t>Database</a:t>
+                      </a:r>
+                    </a:p>
+                  </a:txBody>
+                  <a:tcPr anchor="ctr" marT="25400" marB="25400" marL="88900" marR="88900">
+                    <a:solidFill>
+                      <a:srgbClr val="FFFFFF"/>
+                    </a:solidFill>
+                  </a:tcPr>
+                </a:tc>
+                <a:tc>
+                  <a:txBody>
+                    <a:bodyPr/>
+                    <a:lstStyle/>
+                    <a:p>
+                      <a:pPr>
+                        <a:defRPr sz="1250">
+                          <a:solidFill>
+                            <a:srgbClr val="262626"/>
+                          </a:solidFill>
+                          <a:latin typeface="Calibri"/>
+                        </a:defRPr>
+                      </a:pPr>
+                      <a:r>
+                        <a:t>PostgreSQL 16</a:t>
+                      </a:r>
+                    </a:p>
+                  </a:txBody>
+                  <a:tcPr anchor="ctr" marT="25400" marB="25400" marL="88900" marR="88900">
+                    <a:solidFill>
+                      <a:srgbClr val="FFFFFF"/>
+                    </a:solidFill>
+                  </a:tcPr>
+                </a:tc>
+              </a:tr>
+              <a:tr h="457200">
+                <a:tc>
+                  <a:txBody>
+                    <a:bodyPr/>
+                    <a:lstStyle/>
+                    <a:p>
+                      <a:pPr>
+                        <a:defRPr sz="1250">
+                          <a:solidFill>
+                            <a:srgbClr val="262626"/>
+                          </a:solidFill>
+                          <a:latin typeface="Calibri"/>
+                        </a:defRPr>
+                      </a:pPr>
+                      <a:r>
+                        <a:t>Container</a:t>
+                      </a:r>
+                    </a:p>
+                  </a:txBody>
+                  <a:tcPr anchor="ctr" marT="25400" marB="25400" marL="88900" marR="88900">
+                    <a:solidFill>
+                      <a:srgbClr val="ECE6FB"/>
+                    </a:solidFill>
+                  </a:tcPr>
+                </a:tc>
+                <a:tc>
+                  <a:txBody>
+                    <a:bodyPr/>
+                    <a:lstStyle/>
+                    <a:p>
+                      <a:pPr>
+                        <a:defRPr sz="1250">
+                          <a:solidFill>
+                            <a:srgbClr val="262626"/>
+                          </a:solidFill>
+                          <a:latin typeface="Calibri"/>
+                        </a:defRPr>
+                      </a:pPr>
+                      <a:r>
+                        <a:t>Docker + docker-compose</a:t>
+                      </a:r>
+                    </a:p>
+                  </a:txBody>
+                  <a:tcPr anchor="ctr" marT="25400" marB="25400" marL="88900" marR="88900">
+                    <a:solidFill>
+                      <a:srgbClr val="ECE6FB"/>
+                    </a:solidFill>
+                  </a:tcPr>
+                </a:tc>
+              </a:tr>
+              <a:tr h="457200">
+                <a:tc>
+                  <a:txBody>
+                    <a:bodyPr/>
+                    <a:lstStyle/>
+                    <a:p>
+                      <a:pPr>
+                        <a:defRPr sz="1250">
+                          <a:solidFill>
+                            <a:srgbClr val="262626"/>
+                          </a:solidFill>
+                          <a:latin typeface="Calibri"/>
+                        </a:defRPr>
+                      </a:pPr>
+                      <a:r>
+                        <a:t>CI / Registry</a:t>
+                      </a:r>
+                    </a:p>
+                  </a:txBody>
+                  <a:tcPr anchor="ctr" marT="25400" marB="25400" marL="88900" marR="88900">
+                    <a:solidFill>
+                      <a:srgbClr val="FFFFFF"/>
+                    </a:solidFill>
+                  </a:tcPr>
+                </a:tc>
+                <a:tc>
+                  <a:txBody>
+                    <a:bodyPr/>
+                    <a:lstStyle/>
+                    <a:p>
+                      <a:pPr>
+                        <a:defRPr sz="1250">
+                          <a:solidFill>
+                            <a:srgbClr val="262626"/>
+                          </a:solidFill>
+                          <a:latin typeface="Calibri"/>
+                        </a:defRPr>
+                      </a:pPr>
+                      <a:r>
+                        <a:t>GitHub Actions → GHCR</a:t>
+                      </a:r>
+                    </a:p>
+                  </a:txBody>
+                  <a:tcPr anchor="ctr" marT="25400" marB="25400" marL="88900" marR="88900">
+                    <a:solidFill>
+                      <a:srgbClr val="FFFFFF"/>
+                    </a:solidFill>
+                  </a:tcPr>
+                </a:tc>
+              </a:tr>
+              <a:tr h="457200">
+                <a:tc>
+                  <a:txBody>
+                    <a:bodyPr/>
+                    <a:lstStyle/>
+                    <a:p>
+                      <a:pPr>
+                        <a:defRPr sz="1250">
+                          <a:solidFill>
+                            <a:srgbClr val="262626"/>
+                          </a:solidFill>
+                          <a:latin typeface="Calibri"/>
+                        </a:defRPr>
+                      </a:pPr>
+                      <a:r>
+                        <a:t>Dev OS</a:t>
+                      </a:r>
+                    </a:p>
+                  </a:txBody>
+                  <a:tcPr anchor="ctr" marT="25400" marB="25400" marL="88900" marR="88900">
+                    <a:solidFill>
+                      <a:srgbClr val="ECE6FB"/>
+                    </a:solidFill>
+                  </a:tcPr>
+                </a:tc>
+                <a:tc>
+                  <a:txBody>
+                    <a:bodyPr/>
+                    <a:lstStyle/>
+                    <a:p>
+                      <a:pPr>
+                        <a:defRPr sz="1250">
+                          <a:solidFill>
+                            <a:srgbClr val="262626"/>
+                          </a:solidFill>
+                          <a:latin typeface="Calibri"/>
+                        </a:defRPr>
+                      </a:pPr>
+                      <a:r>
+                        <a:t>Windows 11</a:t>
+                      </a:r>
+                    </a:p>
+                  </a:txBody>
+                  <a:tcPr anchor="ctr" marT="25400" marB="25400" marL="88900" marR="88900">
+                    <a:solidFill>
+                      <a:srgbClr val="ECE6FB"/>
+                    </a:solidFill>
+                  </a:tcPr>
+                </a:tc>
+              </a:tr>
+            </a:tbl>
+          </a:graphicData>
+        </a:graphic>
+      </p:graphicFrame>
+      <p:sp>
+        <p:nvSpPr>
+          <p:cNvPr id="6" name="TextBox 5"/>
           <p:cNvSpPr txBox="1"/>
           <p:nvPr/>
         </p:nvSpPr>
         <p:spPr>
           <a:xfrm>
-            <a:off x="640080" y="1371600"/>
-            <a:ext cx="10972800" cy="5120640"/>
+            <a:off x="548640" y="5989320"/>
+            <a:ext cx="11064240" cy="548640"/>
           </a:xfrm>
           <a:prstGeom prst="rect">
             <a:avLst/>
@@ -6790,183 +8515,35 @@
           <a:noFill/>
         </p:spPr>
         <p:txBody>
-          <a:bodyPr wrap="square">
+          <a:bodyPr wrap="none">
             <a:spAutoFit/>
           </a:bodyPr>
           <a:lstStyle/>
           <a:p>
             <a:pPr>
-              <a:spcAft>
-                <a:spcPts val="500"/>
-              </a:spcAft>
-              <a:defRPr sz="1700">
-                <a:solidFill>
-                  <a:srgbClr val="262626"/>
+              <a:defRPr sz="1200" i="1">
+                <a:solidFill>
+                  <a:srgbClr val="595959"/>
                 </a:solidFill>
                 <a:latin typeface="Calibri"/>
               </a:defRPr>
             </a:pPr>
             <a:r>
-              <a:t>• Repository: github.com/meetravig-collab/InsurancePolicyListDemo (public)</a:t>
-            </a:r>
-          </a:p>
-          <a:p>
-            <a:pPr>
-              <a:spcAft>
-                <a:spcPts val="500"/>
-              </a:spcAft>
-              <a:defRPr sz="1700">
-                <a:solidFill>
-                  <a:srgbClr val="262626"/>
-                </a:solidFill>
-                <a:latin typeface="Calibri"/>
-              </a:defRPr>
-            </a:pPr>
-            <a:r>
-              <a:t>• Default branch: dev  (master kept in sync via fast-forward)</a:t>
-            </a:r>
-          </a:p>
-          <a:p>
-            <a:pPr>
-              <a:spcAft>
-                <a:spcPts val="500"/>
-              </a:spcAft>
-              <a:defRPr sz="1700">
-                <a:solidFill>
-                  <a:srgbClr val="262626"/>
-                </a:solidFill>
-                <a:latin typeface="Calibri"/>
-              </a:defRPr>
-            </a:pPr>
-            <a:r>
-              <a:t>• Workflow: work on dev → CI gate (mvn verify) → container image published to GHCR</a:t>
-            </a:r>
-          </a:p>
-          <a:p>
-            <a:pPr>
-              <a:spcAft>
-                <a:spcPts val="500"/>
-              </a:spcAft>
-              <a:defRPr sz="1700">
-                <a:solidFill>
-                  <a:srgbClr val="262626"/>
-                </a:solidFill>
-                <a:latin typeface="Calibri"/>
-              </a:defRPr>
-            </a:pPr>
-            <a:r>
-              <a:t>• Commit style: descriptive messages with Co-Authored-By trailer</a:t>
-            </a:r>
-          </a:p>
-          <a:p>
-            <a:pPr>
-              <a:spcAft>
-                <a:spcPts val="500"/>
-              </a:spcAft>
-              <a:defRPr sz="1700">
-                <a:solidFill>
-                  <a:srgbClr val="262626"/>
-                </a:solidFill>
-                <a:latin typeface="Calibri"/>
-              </a:defRPr>
-            </a:pPr>
-            <a:r>
-              <a:t>• Working platform / tooling</a:t>
-            </a:r>
-          </a:p>
-          <a:p>
-            <a:pPr lvl="1">
-              <a:spcAft>
-                <a:spcPts val="500"/>
-              </a:spcAft>
-              <a:defRPr sz="1400">
-                <a:solidFill>
-                  <a:srgbClr val="262626"/>
-                </a:solidFill>
-                <a:latin typeface="Calibri"/>
-              </a:defRPr>
-            </a:pPr>
-            <a:r>
-              <a:t>– Windows 11 | JDK 17 (Temurin) | Maven 3.9 | PostgreSQL 16 | Docker Desktop | Git + GitHub CLI</a:t>
-            </a:r>
-          </a:p>
-          <a:p>
-            <a:pPr>
-              <a:spcAft>
-                <a:spcPts val="500"/>
-              </a:spcAft>
-              <a:defRPr sz="1700">
-                <a:solidFill>
-                  <a:srgbClr val="262626"/>
-                </a:solidFill>
-                <a:latin typeface="Calibri"/>
-              </a:defRPr>
-            </a:pPr>
-            <a:r>
-              <a:t>• CI/CD: GitHub Actions → GHCR</a:t>
-            </a:r>
-          </a:p>
-          <a:p>
-            <a:pPr lvl="1">
-              <a:spcAft>
-                <a:spcPts val="500"/>
-              </a:spcAft>
-              <a:defRPr sz="1400">
-                <a:solidFill>
-                  <a:srgbClr val="262626"/>
-                </a:solidFill>
-                <a:latin typeface="Calibri"/>
-              </a:defRPr>
-            </a:pPr>
-            <a:r>
-              <a:t>– actions pinned to commit SHAs; Dependabot + security alerts enabled</a:t>
-            </a:r>
-          </a:p>
-          <a:p>
-            <a:pPr lvl="1">
-              <a:spcAft>
-                <a:spcPts val="500"/>
-              </a:spcAft>
-              <a:defRPr sz="1400">
-                <a:solidFill>
-                  <a:srgbClr val="262626"/>
-                </a:solidFill>
-                <a:latin typeface="Calibri"/>
-              </a:defRPr>
-            </a:pPr>
-            <a:r>
-              <a:t>– build runs full Testcontainers suite + coverage gate before publishing the image</a:t>
+              <a:t>CI runs the full Testcontainers suite and coverage gate before any image is published — the registry only ever holds a green build.</a:t>
             </a:r>
           </a:p>
         </p:txBody>
       </p:sp>
     </p:spTree>
-    <p:extLst>
-      <p:ext uri="{BB962C8B-B14F-4D97-AF65-F5344CB8AC3E}">
-        <p14:creationId xmlns:p14="http://schemas.microsoft.com/office/powerpoint/2010/main" val="1514319899"/>
-      </p:ext>
-    </p:extLst>
   </p:cSld>
   <p:clrMapOvr>
     <a:masterClrMapping/>
   </p:clrMapOvr>
-  <mc:AlternateContent xmlns:mc="http://schemas.openxmlformats.org/markup-compatibility/2006" xmlns:p14="http://schemas.microsoft.com/office/powerpoint/2010/main">
-    <mc:Choice Requires="p14">
-      <p:transition spd="med" p14:dur="700">
-        <p:fade/>
-      </p:transition>
-    </mc:Choice>
-    <mc:Fallback xmlns="">
-      <p:transition spd="med">
-        <p:fade/>
-      </p:transition>
-    </mc:Fallback>
-  </mc:AlternateContent>
 </p:sld>
 </file>
 
 <file path=ppt/slides/slide6.xml><?xml version="1.0" encoding="utf-8"?>
-<p:sld xmlns:a="http://schemas.openxmlformats.org/drawingml/2006/main" xmlns:r="http://schemas.openxmlformats.org/officeDocument/2006/relationships" xmlns:p="http://schemas.openxmlformats.org/presentationml/2006/main">
+<p:sld xmlns:a="http://schemas.openxmlformats.org/drawingml/2006/main" xmlns:p="http://schemas.openxmlformats.org/presentationml/2006/main" xmlns:r="http://schemas.openxmlformats.org/officeDocument/2006/relationships">
   <p:cSld>
     <p:spTree>
       <p:nvGrpSpPr>
@@ -6974,14 +8551,7 @@
         <p:cNvGrpSpPr/>
         <p:nvPr/>
       </p:nvGrpSpPr>
-      <p:grpSpPr>
-        <a:xfrm>
-          <a:off x="0" y="0"/>
-          <a:ext cx="0" cy="0"/>
-          <a:chOff x="0" y="0"/>
-          <a:chExt cx="0" cy="0"/>
-        </a:xfrm>
-      </p:grpSpPr>
+      <p:grpSpPr/>
       <p:sp>
         <p:nvSpPr>
           <p:cNvPr id="2" name="TextBox 1"/>
@@ -6990,8 +8560,8 @@
         </p:nvSpPr>
         <p:spPr>
           <a:xfrm>
-            <a:off x="548640" y="411480"/>
-            <a:ext cx="11064240" cy="822960"/>
+            <a:off x="502920" y="320040"/>
+            <a:ext cx="11155680" cy="731520"/>
           </a:xfrm>
           <a:prstGeom prst="rect">
             <a:avLst/>
@@ -7005,7 +8575,7 @@
           <a:lstStyle/>
           <a:p>
             <a:pPr>
-              <a:defRPr sz="2800" b="1">
+              <a:defRPr sz="2700" b="1">
                 <a:solidFill>
                   <a:srgbClr val="5F1EBE"/>
                 </a:solidFill>
@@ -7013,38 +8583,513 @@
               </a:defRPr>
             </a:pPr>
             <a:r>
-              <a:t>3. API Specification</a:t>
-            </a:r>
-          </a:p>
-        </p:txBody>
-      </p:sp>
-      <p:sp>
-        <p:nvSpPr>
-          <p:cNvPr id="3" name="TextBox 2"/>
-          <p:cNvSpPr txBox="1"/>
+              <a:t>3. API Specification — Endpoints</a:t>
+            </a:r>
+          </a:p>
+        </p:txBody>
+      </p:sp>
+      <p:sp>
+        <p:nvSpPr>
+          <p:cNvPr id="3" name="Rectangle 2"/>
+          <p:cNvSpPr/>
           <p:nvPr/>
         </p:nvSpPr>
         <p:spPr>
           <a:xfrm>
-            <a:off x="640080" y="1371600"/>
-            <a:ext cx="10972800" cy="5120640"/>
+            <a:off x="530352" y="1024128"/>
+            <a:ext cx="2194560" cy="38100"/>
           </a:xfrm>
           <a:prstGeom prst="rect">
             <a:avLst/>
           </a:prstGeom>
-          <a:noFill/>
+          <a:solidFill>
+            <a:srgbClr val="5F1EBE"/>
+          </a:solidFill>
+          <a:ln>
+            <a:noFill/>
+          </a:ln>
+          <a:effectLst/>
         </p:spPr>
-        <p:txBody>
-          <a:bodyPr wrap="square">
-            <a:spAutoFit/>
-          </a:bodyPr>
+        <p:style>
+          <a:lnRef idx="1">
+            <a:schemeClr val="accent1"/>
+          </a:lnRef>
+          <a:fillRef idx="3">
+            <a:schemeClr val="accent1"/>
+          </a:fillRef>
+          <a:effectRef idx="2">
+            <a:schemeClr val="accent1"/>
+          </a:effectRef>
+          <a:fontRef idx="minor">
+            <a:schemeClr val="lt1"/>
+          </a:fontRef>
+        </p:style>
+        <p:txBody>
+          <a:bodyPr rtlCol="0" anchor="ctr"/>
           <a:lstStyle/>
+          <a:p>
+            <a:pPr algn="ctr"/>
+          </a:p>
+        </p:txBody>
+      </p:sp>
+      <p:graphicFrame>
+        <p:nvGraphicFramePr>
+          <p:cNvPr id="4" name="Table 3"/>
+          <p:cNvGraphicFramePr>
+            <a:graphicFrameLocks noGrp="1"/>
+          </p:cNvGraphicFramePr>
+          <p:nvPr/>
+        </p:nvGraphicFramePr>
+        <p:xfrm>
+          <a:off x="548640" y="1417320"/>
+          <a:ext cx="11109960" cy="2834640"/>
+        </p:xfrm>
+        <a:graphic>
+          <a:graphicData uri="http://schemas.openxmlformats.org/drawingml/2006/table">
+            <a:tbl>
+              <a:tblPr firstRow="1" bandRow="1">
+                <a:tableStyleId>{5C22544A-7EE6-4342-B048-85BDC9FD1C3A}</a:tableStyleId>
+              </a:tblPr>
+              <a:tblGrid>
+                <a:gridCol w="1188720"/>
+                <a:gridCol w="3063240"/>
+                <a:gridCol w="6858000"/>
+              </a:tblGrid>
+              <a:tr h="566928">
+                <a:tc>
+                  <a:txBody>
+                    <a:bodyPr/>
+                    <a:lstStyle/>
+                    <a:p>
+                      <a:pPr>
+                        <a:defRPr sz="1300" b="1">
+                          <a:solidFill>
+                            <a:srgbClr val="FFFFFF"/>
+                          </a:solidFill>
+                          <a:latin typeface="Calibri"/>
+                        </a:defRPr>
+                      </a:pPr>
+                      <a:r>
+                        <a:t>Method</a:t>
+                      </a:r>
+                    </a:p>
+                  </a:txBody>
+                  <a:tcPr anchor="ctr" marT="25400" marB="25400" marL="88900" marR="88900">
+                    <a:solidFill>
+                      <a:srgbClr val="5F1EBE"/>
+                    </a:solidFill>
+                  </a:tcPr>
+                </a:tc>
+                <a:tc>
+                  <a:txBody>
+                    <a:bodyPr/>
+                    <a:lstStyle/>
+                    <a:p>
+                      <a:pPr>
+                        <a:defRPr sz="1300" b="1">
+                          <a:solidFill>
+                            <a:srgbClr val="FFFFFF"/>
+                          </a:solidFill>
+                          <a:latin typeface="Calibri"/>
+                        </a:defRPr>
+                      </a:pPr>
+                      <a:r>
+                        <a:t>Path</a:t>
+                      </a:r>
+                    </a:p>
+                  </a:txBody>
+                  <a:tcPr anchor="ctr" marT="25400" marB="25400" marL="88900" marR="88900">
+                    <a:solidFill>
+                      <a:srgbClr val="5F1EBE"/>
+                    </a:solidFill>
+                  </a:tcPr>
+                </a:tc>
+                <a:tc>
+                  <a:txBody>
+                    <a:bodyPr/>
+                    <a:lstStyle/>
+                    <a:p>
+                      <a:pPr>
+                        <a:defRPr sz="1300" b="1">
+                          <a:solidFill>
+                            <a:srgbClr val="FFFFFF"/>
+                          </a:solidFill>
+                          <a:latin typeface="Calibri"/>
+                        </a:defRPr>
+                      </a:pPr>
+                      <a:r>
+                        <a:t>Purpose</a:t>
+                      </a:r>
+                    </a:p>
+                  </a:txBody>
+                  <a:tcPr anchor="ctr" marT="25400" marB="25400" marL="88900" marR="88900">
+                    <a:solidFill>
+                      <a:srgbClr val="5F1EBE"/>
+                    </a:solidFill>
+                  </a:tcPr>
+                </a:tc>
+              </a:tr>
+              <a:tr h="566928">
+                <a:tc>
+                  <a:txBody>
+                    <a:bodyPr/>
+                    <a:lstStyle/>
+                    <a:p>
+                      <a:pPr>
+                        <a:defRPr sz="1300">
+                          <a:solidFill>
+                            <a:srgbClr val="262626"/>
+                          </a:solidFill>
+                          <a:latin typeface="Calibri"/>
+                        </a:defRPr>
+                      </a:pPr>
+                      <a:r>
+                        <a:t>GET</a:t>
+                      </a:r>
+                    </a:p>
+                  </a:txBody>
+                  <a:tcPr anchor="ctr" marT="25400" marB="25400" marL="88900" marR="88900">
+                    <a:solidFill>
+                      <a:srgbClr val="FFFFFF"/>
+                    </a:solidFill>
+                  </a:tcPr>
+                </a:tc>
+                <a:tc>
+                  <a:txBody>
+                    <a:bodyPr/>
+                    <a:lstStyle/>
+                    <a:p>
+                      <a:pPr>
+                        <a:defRPr sz="1300">
+                          <a:solidFill>
+                            <a:srgbClr val="262626"/>
+                          </a:solidFill>
+                          <a:latin typeface="Calibri"/>
+                        </a:defRPr>
+                      </a:pPr>
+                      <a:r>
+                        <a:t>/api/v1/policies</a:t>
+                      </a:r>
+                    </a:p>
+                  </a:txBody>
+                  <a:tcPr anchor="ctr" marT="25400" marB="25400" marL="88900" marR="88900">
+                    <a:solidFill>
+                      <a:srgbClr val="FFFFFF"/>
+                    </a:solidFill>
+                  </a:tcPr>
+                </a:tc>
+                <a:tc>
+                  <a:txBody>
+                    <a:bodyPr/>
+                    <a:lstStyle/>
+                    <a:p>
+                      <a:pPr>
+                        <a:defRPr sz="1300">
+                          <a:solidFill>
+                            <a:srgbClr val="262626"/>
+                          </a:solidFill>
+                          <a:latin typeface="Calibri"/>
+                        </a:defRPr>
+                      </a:pPr>
+                      <a:r>
+                        <a:t>List policies — filter, sort, search, pagination (Spring Page)</a:t>
+                      </a:r>
+                    </a:p>
+                  </a:txBody>
+                  <a:tcPr anchor="ctr" marT="25400" marB="25400" marL="88900" marR="88900">
+                    <a:solidFill>
+                      <a:srgbClr val="FFFFFF"/>
+                    </a:solidFill>
+                  </a:tcPr>
+                </a:tc>
+              </a:tr>
+              <a:tr h="566928">
+                <a:tc>
+                  <a:txBody>
+                    <a:bodyPr/>
+                    <a:lstStyle/>
+                    <a:p>
+                      <a:pPr>
+                        <a:defRPr sz="1300">
+                          <a:solidFill>
+                            <a:srgbClr val="262626"/>
+                          </a:solidFill>
+                          <a:latin typeface="Calibri"/>
+                        </a:defRPr>
+                      </a:pPr>
+                      <a:r>
+                        <a:t>GET</a:t>
+                      </a:r>
+                    </a:p>
+                  </a:txBody>
+                  <a:tcPr anchor="ctr" marT="25400" marB="25400" marL="88900" marR="88900">
+                    <a:solidFill>
+                      <a:srgbClr val="ECE6FB"/>
+                    </a:solidFill>
+                  </a:tcPr>
+                </a:tc>
+                <a:tc>
+                  <a:txBody>
+                    <a:bodyPr/>
+                    <a:lstStyle/>
+                    <a:p>
+                      <a:pPr>
+                        <a:defRPr sz="1300">
+                          <a:solidFill>
+                            <a:srgbClr val="262626"/>
+                          </a:solidFill>
+                          <a:latin typeface="Calibri"/>
+                        </a:defRPr>
+                      </a:pPr>
+                      <a:r>
+                        <a:t>/api/v1/policies/{id}</a:t>
+                      </a:r>
+                    </a:p>
+                  </a:txBody>
+                  <a:tcPr anchor="ctr" marT="25400" marB="25400" marL="88900" marR="88900">
+                    <a:solidFill>
+                      <a:srgbClr val="ECE6FB"/>
+                    </a:solidFill>
+                  </a:tcPr>
+                </a:tc>
+                <a:tc>
+                  <a:txBody>
+                    <a:bodyPr/>
+                    <a:lstStyle/>
+                    <a:p>
+                      <a:pPr>
+                        <a:defRPr sz="1300">
+                          <a:solidFill>
+                            <a:srgbClr val="262626"/>
+                          </a:solidFill>
+                          <a:latin typeface="Calibri"/>
+                        </a:defRPr>
+                      </a:pPr>
+                      <a:r>
+                        <a:t>Fetch a single policy by UUID (404 if unknown)</a:t>
+                      </a:r>
+                    </a:p>
+                  </a:txBody>
+                  <a:tcPr anchor="ctr" marT="25400" marB="25400" marL="88900" marR="88900">
+                    <a:solidFill>
+                      <a:srgbClr val="ECE6FB"/>
+                    </a:solidFill>
+                  </a:tcPr>
+                </a:tc>
+              </a:tr>
+              <a:tr h="566928">
+                <a:tc>
+                  <a:txBody>
+                    <a:bodyPr/>
+                    <a:lstStyle/>
+                    <a:p>
+                      <a:pPr>
+                        <a:defRPr sz="1300">
+                          <a:solidFill>
+                            <a:srgbClr val="262626"/>
+                          </a:solidFill>
+                          <a:latin typeface="Calibri"/>
+                        </a:defRPr>
+                      </a:pPr>
+                      <a:r>
+                        <a:t>PATCH</a:t>
+                      </a:r>
+                    </a:p>
+                  </a:txBody>
+                  <a:tcPr anchor="ctr" marT="25400" marB="25400" marL="88900" marR="88900">
+                    <a:solidFill>
+                      <a:srgbClr val="FFFFFF"/>
+                    </a:solidFill>
+                  </a:tcPr>
+                </a:tc>
+                <a:tc>
+                  <a:txBody>
+                    <a:bodyPr/>
+                    <a:lstStyle/>
+                    <a:p>
+                      <a:pPr>
+                        <a:defRPr sz="1300">
+                          <a:solidFill>
+                            <a:srgbClr val="262626"/>
+                          </a:solidFill>
+                          <a:latin typeface="Calibri"/>
+                        </a:defRPr>
+                      </a:pPr>
+                      <a:r>
+                        <a:t>/api/v1/policies/flag</a:t>
+                      </a:r>
+                    </a:p>
+                  </a:txBody>
+                  <a:tcPr anchor="ctr" marT="25400" marB="25400" marL="88900" marR="88900">
+                    <a:solidFill>
+                      <a:srgbClr val="FFFFFF"/>
+                    </a:solidFill>
+                  </a:tcPr>
+                </a:tc>
+                <a:tc>
+                  <a:txBody>
+                    <a:bodyPr/>
+                    <a:lstStyle/>
+                    <a:p>
+                      <a:pPr>
+                        <a:defRPr sz="1300">
+                          <a:solidFill>
+                            <a:srgbClr val="262626"/>
+                          </a:solidFill>
+                          <a:latin typeface="Calibri"/>
+                        </a:defRPr>
+                      </a:pPr>
+                      <a:r>
+                        <a:t>Bulk-flag policies for review — body { policyIds: [uuid] }</a:t>
+                      </a:r>
+                    </a:p>
+                  </a:txBody>
+                  <a:tcPr anchor="ctr" marT="25400" marB="25400" marL="88900" marR="88900">
+                    <a:solidFill>
+                      <a:srgbClr val="FFFFFF"/>
+                    </a:solidFill>
+                  </a:tcPr>
+                </a:tc>
+              </a:tr>
+              <a:tr h="566928">
+                <a:tc>
+                  <a:txBody>
+                    <a:bodyPr/>
+                    <a:lstStyle/>
+                    <a:p>
+                      <a:pPr>
+                        <a:defRPr sz="1300">
+                          <a:solidFill>
+                            <a:srgbClr val="262626"/>
+                          </a:solidFill>
+                          <a:latin typeface="Calibri"/>
+                        </a:defRPr>
+                      </a:pPr>
+                      <a:r>
+                        <a:t>GET</a:t>
+                      </a:r>
+                    </a:p>
+                  </a:txBody>
+                  <a:tcPr anchor="ctr" marT="25400" marB="25400" marL="88900" marR="88900">
+                    <a:solidFill>
+                      <a:srgbClr val="ECE6FB"/>
+                    </a:solidFill>
+                  </a:tcPr>
+                </a:tc>
+                <a:tc>
+                  <a:txBody>
+                    <a:bodyPr/>
+                    <a:lstStyle/>
+                    <a:p>
+                      <a:pPr>
+                        <a:defRPr sz="1300">
+                          <a:solidFill>
+                            <a:srgbClr val="262626"/>
+                          </a:solidFill>
+                          <a:latin typeface="Calibri"/>
+                        </a:defRPr>
+                      </a:pPr>
+                      <a:r>
+                        <a:t>/api/v1/policies/summary</a:t>
+                      </a:r>
+                    </a:p>
+                  </a:txBody>
+                  <a:tcPr anchor="ctr" marT="25400" marB="25400" marL="88900" marR="88900">
+                    <a:solidFill>
+                      <a:srgbClr val="ECE6FB"/>
+                    </a:solidFill>
+                  </a:tcPr>
+                </a:tc>
+                <a:tc>
+                  <a:txBody>
+                    <a:bodyPr/>
+                    <a:lstStyle/>
+                    <a:p>
+                      <a:pPr>
+                        <a:defRPr sz="1300">
+                          <a:solidFill>
+                            <a:srgbClr val="262626"/>
+                          </a:solidFill>
+                          <a:latin typeface="Calibri"/>
+                        </a:defRPr>
+                      </a:pPr>
+                      <a:r>
+                        <a:t>Counts by status, premium by line of business, expiring-soon count</a:t>
+                      </a:r>
+                    </a:p>
+                  </a:txBody>
+                  <a:tcPr anchor="ctr" marT="25400" marB="25400" marL="88900" marR="88900">
+                    <a:solidFill>
+                      <a:srgbClr val="ECE6FB"/>
+                    </a:solidFill>
+                  </a:tcPr>
+                </a:tc>
+              </a:tr>
+            </a:tbl>
+          </a:graphicData>
+        </a:graphic>
+      </p:graphicFrame>
+      <p:sp>
+        <p:nvSpPr>
+          <p:cNvPr id="5" name="Rounded Rectangle 4"/>
+          <p:cNvSpPr/>
+          <p:nvPr/>
+        </p:nvSpPr>
+        <p:spPr>
+          <a:xfrm>
+            <a:off x="548640" y="4206240"/>
+            <a:ext cx="11109960" cy="1417320"/>
+          </a:xfrm>
+          <a:prstGeom prst="roundRect">
+            <a:avLst/>
+          </a:prstGeom>
+          <a:solidFill>
+            <a:srgbClr val="ECE6FB"/>
+          </a:solidFill>
+          <a:ln>
+            <a:noFill/>
+          </a:ln>
+          <a:effectLst/>
+        </p:spPr>
+        <p:style>
+          <a:lnRef idx="1">
+            <a:schemeClr val="accent1"/>
+          </a:lnRef>
+          <a:fillRef idx="3">
+            <a:schemeClr val="accent1"/>
+          </a:fillRef>
+          <a:effectRef idx="2">
+            <a:schemeClr val="accent1"/>
+          </a:effectRef>
+          <a:fontRef idx="minor">
+            <a:schemeClr val="lt1"/>
+          </a:fontRef>
+        </p:style>
+        <p:txBody>
+          <a:bodyPr rtlCol="0" anchor="t" wrap="square" lIns="127000" rIns="127000" tIns="101600" bIns="76200"/>
+          <a:lstStyle/>
+          <a:p>
+            <a:pPr algn="ctr">
+              <a:spcAft>
+                <a:spcPts val="400"/>
+              </a:spcAft>
+              <a:defRPr sz="1500" b="1">
+                <a:solidFill>
+                  <a:srgbClr val="5F1EBE"/>
+                </a:solidFill>
+                <a:latin typeface="Calibri Light"/>
+              </a:defRPr>
+            </a:pPr>
+            <a:r>
+              <a:t>Contract-first</a:t>
+            </a:r>
+          </a:p>
           <a:p>
             <a:pPr>
               <a:spcAft>
-                <a:spcPts val="500"/>
+                <a:spcPts val="300"/>
               </a:spcAft>
-              <a:defRPr sz="1700">
+              <a:defRPr sz="1200">
                 <a:solidFill>
                   <a:srgbClr val="262626"/>
                 </a:solidFill>
@@ -7052,15 +9097,15 @@
               </a:defRPr>
             </a:pPr>
             <a:r>
-              <a:t>• Base path: /api/v1/policies  —  contract-first openapi.yaml served via Swagger UI</a:t>
+              <a:t>•  openapi.yaml is the single source of truth, committed under src/main/resources/static</a:t>
             </a:r>
           </a:p>
           <a:p>
             <a:pPr>
               <a:spcAft>
-                <a:spcPts val="500"/>
+                <a:spcPts val="300"/>
               </a:spcAft>
-              <a:defRPr sz="1700">
+              <a:defRPr sz="1200">
                 <a:solidFill>
                   <a:srgbClr val="262626"/>
                 </a:solidFill>
@@ -7068,79 +9113,15 @@
               </a:defRPr>
             </a:pPr>
             <a:r>
-              <a:t>• Endpoints</a:t>
-            </a:r>
-          </a:p>
-          <a:p>
-            <a:pPr lvl="1">
-              <a:spcAft>
-                <a:spcPts val="500"/>
-              </a:spcAft>
-              <a:defRPr sz="1400">
-                <a:solidFill>
-                  <a:srgbClr val="262626"/>
-                </a:solidFill>
-                <a:latin typeface="Calibri"/>
-              </a:defRPr>
-            </a:pPr>
-            <a:r>
-              <a:t>– GET /api/v1/policies — list: filter, sort, search, paginate (Spring Page)</a:t>
-            </a:r>
-          </a:p>
-          <a:p>
-            <a:pPr lvl="1">
-              <a:spcAft>
-                <a:spcPts val="500"/>
-              </a:spcAft>
-              <a:defRPr sz="1400">
-                <a:solidFill>
-                  <a:srgbClr val="262626"/>
-                </a:solidFill>
-                <a:latin typeface="Calibri"/>
-              </a:defRPr>
-            </a:pPr>
-            <a:r>
-              <a:t>– GET /api/v1/policies/{id} — single policy by UUID (404 if unknown)</a:t>
-            </a:r>
-          </a:p>
-          <a:p>
-            <a:pPr lvl="1">
-              <a:spcAft>
-                <a:spcPts val="500"/>
-              </a:spcAft>
-              <a:defRPr sz="1400">
-                <a:solidFill>
-                  <a:srgbClr val="262626"/>
-                </a:solidFill>
-                <a:latin typeface="Calibri"/>
-              </a:defRPr>
-            </a:pPr>
-            <a:r>
-              <a:t>– PATCH /api/v1/policies/flag — bulk flag for review; body { policyIds: [uuid] }</a:t>
-            </a:r>
-          </a:p>
-          <a:p>
-            <a:pPr lvl="1">
-              <a:spcAft>
-                <a:spcPts val="500"/>
-              </a:spcAft>
-              <a:defRPr sz="1400">
-                <a:solidFill>
-                  <a:srgbClr val="262626"/>
-                </a:solidFill>
-                <a:latin typeface="Calibri"/>
-              </a:defRPr>
-            </a:pPr>
-            <a:r>
-              <a:t>– GET /api/v1/policies/summary — counts by status, premium by line of business, expiring-soon</a:t>
+              <a:t>•  SpringDoc serves it live via Swagger UI at /swagger-ui/index.html</a:t>
             </a:r>
           </a:p>
           <a:p>
             <a:pPr>
               <a:spcAft>
-                <a:spcPts val="500"/>
+                <a:spcPts val="300"/>
               </a:spcAft>
-              <a:defRPr sz="1700">
+              <a:defRPr sz="1200">
                 <a:solidFill>
                   <a:srgbClr val="262626"/>
                 </a:solidFill>
@@ -7148,102 +9129,21 @@
               </a:defRPr>
             </a:pPr>
             <a:r>
-              <a:t>• List query parameters</a:t>
-            </a:r>
-          </a:p>
-          <a:p>
-            <a:pPr lvl="1">
-              <a:spcAft>
-                <a:spcPts val="500"/>
-              </a:spcAft>
-              <a:defRPr sz="1400">
-                <a:solidFill>
-                  <a:srgbClr val="262626"/>
-                </a:solidFill>
-                <a:latin typeface="Calibri"/>
-              </a:defRPr>
-            </a:pPr>
-            <a:r>
-              <a:t>– status, region (8 APAC), lineOfBusiness (PROPERTY/CASUALTY/ACCIDENT_AND_HEALTH/MARINE)</a:t>
-            </a:r>
-          </a:p>
-          <a:p>
-            <a:pPr lvl="1">
-              <a:spcAft>
-                <a:spcPts val="500"/>
-              </a:spcAft>
-              <a:defRPr sz="1400">
-                <a:solidFill>
-                  <a:srgbClr val="262626"/>
-                </a:solidFill>
-                <a:latin typeface="Calibri"/>
-              </a:defRPr>
-            </a:pPr>
-            <a:r>
-              <a:t>– effectiveDateFrom / effectiveDateTo (yyyy-MM-dd); search (policyNumber + policyholderName + underwriter)</a:t>
-            </a:r>
-          </a:p>
-          <a:p>
-            <a:pPr lvl="1">
-              <a:spcAft>
-                <a:spcPts val="500"/>
-              </a:spcAft>
-              <a:defRPr sz="1400">
-                <a:solidFill>
-                  <a:srgbClr val="262626"/>
-                </a:solidFill>
-                <a:latin typeface="Calibri"/>
-              </a:defRPr>
-            </a:pPr>
-            <a:r>
-              <a:t>– page / size (default 0 / 10); sort (default effectiveDate,desc)</a:t>
-            </a:r>
-          </a:p>
-          <a:p>
-            <a:pPr>
-              <a:spcAft>
-                <a:spcPts val="500"/>
-              </a:spcAft>
-              <a:defRPr sz="1700">
-                <a:solidFill>
-                  <a:srgbClr val="262626"/>
-                </a:solidFill>
-                <a:latin typeface="Calibri"/>
-              </a:defRPr>
-            </a:pPr>
-            <a:r>
-              <a:t>• Errors: 404 unknown id | 400 validation/type-mismatch | 503 DB unavailable — structured, no stack traces</a:t>
+              <a:t>•  Responses format enums for display (e.g. ACCIDENT_AND_HEALTH → A&amp;H; ACTIVE → Active)</a:t>
             </a:r>
           </a:p>
         </p:txBody>
       </p:sp>
     </p:spTree>
-    <p:extLst>
-      <p:ext uri="{BB962C8B-B14F-4D97-AF65-F5344CB8AC3E}">
-        <p14:creationId xmlns:p14="http://schemas.microsoft.com/office/powerpoint/2010/main" val="1933645531"/>
-      </p:ext>
-    </p:extLst>
   </p:cSld>
   <p:clrMapOvr>
     <a:masterClrMapping/>
   </p:clrMapOvr>
-  <mc:AlternateContent xmlns:mc="http://schemas.openxmlformats.org/markup-compatibility/2006" xmlns:p14="http://schemas.microsoft.com/office/powerpoint/2010/main">
-    <mc:Choice Requires="p14">
-      <p:transition spd="med" p14:dur="700">
-        <p:fade/>
-      </p:transition>
-    </mc:Choice>
-    <mc:Fallback xmlns="">
-      <p:transition spd="med">
-        <p:fade/>
-      </p:transition>
-    </mc:Fallback>
-  </mc:AlternateContent>
 </p:sld>
 </file>
 
 <file path=ppt/slides/slide7.xml><?xml version="1.0" encoding="utf-8"?>
-<p:sld xmlns:a="http://schemas.openxmlformats.org/drawingml/2006/main" xmlns:r="http://schemas.openxmlformats.org/officeDocument/2006/relationships" xmlns:p="http://schemas.openxmlformats.org/presentationml/2006/main">
+<p:sld xmlns:a="http://schemas.openxmlformats.org/drawingml/2006/main" xmlns:p="http://schemas.openxmlformats.org/presentationml/2006/main" xmlns:r="http://schemas.openxmlformats.org/officeDocument/2006/relationships">
   <p:cSld>
     <p:spTree>
       <p:nvGrpSpPr>
@@ -7251,14 +9151,7 @@
         <p:cNvGrpSpPr/>
         <p:nvPr/>
       </p:nvGrpSpPr>
-      <p:grpSpPr>
-        <a:xfrm>
-          <a:off x="0" y="0"/>
-          <a:ext cx="0" cy="0"/>
-          <a:chOff x="0" y="0"/>
-          <a:chExt cx="0" cy="0"/>
-        </a:xfrm>
-      </p:grpSpPr>
+      <p:grpSpPr/>
       <p:sp>
         <p:nvSpPr>
           <p:cNvPr id="2" name="TextBox 1"/>
@@ -7267,8 +9160,8 @@
         </p:nvSpPr>
         <p:spPr>
           <a:xfrm>
-            <a:off x="548640" y="411480"/>
-            <a:ext cx="11064240" cy="822960"/>
+            <a:off x="502920" y="320040"/>
+            <a:ext cx="11155680" cy="731520"/>
           </a:xfrm>
           <a:prstGeom prst="rect">
             <a:avLst/>
@@ -7282,7 +9175,7 @@
           <a:lstStyle/>
           <a:p>
             <a:pPr>
-              <a:defRPr sz="2800" b="1">
+              <a:defRPr sz="2700" b="1">
                 <a:solidFill>
                   <a:srgbClr val="5F1EBE"/>
                 </a:solidFill>
@@ -7290,21 +9183,822 @@
               </a:defRPr>
             </a:pPr>
             <a:r>
-              <a:t>4. AI Working Journal</a:t>
-            </a:r>
-          </a:p>
-        </p:txBody>
-      </p:sp>
-      <p:sp>
-        <p:nvSpPr>
-          <p:cNvPr id="3" name="TextBox 2"/>
+              <a:t>3. API Specification — Query Parameters &amp; Errors</a:t>
+            </a:r>
+          </a:p>
+        </p:txBody>
+      </p:sp>
+      <p:sp>
+        <p:nvSpPr>
+          <p:cNvPr id="3" name="Rectangle 2"/>
+          <p:cNvSpPr/>
+          <p:nvPr/>
+        </p:nvSpPr>
+        <p:spPr>
+          <a:xfrm>
+            <a:off x="530352" y="1024128"/>
+            <a:ext cx="2194560" cy="38100"/>
+          </a:xfrm>
+          <a:prstGeom prst="rect">
+            <a:avLst/>
+          </a:prstGeom>
+          <a:solidFill>
+            <a:srgbClr val="5F1EBE"/>
+          </a:solidFill>
+          <a:ln>
+            <a:noFill/>
+          </a:ln>
+          <a:effectLst/>
+        </p:spPr>
+        <p:style>
+          <a:lnRef idx="1">
+            <a:schemeClr val="accent1"/>
+          </a:lnRef>
+          <a:fillRef idx="3">
+            <a:schemeClr val="accent1"/>
+          </a:fillRef>
+          <a:effectRef idx="2">
+            <a:schemeClr val="accent1"/>
+          </a:effectRef>
+          <a:fontRef idx="minor">
+            <a:schemeClr val="lt1"/>
+          </a:fontRef>
+        </p:style>
+        <p:txBody>
+          <a:bodyPr rtlCol="0" anchor="ctr"/>
+          <a:lstStyle/>
+          <a:p>
+            <a:pPr algn="ctr"/>
+          </a:p>
+        </p:txBody>
+      </p:sp>
+      <p:graphicFrame>
+        <p:nvGraphicFramePr>
+          <p:cNvPr id="4" name="Table 3"/>
+          <p:cNvGraphicFramePr>
+            <a:graphicFrameLocks noGrp="1"/>
+          </p:cNvGraphicFramePr>
+          <p:nvPr/>
+        </p:nvGraphicFramePr>
+        <p:xfrm>
+          <a:off x="548640" y="1417320"/>
+          <a:ext cx="6903720" cy="3364992"/>
+        </p:xfrm>
+        <a:graphic>
+          <a:graphicData uri="http://schemas.openxmlformats.org/drawingml/2006/table">
+            <a:tbl>
+              <a:tblPr firstRow="1" bandRow="1">
+                <a:tableStyleId>{5C22544A-7EE6-4342-B048-85BDC9FD1C3A}</a:tableStyleId>
+              </a:tblPr>
+              <a:tblGrid>
+                <a:gridCol w="2148840"/>
+                <a:gridCol w="4754880"/>
+              </a:tblGrid>
+              <a:tr h="420624">
+                <a:tc>
+                  <a:txBody>
+                    <a:bodyPr/>
+                    <a:lstStyle/>
+                    <a:p>
+                      <a:pPr>
+                        <a:defRPr sz="1150" b="1">
+                          <a:solidFill>
+                            <a:srgbClr val="FFFFFF"/>
+                          </a:solidFill>
+                          <a:latin typeface="Calibri"/>
+                        </a:defRPr>
+                      </a:pPr>
+                      <a:r>
+                        <a:t>Parameter</a:t>
+                      </a:r>
+                    </a:p>
+                  </a:txBody>
+                  <a:tcPr anchor="ctr" marT="25400" marB="25400" marL="88900" marR="88900">
+                    <a:solidFill>
+                      <a:srgbClr val="5F1EBE"/>
+                    </a:solidFill>
+                  </a:tcPr>
+                </a:tc>
+                <a:tc>
+                  <a:txBody>
+                    <a:bodyPr/>
+                    <a:lstStyle/>
+                    <a:p>
+                      <a:pPr>
+                        <a:defRPr sz="1150" b="1">
+                          <a:solidFill>
+                            <a:srgbClr val="FFFFFF"/>
+                          </a:solidFill>
+                          <a:latin typeface="Calibri"/>
+                        </a:defRPr>
+                      </a:pPr>
+                      <a:r>
+                        <a:t>Allowed / format</a:t>
+                      </a:r>
+                    </a:p>
+                  </a:txBody>
+                  <a:tcPr anchor="ctr" marT="25400" marB="25400" marL="88900" marR="88900">
+                    <a:solidFill>
+                      <a:srgbClr val="5F1EBE"/>
+                    </a:solidFill>
+                  </a:tcPr>
+                </a:tc>
+              </a:tr>
+              <a:tr h="420624">
+                <a:tc>
+                  <a:txBody>
+                    <a:bodyPr/>
+                    <a:lstStyle/>
+                    <a:p>
+                      <a:pPr>
+                        <a:defRPr sz="1150">
+                          <a:solidFill>
+                            <a:srgbClr val="262626"/>
+                          </a:solidFill>
+                          <a:latin typeface="Calibri"/>
+                        </a:defRPr>
+                      </a:pPr>
+                      <a:r>
+                        <a:t>status</a:t>
+                      </a:r>
+                    </a:p>
+                  </a:txBody>
+                  <a:tcPr anchor="ctr" marT="25400" marB="25400" marL="88900" marR="88900">
+                    <a:solidFill>
+                      <a:srgbClr val="FFFFFF"/>
+                    </a:solidFill>
+                  </a:tcPr>
+                </a:tc>
+                <a:tc>
+                  <a:txBody>
+                    <a:bodyPr/>
+                    <a:lstStyle/>
+                    <a:p>
+                      <a:pPr>
+                        <a:defRPr sz="1150">
+                          <a:solidFill>
+                            <a:srgbClr val="262626"/>
+                          </a:solidFill>
+                          <a:latin typeface="Calibri"/>
+                        </a:defRPr>
+                      </a:pPr>
+                      <a:r>
+                        <a:t>ACTIVE · EXPIRED · PENDING · CANCELLED</a:t>
+                      </a:r>
+                    </a:p>
+                  </a:txBody>
+                  <a:tcPr anchor="ctr" marT="25400" marB="25400" marL="88900" marR="88900">
+                    <a:solidFill>
+                      <a:srgbClr val="FFFFFF"/>
+                    </a:solidFill>
+                  </a:tcPr>
+                </a:tc>
+              </a:tr>
+              <a:tr h="420624">
+                <a:tc>
+                  <a:txBody>
+                    <a:bodyPr/>
+                    <a:lstStyle/>
+                    <a:p>
+                      <a:pPr>
+                        <a:defRPr sz="1150">
+                          <a:solidFill>
+                            <a:srgbClr val="262626"/>
+                          </a:solidFill>
+                          <a:latin typeface="Calibri"/>
+                        </a:defRPr>
+                      </a:pPr>
+                      <a:r>
+                        <a:t>region</a:t>
+                      </a:r>
+                    </a:p>
+                  </a:txBody>
+                  <a:tcPr anchor="ctr" marT="25400" marB="25400" marL="88900" marR="88900">
+                    <a:solidFill>
+                      <a:srgbClr val="ECE6FB"/>
+                    </a:solidFill>
+                  </a:tcPr>
+                </a:tc>
+                <a:tc>
+                  <a:txBody>
+                    <a:bodyPr/>
+                    <a:lstStyle/>
+                    <a:p>
+                      <a:pPr>
+                        <a:defRPr sz="1150">
+                          <a:solidFill>
+                            <a:srgbClr val="262626"/>
+                          </a:solidFill>
+                          <a:latin typeface="Calibri"/>
+                        </a:defRPr>
+                      </a:pPr>
+                      <a:r>
+                        <a:t>8 APAC regions</a:t>
+                      </a:r>
+                    </a:p>
+                  </a:txBody>
+                  <a:tcPr anchor="ctr" marT="25400" marB="25400" marL="88900" marR="88900">
+                    <a:solidFill>
+                      <a:srgbClr val="ECE6FB"/>
+                    </a:solidFill>
+                  </a:tcPr>
+                </a:tc>
+              </a:tr>
+              <a:tr h="420624">
+                <a:tc>
+                  <a:txBody>
+                    <a:bodyPr/>
+                    <a:lstStyle/>
+                    <a:p>
+                      <a:pPr>
+                        <a:defRPr sz="1150">
+                          <a:solidFill>
+                            <a:srgbClr val="262626"/>
+                          </a:solidFill>
+                          <a:latin typeface="Calibri"/>
+                        </a:defRPr>
+                      </a:pPr>
+                      <a:r>
+                        <a:t>lineOfBusiness</a:t>
+                      </a:r>
+                    </a:p>
+                  </a:txBody>
+                  <a:tcPr anchor="ctr" marT="25400" marB="25400" marL="88900" marR="88900">
+                    <a:solidFill>
+                      <a:srgbClr val="FFFFFF"/>
+                    </a:solidFill>
+                  </a:tcPr>
+                </a:tc>
+                <a:tc>
+                  <a:txBody>
+                    <a:bodyPr/>
+                    <a:lstStyle/>
+                    <a:p>
+                      <a:pPr>
+                        <a:defRPr sz="1150">
+                          <a:solidFill>
+                            <a:srgbClr val="262626"/>
+                          </a:solidFill>
+                          <a:latin typeface="Calibri"/>
+                        </a:defRPr>
+                      </a:pPr>
+                      <a:r>
+                        <a:t>PROPERTY · CASUALTY · ACCIDENT_AND_HEALTH · MARINE</a:t>
+                      </a:r>
+                    </a:p>
+                  </a:txBody>
+                  <a:tcPr anchor="ctr" marT="25400" marB="25400" marL="88900" marR="88900">
+                    <a:solidFill>
+                      <a:srgbClr val="FFFFFF"/>
+                    </a:solidFill>
+                  </a:tcPr>
+                </a:tc>
+              </a:tr>
+              <a:tr h="420624">
+                <a:tc>
+                  <a:txBody>
+                    <a:bodyPr/>
+                    <a:lstStyle/>
+                    <a:p>
+                      <a:pPr>
+                        <a:defRPr sz="1150">
+                          <a:solidFill>
+                            <a:srgbClr val="262626"/>
+                          </a:solidFill>
+                          <a:latin typeface="Calibri"/>
+                        </a:defRPr>
+                      </a:pPr>
+                      <a:r>
+                        <a:t>effectiveDateFrom / To</a:t>
+                      </a:r>
+                    </a:p>
+                  </a:txBody>
+                  <a:tcPr anchor="ctr" marT="25400" marB="25400" marL="88900" marR="88900">
+                    <a:solidFill>
+                      <a:srgbClr val="ECE6FB"/>
+                    </a:solidFill>
+                  </a:tcPr>
+                </a:tc>
+                <a:tc>
+                  <a:txBody>
+                    <a:bodyPr/>
+                    <a:lstStyle/>
+                    <a:p>
+                      <a:pPr>
+                        <a:defRPr sz="1150">
+                          <a:solidFill>
+                            <a:srgbClr val="262626"/>
+                          </a:solidFill>
+                          <a:latin typeface="Calibri"/>
+                        </a:defRPr>
+                      </a:pPr>
+                      <a:r>
+                        <a:t>yyyy-MM-dd (range on effective date)</a:t>
+                      </a:r>
+                    </a:p>
+                  </a:txBody>
+                  <a:tcPr anchor="ctr" marT="25400" marB="25400" marL="88900" marR="88900">
+                    <a:solidFill>
+                      <a:srgbClr val="ECE6FB"/>
+                    </a:solidFill>
+                  </a:tcPr>
+                </a:tc>
+              </a:tr>
+              <a:tr h="420624">
+                <a:tc>
+                  <a:txBody>
+                    <a:bodyPr/>
+                    <a:lstStyle/>
+                    <a:p>
+                      <a:pPr>
+                        <a:defRPr sz="1150">
+                          <a:solidFill>
+                            <a:srgbClr val="262626"/>
+                          </a:solidFill>
+                          <a:latin typeface="Calibri"/>
+                        </a:defRPr>
+                      </a:pPr>
+                      <a:r>
+                        <a:t>search</a:t>
+                      </a:r>
+                    </a:p>
+                  </a:txBody>
+                  <a:tcPr anchor="ctr" marT="25400" marB="25400" marL="88900" marR="88900">
+                    <a:solidFill>
+                      <a:srgbClr val="FFFFFF"/>
+                    </a:solidFill>
+                  </a:tcPr>
+                </a:tc>
+                <a:tc>
+                  <a:txBody>
+                    <a:bodyPr/>
+                    <a:lstStyle/>
+                    <a:p>
+                      <a:pPr>
+                        <a:defRPr sz="1150">
+                          <a:solidFill>
+                            <a:srgbClr val="262626"/>
+                          </a:solidFill>
+                          <a:latin typeface="Calibri"/>
+                        </a:defRPr>
+                      </a:pPr>
+                      <a:r>
+                        <a:t>policyNumber + policyholderName + underwriter</a:t>
+                      </a:r>
+                    </a:p>
+                  </a:txBody>
+                  <a:tcPr anchor="ctr" marT="25400" marB="25400" marL="88900" marR="88900">
+                    <a:solidFill>
+                      <a:srgbClr val="FFFFFF"/>
+                    </a:solidFill>
+                  </a:tcPr>
+                </a:tc>
+              </a:tr>
+              <a:tr h="420624">
+                <a:tc>
+                  <a:txBody>
+                    <a:bodyPr/>
+                    <a:lstStyle/>
+                    <a:p>
+                      <a:pPr>
+                        <a:defRPr sz="1150">
+                          <a:solidFill>
+                            <a:srgbClr val="262626"/>
+                          </a:solidFill>
+                          <a:latin typeface="Calibri"/>
+                        </a:defRPr>
+                      </a:pPr>
+                      <a:r>
+                        <a:t>page / size</a:t>
+                      </a:r>
+                    </a:p>
+                  </a:txBody>
+                  <a:tcPr anchor="ctr" marT="25400" marB="25400" marL="88900" marR="88900">
+                    <a:solidFill>
+                      <a:srgbClr val="ECE6FB"/>
+                    </a:solidFill>
+                  </a:tcPr>
+                </a:tc>
+                <a:tc>
+                  <a:txBody>
+                    <a:bodyPr/>
+                    <a:lstStyle/>
+                    <a:p>
+                      <a:pPr>
+                        <a:defRPr sz="1150">
+                          <a:solidFill>
+                            <a:srgbClr val="262626"/>
+                          </a:solidFill>
+                          <a:latin typeface="Calibri"/>
+                        </a:defRPr>
+                      </a:pPr>
+                      <a:r>
+                        <a:t>default 0 / 10</a:t>
+                      </a:r>
+                    </a:p>
+                  </a:txBody>
+                  <a:tcPr anchor="ctr" marT="25400" marB="25400" marL="88900" marR="88900">
+                    <a:solidFill>
+                      <a:srgbClr val="ECE6FB"/>
+                    </a:solidFill>
+                  </a:tcPr>
+                </a:tc>
+              </a:tr>
+              <a:tr h="420624">
+                <a:tc>
+                  <a:txBody>
+                    <a:bodyPr/>
+                    <a:lstStyle/>
+                    <a:p>
+                      <a:pPr>
+                        <a:defRPr sz="1150">
+                          <a:solidFill>
+                            <a:srgbClr val="262626"/>
+                          </a:solidFill>
+                          <a:latin typeface="Calibri"/>
+                        </a:defRPr>
+                      </a:pPr>
+                      <a:r>
+                        <a:t>sort</a:t>
+                      </a:r>
+                    </a:p>
+                  </a:txBody>
+                  <a:tcPr anchor="ctr" marT="25400" marB="25400" marL="88900" marR="88900">
+                    <a:solidFill>
+                      <a:srgbClr val="FFFFFF"/>
+                    </a:solidFill>
+                  </a:tcPr>
+                </a:tc>
+                <a:tc>
+                  <a:txBody>
+                    <a:bodyPr/>
+                    <a:lstStyle/>
+                    <a:p>
+                      <a:pPr>
+                        <a:defRPr sz="1150">
+                          <a:solidFill>
+                            <a:srgbClr val="262626"/>
+                          </a:solidFill>
+                          <a:latin typeface="Calibri"/>
+                        </a:defRPr>
+                      </a:pPr>
+                      <a:r>
+                        <a:t>default effectiveDate,desc</a:t>
+                      </a:r>
+                    </a:p>
+                  </a:txBody>
+                  <a:tcPr anchor="ctr" marT="25400" marB="25400" marL="88900" marR="88900">
+                    <a:solidFill>
+                      <a:srgbClr val="FFFFFF"/>
+                    </a:solidFill>
+                  </a:tcPr>
+                </a:tc>
+              </a:tr>
+            </a:tbl>
+          </a:graphicData>
+        </a:graphic>
+      </p:graphicFrame>
+      <p:graphicFrame>
+        <p:nvGraphicFramePr>
+          <p:cNvPr id="5" name="Table 4"/>
+          <p:cNvGraphicFramePr>
+            <a:graphicFrameLocks noGrp="1"/>
+          </p:cNvGraphicFramePr>
+          <p:nvPr/>
+        </p:nvGraphicFramePr>
+        <p:xfrm>
+          <a:off x="7726679" y="1417320"/>
+          <a:ext cx="3931920" cy="2011680"/>
+        </p:xfrm>
+        <a:graphic>
+          <a:graphicData uri="http://schemas.openxmlformats.org/drawingml/2006/table">
+            <a:tbl>
+              <a:tblPr firstRow="1" bandRow="1">
+                <a:tableStyleId>{5C22544A-7EE6-4342-B048-85BDC9FD1C3A}</a:tableStyleId>
+              </a:tblPr>
+              <a:tblGrid>
+                <a:gridCol w="1005840"/>
+                <a:gridCol w="2926080"/>
+              </a:tblGrid>
+              <a:tr h="502920">
+                <a:tc>
+                  <a:txBody>
+                    <a:bodyPr/>
+                    <a:lstStyle/>
+                    <a:p>
+                      <a:pPr>
+                        <a:defRPr sz="1200" b="1">
+                          <a:solidFill>
+                            <a:srgbClr val="FFFFFF"/>
+                          </a:solidFill>
+                          <a:latin typeface="Calibri"/>
+                        </a:defRPr>
+                      </a:pPr>
+                      <a:r>
+                        <a:t>HTTP</a:t>
+                      </a:r>
+                    </a:p>
+                  </a:txBody>
+                  <a:tcPr anchor="ctr" marT="25400" marB="25400" marL="88900" marR="88900">
+                    <a:solidFill>
+                      <a:srgbClr val="5F1EBE"/>
+                    </a:solidFill>
+                  </a:tcPr>
+                </a:tc>
+                <a:tc>
+                  <a:txBody>
+                    <a:bodyPr/>
+                    <a:lstStyle/>
+                    <a:p>
+                      <a:pPr>
+                        <a:defRPr sz="1200" b="1">
+                          <a:solidFill>
+                            <a:srgbClr val="FFFFFF"/>
+                          </a:solidFill>
+                          <a:latin typeface="Calibri"/>
+                        </a:defRPr>
+                      </a:pPr>
+                      <a:r>
+                        <a:t>When</a:t>
+                      </a:r>
+                    </a:p>
+                  </a:txBody>
+                  <a:tcPr anchor="ctr" marT="25400" marB="25400" marL="88900" marR="88900">
+                    <a:solidFill>
+                      <a:srgbClr val="5F1EBE"/>
+                    </a:solidFill>
+                  </a:tcPr>
+                </a:tc>
+              </a:tr>
+              <a:tr h="502920">
+                <a:tc>
+                  <a:txBody>
+                    <a:bodyPr/>
+                    <a:lstStyle/>
+                    <a:p>
+                      <a:pPr>
+                        <a:defRPr sz="1200">
+                          <a:solidFill>
+                            <a:srgbClr val="262626"/>
+                          </a:solidFill>
+                          <a:latin typeface="Calibri"/>
+                        </a:defRPr>
+                      </a:pPr>
+                      <a:r>
+                        <a:t>404</a:t>
+                      </a:r>
+                    </a:p>
+                  </a:txBody>
+                  <a:tcPr anchor="ctr" marT="25400" marB="25400" marL="88900" marR="88900">
+                    <a:solidFill>
+                      <a:srgbClr val="FFFFFF"/>
+                    </a:solidFill>
+                  </a:tcPr>
+                </a:tc>
+                <a:tc>
+                  <a:txBody>
+                    <a:bodyPr/>
+                    <a:lstStyle/>
+                    <a:p>
+                      <a:pPr>
+                        <a:defRPr sz="1200">
+                          <a:solidFill>
+                            <a:srgbClr val="262626"/>
+                          </a:solidFill>
+                          <a:latin typeface="Calibri"/>
+                        </a:defRPr>
+                      </a:pPr>
+                      <a:r>
+                        <a:t>unknown policy id</a:t>
+                      </a:r>
+                    </a:p>
+                  </a:txBody>
+                  <a:tcPr anchor="ctr" marT="25400" marB="25400" marL="88900" marR="88900">
+                    <a:solidFill>
+                      <a:srgbClr val="FFFFFF"/>
+                    </a:solidFill>
+                  </a:tcPr>
+                </a:tc>
+              </a:tr>
+              <a:tr h="502920">
+                <a:tc>
+                  <a:txBody>
+                    <a:bodyPr/>
+                    <a:lstStyle/>
+                    <a:p>
+                      <a:pPr>
+                        <a:defRPr sz="1200">
+                          <a:solidFill>
+                            <a:srgbClr val="262626"/>
+                          </a:solidFill>
+                          <a:latin typeface="Calibri"/>
+                        </a:defRPr>
+                      </a:pPr>
+                      <a:r>
+                        <a:t>400</a:t>
+                      </a:r>
+                    </a:p>
+                  </a:txBody>
+                  <a:tcPr anchor="ctr" marT="25400" marB="25400" marL="88900" marR="88900">
+                    <a:solidFill>
+                      <a:srgbClr val="ECE6FB"/>
+                    </a:solidFill>
+                  </a:tcPr>
+                </a:tc>
+                <a:tc>
+                  <a:txBody>
+                    <a:bodyPr/>
+                    <a:lstStyle/>
+                    <a:p>
+                      <a:pPr>
+                        <a:defRPr sz="1200">
+                          <a:solidFill>
+                            <a:srgbClr val="262626"/>
+                          </a:solidFill>
+                          <a:latin typeface="Calibri"/>
+                        </a:defRPr>
+                      </a:pPr>
+                      <a:r>
+                        <a:t>validation / type mismatch</a:t>
+                      </a:r>
+                    </a:p>
+                  </a:txBody>
+                  <a:tcPr anchor="ctr" marT="25400" marB="25400" marL="88900" marR="88900">
+                    <a:solidFill>
+                      <a:srgbClr val="ECE6FB"/>
+                    </a:solidFill>
+                  </a:tcPr>
+                </a:tc>
+              </a:tr>
+              <a:tr h="502920">
+                <a:tc>
+                  <a:txBody>
+                    <a:bodyPr/>
+                    <a:lstStyle/>
+                    <a:p>
+                      <a:pPr>
+                        <a:defRPr sz="1200">
+                          <a:solidFill>
+                            <a:srgbClr val="262626"/>
+                          </a:solidFill>
+                          <a:latin typeface="Calibri"/>
+                        </a:defRPr>
+                      </a:pPr>
+                      <a:r>
+                        <a:t>503</a:t>
+                      </a:r>
+                    </a:p>
+                  </a:txBody>
+                  <a:tcPr anchor="ctr" marT="25400" marB="25400" marL="88900" marR="88900">
+                    <a:solidFill>
+                      <a:srgbClr val="FFFFFF"/>
+                    </a:solidFill>
+                  </a:tcPr>
+                </a:tc>
+                <a:tc>
+                  <a:txBody>
+                    <a:bodyPr/>
+                    <a:lstStyle/>
+                    <a:p>
+                      <a:pPr>
+                        <a:defRPr sz="1200">
+                          <a:solidFill>
+                            <a:srgbClr val="262626"/>
+                          </a:solidFill>
+                          <a:latin typeface="Calibri"/>
+                        </a:defRPr>
+                      </a:pPr>
+                      <a:r>
+                        <a:t>database unavailable</a:t>
+                      </a:r>
+                    </a:p>
+                  </a:txBody>
+                  <a:tcPr anchor="ctr" marT="25400" marB="25400" marL="88900" marR="88900">
+                    <a:solidFill>
+                      <a:srgbClr val="FFFFFF"/>
+                    </a:solidFill>
+                  </a:tcPr>
+                </a:tc>
+              </a:tr>
+            </a:tbl>
+          </a:graphicData>
+        </a:graphic>
+      </p:graphicFrame>
+      <p:sp>
+        <p:nvSpPr>
+          <p:cNvPr id="6" name="Rounded Rectangle 5"/>
+          <p:cNvSpPr/>
+          <p:nvPr/>
+        </p:nvSpPr>
+        <p:spPr>
+          <a:xfrm>
+            <a:off x="7726679" y="3703320"/>
+            <a:ext cx="3931920" cy="1920240"/>
+          </a:xfrm>
+          <a:prstGeom prst="roundRect">
+            <a:avLst/>
+          </a:prstGeom>
+          <a:solidFill>
+            <a:srgbClr val="ECE6FB"/>
+          </a:solidFill>
+          <a:ln>
+            <a:noFill/>
+          </a:ln>
+          <a:effectLst/>
+        </p:spPr>
+        <p:style>
+          <a:lnRef idx="1">
+            <a:schemeClr val="accent1"/>
+          </a:lnRef>
+          <a:fillRef idx="3">
+            <a:schemeClr val="accent1"/>
+          </a:fillRef>
+          <a:effectRef idx="2">
+            <a:schemeClr val="accent1"/>
+          </a:effectRef>
+          <a:fontRef idx="minor">
+            <a:schemeClr val="lt1"/>
+          </a:fontRef>
+        </p:style>
+        <p:txBody>
+          <a:bodyPr rtlCol="0" anchor="t" wrap="square" lIns="127000" rIns="127000" tIns="101600" bIns="76200"/>
+          <a:lstStyle/>
+          <a:p>
+            <a:pPr algn="ctr">
+              <a:spcAft>
+                <a:spcPts val="400"/>
+              </a:spcAft>
+              <a:defRPr sz="1500" b="1">
+                <a:solidFill>
+                  <a:srgbClr val="5F1EBE"/>
+                </a:solidFill>
+                <a:latin typeface="Calibri Light"/>
+              </a:defRPr>
+            </a:pPr>
+            <a:r>
+              <a:t>Error contract</a:t>
+            </a:r>
+          </a:p>
+          <a:p>
+            <a:pPr>
+              <a:spcAft>
+                <a:spcPts val="300"/>
+              </a:spcAft>
+              <a:defRPr sz="1200">
+                <a:solidFill>
+                  <a:srgbClr val="262626"/>
+                </a:solidFill>
+                <a:latin typeface="Calibri"/>
+              </a:defRPr>
+            </a:pPr>
+            <a:r>
+              <a:t>•  Structured body: timestamp, status, message</a:t>
+            </a:r>
+          </a:p>
+          <a:p>
+            <a:pPr>
+              <a:spcAft>
+                <a:spcPts val="300"/>
+              </a:spcAft>
+              <a:defRPr sz="1200">
+                <a:solidFill>
+                  <a:srgbClr val="262626"/>
+                </a:solidFill>
+                <a:latin typeface="Calibri"/>
+              </a:defRPr>
+            </a:pPr>
+            <a:r>
+              <a:t>•  Stack traces &amp; internal class names never exposed</a:t>
+            </a:r>
+          </a:p>
+          <a:p>
+            <a:pPr>
+              <a:spcAft>
+                <a:spcPts val="300"/>
+              </a:spcAft>
+              <a:defRPr sz="1200">
+                <a:solidFill>
+                  <a:srgbClr val="262626"/>
+                </a:solidFill>
+                <a:latin typeface="Calibri"/>
+              </a:defRPr>
+            </a:pPr>
+            <a:r>
+              <a:t>•  search value is never logged (PII safe)</a:t>
+            </a:r>
+          </a:p>
+        </p:txBody>
+      </p:sp>
+      <p:sp>
+        <p:nvSpPr>
+          <p:cNvPr id="7" name="TextBox 6"/>
           <p:cNvSpPr txBox="1"/>
           <p:nvPr/>
         </p:nvSpPr>
         <p:spPr>
           <a:xfrm>
-            <a:off x="640080" y="1371600"/>
-            <a:ext cx="10972800" cy="5120640"/>
+            <a:off x="548640" y="5989320"/>
+            <a:ext cx="11064240" cy="548640"/>
           </a:xfrm>
           <a:prstGeom prst="rect">
             <a:avLst/>
@@ -7312,162 +10006,26 @@
           <a:noFill/>
         </p:spPr>
         <p:txBody>
-          <a:bodyPr wrap="square">
+          <a:bodyPr wrap="none">
             <a:spAutoFit/>
           </a:bodyPr>
           <a:lstStyle/>
           <a:p>
             <a:pPr>
-              <a:spcAft>
-                <a:spcPts val="500"/>
-              </a:spcAft>
-              <a:defRPr sz="1700">
-                <a:solidFill>
-                  <a:srgbClr val="262626"/>
+              <a:defRPr sz="1200" i="1">
+                <a:solidFill>
+                  <a:srgbClr val="595959"/>
                 </a:solidFill>
                 <a:latin typeface="Calibri"/>
               </a:defRPr>
             </a:pPr>
             <a:r>
-              <a:t>• Accepted: feature / schema / Docker / branching / k6 requests implemented as specified</a:t>
-            </a:r>
-          </a:p>
-          <a:p>
-            <a:pPr>
-              <a:spcAft>
-                <a:spcPts val="500"/>
-              </a:spcAft>
-              <a:defRPr sz="1700">
-                <a:solidFill>
-                  <a:srgbClr val="262626"/>
-                </a:solidFill>
-                <a:latin typeface="Calibri"/>
-              </a:defRPr>
-            </a:pPr>
-            <a:r>
-              <a:t>• Challenged / pushed back</a:t>
-            </a:r>
-          </a:p>
-          <a:p>
-            <a:pPr lvl="1">
-              <a:spcAft>
-                <a:spcPts val="500"/>
-              </a:spcAft>
-              <a:defRPr sz="1400">
-                <a:solidFill>
-                  <a:srgbClr val="262626"/>
-                </a:solidFill>
-                <a:latin typeface="Calibri"/>
-              </a:defRPr>
-            </a:pPr>
-            <a:r>
-              <a:t>– flagged 3 layering violations (service→api, infra→service, infra→domain leak) and fixed them</a:t>
-            </a:r>
-          </a:p>
-          <a:p>
-            <a:pPr lvl="1">
-              <a:spcAft>
-                <a:spcPts val="500"/>
-              </a:spcAft>
-              <a:defRPr sz="1400">
-                <a:solidFill>
-                  <a:srgbClr val="262626"/>
-                </a:solidFill>
-                <a:latin typeface="Calibri"/>
-              </a:defRPr>
-            </a:pPr>
-            <a:r>
-              <a:t>– caught duplicated toTitleCase + presentation logic in the service</a:t>
-            </a:r>
-          </a:p>
-          <a:p>
-            <a:pPr lvl="1">
-              <a:spcAft>
-                <a:spcPts val="500"/>
-              </a:spcAft>
-              <a:defRPr sz="1400">
-                <a:solidFill>
-                  <a:srgbClr val="262626"/>
-                </a:solidFill>
-                <a:latin typeface="Calibri"/>
-              </a:defRPr>
-            </a:pPr>
-            <a:r>
-              <a:t>– flagged a stale duplicate load test; advised against auto-merging breaking Dependabot PRs</a:t>
-            </a:r>
-          </a:p>
-          <a:p>
-            <a:pPr lvl="1">
-              <a:spcAft>
-                <a:spcPts val="500"/>
-              </a:spcAft>
-              <a:defRPr sz="1400">
-                <a:solidFill>
-                  <a:srgbClr val="262626"/>
-                </a:solidFill>
-                <a:latin typeface="Calibri"/>
-              </a:defRPr>
-            </a:pPr>
-            <a:r>
-              <a:t>– flagged PII risk — free-text search value was being logged — and removed it</a:t>
-            </a:r>
-          </a:p>
-          <a:p>
-            <a:pPr>
-              <a:spcAft>
-                <a:spcPts val="500"/>
-              </a:spcAft>
-              <a:defRPr sz="1700">
-                <a:solidFill>
-                  <a:srgbClr val="262626"/>
-                </a:solidFill>
-                <a:latin typeface="Calibri"/>
-              </a:defRPr>
-            </a:pPr>
-            <a:r>
-              <a:t>• Overrode: openapi → static/ for Swagger; line-gate then instruction-gate coverage; Dockerfile.local for proxy</a:t>
-            </a:r>
-          </a:p>
-          <a:p>
-            <a:pPr>
-              <a:spcAft>
-                <a:spcPts val="500"/>
-              </a:spcAft>
-              <a:defRPr sz="1700">
-                <a:solidFill>
-                  <a:srgbClr val="262626"/>
-                </a:solidFill>
-                <a:latin typeface="Calibri"/>
-              </a:defRPr>
-            </a:pPr>
-            <a:r>
-              <a:t>• Corrected: retracted the ‘JPA enums on domain POJO’ caveat after validating the domain is framework-free</a:t>
-            </a:r>
-          </a:p>
-          <a:p>
-            <a:pPr>
-              <a:spcAft>
-                <a:spcPts val="500"/>
-              </a:spcAft>
-              <a:defRPr sz="1700">
-                <a:solidFill>
-                  <a:srgbClr val="262626"/>
-                </a:solidFill>
-                <a:latin typeface="Calibri"/>
-              </a:defRPr>
-            </a:pPr>
-            <a:r>
-              <a:t>• Full log committed at docs/AI-WORKING-JOURNAL.md</a:t>
+              <a:t>All filters are optional and composable; unmatched filters simply return an empty page.</a:t>
             </a:r>
           </a:p>
         </p:txBody>
       </p:sp>
     </p:spTree>
-    <p:extLst>
-      <p:ext uri="{BB962C8B-B14F-4D97-AF65-F5344CB8AC3E}">
-        <p14:creationId xmlns:p14="http://schemas.microsoft.com/office/powerpoint/2010/main" val="1290552111"/>
-      </p:ext>
-    </p:extLst>
   </p:cSld>
   <p:clrMapOvr>
     <a:masterClrMapping/>
@@ -7476,7 +10034,7 @@
 </file>
 
 <file path=ppt/slides/slide8.xml><?xml version="1.0" encoding="utf-8"?>
-<p:sld xmlns:a="http://schemas.openxmlformats.org/drawingml/2006/main" xmlns:r="http://schemas.openxmlformats.org/officeDocument/2006/relationships" xmlns:p="http://schemas.openxmlformats.org/presentationml/2006/main">
+<p:sld xmlns:a="http://schemas.openxmlformats.org/drawingml/2006/main" xmlns:p="http://schemas.openxmlformats.org/presentationml/2006/main" xmlns:r="http://schemas.openxmlformats.org/officeDocument/2006/relationships">
   <p:cSld>
     <p:spTree>
       <p:nvGrpSpPr>
@@ -7484,14 +10042,7 @@
         <p:cNvGrpSpPr/>
         <p:nvPr/>
       </p:nvGrpSpPr>
-      <p:grpSpPr>
-        <a:xfrm>
-          <a:off x="0" y="0"/>
-          <a:ext cx="0" cy="0"/>
-          <a:chOff x="0" y="0"/>
-          <a:chExt cx="0" cy="0"/>
-        </a:xfrm>
-      </p:grpSpPr>
+      <p:grpSpPr/>
       <p:sp>
         <p:nvSpPr>
           <p:cNvPr id="2" name="TextBox 1"/>
@@ -7500,8 +10051,8 @@
         </p:nvSpPr>
         <p:spPr>
           <a:xfrm>
-            <a:off x="548640" y="411480"/>
-            <a:ext cx="11064240" cy="822960"/>
+            <a:off x="502920" y="320040"/>
+            <a:ext cx="11155680" cy="731520"/>
           </a:xfrm>
           <a:prstGeom prst="rect">
             <a:avLst/>
@@ -7515,7 +10066,7 @@
           <a:lstStyle/>
           <a:p>
             <a:pPr>
-              <a:defRPr sz="2800" b="1">
+              <a:defRPr sz="2700" b="1">
                 <a:solidFill>
                   <a:srgbClr val="5F1EBE"/>
                 </a:solidFill>
@@ -7523,21 +10074,453 @@
               </a:defRPr>
             </a:pPr>
             <a:r>
-              <a:t>5. Testing Strategy</a:t>
-            </a:r>
-          </a:p>
-        </p:txBody>
-      </p:sp>
-      <p:sp>
-        <p:nvSpPr>
-          <p:cNvPr id="3" name="TextBox 2"/>
+              <a:t>4. AI Working Journal</a:t>
+            </a:r>
+          </a:p>
+        </p:txBody>
+      </p:sp>
+      <p:sp>
+        <p:nvSpPr>
+          <p:cNvPr id="3" name="Rectangle 2"/>
+          <p:cNvSpPr/>
+          <p:nvPr/>
+        </p:nvSpPr>
+        <p:spPr>
+          <a:xfrm>
+            <a:off x="530352" y="1024128"/>
+            <a:ext cx="2194560" cy="38100"/>
+          </a:xfrm>
+          <a:prstGeom prst="rect">
+            <a:avLst/>
+          </a:prstGeom>
+          <a:solidFill>
+            <a:srgbClr val="5F1EBE"/>
+          </a:solidFill>
+          <a:ln>
+            <a:noFill/>
+          </a:ln>
+          <a:effectLst/>
+        </p:spPr>
+        <p:style>
+          <a:lnRef idx="1">
+            <a:schemeClr val="accent1"/>
+          </a:lnRef>
+          <a:fillRef idx="3">
+            <a:schemeClr val="accent1"/>
+          </a:fillRef>
+          <a:effectRef idx="2">
+            <a:schemeClr val="accent1"/>
+          </a:effectRef>
+          <a:fontRef idx="minor">
+            <a:schemeClr val="lt1"/>
+          </a:fontRef>
+        </p:style>
+        <p:txBody>
+          <a:bodyPr rtlCol="0" anchor="ctr"/>
+          <a:lstStyle/>
+          <a:p>
+            <a:pPr algn="ctr"/>
+          </a:p>
+        </p:txBody>
+      </p:sp>
+      <p:sp>
+        <p:nvSpPr>
+          <p:cNvPr id="4" name="Rounded Rectangle 3"/>
+          <p:cNvSpPr/>
+          <p:nvPr/>
+        </p:nvSpPr>
+        <p:spPr>
+          <a:xfrm>
+            <a:off x="548640" y="1325880"/>
+            <a:ext cx="5458968" cy="2148840"/>
+          </a:xfrm>
+          <a:prstGeom prst="roundRect">
+            <a:avLst/>
+          </a:prstGeom>
+          <a:solidFill>
+            <a:srgbClr val="ECE6FB"/>
+          </a:solidFill>
+          <a:ln>
+            <a:noFill/>
+          </a:ln>
+          <a:effectLst/>
+        </p:spPr>
+        <p:style>
+          <a:lnRef idx="1">
+            <a:schemeClr val="accent1"/>
+          </a:lnRef>
+          <a:fillRef idx="3">
+            <a:schemeClr val="accent1"/>
+          </a:fillRef>
+          <a:effectRef idx="2">
+            <a:schemeClr val="accent1"/>
+          </a:effectRef>
+          <a:fontRef idx="minor">
+            <a:schemeClr val="lt1"/>
+          </a:fontRef>
+        </p:style>
+        <p:txBody>
+          <a:bodyPr rtlCol="0" anchor="t" wrap="square" lIns="127000" rIns="127000" tIns="101600" bIns="76200"/>
+          <a:lstStyle/>
+          <a:p>
+            <a:pPr algn="ctr">
+              <a:spcAft>
+                <a:spcPts val="400"/>
+              </a:spcAft>
+              <a:defRPr sz="1500" b="1">
+                <a:solidFill>
+                  <a:srgbClr val="5F1EBE"/>
+                </a:solidFill>
+                <a:latin typeface="Calibri Light"/>
+              </a:defRPr>
+            </a:pPr>
+            <a:r>
+              <a:t>Accepted</a:t>
+            </a:r>
+          </a:p>
+          <a:p>
+            <a:pPr>
+              <a:spcAft>
+                <a:spcPts val="300"/>
+              </a:spcAft>
+              <a:defRPr sz="1200">
+                <a:solidFill>
+                  <a:srgbClr val="262626"/>
+                </a:solidFill>
+                <a:latin typeface="Calibri"/>
+              </a:defRPr>
+            </a:pPr>
+            <a:r>
+              <a:t>•  Feature, schema, Docker, branching &amp; k6 requests built as specified</a:t>
+            </a:r>
+          </a:p>
+        </p:txBody>
+      </p:sp>
+      <p:sp>
+        <p:nvSpPr>
+          <p:cNvPr id="5" name="Rounded Rectangle 4"/>
+          <p:cNvSpPr/>
+          <p:nvPr/>
+        </p:nvSpPr>
+        <p:spPr>
+          <a:xfrm>
+            <a:off x="6199632" y="1325880"/>
+            <a:ext cx="5440680" cy="2148840"/>
+          </a:xfrm>
+          <a:prstGeom prst="roundRect">
+            <a:avLst/>
+          </a:prstGeom>
+          <a:solidFill>
+            <a:srgbClr val="ECE6FB"/>
+          </a:solidFill>
+          <a:ln>
+            <a:noFill/>
+          </a:ln>
+          <a:effectLst/>
+        </p:spPr>
+        <p:style>
+          <a:lnRef idx="1">
+            <a:schemeClr val="accent1"/>
+          </a:lnRef>
+          <a:fillRef idx="3">
+            <a:schemeClr val="accent1"/>
+          </a:fillRef>
+          <a:effectRef idx="2">
+            <a:schemeClr val="accent1"/>
+          </a:effectRef>
+          <a:fontRef idx="minor">
+            <a:schemeClr val="lt1"/>
+          </a:fontRef>
+        </p:style>
+        <p:txBody>
+          <a:bodyPr rtlCol="0" anchor="t" wrap="square" lIns="127000" rIns="127000" tIns="101600" bIns="76200"/>
+          <a:lstStyle/>
+          <a:p>
+            <a:pPr algn="ctr">
+              <a:spcAft>
+                <a:spcPts val="400"/>
+              </a:spcAft>
+              <a:defRPr sz="1500" b="1">
+                <a:solidFill>
+                  <a:srgbClr val="5F1EBE"/>
+                </a:solidFill>
+                <a:latin typeface="Calibri Light"/>
+              </a:defRPr>
+            </a:pPr>
+            <a:r>
+              <a:t>Challenged / pushed back</a:t>
+            </a:r>
+          </a:p>
+          <a:p>
+            <a:pPr>
+              <a:spcAft>
+                <a:spcPts val="300"/>
+              </a:spcAft>
+              <a:defRPr sz="1200">
+                <a:solidFill>
+                  <a:srgbClr val="262626"/>
+                </a:solidFill>
+                <a:latin typeface="Calibri"/>
+              </a:defRPr>
+            </a:pPr>
+            <a:r>
+              <a:t>•  Fixed 3 layering violations (service→api, infra→service, infra→domain)</a:t>
+            </a:r>
+          </a:p>
+          <a:p>
+            <a:pPr>
+              <a:spcAft>
+                <a:spcPts val="300"/>
+              </a:spcAft>
+              <a:defRPr sz="1200">
+                <a:solidFill>
+                  <a:srgbClr val="262626"/>
+                </a:solidFill>
+                <a:latin typeface="Calibri"/>
+              </a:defRPr>
+            </a:pPr>
+            <a:r>
+              <a:t>•  Removed duplicated toTitleCase / presentation logic from the service</a:t>
+            </a:r>
+          </a:p>
+          <a:p>
+            <a:pPr>
+              <a:spcAft>
+                <a:spcPts val="300"/>
+              </a:spcAft>
+              <a:defRPr sz="1200">
+                <a:solidFill>
+                  <a:srgbClr val="262626"/>
+                </a:solidFill>
+                <a:latin typeface="Calibri"/>
+              </a:defRPr>
+            </a:pPr>
+            <a:r>
+              <a:t>•  Flagged PII: free-text search was being logged → removed it</a:t>
+            </a:r>
+          </a:p>
+          <a:p>
+            <a:pPr>
+              <a:spcAft>
+                <a:spcPts val="300"/>
+              </a:spcAft>
+              <a:defRPr sz="1200">
+                <a:solidFill>
+                  <a:srgbClr val="262626"/>
+                </a:solidFill>
+                <a:latin typeface="Calibri"/>
+              </a:defRPr>
+            </a:pPr>
+            <a:r>
+              <a:t>•  Advised against auto-merging breaking Dependabot PRs</a:t>
+            </a:r>
+          </a:p>
+        </p:txBody>
+      </p:sp>
+      <p:sp>
+        <p:nvSpPr>
+          <p:cNvPr id="6" name="Rounded Rectangle 5"/>
+          <p:cNvSpPr/>
+          <p:nvPr/>
+        </p:nvSpPr>
+        <p:spPr>
+          <a:xfrm>
+            <a:off x="548640" y="3657600"/>
+            <a:ext cx="5458968" cy="2148840"/>
+          </a:xfrm>
+          <a:prstGeom prst="roundRect">
+            <a:avLst/>
+          </a:prstGeom>
+          <a:solidFill>
+            <a:srgbClr val="ECE6FB"/>
+          </a:solidFill>
+          <a:ln>
+            <a:noFill/>
+          </a:ln>
+          <a:effectLst/>
+        </p:spPr>
+        <p:style>
+          <a:lnRef idx="1">
+            <a:schemeClr val="accent1"/>
+          </a:lnRef>
+          <a:fillRef idx="3">
+            <a:schemeClr val="accent1"/>
+          </a:fillRef>
+          <a:effectRef idx="2">
+            <a:schemeClr val="accent1"/>
+          </a:effectRef>
+          <a:fontRef idx="minor">
+            <a:schemeClr val="lt1"/>
+          </a:fontRef>
+        </p:style>
+        <p:txBody>
+          <a:bodyPr rtlCol="0" anchor="t" wrap="square" lIns="127000" rIns="127000" tIns="101600" bIns="76200"/>
+          <a:lstStyle/>
+          <a:p>
+            <a:pPr algn="ctr">
+              <a:spcAft>
+                <a:spcPts val="400"/>
+              </a:spcAft>
+              <a:defRPr sz="1500" b="1">
+                <a:solidFill>
+                  <a:srgbClr val="5F1EBE"/>
+                </a:solidFill>
+                <a:latin typeface="Calibri Light"/>
+              </a:defRPr>
+            </a:pPr>
+            <a:r>
+              <a:t>Overrode / steered</a:t>
+            </a:r>
+          </a:p>
+          <a:p>
+            <a:pPr>
+              <a:spcAft>
+                <a:spcPts val="300"/>
+              </a:spcAft>
+              <a:defRPr sz="1200">
+                <a:solidFill>
+                  <a:srgbClr val="262626"/>
+                </a:solidFill>
+                <a:latin typeface="Calibri"/>
+              </a:defRPr>
+            </a:pPr>
+            <a:r>
+              <a:t>•  Moved openapi.yaml to static/ so Swagger serves the contract</a:t>
+            </a:r>
+          </a:p>
+          <a:p>
+            <a:pPr>
+              <a:spcAft>
+                <a:spcPts val="300"/>
+              </a:spcAft>
+              <a:defRPr sz="1200">
+                <a:solidFill>
+                  <a:srgbClr val="262626"/>
+                </a:solidFill>
+                <a:latin typeface="Calibri"/>
+              </a:defRPr>
+            </a:pPr>
+            <a:r>
+              <a:t>•  Coverage gate: line ≥ 80%, then instruction ≥ 85%</a:t>
+            </a:r>
+          </a:p>
+          <a:p>
+            <a:pPr>
+              <a:spcAft>
+                <a:spcPts val="300"/>
+              </a:spcAft>
+              <a:defRPr sz="1200">
+                <a:solidFill>
+                  <a:srgbClr val="262626"/>
+                </a:solidFill>
+                <a:latin typeface="Calibri"/>
+              </a:defRPr>
+            </a:pPr>
+            <a:r>
+              <a:t>•  Added Dockerfile.local to build behind the TLS proxy</a:t>
+            </a:r>
+          </a:p>
+        </p:txBody>
+      </p:sp>
+      <p:sp>
+        <p:nvSpPr>
+          <p:cNvPr id="7" name="Rounded Rectangle 6"/>
+          <p:cNvSpPr/>
+          <p:nvPr/>
+        </p:nvSpPr>
+        <p:spPr>
+          <a:xfrm>
+            <a:off x="6199632" y="3657600"/>
+            <a:ext cx="5440680" cy="2148840"/>
+          </a:xfrm>
+          <a:prstGeom prst="roundRect">
+            <a:avLst/>
+          </a:prstGeom>
+          <a:solidFill>
+            <a:srgbClr val="ECE6FB"/>
+          </a:solidFill>
+          <a:ln>
+            <a:noFill/>
+          </a:ln>
+          <a:effectLst/>
+        </p:spPr>
+        <p:style>
+          <a:lnRef idx="1">
+            <a:schemeClr val="accent1"/>
+          </a:lnRef>
+          <a:fillRef idx="3">
+            <a:schemeClr val="accent1"/>
+          </a:fillRef>
+          <a:effectRef idx="2">
+            <a:schemeClr val="accent1"/>
+          </a:effectRef>
+          <a:fontRef idx="minor">
+            <a:schemeClr val="lt1"/>
+          </a:fontRef>
+        </p:style>
+        <p:txBody>
+          <a:bodyPr rtlCol="0" anchor="t" wrap="square" lIns="127000" rIns="127000" tIns="101600" bIns="76200"/>
+          <a:lstStyle/>
+          <a:p>
+            <a:pPr algn="ctr">
+              <a:spcAft>
+                <a:spcPts val="400"/>
+              </a:spcAft>
+              <a:defRPr sz="1500" b="1">
+                <a:solidFill>
+                  <a:srgbClr val="5F1EBE"/>
+                </a:solidFill>
+                <a:latin typeface="Calibri Light"/>
+              </a:defRPr>
+            </a:pPr>
+            <a:r>
+              <a:t>Corrected (self)</a:t>
+            </a:r>
+          </a:p>
+          <a:p>
+            <a:pPr>
+              <a:spcAft>
+                <a:spcPts val="300"/>
+              </a:spcAft>
+              <a:defRPr sz="1200">
+                <a:solidFill>
+                  <a:srgbClr val="262626"/>
+                </a:solidFill>
+                <a:latin typeface="Calibri"/>
+              </a:defRPr>
+            </a:pPr>
+            <a:r>
+              <a:t>•  Retracted the “JPA enums on domain POJO” caveat after verifying</a:t>
+            </a:r>
+          </a:p>
+          <a:p>
+            <a:pPr>
+              <a:spcAft>
+                <a:spcPts val="300"/>
+              </a:spcAft>
+              <a:defRPr sz="1200">
+                <a:solidFill>
+                  <a:srgbClr val="262626"/>
+                </a:solidFill>
+                <a:latin typeface="Calibri"/>
+              </a:defRPr>
+            </a:pPr>
+            <a:r>
+              <a:t>•  the domain is genuinely framework-free</a:t>
+            </a:r>
+          </a:p>
+        </p:txBody>
+      </p:sp>
+      <p:sp>
+        <p:nvSpPr>
+          <p:cNvPr id="8" name="TextBox 7"/>
           <p:cNvSpPr txBox="1"/>
           <p:nvPr/>
         </p:nvSpPr>
         <p:spPr>
           <a:xfrm>
-            <a:off x="640080" y="1371600"/>
-            <a:ext cx="10972800" cy="5120640"/>
+            <a:off x="548640" y="5989320"/>
+            <a:ext cx="11064240" cy="548640"/>
           </a:xfrm>
           <a:prstGeom prst="rect">
             <a:avLst/>
@@ -7545,64 +10528,476 @@
           <a:noFill/>
         </p:spPr>
         <p:txBody>
-          <a:bodyPr wrap="square">
+          <a:bodyPr wrap="none">
             <a:spAutoFit/>
           </a:bodyPr>
           <a:lstStyle/>
           <a:p>
             <a:pPr>
+              <a:defRPr sz="1200" i="1">
+                <a:solidFill>
+                  <a:srgbClr val="595959"/>
+                </a:solidFill>
+                <a:latin typeface="Calibri"/>
+              </a:defRPr>
+            </a:pPr>
+            <a:r>
+              <a:t>Full chronological log: docs/AI-WORKING-JOURNAL.md</a:t>
+            </a:r>
+          </a:p>
+        </p:txBody>
+      </p:sp>
+    </p:spTree>
+  </p:cSld>
+  <p:clrMapOvr>
+    <a:masterClrMapping/>
+  </p:clrMapOvr>
+</p:sld>
+</file>
+
+<file path=ppt/slides/slide9.xml><?xml version="1.0" encoding="utf-8"?>
+<p:sld xmlns:a="http://schemas.openxmlformats.org/drawingml/2006/main" xmlns:p="http://schemas.openxmlformats.org/presentationml/2006/main" xmlns:r="http://schemas.openxmlformats.org/officeDocument/2006/relationships">
+  <p:cSld>
+    <p:spTree>
+      <p:nvGrpSpPr>
+        <p:cNvPr id="1" name=""/>
+        <p:cNvGrpSpPr/>
+        <p:nvPr/>
+      </p:nvGrpSpPr>
+      <p:grpSpPr/>
+      <p:sp>
+        <p:nvSpPr>
+          <p:cNvPr id="2" name="TextBox 1"/>
+          <p:cNvSpPr txBox="1"/>
+          <p:nvPr/>
+        </p:nvSpPr>
+        <p:spPr>
+          <a:xfrm>
+            <a:off x="502920" y="320040"/>
+            <a:ext cx="11155680" cy="731520"/>
+          </a:xfrm>
+          <a:prstGeom prst="rect">
+            <a:avLst/>
+          </a:prstGeom>
+          <a:noFill/>
+        </p:spPr>
+        <p:txBody>
+          <a:bodyPr wrap="none">
+            <a:spAutoFit/>
+          </a:bodyPr>
+          <a:lstStyle/>
+          <a:p>
+            <a:pPr>
+              <a:defRPr sz="2700" b="1">
+                <a:solidFill>
+                  <a:srgbClr val="5F1EBE"/>
+                </a:solidFill>
+                <a:latin typeface="Calibri Light"/>
+              </a:defRPr>
+            </a:pPr>
+            <a:r>
+              <a:t>5. Testing Strategy</a:t>
+            </a:r>
+          </a:p>
+        </p:txBody>
+      </p:sp>
+      <p:sp>
+        <p:nvSpPr>
+          <p:cNvPr id="3" name="Rectangle 2"/>
+          <p:cNvSpPr/>
+          <p:nvPr/>
+        </p:nvSpPr>
+        <p:spPr>
+          <a:xfrm>
+            <a:off x="530352" y="1024128"/>
+            <a:ext cx="2194560" cy="38100"/>
+          </a:xfrm>
+          <a:prstGeom prst="rect">
+            <a:avLst/>
+          </a:prstGeom>
+          <a:solidFill>
+            <a:srgbClr val="5F1EBE"/>
+          </a:solidFill>
+          <a:ln>
+            <a:noFill/>
+          </a:ln>
+          <a:effectLst/>
+        </p:spPr>
+        <p:style>
+          <a:lnRef idx="1">
+            <a:schemeClr val="accent1"/>
+          </a:lnRef>
+          <a:fillRef idx="3">
+            <a:schemeClr val="accent1"/>
+          </a:fillRef>
+          <a:effectRef idx="2">
+            <a:schemeClr val="accent1"/>
+          </a:effectRef>
+          <a:fontRef idx="minor">
+            <a:schemeClr val="lt1"/>
+          </a:fontRef>
+        </p:style>
+        <p:txBody>
+          <a:bodyPr rtlCol="0" anchor="ctr"/>
+          <a:lstStyle/>
+          <a:p>
+            <a:pPr algn="ctr"/>
+          </a:p>
+        </p:txBody>
+      </p:sp>
+      <p:sp>
+        <p:nvSpPr>
+          <p:cNvPr id="4" name="Rounded Rectangle 3"/>
+          <p:cNvSpPr/>
+          <p:nvPr/>
+        </p:nvSpPr>
+        <p:spPr>
+          <a:xfrm>
+            <a:off x="548640" y="1371600"/>
+            <a:ext cx="2670048" cy="1234440"/>
+          </a:xfrm>
+          <a:prstGeom prst="roundRect">
+            <a:avLst/>
+          </a:prstGeom>
+          <a:solidFill>
+            <a:srgbClr val="5F1EBE"/>
+          </a:solidFill>
+          <a:ln>
+            <a:noFill/>
+          </a:ln>
+          <a:effectLst/>
+        </p:spPr>
+        <p:style>
+          <a:lnRef idx="1">
+            <a:schemeClr val="accent1"/>
+          </a:lnRef>
+          <a:fillRef idx="3">
+            <a:schemeClr val="accent1"/>
+          </a:fillRef>
+          <a:effectRef idx="2">
+            <a:schemeClr val="accent1"/>
+          </a:effectRef>
+          <a:fontRef idx="minor">
+            <a:schemeClr val="lt1"/>
+          </a:fontRef>
+        </p:style>
+        <p:txBody>
+          <a:bodyPr rtlCol="0" anchor="ctr" wrap="square" lIns="101600" rIns="101600" tIns="50800" bIns="50800"/>
+          <a:lstStyle/>
+          <a:p>
+            <a:pPr algn="ctr">
               <a:spcAft>
-                <a:spcPts val="500"/>
+                <a:spcPts val="200"/>
               </a:spcAft>
-              <a:defRPr sz="1700">
-                <a:solidFill>
-                  <a:srgbClr val="262626"/>
+              <a:defRPr sz="3000" b="1">
+                <a:solidFill>
+                  <a:srgbClr val="FFFFFF"/>
                 </a:solidFill>
                 <a:latin typeface="Calibri"/>
               </a:defRPr>
             </a:pPr>
             <a:r>
-              <a:t>• Layered suite (38 tests)</a:t>
-            </a:r>
-          </a:p>
-          <a:p>
-            <a:pPr lvl="1">
+              <a:t>38</a:t>
+            </a:r>
+          </a:p>
+          <a:p>
+            <a:pPr algn="ctr">
               <a:spcAft>
-                <a:spcPts val="500"/>
+                <a:spcPts val="200"/>
               </a:spcAft>
-              <a:defRPr sz="1400">
-                <a:solidFill>
-                  <a:srgbClr val="262626"/>
+              <a:defRPr sz="1150" b="0">
+                <a:solidFill>
+                  <a:srgbClr val="FFFFFF"/>
                 </a:solidFill>
                 <a:latin typeface="Calibri"/>
               </a:defRPr>
             </a:pPr>
             <a:r>
-              <a:t>– service unit (port mocked) | caching (hits + eviction) | controller slice (real mapper)</a:t>
-            </a:r>
-          </a:p>
-          <a:p>
-            <a:pPr lvl="1">
+              <a:t>automated tests</a:t>
+            </a:r>
+          </a:p>
+        </p:txBody>
+      </p:sp>
+      <p:sp>
+        <p:nvSpPr>
+          <p:cNvPr id="5" name="Rounded Rectangle 4"/>
+          <p:cNvSpPr/>
+          <p:nvPr/>
+        </p:nvSpPr>
+        <p:spPr>
+          <a:xfrm>
+            <a:off x="3337560" y="1371600"/>
+            <a:ext cx="2670048" cy="1234440"/>
+          </a:xfrm>
+          <a:prstGeom prst="roundRect">
+            <a:avLst/>
+          </a:prstGeom>
+          <a:solidFill>
+            <a:srgbClr val="5F1EBE"/>
+          </a:solidFill>
+          <a:ln>
+            <a:noFill/>
+          </a:ln>
+          <a:effectLst/>
+        </p:spPr>
+        <p:style>
+          <a:lnRef idx="1">
+            <a:schemeClr val="accent1"/>
+          </a:lnRef>
+          <a:fillRef idx="3">
+            <a:schemeClr val="accent1"/>
+          </a:fillRef>
+          <a:effectRef idx="2">
+            <a:schemeClr val="accent1"/>
+          </a:effectRef>
+          <a:fontRef idx="minor">
+            <a:schemeClr val="lt1"/>
+          </a:fontRef>
+        </p:style>
+        <p:txBody>
+          <a:bodyPr rtlCol="0" anchor="ctr" wrap="square" lIns="101600" rIns="101600" tIns="50800" bIns="50800"/>
+          <a:lstStyle/>
+          <a:p>
+            <a:pPr algn="ctr">
               <a:spcAft>
-                <a:spcPts val="500"/>
+                <a:spcPts val="200"/>
               </a:spcAft>
-              <a:defRPr sz="1400">
-                <a:solidFill>
-                  <a:srgbClr val="262626"/>
+              <a:defRPr sz="3000" b="1">
+                <a:solidFill>
+                  <a:srgbClr val="FFFFFF"/>
                 </a:solidFill>
                 <a:latin typeface="Calibri"/>
               </a:defRPr>
             </a:pPr>
             <a:r>
-              <a:t>– full-stack acceptance on Testcontainers PostgreSQL (@Transactional rollback) | DB-failure path (503)</a:t>
+              <a:t>92.5%</a:t>
+            </a:r>
+          </a:p>
+          <a:p>
+            <a:pPr algn="ctr">
+              <a:spcAft>
+                <a:spcPts val="200"/>
+              </a:spcAft>
+              <a:defRPr sz="1150" b="0">
+                <a:solidFill>
+                  <a:srgbClr val="FFFFFF"/>
+                </a:solidFill>
+                <a:latin typeface="Calibri"/>
+              </a:defRPr>
+            </a:pPr>
+            <a:r>
+              <a:t>line coverage · gated ≥ 80%</a:t>
+            </a:r>
+          </a:p>
+        </p:txBody>
+      </p:sp>
+      <p:sp>
+        <p:nvSpPr>
+          <p:cNvPr id="6" name="Rounded Rectangle 5"/>
+          <p:cNvSpPr/>
+          <p:nvPr/>
+        </p:nvSpPr>
+        <p:spPr>
+          <a:xfrm>
+            <a:off x="6126479" y="1371600"/>
+            <a:ext cx="2670048" cy="1234440"/>
+          </a:xfrm>
+          <a:prstGeom prst="roundRect">
+            <a:avLst/>
+          </a:prstGeom>
+          <a:solidFill>
+            <a:srgbClr val="5F1EBE"/>
+          </a:solidFill>
+          <a:ln>
+            <a:noFill/>
+          </a:ln>
+          <a:effectLst/>
+        </p:spPr>
+        <p:style>
+          <a:lnRef idx="1">
+            <a:schemeClr val="accent1"/>
+          </a:lnRef>
+          <a:fillRef idx="3">
+            <a:schemeClr val="accent1"/>
+          </a:fillRef>
+          <a:effectRef idx="2">
+            <a:schemeClr val="accent1"/>
+          </a:effectRef>
+          <a:fontRef idx="minor">
+            <a:schemeClr val="lt1"/>
+          </a:fontRef>
+        </p:style>
+        <p:txBody>
+          <a:bodyPr rtlCol="0" anchor="ctr" wrap="square" lIns="101600" rIns="101600" tIns="50800" bIns="50800"/>
+          <a:lstStyle/>
+          <a:p>
+            <a:pPr algn="ctr">
+              <a:spcAft>
+                <a:spcPts val="200"/>
+              </a:spcAft>
+              <a:defRPr sz="3000" b="1">
+                <a:solidFill>
+                  <a:srgbClr val="FFFFFF"/>
+                </a:solidFill>
+                <a:latin typeface="Calibri"/>
+              </a:defRPr>
+            </a:pPr>
+            <a:r>
+              <a:t>~150ms</a:t>
+            </a:r>
+          </a:p>
+          <a:p>
+            <a:pPr algn="ctr">
+              <a:spcAft>
+                <a:spcPts val="200"/>
+              </a:spcAft>
+              <a:defRPr sz="1150" b="0">
+                <a:solidFill>
+                  <a:srgbClr val="FFFFFF"/>
+                </a:solidFill>
+                <a:latin typeface="Calibri"/>
+              </a:defRPr>
+            </a:pPr>
+            <a:r>
+              <a:t>p95 list latency @ 50 VUs</a:t>
+            </a:r>
+          </a:p>
+        </p:txBody>
+      </p:sp>
+      <p:sp>
+        <p:nvSpPr>
+          <p:cNvPr id="7" name="Rounded Rectangle 6"/>
+          <p:cNvSpPr/>
+          <p:nvPr/>
+        </p:nvSpPr>
+        <p:spPr>
+          <a:xfrm>
+            <a:off x="8915400" y="1371600"/>
+            <a:ext cx="2670048" cy="1234440"/>
+          </a:xfrm>
+          <a:prstGeom prst="roundRect">
+            <a:avLst/>
+          </a:prstGeom>
+          <a:solidFill>
+            <a:srgbClr val="5F1EBE"/>
+          </a:solidFill>
+          <a:ln>
+            <a:noFill/>
+          </a:ln>
+          <a:effectLst/>
+        </p:spPr>
+        <p:style>
+          <a:lnRef idx="1">
+            <a:schemeClr val="accent1"/>
+          </a:lnRef>
+          <a:fillRef idx="3">
+            <a:schemeClr val="accent1"/>
+          </a:fillRef>
+          <a:effectRef idx="2">
+            <a:schemeClr val="accent1"/>
+          </a:effectRef>
+          <a:fontRef idx="minor">
+            <a:schemeClr val="lt1"/>
+          </a:fontRef>
+        </p:style>
+        <p:txBody>
+          <a:bodyPr rtlCol="0" anchor="ctr" wrap="square" lIns="101600" rIns="101600" tIns="50800" bIns="50800"/>
+          <a:lstStyle/>
+          <a:p>
+            <a:pPr algn="ctr">
+              <a:spcAft>
+                <a:spcPts val="200"/>
+              </a:spcAft>
+              <a:defRPr sz="3000" b="1">
+                <a:solidFill>
+                  <a:srgbClr val="FFFFFF"/>
+                </a:solidFill>
+                <a:latin typeface="Calibri"/>
+              </a:defRPr>
+            </a:pPr>
+            <a:r>
+              <a:t>0</a:t>
+            </a:r>
+          </a:p>
+          <a:p>
+            <a:pPr algn="ctr">
+              <a:spcAft>
+                <a:spcPts val="200"/>
+              </a:spcAft>
+              <a:defRPr sz="1150" b="0">
+                <a:solidFill>
+                  <a:srgbClr val="FFFFFF"/>
+                </a:solidFill>
+                <a:latin typeface="Calibri"/>
+              </a:defRPr>
+            </a:pPr>
+            <a:r>
+              <a:t>errors under load</a:t>
+            </a:r>
+          </a:p>
+        </p:txBody>
+      </p:sp>
+      <p:sp>
+        <p:nvSpPr>
+          <p:cNvPr id="8" name="Rounded Rectangle 7"/>
+          <p:cNvSpPr/>
+          <p:nvPr/>
+        </p:nvSpPr>
+        <p:spPr>
+          <a:xfrm>
+            <a:off x="548640" y="2880360"/>
+            <a:ext cx="5532120" cy="2743200"/>
+          </a:xfrm>
+          <a:prstGeom prst="roundRect">
+            <a:avLst/>
+          </a:prstGeom>
+          <a:solidFill>
+            <a:srgbClr val="ECE6FB"/>
+          </a:solidFill>
+          <a:ln>
+            <a:noFill/>
+          </a:ln>
+          <a:effectLst/>
+        </p:spPr>
+        <p:style>
+          <a:lnRef idx="1">
+            <a:schemeClr val="accent1"/>
+          </a:lnRef>
+          <a:fillRef idx="3">
+            <a:schemeClr val="accent1"/>
+          </a:fillRef>
+          <a:effectRef idx="2">
+            <a:schemeClr val="accent1"/>
+          </a:effectRef>
+          <a:fontRef idx="minor">
+            <a:schemeClr val="lt1"/>
+          </a:fontRef>
+        </p:style>
+        <p:txBody>
+          <a:bodyPr rtlCol="0" anchor="t" wrap="square" lIns="127000" rIns="127000" tIns="101600" bIns="76200"/>
+          <a:lstStyle/>
+          <a:p>
+            <a:pPr algn="ctr">
+              <a:spcAft>
+                <a:spcPts val="400"/>
+              </a:spcAft>
+              <a:defRPr sz="1500" b="1">
+                <a:solidFill>
+                  <a:srgbClr val="5F1EBE"/>
+                </a:solidFill>
+                <a:latin typeface="Calibri Light"/>
+              </a:defRPr>
+            </a:pPr>
+            <a:r>
+              <a:t>Test layers</a:t>
             </a:r>
           </a:p>
           <a:p>
             <a:pPr>
               <a:spcAft>
-                <a:spcPts val="500"/>
+                <a:spcPts val="300"/>
               </a:spcAft>
-              <a:defRPr sz="1700">
+              <a:defRPr sz="1200">
                 <a:solidFill>
                   <a:srgbClr val="262626"/>
                 </a:solidFill>
@@ -7610,15 +11005,15 @@
               </a:defRPr>
             </a:pPr>
             <a:r>
-              <a:t>• Edge / negative: invalid enum → 400, malformed UUID → 400, no match → empty page, flag unknown → no-op</a:t>
+              <a:t>•  Service unit tests — repository port mocked</a:t>
             </a:r>
           </a:p>
           <a:p>
             <a:pPr>
               <a:spcAft>
-                <a:spcPts val="500"/>
+                <a:spcPts val="300"/>
               </a:spcAft>
-              <a:defRPr sz="1700">
+              <a:defRPr sz="1200">
                 <a:solidFill>
                   <a:srgbClr val="262626"/>
                 </a:solidFill>
@@ -7626,15 +11021,15 @@
               </a:defRPr>
             </a:pPr>
             <a:r>
-              <a:t>• Coverage: 92.5% line / 93.9% instruction (Lombok excluded); gated line ≥ 80%, instruction ≥ 85% (JaCoCo)</a:t>
+              <a:t>•  Caching tests — verify hits + eviction on flag</a:t>
             </a:r>
           </a:p>
           <a:p>
             <a:pPr>
               <a:spcAft>
-                <a:spcPts val="500"/>
+                <a:spcPts val="300"/>
               </a:spcAft>
-              <a:defRPr sz="1700">
+              <a:defRPr sz="1200">
                 <a:solidFill>
                   <a:srgbClr val="262626"/>
                 </a:solidFill>
@@ -7642,31 +11037,15 @@
               </a:defRPr>
             </a:pPr>
             <a:r>
-              <a:t>• Load testing: Gatling (in-build gate) + k6; p95 &lt; 300ms for list &amp; detail @ 50 concurrent sessions</a:t>
-            </a:r>
-          </a:p>
-          <a:p>
-            <a:pPr lvl="1">
-              <a:spcAft>
-                <a:spcPts val="500"/>
-              </a:spcAft>
-              <a:defRPr sz="1400">
-                <a:solidFill>
-                  <a:srgbClr val="262626"/>
-                </a:solidFill>
-                <a:latin typeface="Calibri"/>
-              </a:defRPr>
-            </a:pPr>
-            <a:r>
-              <a:t>– measured: list ~150ms, detail ~80ms, 0 errors</a:t>
+              <a:t>•  Controller slice — real mapper, MockMvc</a:t>
             </a:r>
           </a:p>
           <a:p>
             <a:pPr>
               <a:spcAft>
-                <a:spcPts val="500"/>
+                <a:spcPts val="300"/>
               </a:spcAft>
-              <a:defRPr sz="1700">
+              <a:defRPr sz="1200">
                 <a:solidFill>
                   <a:srgbClr val="262626"/>
                 </a:solidFill>
@@ -7674,17 +11053,197 @@
               </a:defRPr>
             </a:pPr>
             <a:r>
-              <a:t>• CI: mvn verify (Testcontainers + coverage gate) must pass before the image is published</a:t>
+              <a:t>•  Full-stack acceptance on Testcontainers PostgreSQL (@Transactional rollback)</a:t>
+            </a:r>
+          </a:p>
+          <a:p>
+            <a:pPr>
+              <a:spcAft>
+                <a:spcPts val="300"/>
+              </a:spcAft>
+              <a:defRPr sz="1200">
+                <a:solidFill>
+                  <a:srgbClr val="262626"/>
+                </a:solidFill>
+                <a:latin typeface="Calibri"/>
+              </a:defRPr>
+            </a:pPr>
+            <a:r>
+              <a:t>•  DB-failure path — returns 503, no stack trace</a:t>
+            </a:r>
+          </a:p>
+          <a:p>
+            <a:pPr>
+              <a:spcAft>
+                <a:spcPts val="300"/>
+              </a:spcAft>
+              <a:defRPr sz="1200">
+                <a:solidFill>
+                  <a:srgbClr val="262626"/>
+                </a:solidFill>
+                <a:latin typeface="Calibri"/>
+              </a:defRPr>
+            </a:pPr>
+            <a:r>
+              <a:t>•  Edge/negative: bad enum/UUID → 400, no match → empty page</a:t>
+            </a:r>
+          </a:p>
+        </p:txBody>
+      </p:sp>
+      <p:sp>
+        <p:nvSpPr>
+          <p:cNvPr id="9" name="Rounded Rectangle 8"/>
+          <p:cNvSpPr/>
+          <p:nvPr/>
+        </p:nvSpPr>
+        <p:spPr>
+          <a:xfrm>
+            <a:off x="6263640" y="2880360"/>
+            <a:ext cx="5394960" cy="2743200"/>
+          </a:xfrm>
+          <a:prstGeom prst="roundRect">
+            <a:avLst/>
+          </a:prstGeom>
+          <a:solidFill>
+            <a:srgbClr val="ECE6FB"/>
+          </a:solidFill>
+          <a:ln>
+            <a:noFill/>
+          </a:ln>
+          <a:effectLst/>
+        </p:spPr>
+        <p:style>
+          <a:lnRef idx="1">
+            <a:schemeClr val="accent1"/>
+          </a:lnRef>
+          <a:fillRef idx="3">
+            <a:schemeClr val="accent1"/>
+          </a:fillRef>
+          <a:effectRef idx="2">
+            <a:schemeClr val="accent1"/>
+          </a:effectRef>
+          <a:fontRef idx="minor">
+            <a:schemeClr val="lt1"/>
+          </a:fontRef>
+        </p:style>
+        <p:txBody>
+          <a:bodyPr rtlCol="0" anchor="t" wrap="square" lIns="127000" rIns="127000" tIns="101600" bIns="76200"/>
+          <a:lstStyle/>
+          <a:p>
+            <a:pPr algn="ctr">
+              <a:spcAft>
+                <a:spcPts val="400"/>
+              </a:spcAft>
+              <a:defRPr sz="1500" b="1">
+                <a:solidFill>
+                  <a:srgbClr val="5F1EBE"/>
+                </a:solidFill>
+                <a:latin typeface="Calibri Light"/>
+              </a:defRPr>
+            </a:pPr>
+            <a:r>
+              <a:t>Coverage &amp; performance gates</a:t>
+            </a:r>
+          </a:p>
+          <a:p>
+            <a:pPr>
+              <a:spcAft>
+                <a:spcPts val="300"/>
+              </a:spcAft>
+              <a:defRPr sz="1200">
+                <a:solidFill>
+                  <a:srgbClr val="262626"/>
+                </a:solidFill>
+                <a:latin typeface="Calibri"/>
+              </a:defRPr>
+            </a:pPr>
+            <a:r>
+              <a:t>•  JaCoCo: line ≥ 80% and instruction ≥ 85% (Lombok excluded)</a:t>
+            </a:r>
+          </a:p>
+          <a:p>
+            <a:pPr>
+              <a:spcAft>
+                <a:spcPts val="300"/>
+              </a:spcAft>
+              <a:defRPr sz="1200">
+                <a:solidFill>
+                  <a:srgbClr val="262626"/>
+                </a:solidFill>
+                <a:latin typeface="Calibri"/>
+              </a:defRPr>
+            </a:pPr>
+            <a:r>
+              <a:t>•  Measured: 92.5% line / 93.9% instruction</a:t>
+            </a:r>
+          </a:p>
+          <a:p>
+            <a:pPr>
+              <a:spcAft>
+                <a:spcPts val="300"/>
+              </a:spcAft>
+              <a:defRPr sz="1200">
+                <a:solidFill>
+                  <a:srgbClr val="262626"/>
+                </a:solidFill>
+                <a:latin typeface="Calibri"/>
+              </a:defRPr>
+            </a:pPr>
+            <a:r>
+              <a:t>•  Gatling load test runs in the build (in-build gate)</a:t>
+            </a:r>
+          </a:p>
+          <a:p>
+            <a:pPr>
+              <a:spcAft>
+                <a:spcPts val="300"/>
+              </a:spcAft>
+              <a:defRPr sz="1200">
+                <a:solidFill>
+                  <a:srgbClr val="262626"/>
+                </a:solidFill>
+                <a:latin typeface="Calibri"/>
+              </a:defRPr>
+            </a:pPr>
+            <a:r>
+              <a:t>•  k6 script for ad-hoc load runs</a:t>
+            </a:r>
+          </a:p>
+          <a:p>
+            <a:pPr>
+              <a:spcAft>
+                <a:spcPts val="300"/>
+              </a:spcAft>
+              <a:defRPr sz="1200">
+                <a:solidFill>
+                  <a:srgbClr val="262626"/>
+                </a:solidFill>
+                <a:latin typeface="Calibri"/>
+              </a:defRPr>
+            </a:pPr>
+            <a:r>
+              <a:t>•  Target met: p95 &lt; 300ms list &amp; detail @ 50 sessions</a:t>
+            </a:r>
+          </a:p>
+          <a:p>
+            <a:pPr>
+              <a:spcAft>
+                <a:spcPts val="300"/>
+              </a:spcAft>
+              <a:defRPr sz="1200">
+                <a:solidFill>
+                  <a:srgbClr val="262626"/>
+                </a:solidFill>
+                <a:latin typeface="Calibri"/>
+              </a:defRPr>
+            </a:pPr>
+            <a:r>
+              <a:t>•  mvn verify must pass before the image is published</a:t>
             </a:r>
           </a:p>
         </p:txBody>
       </p:sp>
     </p:spTree>
-    <p:extLst>
-      <p:ext uri="{BB962C8B-B14F-4D97-AF65-F5344CB8AC3E}">
-        <p14:creationId xmlns:p14="http://schemas.microsoft.com/office/powerpoint/2010/main" val="1647963943"/>
-      </p:ext>
-    </p:extLst>
   </p:cSld>
   <p:clrMapOvr>
     <a:masterClrMapping/>
